--- a/제안서/변동성하베스트펀드_AITop2_v1_20260715.pptx
+++ b/제안서/변동성하베스트펀드_AITop2_v1_20260715.pptx
@@ -18,6 +18,7 @@
     <p:sldId id="261" r:id="rId9"/>
     <p:sldId id="263" r:id="rId10"/>
     <p:sldId id="264" r:id="rId11"/>
+    <p:sldId id="1040" r:id="rId20"/>
     <p:sldId id="265" r:id="rId12"/>
     <p:sldId id="266" r:id="rId13"/>
     <p:sldId id="267" r:id="rId14"/>
@@ -12593,6 +12594,3279 @@
                 <a:latin typeface="맑은 고딕"/>
               </a:rPr>
               <a:t>13</a:t>
+            </a:r>
+          </a:p>
+        </p:txBody>
+      </p:sp>
+    </p:spTree>
+  </p:cSld>
+  <p:clrMapOvr>
+    <a:masterClrMapping/>
+  </p:clrMapOvr>
+</p:sld>
+</file>
+
+<file path=ppt/slides/slide13.xml><?xml version="1.0" encoding="utf-8"?>
+<p:sld xmlns:a="http://schemas.openxmlformats.org/drawingml/2006/main" xmlns:p="http://schemas.openxmlformats.org/presentationml/2006/main" xmlns:r="http://schemas.openxmlformats.org/officeDocument/2006/relationships">
+  <p:cSld>
+    <p:spTree>
+      <p:nvGrpSpPr>
+        <p:cNvPr id="1" name=""/>
+        <p:cNvGrpSpPr/>
+        <p:nvPr/>
+      </p:nvGrpSpPr>
+      <p:grpSpPr/>
+      <p:sp>
+        <p:nvSpPr>
+          <p:cNvPr id="2" name="Rectangle 1"/>
+          <p:cNvSpPr/>
+          <p:nvPr/>
+        </p:nvSpPr>
+        <p:spPr>
+          <a:xfrm>
+            <a:off x="0" y="0"/>
+            <a:ext cx="9875838" cy="6858000"/>
+          </a:xfrm>
+          <a:prstGeom prst="rect">
+            <a:avLst/>
+          </a:prstGeom>
+          <a:solidFill>
+            <a:srgbClr val="FFFFFF"/>
+          </a:solidFill>
+          <a:ln>
+            <a:noFill/>
+          </a:ln>
+          <a:effectLst/>
+        </p:spPr>
+        <p:style>
+          <a:lnRef idx="1">
+            <a:schemeClr val="accent1"/>
+          </a:lnRef>
+          <a:fillRef idx="3">
+            <a:schemeClr val="accent1"/>
+          </a:fillRef>
+          <a:effectRef idx="2">
+            <a:schemeClr val="accent1"/>
+          </a:effectRef>
+          <a:fontRef idx="minor">
+            <a:schemeClr val="lt1"/>
+          </a:fontRef>
+        </p:style>
+        <p:txBody>
+          <a:bodyPr rtlCol="0" anchor="ctr"/>
+          <a:lstStyle/>
+          <a:p>
+            <a:pPr algn="ctr"/>
+          </a:p>
+        </p:txBody>
+      </p:sp>
+      <p:sp>
+        <p:nvSpPr>
+          <p:cNvPr id="3" name="Rectangle 2"/>
+          <p:cNvSpPr/>
+          <p:nvPr/>
+        </p:nvSpPr>
+        <p:spPr>
+          <a:xfrm>
+            <a:off x="457200" y="502920"/>
+            <a:ext cx="128016" cy="566928"/>
+          </a:xfrm>
+          <a:prstGeom prst="rect">
+            <a:avLst/>
+          </a:prstGeom>
+          <a:solidFill>
+            <a:srgbClr val="F58220"/>
+          </a:solidFill>
+          <a:ln>
+            <a:noFill/>
+          </a:ln>
+          <a:effectLst/>
+        </p:spPr>
+        <p:style>
+          <a:lnRef idx="1">
+            <a:schemeClr val="accent1"/>
+          </a:lnRef>
+          <a:fillRef idx="3">
+            <a:schemeClr val="accent1"/>
+          </a:fillRef>
+          <a:effectRef idx="2">
+            <a:schemeClr val="accent1"/>
+          </a:effectRef>
+          <a:fontRef idx="minor">
+            <a:schemeClr val="lt1"/>
+          </a:fontRef>
+        </p:style>
+        <p:txBody>
+          <a:bodyPr rtlCol="0" anchor="ctr"/>
+          <a:lstStyle/>
+          <a:p>
+            <a:pPr algn="ctr"/>
+          </a:p>
+        </p:txBody>
+      </p:sp>
+      <p:sp>
+        <p:nvSpPr>
+          <p:cNvPr id="4" name="TextBox 3"/>
+          <p:cNvSpPr txBox="1"/>
+          <p:nvPr/>
+        </p:nvSpPr>
+        <p:spPr>
+          <a:xfrm>
+            <a:off x="685800" y="457200"/>
+            <a:ext cx="8229600" cy="320040"/>
+          </a:xfrm>
+          <a:prstGeom prst="rect">
+            <a:avLst/>
+          </a:prstGeom>
+          <a:noFill/>
+        </p:spPr>
+        <p:txBody>
+          <a:bodyPr wrap="square" anchor="t" lIns="25400" rIns="25400" tIns="12700" bIns="12700">
+            <a:spAutoFit/>
+          </a:bodyPr>
+          <a:lstStyle/>
+          <a:p>
+            <a:pPr algn="l">
+              <a:lnSpc>
+                <a:spcPct val="100000"/>
+              </a:lnSpc>
+            </a:pPr>
+            <a:r>
+              <a:rPr sz="1200" b="1">
+                <a:solidFill>
+                  <a:srgbClr val="F58220"/>
+                </a:solidFill>
+                <a:latin typeface="맑은 고딕"/>
+              </a:rPr>
+              <a:t>08  HOW</a:t>
+            </a:r>
+          </a:p>
+        </p:txBody>
+      </p:sp>
+      <p:sp>
+        <p:nvSpPr>
+          <p:cNvPr id="5" name="TextBox 4"/>
+          <p:cNvSpPr txBox="1"/>
+          <p:nvPr/>
+        </p:nvSpPr>
+        <p:spPr>
+          <a:xfrm>
+            <a:off x="685800" y="731520"/>
+            <a:ext cx="8686800" cy="502920"/>
+          </a:xfrm>
+          <a:prstGeom prst="rect">
+            <a:avLst/>
+          </a:prstGeom>
+          <a:noFill/>
+        </p:spPr>
+        <p:txBody>
+          <a:bodyPr wrap="square" anchor="t" lIns="25400" rIns="25400" tIns="12700" bIns="12700">
+            <a:spAutoFit/>
+          </a:bodyPr>
+          <a:lstStyle/>
+          <a:p>
+            <a:pPr algn="l">
+              <a:lnSpc>
+                <a:spcPct val="100000"/>
+              </a:lnSpc>
+            </a:pPr>
+            <a:r>
+              <a:rPr sz="2300" b="1">
+                <a:solidFill>
+                  <a:srgbClr val="043B72"/>
+                </a:solidFill>
+                <a:latin typeface="맑은 고딕"/>
+              </a:rPr>
+              <a:t>지수대별 실제 편입비 — 만기까지 남은 시간 활용</a:t>
+            </a:r>
+          </a:p>
+        </p:txBody>
+      </p:sp>
+      <p:sp>
+        <p:nvSpPr>
+          <p:cNvPr id="6" name="TextBox 5"/>
+          <p:cNvSpPr txBox="1"/>
+          <p:nvPr/>
+        </p:nvSpPr>
+        <p:spPr>
+          <a:xfrm>
+            <a:off x="685800" y="1298448"/>
+            <a:ext cx="8686800" cy="365760"/>
+          </a:xfrm>
+          <a:prstGeom prst="rect">
+            <a:avLst/>
+          </a:prstGeom>
+          <a:noFill/>
+        </p:spPr>
+        <p:txBody>
+          <a:bodyPr wrap="square" anchor="t" lIns="25400" rIns="25400" tIns="12700" bIns="12700">
+            <a:spAutoFit/>
+          </a:bodyPr>
+          <a:lstStyle/>
+          <a:p>
+            <a:pPr algn="l">
+              <a:lnSpc>
+                <a:spcPct val="100000"/>
+              </a:lnSpc>
+            </a:pPr>
+            <a:r>
+              <a:rPr sz="1250" b="1">
+                <a:solidFill>
+                  <a:srgbClr val="3A3A3A"/>
+                </a:solidFill>
+                <a:latin typeface="맑은 고딕"/>
+              </a:rPr>
+              <a:t>리밸런싱일 지수=100 기준 · 편입비는 잔존만기가 짧아질수록 가팔라짐 · 최대 편입비 100%</a:t>
+            </a:r>
+          </a:p>
+        </p:txBody>
+      </p:sp>
+      <p:sp>
+        <p:nvSpPr>
+          <p:cNvPr id="7" name="TextBox 6"/>
+          <p:cNvSpPr txBox="1"/>
+          <p:nvPr/>
+        </p:nvSpPr>
+        <p:spPr>
+          <a:xfrm>
+            <a:off x="548640" y="1783080"/>
+            <a:ext cx="4297680" cy="320040"/>
+          </a:xfrm>
+          <a:prstGeom prst="rect">
+            <a:avLst/>
+          </a:prstGeom>
+          <a:noFill/>
+        </p:spPr>
+        <p:txBody>
+          <a:bodyPr wrap="square" anchor="t" lIns="25400" rIns="25400" tIns="12700" bIns="12700">
+            <a:spAutoFit/>
+          </a:bodyPr>
+          <a:lstStyle/>
+          <a:p>
+            <a:pPr algn="l">
+              <a:lnSpc>
+                <a:spcPct val="100000"/>
+              </a:lnSpc>
+            </a:pPr>
+            <a:r>
+              <a:rPr sz="1400" b="1">
+                <a:solidFill>
+                  <a:srgbClr val="F58220"/>
+                </a:solidFill>
+                <a:latin typeface="맑은 고딕"/>
+              </a:rPr>
+              <a:t>성장변동성펀드</a:t>
+            </a:r>
+            <a:r>
+              <a:rPr sz="1050" b="0">
+                <a:solidFill>
+                  <a:srgbClr val="84888B"/>
+                </a:solidFill>
+                <a:latin typeface="맑은 고딕"/>
+              </a:rPr>
+              <a:t>  (변동성 매매 + 상승 참여)</a:t>
+            </a:r>
+          </a:p>
+        </p:txBody>
+      </p:sp>
+      <p:graphicFrame>
+        <p:nvGraphicFramePr>
+          <p:cNvPr id="8" name="Table 7"/>
+          <p:cNvGraphicFramePr>
+            <a:graphicFrameLocks noGrp="1"/>
+          </p:cNvGraphicFramePr>
+          <p:nvPr/>
+        </p:nvGraphicFramePr>
+        <p:xfrm>
+          <a:off x="548640" y="2121408"/>
+          <a:ext cx="4343400" cy="3017520"/>
+        </p:xfrm>
+        <a:graphic>
+          <a:graphicData uri="http://schemas.openxmlformats.org/drawingml/2006/table">
+            <a:tbl>
+              <a:tblPr firstRow="1" bandRow="1">
+                <a:tableStyleId>{5C22544A-7EE6-4342-B048-85BDC9FD1C3A}</a:tableStyleId>
+              </a:tblPr>
+              <a:tblGrid>
+                <a:gridCol w="868680"/>
+                <a:gridCol w="694944"/>
+                <a:gridCol w="694944"/>
+                <a:gridCol w="694944"/>
+                <a:gridCol w="694944"/>
+                <a:gridCol w="694944"/>
+              </a:tblGrid>
+              <a:tr h="301752">
+                <a:tc>
+                  <a:txBody>
+                    <a:bodyPr/>
+                    <a:lstStyle/>
+                    <a:p>
+                      <a:pPr algn="ctr"/>
+                      <a:r>
+                        <a:rPr sz="950" b="1">
+                          <a:solidFill>
+                            <a:srgbClr val="FFFFFF"/>
+                          </a:solidFill>
+                          <a:latin typeface="맑은 고딕"/>
+                        </a:rPr>
+                        <a:t>지수 \ 잔존</a:t>
+                      </a:r>
+                    </a:p>
+                  </a:txBody>
+                  <a:tcPr marL="38100" marR="38100" marT="12700" marB="12700" anchor="ctr">
+                    <a:solidFill>
+                      <a:srgbClr val="F58220"/>
+                    </a:solidFill>
+                  </a:tcPr>
+                </a:tc>
+                <a:tc>
+                  <a:txBody>
+                    <a:bodyPr/>
+                    <a:lstStyle/>
+                    <a:p>
+                      <a:pPr algn="ctr"/>
+                      <a:r>
+                        <a:rPr sz="950" b="1">
+                          <a:solidFill>
+                            <a:srgbClr val="FFFFFF"/>
+                          </a:solidFill>
+                          <a:latin typeface="맑은 고딕"/>
+                        </a:rPr>
+                        <a:t>12개월</a:t>
+                      </a:r>
+                    </a:p>
+                  </a:txBody>
+                  <a:tcPr marL="38100" marR="38100" marT="12700" marB="12700" anchor="ctr">
+                    <a:solidFill>
+                      <a:srgbClr val="F58220"/>
+                    </a:solidFill>
+                  </a:tcPr>
+                </a:tc>
+                <a:tc>
+                  <a:txBody>
+                    <a:bodyPr/>
+                    <a:lstStyle/>
+                    <a:p>
+                      <a:pPr algn="ctr"/>
+                      <a:r>
+                        <a:rPr sz="950" b="1">
+                          <a:solidFill>
+                            <a:srgbClr val="FFFFFF"/>
+                          </a:solidFill>
+                          <a:latin typeface="맑은 고딕"/>
+                        </a:rPr>
+                        <a:t>9개월</a:t>
+                      </a:r>
+                    </a:p>
+                  </a:txBody>
+                  <a:tcPr marL="38100" marR="38100" marT="12700" marB="12700" anchor="ctr">
+                    <a:solidFill>
+                      <a:srgbClr val="F58220"/>
+                    </a:solidFill>
+                  </a:tcPr>
+                </a:tc>
+                <a:tc>
+                  <a:txBody>
+                    <a:bodyPr/>
+                    <a:lstStyle/>
+                    <a:p>
+                      <a:pPr algn="ctr"/>
+                      <a:r>
+                        <a:rPr sz="950" b="1">
+                          <a:solidFill>
+                            <a:srgbClr val="FFFFFF"/>
+                          </a:solidFill>
+                          <a:latin typeface="맑은 고딕"/>
+                        </a:rPr>
+                        <a:t>6개월</a:t>
+                      </a:r>
+                    </a:p>
+                  </a:txBody>
+                  <a:tcPr marL="38100" marR="38100" marT="12700" marB="12700" anchor="ctr">
+                    <a:solidFill>
+                      <a:srgbClr val="F58220"/>
+                    </a:solidFill>
+                  </a:tcPr>
+                </a:tc>
+                <a:tc>
+                  <a:txBody>
+                    <a:bodyPr/>
+                    <a:lstStyle/>
+                    <a:p>
+                      <a:pPr algn="ctr"/>
+                      <a:r>
+                        <a:rPr sz="950" b="1">
+                          <a:solidFill>
+                            <a:srgbClr val="FFFFFF"/>
+                          </a:solidFill>
+                          <a:latin typeface="맑은 고딕"/>
+                        </a:rPr>
+                        <a:t>3개월</a:t>
+                      </a:r>
+                    </a:p>
+                  </a:txBody>
+                  <a:tcPr marL="38100" marR="38100" marT="12700" marB="12700" anchor="ctr">
+                    <a:solidFill>
+                      <a:srgbClr val="F58220"/>
+                    </a:solidFill>
+                  </a:tcPr>
+                </a:tc>
+                <a:tc>
+                  <a:txBody>
+                    <a:bodyPr/>
+                    <a:lstStyle/>
+                    <a:p>
+                      <a:pPr algn="ctr"/>
+                      <a:r>
+                        <a:rPr sz="950" b="1">
+                          <a:solidFill>
+                            <a:srgbClr val="FFFFFF"/>
+                          </a:solidFill>
+                          <a:latin typeface="맑은 고딕"/>
+                        </a:rPr>
+                        <a:t>1개월</a:t>
+                      </a:r>
+                    </a:p>
+                  </a:txBody>
+                  <a:tcPr marL="38100" marR="38100" marT="12700" marB="12700" anchor="ctr">
+                    <a:solidFill>
+                      <a:srgbClr val="F58220"/>
+                    </a:solidFill>
+                  </a:tcPr>
+                </a:tc>
+              </a:tr>
+              <a:tr h="301752">
+                <a:tc>
+                  <a:txBody>
+                    <a:bodyPr/>
+                    <a:lstStyle/>
+                    <a:p>
+                      <a:pPr algn="ctr"/>
+                      <a:r>
+                        <a:rPr sz="950" b="1">
+                          <a:solidFill>
+                            <a:srgbClr val="3A3A3A"/>
+                          </a:solidFill>
+                          <a:latin typeface="맑은 고딕"/>
+                        </a:rPr>
+                        <a:t>140</a:t>
+                      </a:r>
+                    </a:p>
+                  </a:txBody>
+                  <a:tcPr marL="38100" marR="38100" marT="12700" marB="12700" anchor="ctr">
+                    <a:solidFill>
+                      <a:srgbClr val="FFFFFF"/>
+                    </a:solidFill>
+                  </a:tcPr>
+                </a:tc>
+                <a:tc>
+                  <a:txBody>
+                    <a:bodyPr/>
+                    <a:lstStyle/>
+                    <a:p>
+                      <a:pPr algn="ctr"/>
+                      <a:r>
+                        <a:rPr sz="950" b="0">
+                          <a:solidFill>
+                            <a:srgbClr val="3A3A3A"/>
+                          </a:solidFill>
+                          <a:latin typeface="맑은 고딕"/>
+                        </a:rPr>
+                        <a:t>36%</a:t>
+                      </a:r>
+                    </a:p>
+                  </a:txBody>
+                  <a:tcPr marL="38100" marR="38100" marT="12700" marB="12700" anchor="ctr">
+                    <a:solidFill>
+                      <a:srgbClr val="FFFFFF"/>
+                    </a:solidFill>
+                  </a:tcPr>
+                </a:tc>
+                <a:tc>
+                  <a:txBody>
+                    <a:bodyPr/>
+                    <a:lstStyle/>
+                    <a:p>
+                      <a:pPr algn="ctr"/>
+                      <a:r>
+                        <a:rPr sz="950" b="0">
+                          <a:solidFill>
+                            <a:srgbClr val="3A3A3A"/>
+                          </a:solidFill>
+                          <a:latin typeface="맑은 고딕"/>
+                        </a:rPr>
+                        <a:t>36%</a:t>
+                      </a:r>
+                    </a:p>
+                  </a:txBody>
+                  <a:tcPr marL="38100" marR="38100" marT="12700" marB="12700" anchor="ctr">
+                    <a:solidFill>
+                      <a:srgbClr val="FFFFFF"/>
+                    </a:solidFill>
+                  </a:tcPr>
+                </a:tc>
+                <a:tc>
+                  <a:txBody>
+                    <a:bodyPr/>
+                    <a:lstStyle/>
+                    <a:p>
+                      <a:pPr algn="ctr"/>
+                      <a:r>
+                        <a:rPr sz="950" b="0">
+                          <a:solidFill>
+                            <a:srgbClr val="3A3A3A"/>
+                          </a:solidFill>
+                          <a:latin typeface="맑은 고딕"/>
+                        </a:rPr>
+                        <a:t>36%</a:t>
+                      </a:r>
+                    </a:p>
+                  </a:txBody>
+                  <a:tcPr marL="38100" marR="38100" marT="12700" marB="12700" anchor="ctr">
+                    <a:solidFill>
+                      <a:srgbClr val="FFFFFF"/>
+                    </a:solidFill>
+                  </a:tcPr>
+                </a:tc>
+                <a:tc>
+                  <a:txBody>
+                    <a:bodyPr/>
+                    <a:lstStyle/>
+                    <a:p>
+                      <a:pPr algn="ctr"/>
+                      <a:r>
+                        <a:rPr sz="950" b="0">
+                          <a:solidFill>
+                            <a:srgbClr val="3A3A3A"/>
+                          </a:solidFill>
+                          <a:latin typeface="맑은 고딕"/>
+                        </a:rPr>
+                        <a:t>38%</a:t>
+                      </a:r>
+                    </a:p>
+                  </a:txBody>
+                  <a:tcPr marL="38100" marR="38100" marT="12700" marB="12700" anchor="ctr">
+                    <a:solidFill>
+                      <a:srgbClr val="FFFFFF"/>
+                    </a:solidFill>
+                  </a:tcPr>
+                </a:tc>
+                <a:tc>
+                  <a:txBody>
+                    <a:bodyPr/>
+                    <a:lstStyle/>
+                    <a:p>
+                      <a:pPr algn="ctr"/>
+                      <a:r>
+                        <a:rPr sz="950" b="0">
+                          <a:solidFill>
+                            <a:srgbClr val="3A3A3A"/>
+                          </a:solidFill>
+                          <a:latin typeface="맑은 고딕"/>
+                        </a:rPr>
+                        <a:t>55%</a:t>
+                      </a:r>
+                    </a:p>
+                  </a:txBody>
+                  <a:tcPr marL="38100" marR="38100" marT="12700" marB="12700" anchor="ctr">
+                    <a:solidFill>
+                      <a:srgbClr val="FFFFFF"/>
+                    </a:solidFill>
+                  </a:tcPr>
+                </a:tc>
+              </a:tr>
+              <a:tr h="301752">
+                <a:tc>
+                  <a:txBody>
+                    <a:bodyPr/>
+                    <a:lstStyle/>
+                    <a:p>
+                      <a:pPr algn="ctr"/>
+                      <a:r>
+                        <a:rPr sz="950" b="1">
+                          <a:solidFill>
+                            <a:srgbClr val="3A3A3A"/>
+                          </a:solidFill>
+                          <a:latin typeface="맑은 고딕"/>
+                        </a:rPr>
+                        <a:t>130</a:t>
+                      </a:r>
+                    </a:p>
+                  </a:txBody>
+                  <a:tcPr marL="38100" marR="38100" marT="12700" marB="12700" anchor="ctr">
+                    <a:solidFill>
+                      <a:srgbClr val="EEF2F7"/>
+                    </a:solidFill>
+                  </a:tcPr>
+                </a:tc>
+                <a:tc>
+                  <a:txBody>
+                    <a:bodyPr/>
+                    <a:lstStyle/>
+                    <a:p>
+                      <a:pPr algn="ctr"/>
+                      <a:r>
+                        <a:rPr sz="950" b="0">
+                          <a:solidFill>
+                            <a:srgbClr val="3A3A3A"/>
+                          </a:solidFill>
+                          <a:latin typeface="맑은 고딕"/>
+                        </a:rPr>
+                        <a:t>41%</a:t>
+                      </a:r>
+                    </a:p>
+                  </a:txBody>
+                  <a:tcPr marL="38100" marR="38100" marT="12700" marB="12700" anchor="ctr">
+                    <a:solidFill>
+                      <a:srgbClr val="EEF2F7"/>
+                    </a:solidFill>
+                  </a:tcPr>
+                </a:tc>
+                <a:tc>
+                  <a:txBody>
+                    <a:bodyPr/>
+                    <a:lstStyle/>
+                    <a:p>
+                      <a:pPr algn="ctr"/>
+                      <a:r>
+                        <a:rPr sz="950" b="0">
+                          <a:solidFill>
+                            <a:srgbClr val="3A3A3A"/>
+                          </a:solidFill>
+                          <a:latin typeface="맑은 고딕"/>
+                        </a:rPr>
+                        <a:t>41%</a:t>
+                      </a:r>
+                    </a:p>
+                  </a:txBody>
+                  <a:tcPr marL="38100" marR="38100" marT="12700" marB="12700" anchor="ctr">
+                    <a:solidFill>
+                      <a:srgbClr val="EEF2F7"/>
+                    </a:solidFill>
+                  </a:tcPr>
+                </a:tc>
+                <a:tc>
+                  <a:txBody>
+                    <a:bodyPr/>
+                    <a:lstStyle/>
+                    <a:p>
+                      <a:pPr algn="ctr"/>
+                      <a:r>
+                        <a:rPr sz="950" b="0">
+                          <a:solidFill>
+                            <a:srgbClr val="3A3A3A"/>
+                          </a:solidFill>
+                          <a:latin typeface="맑은 고딕"/>
+                        </a:rPr>
+                        <a:t>41%</a:t>
+                      </a:r>
+                    </a:p>
+                  </a:txBody>
+                  <a:tcPr marL="38100" marR="38100" marT="12700" marB="12700" anchor="ctr">
+                    <a:solidFill>
+                      <a:srgbClr val="EEF2F7"/>
+                    </a:solidFill>
+                  </a:tcPr>
+                </a:tc>
+                <a:tc>
+                  <a:txBody>
+                    <a:bodyPr/>
+                    <a:lstStyle/>
+                    <a:p>
+                      <a:pPr algn="ctr"/>
+                      <a:r>
+                        <a:rPr sz="950" b="0">
+                          <a:solidFill>
+                            <a:srgbClr val="3A3A3A"/>
+                          </a:solidFill>
+                          <a:latin typeface="맑은 고딕"/>
+                        </a:rPr>
+                        <a:t>43%</a:t>
+                      </a:r>
+                    </a:p>
+                  </a:txBody>
+                  <a:tcPr marL="38100" marR="38100" marT="12700" marB="12700" anchor="ctr">
+                    <a:solidFill>
+                      <a:srgbClr val="EEF2F7"/>
+                    </a:solidFill>
+                  </a:tcPr>
+                </a:tc>
+                <a:tc>
+                  <a:txBody>
+                    <a:bodyPr/>
+                    <a:lstStyle/>
+                    <a:p>
+                      <a:pPr algn="ctr"/>
+                      <a:r>
+                        <a:rPr sz="950" b="0">
+                          <a:solidFill>
+                            <a:srgbClr val="3A3A3A"/>
+                          </a:solidFill>
+                          <a:latin typeface="맑은 고딕"/>
+                        </a:rPr>
+                        <a:t>62%</a:t>
+                      </a:r>
+                    </a:p>
+                  </a:txBody>
+                  <a:tcPr marL="38100" marR="38100" marT="12700" marB="12700" anchor="ctr">
+                    <a:solidFill>
+                      <a:srgbClr val="EEF2F7"/>
+                    </a:solidFill>
+                  </a:tcPr>
+                </a:tc>
+              </a:tr>
+              <a:tr h="301752">
+                <a:tc>
+                  <a:txBody>
+                    <a:bodyPr/>
+                    <a:lstStyle/>
+                    <a:p>
+                      <a:pPr algn="ctr"/>
+                      <a:r>
+                        <a:rPr sz="950" b="1">
+                          <a:solidFill>
+                            <a:srgbClr val="3A3A3A"/>
+                          </a:solidFill>
+                          <a:latin typeface="맑은 고딕"/>
+                        </a:rPr>
+                        <a:t>120</a:t>
+                      </a:r>
+                    </a:p>
+                  </a:txBody>
+                  <a:tcPr marL="38100" marR="38100" marT="12700" marB="12700" anchor="ctr">
+                    <a:solidFill>
+                      <a:srgbClr val="FFFFFF"/>
+                    </a:solidFill>
+                  </a:tcPr>
+                </a:tc>
+                <a:tc>
+                  <a:txBody>
+                    <a:bodyPr/>
+                    <a:lstStyle/>
+                    <a:p>
+                      <a:pPr algn="ctr"/>
+                      <a:r>
+                        <a:rPr sz="950" b="0">
+                          <a:solidFill>
+                            <a:srgbClr val="3A3A3A"/>
+                          </a:solidFill>
+                          <a:latin typeface="맑은 고딕"/>
+                        </a:rPr>
+                        <a:t>46%</a:t>
+                      </a:r>
+                    </a:p>
+                  </a:txBody>
+                  <a:tcPr marL="38100" marR="38100" marT="12700" marB="12700" anchor="ctr">
+                    <a:solidFill>
+                      <a:srgbClr val="FFFFFF"/>
+                    </a:solidFill>
+                  </a:tcPr>
+                </a:tc>
+                <a:tc>
+                  <a:txBody>
+                    <a:bodyPr/>
+                    <a:lstStyle/>
+                    <a:p>
+                      <a:pPr algn="ctr"/>
+                      <a:r>
+                        <a:rPr sz="950" b="0">
+                          <a:solidFill>
+                            <a:srgbClr val="3A3A3A"/>
+                          </a:solidFill>
+                          <a:latin typeface="맑은 고딕"/>
+                        </a:rPr>
+                        <a:t>48%</a:t>
+                      </a:r>
+                    </a:p>
+                  </a:txBody>
+                  <a:tcPr marL="38100" marR="38100" marT="12700" marB="12700" anchor="ctr">
+                    <a:solidFill>
+                      <a:srgbClr val="FFFFFF"/>
+                    </a:solidFill>
+                  </a:tcPr>
+                </a:tc>
+                <a:tc>
+                  <a:txBody>
+                    <a:bodyPr/>
+                    <a:lstStyle/>
+                    <a:p>
+                      <a:pPr algn="ctr"/>
+                      <a:r>
+                        <a:rPr sz="950" b="0">
+                          <a:solidFill>
+                            <a:srgbClr val="3A3A3A"/>
+                          </a:solidFill>
+                          <a:latin typeface="맑은 고딕"/>
+                        </a:rPr>
+                        <a:t>48%</a:t>
+                      </a:r>
+                    </a:p>
+                  </a:txBody>
+                  <a:tcPr marL="38100" marR="38100" marT="12700" marB="12700" anchor="ctr">
+                    <a:solidFill>
+                      <a:srgbClr val="FFFFFF"/>
+                    </a:solidFill>
+                  </a:tcPr>
+                </a:tc>
+                <a:tc>
+                  <a:txBody>
+                    <a:bodyPr/>
+                    <a:lstStyle/>
+                    <a:p>
+                      <a:pPr algn="ctr"/>
+                      <a:r>
+                        <a:rPr sz="950" b="0">
+                          <a:solidFill>
+                            <a:srgbClr val="3A3A3A"/>
+                          </a:solidFill>
+                          <a:latin typeface="맑은 고딕"/>
+                        </a:rPr>
+                        <a:t>47%</a:t>
+                      </a:r>
+                    </a:p>
+                  </a:txBody>
+                  <a:tcPr marL="38100" marR="38100" marT="12700" marB="12700" anchor="ctr">
+                    <a:solidFill>
+                      <a:srgbClr val="FFFFFF"/>
+                    </a:solidFill>
+                  </a:tcPr>
+                </a:tc>
+                <a:tc>
+                  <a:txBody>
+                    <a:bodyPr/>
+                    <a:lstStyle/>
+                    <a:p>
+                      <a:pPr algn="ctr"/>
+                      <a:r>
+                        <a:rPr sz="950" b="0">
+                          <a:solidFill>
+                            <a:srgbClr val="3A3A3A"/>
+                          </a:solidFill>
+                          <a:latin typeface="맑은 고딕"/>
+                        </a:rPr>
+                        <a:t>61%</a:t>
+                      </a:r>
+                    </a:p>
+                  </a:txBody>
+                  <a:tcPr marL="38100" marR="38100" marT="12700" marB="12700" anchor="ctr">
+                    <a:solidFill>
+                      <a:srgbClr val="FFFFFF"/>
+                    </a:solidFill>
+                  </a:tcPr>
+                </a:tc>
+              </a:tr>
+              <a:tr h="301752">
+                <a:tc>
+                  <a:txBody>
+                    <a:bodyPr/>
+                    <a:lstStyle/>
+                    <a:p>
+                      <a:pPr algn="ctr"/>
+                      <a:r>
+                        <a:rPr sz="950" b="1">
+                          <a:solidFill>
+                            <a:srgbClr val="3A3A3A"/>
+                          </a:solidFill>
+                          <a:latin typeface="맑은 고딕"/>
+                        </a:rPr>
+                        <a:t>110</a:t>
+                      </a:r>
+                    </a:p>
+                  </a:txBody>
+                  <a:tcPr marL="38100" marR="38100" marT="12700" marB="12700" anchor="ctr">
+                    <a:solidFill>
+                      <a:srgbClr val="EEF2F7"/>
+                    </a:solidFill>
+                  </a:tcPr>
+                </a:tc>
+                <a:tc>
+                  <a:txBody>
+                    <a:bodyPr/>
+                    <a:lstStyle/>
+                    <a:p>
+                      <a:pPr algn="ctr"/>
+                      <a:r>
+                        <a:rPr sz="950" b="0">
+                          <a:solidFill>
+                            <a:srgbClr val="3A3A3A"/>
+                          </a:solidFill>
+                          <a:latin typeface="맑은 고딕"/>
+                        </a:rPr>
+                        <a:t>52%</a:t>
+                      </a:r>
+                    </a:p>
+                  </a:txBody>
+                  <a:tcPr marL="38100" marR="38100" marT="12700" marB="12700" anchor="ctr">
+                    <a:solidFill>
+                      <a:srgbClr val="EEF2F7"/>
+                    </a:solidFill>
+                  </a:tcPr>
+                </a:tc>
+                <a:tc>
+                  <a:txBody>
+                    <a:bodyPr/>
+                    <a:lstStyle/>
+                    <a:p>
+                      <a:pPr algn="ctr"/>
+                      <a:r>
+                        <a:rPr sz="950" b="0">
+                          <a:solidFill>
+                            <a:srgbClr val="3A3A3A"/>
+                          </a:solidFill>
+                          <a:latin typeface="맑은 고딕"/>
+                        </a:rPr>
+                        <a:t>55%</a:t>
+                      </a:r>
+                    </a:p>
+                  </a:txBody>
+                  <a:tcPr marL="38100" marR="38100" marT="12700" marB="12700" anchor="ctr">
+                    <a:solidFill>
+                      <a:srgbClr val="EEF2F7"/>
+                    </a:solidFill>
+                  </a:tcPr>
+                </a:tc>
+                <a:tc>
+                  <a:txBody>
+                    <a:bodyPr/>
+                    <a:lstStyle/>
+                    <a:p>
+                      <a:pPr algn="ctr"/>
+                      <a:r>
+                        <a:rPr sz="950" b="0">
+                          <a:solidFill>
+                            <a:srgbClr val="3A3A3A"/>
+                          </a:solidFill>
+                          <a:latin typeface="맑은 고딕"/>
+                        </a:rPr>
+                        <a:t>57%</a:t>
+                      </a:r>
+                    </a:p>
+                  </a:txBody>
+                  <a:tcPr marL="38100" marR="38100" marT="12700" marB="12700" anchor="ctr">
+                    <a:solidFill>
+                      <a:srgbClr val="EEF2F7"/>
+                    </a:solidFill>
+                  </a:tcPr>
+                </a:tc>
+                <a:tc>
+                  <a:txBody>
+                    <a:bodyPr/>
+                    <a:lstStyle/>
+                    <a:p>
+                      <a:pPr algn="ctr"/>
+                      <a:r>
+                        <a:rPr sz="950" b="0">
+                          <a:solidFill>
+                            <a:srgbClr val="3A3A3A"/>
+                          </a:solidFill>
+                          <a:latin typeface="맑은 고딕"/>
+                        </a:rPr>
+                        <a:t>53%</a:t>
+                      </a:r>
+                    </a:p>
+                  </a:txBody>
+                  <a:tcPr marL="38100" marR="38100" marT="12700" marB="12700" anchor="ctr">
+                    <a:solidFill>
+                      <a:srgbClr val="EEF2F7"/>
+                    </a:solidFill>
+                  </a:tcPr>
+                </a:tc>
+                <a:tc>
+                  <a:txBody>
+                    <a:bodyPr/>
+                    <a:lstStyle/>
+                    <a:p>
+                      <a:pPr algn="ctr"/>
+                      <a:r>
+                        <a:rPr sz="950" b="0">
+                          <a:solidFill>
+                            <a:srgbClr val="3A3A3A"/>
+                          </a:solidFill>
+                          <a:latin typeface="맑은 고딕"/>
+                        </a:rPr>
+                        <a:t>50%</a:t>
+                      </a:r>
+                    </a:p>
+                  </a:txBody>
+                  <a:tcPr marL="38100" marR="38100" marT="12700" marB="12700" anchor="ctr">
+                    <a:solidFill>
+                      <a:srgbClr val="EEF2F7"/>
+                    </a:solidFill>
+                  </a:tcPr>
+                </a:tc>
+              </a:tr>
+              <a:tr h="301752">
+                <a:tc>
+                  <a:txBody>
+                    <a:bodyPr/>
+                    <a:lstStyle/>
+                    <a:p>
+                      <a:pPr algn="ctr"/>
+                      <a:r>
+                        <a:rPr sz="950" b="1">
+                          <a:solidFill>
+                            <a:srgbClr val="3A3A3A"/>
+                          </a:solidFill>
+                          <a:latin typeface="맑은 고딕"/>
+                        </a:rPr>
+                        <a:t>100</a:t>
+                      </a:r>
+                    </a:p>
+                  </a:txBody>
+                  <a:tcPr marL="38100" marR="38100" marT="12700" marB="12700" anchor="ctr">
+                    <a:solidFill>
+                      <a:srgbClr val="FFFFFF"/>
+                    </a:solidFill>
+                  </a:tcPr>
+                </a:tc>
+                <a:tc>
+                  <a:txBody>
+                    <a:bodyPr/>
+                    <a:lstStyle/>
+                    <a:p>
+                      <a:pPr algn="ctr"/>
+                      <a:r>
+                        <a:rPr sz="950" b="1">
+                          <a:solidFill>
+                            <a:srgbClr val="3A3A3A"/>
+                          </a:solidFill>
+                          <a:latin typeface="맑은 고딕"/>
+                        </a:rPr>
+                        <a:t>59%</a:t>
+                      </a:r>
+                    </a:p>
+                  </a:txBody>
+                  <a:tcPr marL="38100" marR="38100" marT="12700" marB="12700" anchor="ctr">
+                    <a:solidFill>
+                      <a:srgbClr val="FFFFFF"/>
+                    </a:solidFill>
+                  </a:tcPr>
+                </a:tc>
+                <a:tc>
+                  <a:txBody>
+                    <a:bodyPr/>
+                    <a:lstStyle/>
+                    <a:p>
+                      <a:pPr algn="ctr"/>
+                      <a:r>
+                        <a:rPr sz="950" b="1">
+                          <a:solidFill>
+                            <a:srgbClr val="3A3A3A"/>
+                          </a:solidFill>
+                          <a:latin typeface="맑은 고딕"/>
+                        </a:rPr>
+                        <a:t>64%</a:t>
+                      </a:r>
+                    </a:p>
+                  </a:txBody>
+                  <a:tcPr marL="38100" marR="38100" marT="12700" marB="12700" anchor="ctr">
+                    <a:solidFill>
+                      <a:srgbClr val="FFFFFF"/>
+                    </a:solidFill>
+                  </a:tcPr>
+                </a:tc>
+                <a:tc>
+                  <a:txBody>
+                    <a:bodyPr/>
+                    <a:lstStyle/>
+                    <a:p>
+                      <a:pPr algn="ctr"/>
+                      <a:r>
+                        <a:rPr sz="950" b="1">
+                          <a:solidFill>
+                            <a:srgbClr val="3A3A3A"/>
+                          </a:solidFill>
+                          <a:latin typeface="맑은 고딕"/>
+                        </a:rPr>
+                        <a:t>67%</a:t>
+                      </a:r>
+                    </a:p>
+                  </a:txBody>
+                  <a:tcPr marL="38100" marR="38100" marT="12700" marB="12700" anchor="ctr">
+                    <a:solidFill>
+                      <a:srgbClr val="FFFFFF"/>
+                    </a:solidFill>
+                  </a:tcPr>
+                </a:tc>
+                <a:tc>
+                  <a:txBody>
+                    <a:bodyPr/>
+                    <a:lstStyle/>
+                    <a:p>
+                      <a:pPr algn="ctr"/>
+                      <a:r>
+                        <a:rPr sz="950" b="1">
+                          <a:solidFill>
+                            <a:srgbClr val="3A3A3A"/>
+                          </a:solidFill>
+                          <a:latin typeface="맑은 고딕"/>
+                        </a:rPr>
+                        <a:t>61%</a:t>
+                      </a:r>
+                    </a:p>
+                  </a:txBody>
+                  <a:tcPr marL="38100" marR="38100" marT="12700" marB="12700" anchor="ctr">
+                    <a:solidFill>
+                      <a:srgbClr val="FFFFFF"/>
+                    </a:solidFill>
+                  </a:tcPr>
+                </a:tc>
+                <a:tc>
+                  <a:txBody>
+                    <a:bodyPr/>
+                    <a:lstStyle/>
+                    <a:p>
+                      <a:pPr algn="ctr"/>
+                      <a:r>
+                        <a:rPr sz="950" b="1">
+                          <a:solidFill>
+                            <a:srgbClr val="3A3A3A"/>
+                          </a:solidFill>
+                          <a:latin typeface="맑은 고딕"/>
+                        </a:rPr>
+                        <a:t>34%</a:t>
+                      </a:r>
+                    </a:p>
+                  </a:txBody>
+                  <a:tcPr marL="38100" marR="38100" marT="12700" marB="12700" anchor="ctr">
+                    <a:solidFill>
+                      <a:srgbClr val="FFFFFF"/>
+                    </a:solidFill>
+                  </a:tcPr>
+                </a:tc>
+              </a:tr>
+              <a:tr h="301752">
+                <a:tc>
+                  <a:txBody>
+                    <a:bodyPr/>
+                    <a:lstStyle/>
+                    <a:p>
+                      <a:pPr algn="ctr"/>
+                      <a:r>
+                        <a:rPr sz="950" b="1">
+                          <a:solidFill>
+                            <a:srgbClr val="3A3A3A"/>
+                          </a:solidFill>
+                          <a:latin typeface="맑은 고딕"/>
+                        </a:rPr>
+                        <a:t>90</a:t>
+                      </a:r>
+                    </a:p>
+                  </a:txBody>
+                  <a:tcPr marL="38100" marR="38100" marT="12700" marB="12700" anchor="ctr">
+                    <a:solidFill>
+                      <a:srgbClr val="EEF2F7"/>
+                    </a:solidFill>
+                  </a:tcPr>
+                </a:tc>
+                <a:tc>
+                  <a:txBody>
+                    <a:bodyPr/>
+                    <a:lstStyle/>
+                    <a:p>
+                      <a:pPr algn="ctr"/>
+                      <a:r>
+                        <a:rPr sz="950" b="0">
+                          <a:solidFill>
+                            <a:srgbClr val="3A3A3A"/>
+                          </a:solidFill>
+                          <a:latin typeface="맑은 고딕"/>
+                        </a:rPr>
+                        <a:t>67%</a:t>
+                      </a:r>
+                    </a:p>
+                  </a:txBody>
+                  <a:tcPr marL="38100" marR="38100" marT="12700" marB="12700" anchor="ctr">
+                    <a:solidFill>
+                      <a:srgbClr val="EEF2F7"/>
+                    </a:solidFill>
+                  </a:tcPr>
+                </a:tc>
+                <a:tc>
+                  <a:txBody>
+                    <a:bodyPr/>
+                    <a:lstStyle/>
+                    <a:p>
+                      <a:pPr algn="ctr"/>
+                      <a:r>
+                        <a:rPr sz="950" b="0">
+                          <a:solidFill>
+                            <a:srgbClr val="3A3A3A"/>
+                          </a:solidFill>
+                          <a:latin typeface="맑은 고딕"/>
+                        </a:rPr>
+                        <a:t>73%</a:t>
+                      </a:r>
+                    </a:p>
+                  </a:txBody>
+                  <a:tcPr marL="38100" marR="38100" marT="12700" marB="12700" anchor="ctr">
+                    <a:solidFill>
+                      <a:srgbClr val="EEF2F7"/>
+                    </a:solidFill>
+                  </a:tcPr>
+                </a:tc>
+                <a:tc>
+                  <a:txBody>
+                    <a:bodyPr/>
+                    <a:lstStyle/>
+                    <a:p>
+                      <a:pPr algn="ctr"/>
+                      <a:r>
+                        <a:rPr sz="950" b="0">
+                          <a:solidFill>
+                            <a:srgbClr val="3A3A3A"/>
+                          </a:solidFill>
+                          <a:latin typeface="맑은 고딕"/>
+                        </a:rPr>
+                        <a:t>79%</a:t>
+                      </a:r>
+                    </a:p>
+                  </a:txBody>
+                  <a:tcPr marL="38100" marR="38100" marT="12700" marB="12700" anchor="ctr">
+                    <a:solidFill>
+                      <a:srgbClr val="EEF2F7"/>
+                    </a:solidFill>
+                  </a:tcPr>
+                </a:tc>
+                <a:tc>
+                  <a:txBody>
+                    <a:bodyPr/>
+                    <a:lstStyle/>
+                    <a:p>
+                      <a:pPr algn="ctr"/>
+                      <a:r>
+                        <a:rPr sz="950" b="0">
+                          <a:solidFill>
+                            <a:srgbClr val="3A3A3A"/>
+                          </a:solidFill>
+                          <a:latin typeface="맑은 고딕"/>
+                        </a:rPr>
+                        <a:t>77%</a:t>
+                      </a:r>
+                    </a:p>
+                  </a:txBody>
+                  <a:tcPr marL="38100" marR="38100" marT="12700" marB="12700" anchor="ctr">
+                    <a:solidFill>
+                      <a:srgbClr val="EEF2F7"/>
+                    </a:solidFill>
+                  </a:tcPr>
+                </a:tc>
+                <a:tc>
+                  <a:txBody>
+                    <a:bodyPr/>
+                    <a:lstStyle/>
+                    <a:p>
+                      <a:pPr algn="ctr"/>
+                      <a:r>
+                        <a:rPr sz="950" b="0">
+                          <a:solidFill>
+                            <a:srgbClr val="3A3A3A"/>
+                          </a:solidFill>
+                          <a:latin typeface="맑은 고딕"/>
+                        </a:rPr>
+                        <a:t>29%</a:t>
+                      </a:r>
+                    </a:p>
+                  </a:txBody>
+                  <a:tcPr marL="38100" marR="38100" marT="12700" marB="12700" anchor="ctr">
+                    <a:solidFill>
+                      <a:srgbClr val="EEF2F7"/>
+                    </a:solidFill>
+                  </a:tcPr>
+                </a:tc>
+              </a:tr>
+              <a:tr h="301752">
+                <a:tc>
+                  <a:txBody>
+                    <a:bodyPr/>
+                    <a:lstStyle/>
+                    <a:p>
+                      <a:pPr algn="ctr"/>
+                      <a:r>
+                        <a:rPr sz="950" b="1">
+                          <a:solidFill>
+                            <a:srgbClr val="3A3A3A"/>
+                          </a:solidFill>
+                          <a:latin typeface="맑은 고딕"/>
+                        </a:rPr>
+                        <a:t>80</a:t>
+                      </a:r>
+                    </a:p>
+                  </a:txBody>
+                  <a:tcPr marL="38100" marR="38100" marT="12700" marB="12700" anchor="ctr">
+                    <a:solidFill>
+                      <a:srgbClr val="FFFFFF"/>
+                    </a:solidFill>
+                  </a:tcPr>
+                </a:tc>
+                <a:tc>
+                  <a:txBody>
+                    <a:bodyPr/>
+                    <a:lstStyle/>
+                    <a:p>
+                      <a:pPr algn="ctr"/>
+                      <a:r>
+                        <a:rPr sz="950" b="0">
+                          <a:solidFill>
+                            <a:srgbClr val="3A3A3A"/>
+                          </a:solidFill>
+                          <a:latin typeface="맑은 고딕"/>
+                        </a:rPr>
+                        <a:t>75%</a:t>
+                      </a:r>
+                    </a:p>
+                  </a:txBody>
+                  <a:tcPr marL="38100" marR="38100" marT="12700" marB="12700" anchor="ctr">
+                    <a:solidFill>
+                      <a:srgbClr val="FFFFFF"/>
+                    </a:solidFill>
+                  </a:tcPr>
+                </a:tc>
+                <a:tc>
+                  <a:txBody>
+                    <a:bodyPr/>
+                    <a:lstStyle/>
+                    <a:p>
+                      <a:pPr algn="ctr"/>
+                      <a:r>
+                        <a:rPr sz="950" b="0">
+                          <a:solidFill>
+                            <a:srgbClr val="3A3A3A"/>
+                          </a:solidFill>
+                          <a:latin typeface="맑은 고딕"/>
+                        </a:rPr>
+                        <a:t>83%</a:t>
+                      </a:r>
+                    </a:p>
+                  </a:txBody>
+                  <a:tcPr marL="38100" marR="38100" marT="12700" marB="12700" anchor="ctr">
+                    <a:solidFill>
+                      <a:srgbClr val="FFFFFF"/>
+                    </a:solidFill>
+                  </a:tcPr>
+                </a:tc>
+                <a:tc>
+                  <a:txBody>
+                    <a:bodyPr/>
+                    <a:lstStyle/>
+                    <a:p>
+                      <a:pPr algn="ctr"/>
+                      <a:r>
+                        <a:rPr sz="950" b="0">
+                          <a:solidFill>
+                            <a:srgbClr val="3A3A3A"/>
+                          </a:solidFill>
+                          <a:latin typeface="맑은 고딕"/>
+                        </a:rPr>
+                        <a:t>93%</a:t>
+                      </a:r>
+                    </a:p>
+                  </a:txBody>
+                  <a:tcPr marL="38100" marR="38100" marT="12700" marB="12700" anchor="ctr">
+                    <a:solidFill>
+                      <a:srgbClr val="FFFFFF"/>
+                    </a:solidFill>
+                  </a:tcPr>
+                </a:tc>
+                <a:tc>
+                  <a:txBody>
+                    <a:bodyPr/>
+                    <a:lstStyle/>
+                    <a:p>
+                      <a:pPr algn="ctr"/>
+                      <a:r>
+                        <a:rPr sz="950" b="0">
+                          <a:solidFill>
+                            <a:srgbClr val="3A3A3A"/>
+                          </a:solidFill>
+                          <a:latin typeface="맑은 고딕"/>
+                        </a:rPr>
+                        <a:t>100%</a:t>
+                      </a:r>
+                    </a:p>
+                  </a:txBody>
+                  <a:tcPr marL="38100" marR="38100" marT="12700" marB="12700" anchor="ctr">
+                    <a:solidFill>
+                      <a:srgbClr val="FFFFFF"/>
+                    </a:solidFill>
+                  </a:tcPr>
+                </a:tc>
+                <a:tc>
+                  <a:txBody>
+                    <a:bodyPr/>
+                    <a:lstStyle/>
+                    <a:p>
+                      <a:pPr algn="ctr"/>
+                      <a:r>
+                        <a:rPr sz="950" b="0">
+                          <a:solidFill>
+                            <a:srgbClr val="3A3A3A"/>
+                          </a:solidFill>
+                          <a:latin typeface="맑은 고딕"/>
+                        </a:rPr>
+                        <a:t>67%</a:t>
+                      </a:r>
+                    </a:p>
+                  </a:txBody>
+                  <a:tcPr marL="38100" marR="38100" marT="12700" marB="12700" anchor="ctr">
+                    <a:solidFill>
+                      <a:srgbClr val="FFFFFF"/>
+                    </a:solidFill>
+                  </a:tcPr>
+                </a:tc>
+              </a:tr>
+              <a:tr h="301752">
+                <a:tc>
+                  <a:txBody>
+                    <a:bodyPr/>
+                    <a:lstStyle/>
+                    <a:p>
+                      <a:pPr algn="ctr"/>
+                      <a:r>
+                        <a:rPr sz="950" b="1">
+                          <a:solidFill>
+                            <a:srgbClr val="3A3A3A"/>
+                          </a:solidFill>
+                          <a:latin typeface="맑은 고딕"/>
+                        </a:rPr>
+                        <a:t>70</a:t>
+                      </a:r>
+                    </a:p>
+                  </a:txBody>
+                  <a:tcPr marL="38100" marR="38100" marT="12700" marB="12700" anchor="ctr">
+                    <a:solidFill>
+                      <a:srgbClr val="EEF2F7"/>
+                    </a:solidFill>
+                  </a:tcPr>
+                </a:tc>
+                <a:tc>
+                  <a:txBody>
+                    <a:bodyPr/>
+                    <a:lstStyle/>
+                    <a:p>
+                      <a:pPr algn="ctr"/>
+                      <a:r>
+                        <a:rPr sz="950" b="0">
+                          <a:solidFill>
+                            <a:srgbClr val="3A3A3A"/>
+                          </a:solidFill>
+                          <a:latin typeface="맑은 고딕"/>
+                        </a:rPr>
+                        <a:t>84%</a:t>
+                      </a:r>
+                    </a:p>
+                  </a:txBody>
+                  <a:tcPr marL="38100" marR="38100" marT="12700" marB="12700" anchor="ctr">
+                    <a:solidFill>
+                      <a:srgbClr val="EEF2F7"/>
+                    </a:solidFill>
+                  </a:tcPr>
+                </a:tc>
+                <a:tc>
+                  <a:txBody>
+                    <a:bodyPr/>
+                    <a:lstStyle/>
+                    <a:p>
+                      <a:pPr algn="ctr"/>
+                      <a:r>
+                        <a:rPr sz="950" b="0">
+                          <a:solidFill>
+                            <a:srgbClr val="3A3A3A"/>
+                          </a:solidFill>
+                          <a:latin typeface="맑은 고딕"/>
+                        </a:rPr>
+                        <a:t>93%</a:t>
+                      </a:r>
+                    </a:p>
+                  </a:txBody>
+                  <a:tcPr marL="38100" marR="38100" marT="12700" marB="12700" anchor="ctr">
+                    <a:solidFill>
+                      <a:srgbClr val="EEF2F7"/>
+                    </a:solidFill>
+                  </a:tcPr>
+                </a:tc>
+                <a:tc>
+                  <a:txBody>
+                    <a:bodyPr/>
+                    <a:lstStyle/>
+                    <a:p>
+                      <a:pPr algn="ctr"/>
+                      <a:r>
+                        <a:rPr sz="950" b="0">
+                          <a:solidFill>
+                            <a:srgbClr val="3A3A3A"/>
+                          </a:solidFill>
+                          <a:latin typeface="맑은 고딕"/>
+                        </a:rPr>
+                        <a:t>100%</a:t>
+                      </a:r>
+                    </a:p>
+                  </a:txBody>
+                  <a:tcPr marL="38100" marR="38100" marT="12700" marB="12700" anchor="ctr">
+                    <a:solidFill>
+                      <a:srgbClr val="EEF2F7"/>
+                    </a:solidFill>
+                  </a:tcPr>
+                </a:tc>
+                <a:tc>
+                  <a:txBody>
+                    <a:bodyPr/>
+                    <a:lstStyle/>
+                    <a:p>
+                      <a:pPr algn="ctr"/>
+                      <a:r>
+                        <a:rPr sz="950" b="0">
+                          <a:solidFill>
+                            <a:srgbClr val="3A3A3A"/>
+                          </a:solidFill>
+                          <a:latin typeface="맑은 고딕"/>
+                        </a:rPr>
+                        <a:t>100%</a:t>
+                      </a:r>
+                    </a:p>
+                  </a:txBody>
+                  <a:tcPr marL="38100" marR="38100" marT="12700" marB="12700" anchor="ctr">
+                    <a:solidFill>
+                      <a:srgbClr val="EEF2F7"/>
+                    </a:solidFill>
+                  </a:tcPr>
+                </a:tc>
+                <a:tc>
+                  <a:txBody>
+                    <a:bodyPr/>
+                    <a:lstStyle/>
+                    <a:p>
+                      <a:pPr algn="ctr"/>
+                      <a:r>
+                        <a:rPr sz="950" b="0">
+                          <a:solidFill>
+                            <a:srgbClr val="3A3A3A"/>
+                          </a:solidFill>
+                          <a:latin typeface="맑은 고딕"/>
+                        </a:rPr>
+                        <a:t>100%</a:t>
+                      </a:r>
+                    </a:p>
+                  </a:txBody>
+                  <a:tcPr marL="38100" marR="38100" marT="12700" marB="12700" anchor="ctr">
+                    <a:solidFill>
+                      <a:srgbClr val="EEF2F7"/>
+                    </a:solidFill>
+                  </a:tcPr>
+                </a:tc>
+              </a:tr>
+              <a:tr h="301752">
+                <a:tc>
+                  <a:txBody>
+                    <a:bodyPr/>
+                    <a:lstStyle/>
+                    <a:p>
+                      <a:pPr algn="ctr"/>
+                      <a:r>
+                        <a:rPr sz="950" b="1">
+                          <a:solidFill>
+                            <a:srgbClr val="3A3A3A"/>
+                          </a:solidFill>
+                          <a:latin typeface="맑은 고딕"/>
+                        </a:rPr>
+                        <a:t>60</a:t>
+                      </a:r>
+                    </a:p>
+                  </a:txBody>
+                  <a:tcPr marL="38100" marR="38100" marT="12700" marB="12700" anchor="ctr">
+                    <a:solidFill>
+                      <a:srgbClr val="FFFFFF"/>
+                    </a:solidFill>
+                  </a:tcPr>
+                </a:tc>
+                <a:tc>
+                  <a:txBody>
+                    <a:bodyPr/>
+                    <a:lstStyle/>
+                    <a:p>
+                      <a:pPr algn="ctr"/>
+                      <a:r>
+                        <a:rPr sz="950" b="0">
+                          <a:solidFill>
+                            <a:srgbClr val="3A3A3A"/>
+                          </a:solidFill>
+                          <a:latin typeface="맑은 고딕"/>
+                        </a:rPr>
+                        <a:t>낙아웃</a:t>
+                      </a:r>
+                    </a:p>
+                  </a:txBody>
+                  <a:tcPr marL="38100" marR="38100" marT="12700" marB="12700" anchor="ctr">
+                    <a:solidFill>
+                      <a:srgbClr val="FFFFFF"/>
+                    </a:solidFill>
+                  </a:tcPr>
+                </a:tc>
+                <a:tc>
+                  <a:txBody>
+                    <a:bodyPr/>
+                    <a:lstStyle/>
+                    <a:p>
+                      <a:pPr algn="ctr"/>
+                      <a:r>
+                        <a:rPr sz="950" b="0">
+                          <a:solidFill>
+                            <a:srgbClr val="3A3A3A"/>
+                          </a:solidFill>
+                          <a:latin typeface="맑은 고딕"/>
+                        </a:rPr>
+                        <a:t>낙아웃</a:t>
+                      </a:r>
+                    </a:p>
+                  </a:txBody>
+                  <a:tcPr marL="38100" marR="38100" marT="12700" marB="12700" anchor="ctr">
+                    <a:solidFill>
+                      <a:srgbClr val="FFFFFF"/>
+                    </a:solidFill>
+                  </a:tcPr>
+                </a:tc>
+                <a:tc>
+                  <a:txBody>
+                    <a:bodyPr/>
+                    <a:lstStyle/>
+                    <a:p>
+                      <a:pPr algn="ctr"/>
+                      <a:r>
+                        <a:rPr sz="950" b="0">
+                          <a:solidFill>
+                            <a:srgbClr val="3A3A3A"/>
+                          </a:solidFill>
+                          <a:latin typeface="맑은 고딕"/>
+                        </a:rPr>
+                        <a:t>낙아웃</a:t>
+                      </a:r>
+                    </a:p>
+                  </a:txBody>
+                  <a:tcPr marL="38100" marR="38100" marT="12700" marB="12700" anchor="ctr">
+                    <a:solidFill>
+                      <a:srgbClr val="FFFFFF"/>
+                    </a:solidFill>
+                  </a:tcPr>
+                </a:tc>
+                <a:tc>
+                  <a:txBody>
+                    <a:bodyPr/>
+                    <a:lstStyle/>
+                    <a:p>
+                      <a:pPr algn="ctr"/>
+                      <a:r>
+                        <a:rPr sz="950" b="0">
+                          <a:solidFill>
+                            <a:srgbClr val="3A3A3A"/>
+                          </a:solidFill>
+                          <a:latin typeface="맑은 고딕"/>
+                        </a:rPr>
+                        <a:t>낙아웃</a:t>
+                      </a:r>
+                    </a:p>
+                  </a:txBody>
+                  <a:tcPr marL="38100" marR="38100" marT="12700" marB="12700" anchor="ctr">
+                    <a:solidFill>
+                      <a:srgbClr val="FFFFFF"/>
+                    </a:solidFill>
+                  </a:tcPr>
+                </a:tc>
+                <a:tc>
+                  <a:txBody>
+                    <a:bodyPr/>
+                    <a:lstStyle/>
+                    <a:p>
+                      <a:pPr algn="ctr"/>
+                      <a:r>
+                        <a:rPr sz="950" b="0">
+                          <a:solidFill>
+                            <a:srgbClr val="3A3A3A"/>
+                          </a:solidFill>
+                          <a:latin typeface="맑은 고딕"/>
+                        </a:rPr>
+                        <a:t>낙아웃</a:t>
+                      </a:r>
+                    </a:p>
+                  </a:txBody>
+                  <a:tcPr marL="38100" marR="38100" marT="12700" marB="12700" anchor="ctr">
+                    <a:solidFill>
+                      <a:srgbClr val="FFFFFF"/>
+                    </a:solidFill>
+                  </a:tcPr>
+                </a:tc>
+              </a:tr>
+            </a:tbl>
+          </a:graphicData>
+        </a:graphic>
+      </p:graphicFrame>
+      <p:sp>
+        <p:nvSpPr>
+          <p:cNvPr id="9" name="TextBox 8"/>
+          <p:cNvSpPr txBox="1"/>
+          <p:nvPr/>
+        </p:nvSpPr>
+        <p:spPr>
+          <a:xfrm>
+            <a:off x="5120640" y="1783080"/>
+            <a:ext cx="4297680" cy="320040"/>
+          </a:xfrm>
+          <a:prstGeom prst="rect">
+            <a:avLst/>
+          </a:prstGeom>
+          <a:noFill/>
+        </p:spPr>
+        <p:txBody>
+          <a:bodyPr wrap="square" anchor="t" lIns="25400" rIns="25400" tIns="12700" bIns="12700">
+            <a:spAutoFit/>
+          </a:bodyPr>
+          <a:lstStyle/>
+          <a:p>
+            <a:pPr algn="l">
+              <a:lnSpc>
+                <a:spcPct val="100000"/>
+              </a:lnSpc>
+            </a:pPr>
+            <a:r>
+              <a:rPr sz="1400" b="1">
+                <a:solidFill>
+                  <a:srgbClr val="043B72"/>
+                </a:solidFill>
+                <a:latin typeface="맑은 고딕"/>
+              </a:rPr>
+              <a:t>안정변동성펀드</a:t>
+            </a:r>
+            <a:r>
+              <a:rPr sz="1050" b="0">
+                <a:solidFill>
+                  <a:srgbClr val="84888B"/>
+                </a:solidFill>
+                <a:latin typeface="맑은 고딕"/>
+              </a:rPr>
+              <a:t>  (안정 변동성 매매)</a:t>
+            </a:r>
+          </a:p>
+        </p:txBody>
+      </p:sp>
+      <p:graphicFrame>
+        <p:nvGraphicFramePr>
+          <p:cNvPr id="10" name="Table 9"/>
+          <p:cNvGraphicFramePr>
+            <a:graphicFrameLocks noGrp="1"/>
+          </p:cNvGraphicFramePr>
+          <p:nvPr/>
+        </p:nvGraphicFramePr>
+        <p:xfrm>
+          <a:off x="5120640" y="2121408"/>
+          <a:ext cx="4343400" cy="3017520"/>
+        </p:xfrm>
+        <a:graphic>
+          <a:graphicData uri="http://schemas.openxmlformats.org/drawingml/2006/table">
+            <a:tbl>
+              <a:tblPr firstRow="1" bandRow="1">
+                <a:tableStyleId>{5C22544A-7EE6-4342-B048-85BDC9FD1C3A}</a:tableStyleId>
+              </a:tblPr>
+              <a:tblGrid>
+                <a:gridCol w="868680"/>
+                <a:gridCol w="694944"/>
+                <a:gridCol w="694944"/>
+                <a:gridCol w="694944"/>
+                <a:gridCol w="694944"/>
+                <a:gridCol w="694944"/>
+              </a:tblGrid>
+              <a:tr h="301752">
+                <a:tc>
+                  <a:txBody>
+                    <a:bodyPr/>
+                    <a:lstStyle/>
+                    <a:p>
+                      <a:pPr algn="ctr"/>
+                      <a:r>
+                        <a:rPr sz="950" b="1">
+                          <a:solidFill>
+                            <a:srgbClr val="FFFFFF"/>
+                          </a:solidFill>
+                          <a:latin typeface="맑은 고딕"/>
+                        </a:rPr>
+                        <a:t>지수 \ 잔존</a:t>
+                      </a:r>
+                    </a:p>
+                  </a:txBody>
+                  <a:tcPr marL="38100" marR="38100" marT="12700" marB="12700" anchor="ctr">
+                    <a:solidFill>
+                      <a:srgbClr val="043B72"/>
+                    </a:solidFill>
+                  </a:tcPr>
+                </a:tc>
+                <a:tc>
+                  <a:txBody>
+                    <a:bodyPr/>
+                    <a:lstStyle/>
+                    <a:p>
+                      <a:pPr algn="ctr"/>
+                      <a:r>
+                        <a:rPr sz="950" b="1">
+                          <a:solidFill>
+                            <a:srgbClr val="FFFFFF"/>
+                          </a:solidFill>
+                          <a:latin typeface="맑은 고딕"/>
+                        </a:rPr>
+                        <a:t>12개월</a:t>
+                      </a:r>
+                    </a:p>
+                  </a:txBody>
+                  <a:tcPr marL="38100" marR="38100" marT="12700" marB="12700" anchor="ctr">
+                    <a:solidFill>
+                      <a:srgbClr val="043B72"/>
+                    </a:solidFill>
+                  </a:tcPr>
+                </a:tc>
+                <a:tc>
+                  <a:txBody>
+                    <a:bodyPr/>
+                    <a:lstStyle/>
+                    <a:p>
+                      <a:pPr algn="ctr"/>
+                      <a:r>
+                        <a:rPr sz="950" b="1">
+                          <a:solidFill>
+                            <a:srgbClr val="FFFFFF"/>
+                          </a:solidFill>
+                          <a:latin typeface="맑은 고딕"/>
+                        </a:rPr>
+                        <a:t>9개월</a:t>
+                      </a:r>
+                    </a:p>
+                  </a:txBody>
+                  <a:tcPr marL="38100" marR="38100" marT="12700" marB="12700" anchor="ctr">
+                    <a:solidFill>
+                      <a:srgbClr val="043B72"/>
+                    </a:solidFill>
+                  </a:tcPr>
+                </a:tc>
+                <a:tc>
+                  <a:txBody>
+                    <a:bodyPr/>
+                    <a:lstStyle/>
+                    <a:p>
+                      <a:pPr algn="ctr"/>
+                      <a:r>
+                        <a:rPr sz="950" b="1">
+                          <a:solidFill>
+                            <a:srgbClr val="FFFFFF"/>
+                          </a:solidFill>
+                          <a:latin typeface="맑은 고딕"/>
+                        </a:rPr>
+                        <a:t>6개월</a:t>
+                      </a:r>
+                    </a:p>
+                  </a:txBody>
+                  <a:tcPr marL="38100" marR="38100" marT="12700" marB="12700" anchor="ctr">
+                    <a:solidFill>
+                      <a:srgbClr val="043B72"/>
+                    </a:solidFill>
+                  </a:tcPr>
+                </a:tc>
+                <a:tc>
+                  <a:txBody>
+                    <a:bodyPr/>
+                    <a:lstStyle/>
+                    <a:p>
+                      <a:pPr algn="ctr"/>
+                      <a:r>
+                        <a:rPr sz="950" b="1">
+                          <a:solidFill>
+                            <a:srgbClr val="FFFFFF"/>
+                          </a:solidFill>
+                          <a:latin typeface="맑은 고딕"/>
+                        </a:rPr>
+                        <a:t>3개월</a:t>
+                      </a:r>
+                    </a:p>
+                  </a:txBody>
+                  <a:tcPr marL="38100" marR="38100" marT="12700" marB="12700" anchor="ctr">
+                    <a:solidFill>
+                      <a:srgbClr val="043B72"/>
+                    </a:solidFill>
+                  </a:tcPr>
+                </a:tc>
+                <a:tc>
+                  <a:txBody>
+                    <a:bodyPr/>
+                    <a:lstStyle/>
+                    <a:p>
+                      <a:pPr algn="ctr"/>
+                      <a:r>
+                        <a:rPr sz="950" b="1">
+                          <a:solidFill>
+                            <a:srgbClr val="FFFFFF"/>
+                          </a:solidFill>
+                          <a:latin typeface="맑은 고딕"/>
+                        </a:rPr>
+                        <a:t>1개월</a:t>
+                      </a:r>
+                    </a:p>
+                  </a:txBody>
+                  <a:tcPr marL="38100" marR="38100" marT="12700" marB="12700" anchor="ctr">
+                    <a:solidFill>
+                      <a:srgbClr val="043B72"/>
+                    </a:solidFill>
+                  </a:tcPr>
+                </a:tc>
+              </a:tr>
+              <a:tr h="301752">
+                <a:tc>
+                  <a:txBody>
+                    <a:bodyPr/>
+                    <a:lstStyle/>
+                    <a:p>
+                      <a:pPr algn="ctr"/>
+                      <a:r>
+                        <a:rPr sz="950" b="1">
+                          <a:solidFill>
+                            <a:srgbClr val="3A3A3A"/>
+                          </a:solidFill>
+                          <a:latin typeface="맑은 고딕"/>
+                        </a:rPr>
+                        <a:t>140</a:t>
+                      </a:r>
+                    </a:p>
+                  </a:txBody>
+                  <a:tcPr marL="38100" marR="38100" marT="12700" marB="12700" anchor="ctr">
+                    <a:solidFill>
+                      <a:srgbClr val="FFFFFF"/>
+                    </a:solidFill>
+                  </a:tcPr>
+                </a:tc>
+                <a:tc>
+                  <a:txBody>
+                    <a:bodyPr/>
+                    <a:lstStyle/>
+                    <a:p>
+                      <a:pPr algn="ctr"/>
+                      <a:r>
+                        <a:rPr sz="950" b="0">
+                          <a:solidFill>
+                            <a:srgbClr val="3A3A3A"/>
+                          </a:solidFill>
+                          <a:latin typeface="맑은 고딕"/>
+                        </a:rPr>
+                        <a:t>19%</a:t>
+                      </a:r>
+                    </a:p>
+                  </a:txBody>
+                  <a:tcPr marL="38100" marR="38100" marT="12700" marB="12700" anchor="ctr">
+                    <a:solidFill>
+                      <a:srgbClr val="FFFFFF"/>
+                    </a:solidFill>
+                  </a:tcPr>
+                </a:tc>
+                <a:tc>
+                  <a:txBody>
+                    <a:bodyPr/>
+                    <a:lstStyle/>
+                    <a:p>
+                      <a:pPr algn="ctr"/>
+                      <a:r>
+                        <a:rPr sz="950" b="0">
+                          <a:solidFill>
+                            <a:srgbClr val="3A3A3A"/>
+                          </a:solidFill>
+                          <a:latin typeface="맑은 고딕"/>
+                        </a:rPr>
+                        <a:t>18%</a:t>
+                      </a:r>
+                    </a:p>
+                  </a:txBody>
+                  <a:tcPr marL="38100" marR="38100" marT="12700" marB="12700" anchor="ctr">
+                    <a:solidFill>
+                      <a:srgbClr val="FFFFFF"/>
+                    </a:solidFill>
+                  </a:tcPr>
+                </a:tc>
+                <a:tc>
+                  <a:txBody>
+                    <a:bodyPr/>
+                    <a:lstStyle/>
+                    <a:p>
+                      <a:pPr algn="ctr"/>
+                      <a:r>
+                        <a:rPr sz="950" b="0">
+                          <a:solidFill>
+                            <a:srgbClr val="3A3A3A"/>
+                          </a:solidFill>
+                          <a:latin typeface="맑은 고딕"/>
+                        </a:rPr>
+                        <a:t>15%</a:t>
+                      </a:r>
+                    </a:p>
+                  </a:txBody>
+                  <a:tcPr marL="38100" marR="38100" marT="12700" marB="12700" anchor="ctr">
+                    <a:solidFill>
+                      <a:srgbClr val="FFFFFF"/>
+                    </a:solidFill>
+                  </a:tcPr>
+                </a:tc>
+                <a:tc>
+                  <a:txBody>
+                    <a:bodyPr/>
+                    <a:lstStyle/>
+                    <a:p>
+                      <a:pPr algn="ctr"/>
+                      <a:r>
+                        <a:rPr sz="950" b="0">
+                          <a:solidFill>
+                            <a:srgbClr val="3A3A3A"/>
+                          </a:solidFill>
+                          <a:latin typeface="맑은 고딕"/>
+                        </a:rPr>
+                        <a:t>10%</a:t>
+                      </a:r>
+                    </a:p>
+                  </a:txBody>
+                  <a:tcPr marL="38100" marR="38100" marT="12700" marB="12700" anchor="ctr">
+                    <a:solidFill>
+                      <a:srgbClr val="FFFFFF"/>
+                    </a:solidFill>
+                  </a:tcPr>
+                </a:tc>
+                <a:tc>
+                  <a:txBody>
+                    <a:bodyPr/>
+                    <a:lstStyle/>
+                    <a:p>
+                      <a:pPr algn="ctr"/>
+                      <a:r>
+                        <a:rPr sz="950" b="0">
+                          <a:solidFill>
+                            <a:srgbClr val="3A3A3A"/>
+                          </a:solidFill>
+                          <a:latin typeface="맑은 고딕"/>
+                        </a:rPr>
+                        <a:t>2%</a:t>
+                      </a:r>
+                    </a:p>
+                  </a:txBody>
+                  <a:tcPr marL="38100" marR="38100" marT="12700" marB="12700" anchor="ctr">
+                    <a:solidFill>
+                      <a:srgbClr val="FFFFFF"/>
+                    </a:solidFill>
+                  </a:tcPr>
+                </a:tc>
+              </a:tr>
+              <a:tr h="301752">
+                <a:tc>
+                  <a:txBody>
+                    <a:bodyPr/>
+                    <a:lstStyle/>
+                    <a:p>
+                      <a:pPr algn="ctr"/>
+                      <a:r>
+                        <a:rPr sz="950" b="1">
+                          <a:solidFill>
+                            <a:srgbClr val="3A3A3A"/>
+                          </a:solidFill>
+                          <a:latin typeface="맑은 고딕"/>
+                        </a:rPr>
+                        <a:t>130</a:t>
+                      </a:r>
+                    </a:p>
+                  </a:txBody>
+                  <a:tcPr marL="38100" marR="38100" marT="12700" marB="12700" anchor="ctr">
+                    <a:solidFill>
+                      <a:srgbClr val="EEF2F7"/>
+                    </a:solidFill>
+                  </a:tcPr>
+                </a:tc>
+                <a:tc>
+                  <a:txBody>
+                    <a:bodyPr/>
+                    <a:lstStyle/>
+                    <a:p>
+                      <a:pPr algn="ctr"/>
+                      <a:r>
+                        <a:rPr sz="950" b="0">
+                          <a:solidFill>
+                            <a:srgbClr val="3A3A3A"/>
+                          </a:solidFill>
+                          <a:latin typeface="맑은 고딕"/>
+                        </a:rPr>
+                        <a:t>22%</a:t>
+                      </a:r>
+                    </a:p>
+                  </a:txBody>
+                  <a:tcPr marL="38100" marR="38100" marT="12700" marB="12700" anchor="ctr">
+                    <a:solidFill>
+                      <a:srgbClr val="EEF2F7"/>
+                    </a:solidFill>
+                  </a:tcPr>
+                </a:tc>
+                <a:tc>
+                  <a:txBody>
+                    <a:bodyPr/>
+                    <a:lstStyle/>
+                    <a:p>
+                      <a:pPr algn="ctr"/>
+                      <a:r>
+                        <a:rPr sz="950" b="0">
+                          <a:solidFill>
+                            <a:srgbClr val="3A3A3A"/>
+                          </a:solidFill>
+                          <a:latin typeface="맑은 고딕"/>
+                        </a:rPr>
+                        <a:t>21%</a:t>
+                      </a:r>
+                    </a:p>
+                  </a:txBody>
+                  <a:tcPr marL="38100" marR="38100" marT="12700" marB="12700" anchor="ctr">
+                    <a:solidFill>
+                      <a:srgbClr val="EEF2F7"/>
+                    </a:solidFill>
+                  </a:tcPr>
+                </a:tc>
+                <a:tc>
+                  <a:txBody>
+                    <a:bodyPr/>
+                    <a:lstStyle/>
+                    <a:p>
+                      <a:pPr algn="ctr"/>
+                      <a:r>
+                        <a:rPr sz="950" b="0">
+                          <a:solidFill>
+                            <a:srgbClr val="3A3A3A"/>
+                          </a:solidFill>
+                          <a:latin typeface="맑은 고딕"/>
+                        </a:rPr>
+                        <a:t>20%</a:t>
+                      </a:r>
+                    </a:p>
+                  </a:txBody>
+                  <a:tcPr marL="38100" marR="38100" marT="12700" marB="12700" anchor="ctr">
+                    <a:solidFill>
+                      <a:srgbClr val="EEF2F7"/>
+                    </a:solidFill>
+                  </a:tcPr>
+                </a:tc>
+                <a:tc>
+                  <a:txBody>
+                    <a:bodyPr/>
+                    <a:lstStyle/>
+                    <a:p>
+                      <a:pPr algn="ctr"/>
+                      <a:r>
+                        <a:rPr sz="950" b="0">
+                          <a:solidFill>
+                            <a:srgbClr val="3A3A3A"/>
+                          </a:solidFill>
+                          <a:latin typeface="맑은 고딕"/>
+                        </a:rPr>
+                        <a:t>15%</a:t>
+                      </a:r>
+                    </a:p>
+                  </a:txBody>
+                  <a:tcPr marL="38100" marR="38100" marT="12700" marB="12700" anchor="ctr">
+                    <a:solidFill>
+                      <a:srgbClr val="EEF2F7"/>
+                    </a:solidFill>
+                  </a:tcPr>
+                </a:tc>
+                <a:tc>
+                  <a:txBody>
+                    <a:bodyPr/>
+                    <a:lstStyle/>
+                    <a:p>
+                      <a:pPr algn="ctr"/>
+                      <a:r>
+                        <a:rPr sz="950" b="0">
+                          <a:solidFill>
+                            <a:srgbClr val="3A3A3A"/>
+                          </a:solidFill>
+                          <a:latin typeface="맑은 고딕"/>
+                        </a:rPr>
+                        <a:t>5%</a:t>
+                      </a:r>
+                    </a:p>
+                  </a:txBody>
+                  <a:tcPr marL="38100" marR="38100" marT="12700" marB="12700" anchor="ctr">
+                    <a:solidFill>
+                      <a:srgbClr val="EEF2F7"/>
+                    </a:solidFill>
+                  </a:tcPr>
+                </a:tc>
+              </a:tr>
+              <a:tr h="301752">
+                <a:tc>
+                  <a:txBody>
+                    <a:bodyPr/>
+                    <a:lstStyle/>
+                    <a:p>
+                      <a:pPr algn="ctr"/>
+                      <a:r>
+                        <a:rPr sz="950" b="1">
+                          <a:solidFill>
+                            <a:srgbClr val="3A3A3A"/>
+                          </a:solidFill>
+                          <a:latin typeface="맑은 고딕"/>
+                        </a:rPr>
+                        <a:t>120</a:t>
+                      </a:r>
+                    </a:p>
+                  </a:txBody>
+                  <a:tcPr marL="38100" marR="38100" marT="12700" marB="12700" anchor="ctr">
+                    <a:solidFill>
+                      <a:srgbClr val="FFFFFF"/>
+                    </a:solidFill>
+                  </a:tcPr>
+                </a:tc>
+                <a:tc>
+                  <a:txBody>
+                    <a:bodyPr/>
+                    <a:lstStyle/>
+                    <a:p>
+                      <a:pPr algn="ctr"/>
+                      <a:r>
+                        <a:rPr sz="950" b="0">
+                          <a:solidFill>
+                            <a:srgbClr val="3A3A3A"/>
+                          </a:solidFill>
+                          <a:latin typeface="맑은 고딕"/>
+                        </a:rPr>
+                        <a:t>26%</a:t>
+                      </a:r>
+                    </a:p>
+                  </a:txBody>
+                  <a:tcPr marL="38100" marR="38100" marT="12700" marB="12700" anchor="ctr">
+                    <a:solidFill>
+                      <a:srgbClr val="FFFFFF"/>
+                    </a:solidFill>
+                  </a:tcPr>
+                </a:tc>
+                <a:tc>
+                  <a:txBody>
+                    <a:bodyPr/>
+                    <a:lstStyle/>
+                    <a:p>
+                      <a:pPr algn="ctr"/>
+                      <a:r>
+                        <a:rPr sz="950" b="0">
+                          <a:solidFill>
+                            <a:srgbClr val="3A3A3A"/>
+                          </a:solidFill>
+                          <a:latin typeface="맑은 고딕"/>
+                        </a:rPr>
+                        <a:t>26%</a:t>
+                      </a:r>
+                    </a:p>
+                  </a:txBody>
+                  <a:tcPr marL="38100" marR="38100" marT="12700" marB="12700" anchor="ctr">
+                    <a:solidFill>
+                      <a:srgbClr val="FFFFFF"/>
+                    </a:solidFill>
+                  </a:tcPr>
+                </a:tc>
+                <a:tc>
+                  <a:txBody>
+                    <a:bodyPr/>
+                    <a:lstStyle/>
+                    <a:p>
+                      <a:pPr algn="ctr"/>
+                      <a:r>
+                        <a:rPr sz="950" b="0">
+                          <a:solidFill>
+                            <a:srgbClr val="3A3A3A"/>
+                          </a:solidFill>
+                          <a:latin typeface="맑은 고딕"/>
+                        </a:rPr>
+                        <a:t>25%</a:t>
+                      </a:r>
+                    </a:p>
+                  </a:txBody>
+                  <a:tcPr marL="38100" marR="38100" marT="12700" marB="12700" anchor="ctr">
+                    <a:solidFill>
+                      <a:srgbClr val="FFFFFF"/>
+                    </a:solidFill>
+                  </a:tcPr>
+                </a:tc>
+                <a:tc>
+                  <a:txBody>
+                    <a:bodyPr/>
+                    <a:lstStyle/>
+                    <a:p>
+                      <a:pPr algn="ctr"/>
+                      <a:r>
+                        <a:rPr sz="950" b="0">
+                          <a:solidFill>
+                            <a:srgbClr val="3A3A3A"/>
+                          </a:solidFill>
+                          <a:latin typeface="맑은 고딕"/>
+                        </a:rPr>
+                        <a:t>22%</a:t>
+                      </a:r>
+                    </a:p>
+                  </a:txBody>
+                  <a:tcPr marL="38100" marR="38100" marT="12700" marB="12700" anchor="ctr">
+                    <a:solidFill>
+                      <a:srgbClr val="FFFFFF"/>
+                    </a:solidFill>
+                  </a:tcPr>
+                </a:tc>
+                <a:tc>
+                  <a:txBody>
+                    <a:bodyPr/>
+                    <a:lstStyle/>
+                    <a:p>
+                      <a:pPr algn="ctr"/>
+                      <a:r>
+                        <a:rPr sz="950" b="0">
+                          <a:solidFill>
+                            <a:srgbClr val="3A3A3A"/>
+                          </a:solidFill>
+                          <a:latin typeface="맑은 고딕"/>
+                        </a:rPr>
+                        <a:t>13%</a:t>
+                      </a:r>
+                    </a:p>
+                  </a:txBody>
+                  <a:tcPr marL="38100" marR="38100" marT="12700" marB="12700" anchor="ctr">
+                    <a:solidFill>
+                      <a:srgbClr val="FFFFFF"/>
+                    </a:solidFill>
+                  </a:tcPr>
+                </a:tc>
+              </a:tr>
+              <a:tr h="301752">
+                <a:tc>
+                  <a:txBody>
+                    <a:bodyPr/>
+                    <a:lstStyle/>
+                    <a:p>
+                      <a:pPr algn="ctr"/>
+                      <a:r>
+                        <a:rPr sz="950" b="1">
+                          <a:solidFill>
+                            <a:srgbClr val="3A3A3A"/>
+                          </a:solidFill>
+                          <a:latin typeface="맑은 고딕"/>
+                        </a:rPr>
+                        <a:t>110</a:t>
+                      </a:r>
+                    </a:p>
+                  </a:txBody>
+                  <a:tcPr marL="38100" marR="38100" marT="12700" marB="12700" anchor="ctr">
+                    <a:solidFill>
+                      <a:srgbClr val="EEF2F7"/>
+                    </a:solidFill>
+                  </a:tcPr>
+                </a:tc>
+                <a:tc>
+                  <a:txBody>
+                    <a:bodyPr/>
+                    <a:lstStyle/>
+                    <a:p>
+                      <a:pPr algn="ctr"/>
+                      <a:r>
+                        <a:rPr sz="950" b="0">
+                          <a:solidFill>
+                            <a:srgbClr val="3A3A3A"/>
+                          </a:solidFill>
+                          <a:latin typeface="맑은 고딕"/>
+                        </a:rPr>
+                        <a:t>31%</a:t>
+                      </a:r>
+                    </a:p>
+                  </a:txBody>
+                  <a:tcPr marL="38100" marR="38100" marT="12700" marB="12700" anchor="ctr">
+                    <a:solidFill>
+                      <a:srgbClr val="EEF2F7"/>
+                    </a:solidFill>
+                  </a:tcPr>
+                </a:tc>
+                <a:tc>
+                  <a:txBody>
+                    <a:bodyPr/>
+                    <a:lstStyle/>
+                    <a:p>
+                      <a:pPr algn="ctr"/>
+                      <a:r>
+                        <a:rPr sz="950" b="0">
+                          <a:solidFill>
+                            <a:srgbClr val="3A3A3A"/>
+                          </a:solidFill>
+                          <a:latin typeface="맑은 고딕"/>
+                        </a:rPr>
+                        <a:t>32%</a:t>
+                      </a:r>
+                    </a:p>
+                  </a:txBody>
+                  <a:tcPr marL="38100" marR="38100" marT="12700" marB="12700" anchor="ctr">
+                    <a:solidFill>
+                      <a:srgbClr val="EEF2F7"/>
+                    </a:solidFill>
+                  </a:tcPr>
+                </a:tc>
+                <a:tc>
+                  <a:txBody>
+                    <a:bodyPr/>
+                    <a:lstStyle/>
+                    <a:p>
+                      <a:pPr algn="ctr"/>
+                      <a:r>
+                        <a:rPr sz="950" b="0">
+                          <a:solidFill>
+                            <a:srgbClr val="3A3A3A"/>
+                          </a:solidFill>
+                          <a:latin typeface="맑은 고딕"/>
+                        </a:rPr>
+                        <a:t>32%</a:t>
+                      </a:r>
+                    </a:p>
+                  </a:txBody>
+                  <a:tcPr marL="38100" marR="38100" marT="12700" marB="12700" anchor="ctr">
+                    <a:solidFill>
+                      <a:srgbClr val="EEF2F7"/>
+                    </a:solidFill>
+                  </a:tcPr>
+                </a:tc>
+                <a:tc>
+                  <a:txBody>
+                    <a:bodyPr/>
+                    <a:lstStyle/>
+                    <a:p>
+                      <a:pPr algn="ctr"/>
+                      <a:r>
+                        <a:rPr sz="950" b="0">
+                          <a:solidFill>
+                            <a:srgbClr val="3A3A3A"/>
+                          </a:solidFill>
+                          <a:latin typeface="맑은 고딕"/>
+                        </a:rPr>
+                        <a:t>32%</a:t>
+                      </a:r>
+                    </a:p>
+                  </a:txBody>
+                  <a:tcPr marL="38100" marR="38100" marT="12700" marB="12700" anchor="ctr">
+                    <a:solidFill>
+                      <a:srgbClr val="EEF2F7"/>
+                    </a:solidFill>
+                  </a:tcPr>
+                </a:tc>
+                <a:tc>
+                  <a:txBody>
+                    <a:bodyPr/>
+                    <a:lstStyle/>
+                    <a:p>
+                      <a:pPr algn="ctr"/>
+                      <a:r>
+                        <a:rPr sz="950" b="0">
+                          <a:solidFill>
+                            <a:srgbClr val="3A3A3A"/>
+                          </a:solidFill>
+                          <a:latin typeface="맑은 고딕"/>
+                        </a:rPr>
+                        <a:t>26%</a:t>
+                      </a:r>
+                    </a:p>
+                  </a:txBody>
+                  <a:tcPr marL="38100" marR="38100" marT="12700" marB="12700" anchor="ctr">
+                    <a:solidFill>
+                      <a:srgbClr val="EEF2F7"/>
+                    </a:solidFill>
+                  </a:tcPr>
+                </a:tc>
+              </a:tr>
+              <a:tr h="301752">
+                <a:tc>
+                  <a:txBody>
+                    <a:bodyPr/>
+                    <a:lstStyle/>
+                    <a:p>
+                      <a:pPr algn="ctr"/>
+                      <a:r>
+                        <a:rPr sz="950" b="1">
+                          <a:solidFill>
+                            <a:srgbClr val="3A3A3A"/>
+                          </a:solidFill>
+                          <a:latin typeface="맑은 고딕"/>
+                        </a:rPr>
+                        <a:t>100</a:t>
+                      </a:r>
+                    </a:p>
+                  </a:txBody>
+                  <a:tcPr marL="38100" marR="38100" marT="12700" marB="12700" anchor="ctr">
+                    <a:solidFill>
+                      <a:srgbClr val="FFFFFF"/>
+                    </a:solidFill>
+                  </a:tcPr>
+                </a:tc>
+                <a:tc>
+                  <a:txBody>
+                    <a:bodyPr/>
+                    <a:lstStyle/>
+                    <a:p>
+                      <a:pPr algn="ctr"/>
+                      <a:r>
+                        <a:rPr sz="950" b="1">
+                          <a:solidFill>
+                            <a:srgbClr val="3A3A3A"/>
+                          </a:solidFill>
+                          <a:latin typeface="맑은 고딕"/>
+                        </a:rPr>
+                        <a:t>37%</a:t>
+                      </a:r>
+                    </a:p>
+                  </a:txBody>
+                  <a:tcPr marL="38100" marR="38100" marT="12700" marB="12700" anchor="ctr">
+                    <a:solidFill>
+                      <a:srgbClr val="FFFFFF"/>
+                    </a:solidFill>
+                  </a:tcPr>
+                </a:tc>
+                <a:tc>
+                  <a:txBody>
+                    <a:bodyPr/>
+                    <a:lstStyle/>
+                    <a:p>
+                      <a:pPr algn="ctr"/>
+                      <a:r>
+                        <a:rPr sz="950" b="1">
+                          <a:solidFill>
+                            <a:srgbClr val="3A3A3A"/>
+                          </a:solidFill>
+                          <a:latin typeface="맑은 고딕"/>
+                        </a:rPr>
+                        <a:t>39%</a:t>
+                      </a:r>
+                    </a:p>
+                  </a:txBody>
+                  <a:tcPr marL="38100" marR="38100" marT="12700" marB="12700" anchor="ctr">
+                    <a:solidFill>
+                      <a:srgbClr val="FFFFFF"/>
+                    </a:solidFill>
+                  </a:tcPr>
+                </a:tc>
+                <a:tc>
+                  <a:txBody>
+                    <a:bodyPr/>
+                    <a:lstStyle/>
+                    <a:p>
+                      <a:pPr algn="ctr"/>
+                      <a:r>
+                        <a:rPr sz="950" b="1">
+                          <a:solidFill>
+                            <a:srgbClr val="3A3A3A"/>
+                          </a:solidFill>
+                          <a:latin typeface="맑은 고딕"/>
+                        </a:rPr>
+                        <a:t>41%</a:t>
+                      </a:r>
+                    </a:p>
+                  </a:txBody>
+                  <a:tcPr marL="38100" marR="38100" marT="12700" marB="12700" anchor="ctr">
+                    <a:solidFill>
+                      <a:srgbClr val="FFFFFF"/>
+                    </a:solidFill>
+                  </a:tcPr>
+                </a:tc>
+                <a:tc>
+                  <a:txBody>
+                    <a:bodyPr/>
+                    <a:lstStyle/>
+                    <a:p>
+                      <a:pPr algn="ctr"/>
+                      <a:r>
+                        <a:rPr sz="950" b="1">
+                          <a:solidFill>
+                            <a:srgbClr val="3A3A3A"/>
+                          </a:solidFill>
+                          <a:latin typeface="맑은 고딕"/>
+                        </a:rPr>
+                        <a:t>43%</a:t>
+                      </a:r>
+                    </a:p>
+                  </a:txBody>
+                  <a:tcPr marL="38100" marR="38100" marT="12700" marB="12700" anchor="ctr">
+                    <a:solidFill>
+                      <a:srgbClr val="FFFFFF"/>
+                    </a:solidFill>
+                  </a:tcPr>
+                </a:tc>
+                <a:tc>
+                  <a:txBody>
+                    <a:bodyPr/>
+                    <a:lstStyle/>
+                    <a:p>
+                      <a:pPr algn="ctr"/>
+                      <a:r>
+                        <a:rPr sz="950" b="1">
+                          <a:solidFill>
+                            <a:srgbClr val="3A3A3A"/>
+                          </a:solidFill>
+                          <a:latin typeface="맑은 고딕"/>
+                        </a:rPr>
+                        <a:t>46%</a:t>
+                      </a:r>
+                    </a:p>
+                  </a:txBody>
+                  <a:tcPr marL="38100" marR="38100" marT="12700" marB="12700" anchor="ctr">
+                    <a:solidFill>
+                      <a:srgbClr val="FFFFFF"/>
+                    </a:solidFill>
+                  </a:tcPr>
+                </a:tc>
+              </a:tr>
+              <a:tr h="301752">
+                <a:tc>
+                  <a:txBody>
+                    <a:bodyPr/>
+                    <a:lstStyle/>
+                    <a:p>
+                      <a:pPr algn="ctr"/>
+                      <a:r>
+                        <a:rPr sz="950" b="1">
+                          <a:solidFill>
+                            <a:srgbClr val="3A3A3A"/>
+                          </a:solidFill>
+                          <a:latin typeface="맑은 고딕"/>
+                        </a:rPr>
+                        <a:t>90</a:t>
+                      </a:r>
+                    </a:p>
+                  </a:txBody>
+                  <a:tcPr marL="38100" marR="38100" marT="12700" marB="12700" anchor="ctr">
+                    <a:solidFill>
+                      <a:srgbClr val="EEF2F7"/>
+                    </a:solidFill>
+                  </a:tcPr>
+                </a:tc>
+                <a:tc>
+                  <a:txBody>
+                    <a:bodyPr/>
+                    <a:lstStyle/>
+                    <a:p>
+                      <a:pPr algn="ctr"/>
+                      <a:r>
+                        <a:rPr sz="950" b="0">
+                          <a:solidFill>
+                            <a:srgbClr val="3A3A3A"/>
+                          </a:solidFill>
+                          <a:latin typeface="맑은 고딕"/>
+                        </a:rPr>
+                        <a:t>44%</a:t>
+                      </a:r>
+                    </a:p>
+                  </a:txBody>
+                  <a:tcPr marL="38100" marR="38100" marT="12700" marB="12700" anchor="ctr">
+                    <a:solidFill>
+                      <a:srgbClr val="EEF2F7"/>
+                    </a:solidFill>
+                  </a:tcPr>
+                </a:tc>
+                <a:tc>
+                  <a:txBody>
+                    <a:bodyPr/>
+                    <a:lstStyle/>
+                    <a:p>
+                      <a:pPr algn="ctr"/>
+                      <a:r>
+                        <a:rPr sz="950" b="0">
+                          <a:solidFill>
+                            <a:srgbClr val="3A3A3A"/>
+                          </a:solidFill>
+                          <a:latin typeface="맑은 고딕"/>
+                        </a:rPr>
+                        <a:t>46%</a:t>
+                      </a:r>
+                    </a:p>
+                  </a:txBody>
+                  <a:tcPr marL="38100" marR="38100" marT="12700" marB="12700" anchor="ctr">
+                    <a:solidFill>
+                      <a:srgbClr val="EEF2F7"/>
+                    </a:solidFill>
+                  </a:tcPr>
+                </a:tc>
+                <a:tc>
+                  <a:txBody>
+                    <a:bodyPr/>
+                    <a:lstStyle/>
+                    <a:p>
+                      <a:pPr algn="ctr"/>
+                      <a:r>
+                        <a:rPr sz="950" b="0">
+                          <a:solidFill>
+                            <a:srgbClr val="3A3A3A"/>
+                          </a:solidFill>
+                          <a:latin typeface="맑은 고딕"/>
+                        </a:rPr>
+                        <a:t>50%</a:t>
+                      </a:r>
+                    </a:p>
+                  </a:txBody>
+                  <a:tcPr marL="38100" marR="38100" marT="12700" marB="12700" anchor="ctr">
+                    <a:solidFill>
+                      <a:srgbClr val="EEF2F7"/>
+                    </a:solidFill>
+                  </a:tcPr>
+                </a:tc>
+                <a:tc>
+                  <a:txBody>
+                    <a:bodyPr/>
+                    <a:lstStyle/>
+                    <a:p>
+                      <a:pPr algn="ctr"/>
+                      <a:r>
+                        <a:rPr sz="950" b="0">
+                          <a:solidFill>
+                            <a:srgbClr val="3A3A3A"/>
+                          </a:solidFill>
+                          <a:latin typeface="맑은 고딕"/>
+                        </a:rPr>
+                        <a:t>57%</a:t>
+                      </a:r>
+                    </a:p>
+                  </a:txBody>
+                  <a:tcPr marL="38100" marR="38100" marT="12700" marB="12700" anchor="ctr">
+                    <a:solidFill>
+                      <a:srgbClr val="EEF2F7"/>
+                    </a:solidFill>
+                  </a:tcPr>
+                </a:tc>
+                <a:tc>
+                  <a:txBody>
+                    <a:bodyPr/>
+                    <a:lstStyle/>
+                    <a:p>
+                      <a:pPr algn="ctr"/>
+                      <a:r>
+                        <a:rPr sz="950" b="0">
+                          <a:solidFill>
+                            <a:srgbClr val="3A3A3A"/>
+                          </a:solidFill>
+                          <a:latin typeface="맑은 고딕"/>
+                        </a:rPr>
+                        <a:t>70%</a:t>
+                      </a:r>
+                    </a:p>
+                  </a:txBody>
+                  <a:tcPr marL="38100" marR="38100" marT="12700" marB="12700" anchor="ctr">
+                    <a:solidFill>
+                      <a:srgbClr val="EEF2F7"/>
+                    </a:solidFill>
+                  </a:tcPr>
+                </a:tc>
+              </a:tr>
+              <a:tr h="301752">
+                <a:tc>
+                  <a:txBody>
+                    <a:bodyPr/>
+                    <a:lstStyle/>
+                    <a:p>
+                      <a:pPr algn="ctr"/>
+                      <a:r>
+                        <a:rPr sz="950" b="1">
+                          <a:solidFill>
+                            <a:srgbClr val="3A3A3A"/>
+                          </a:solidFill>
+                          <a:latin typeface="맑은 고딕"/>
+                        </a:rPr>
+                        <a:t>80</a:t>
+                      </a:r>
+                    </a:p>
+                  </a:txBody>
+                  <a:tcPr marL="38100" marR="38100" marT="12700" marB="12700" anchor="ctr">
+                    <a:solidFill>
+                      <a:srgbClr val="FFFFFF"/>
+                    </a:solidFill>
+                  </a:tcPr>
+                </a:tc>
+                <a:tc>
+                  <a:txBody>
+                    <a:bodyPr/>
+                    <a:lstStyle/>
+                    <a:p>
+                      <a:pPr algn="ctr"/>
+                      <a:r>
+                        <a:rPr sz="950" b="0">
+                          <a:solidFill>
+                            <a:srgbClr val="3A3A3A"/>
+                          </a:solidFill>
+                          <a:latin typeface="맑은 고딕"/>
+                        </a:rPr>
+                        <a:t>51%</a:t>
+                      </a:r>
+                    </a:p>
+                  </a:txBody>
+                  <a:tcPr marL="38100" marR="38100" marT="12700" marB="12700" anchor="ctr">
+                    <a:solidFill>
+                      <a:srgbClr val="FFFFFF"/>
+                    </a:solidFill>
+                  </a:tcPr>
+                </a:tc>
+                <a:tc>
+                  <a:txBody>
+                    <a:bodyPr/>
+                    <a:lstStyle/>
+                    <a:p>
+                      <a:pPr algn="ctr"/>
+                      <a:r>
+                        <a:rPr sz="950" b="0">
+                          <a:solidFill>
+                            <a:srgbClr val="3A3A3A"/>
+                          </a:solidFill>
+                          <a:latin typeface="맑은 고딕"/>
+                        </a:rPr>
+                        <a:t>55%</a:t>
+                      </a:r>
+                    </a:p>
+                  </a:txBody>
+                  <a:tcPr marL="38100" marR="38100" marT="12700" marB="12700" anchor="ctr">
+                    <a:solidFill>
+                      <a:srgbClr val="FFFFFF"/>
+                    </a:solidFill>
+                  </a:tcPr>
+                </a:tc>
+                <a:tc>
+                  <a:txBody>
+                    <a:bodyPr/>
+                    <a:lstStyle/>
+                    <a:p>
+                      <a:pPr algn="ctr"/>
+                      <a:r>
+                        <a:rPr sz="950" b="0">
+                          <a:solidFill>
+                            <a:srgbClr val="3A3A3A"/>
+                          </a:solidFill>
+                          <a:latin typeface="맑은 고딕"/>
+                        </a:rPr>
+                        <a:t>61%</a:t>
+                      </a:r>
+                    </a:p>
+                  </a:txBody>
+                  <a:tcPr marL="38100" marR="38100" marT="12700" marB="12700" anchor="ctr">
+                    <a:solidFill>
+                      <a:srgbClr val="FFFFFF"/>
+                    </a:solidFill>
+                  </a:tcPr>
+                </a:tc>
+                <a:tc>
+                  <a:txBody>
+                    <a:bodyPr/>
+                    <a:lstStyle/>
+                    <a:p>
+                      <a:pPr algn="ctr"/>
+                      <a:r>
+                        <a:rPr sz="950" b="0">
+                          <a:solidFill>
+                            <a:srgbClr val="3A3A3A"/>
+                          </a:solidFill>
+                          <a:latin typeface="맑은 고딕"/>
+                        </a:rPr>
+                        <a:t>72%</a:t>
+                      </a:r>
+                    </a:p>
+                  </a:txBody>
+                  <a:tcPr marL="38100" marR="38100" marT="12700" marB="12700" anchor="ctr">
+                    <a:solidFill>
+                      <a:srgbClr val="FFFFFF"/>
+                    </a:solidFill>
+                  </a:tcPr>
+                </a:tc>
+                <a:tc>
+                  <a:txBody>
+                    <a:bodyPr/>
+                    <a:lstStyle/>
+                    <a:p>
+                      <a:pPr algn="ctr"/>
+                      <a:r>
+                        <a:rPr sz="950" b="0">
+                          <a:solidFill>
+                            <a:srgbClr val="3A3A3A"/>
+                          </a:solidFill>
+                          <a:latin typeface="맑은 고딕"/>
+                        </a:rPr>
+                        <a:t>88%</a:t>
+                      </a:r>
+                    </a:p>
+                  </a:txBody>
+                  <a:tcPr marL="38100" marR="38100" marT="12700" marB="12700" anchor="ctr">
+                    <a:solidFill>
+                      <a:srgbClr val="FFFFFF"/>
+                    </a:solidFill>
+                  </a:tcPr>
+                </a:tc>
+              </a:tr>
+              <a:tr h="301752">
+                <a:tc>
+                  <a:txBody>
+                    <a:bodyPr/>
+                    <a:lstStyle/>
+                    <a:p>
+                      <a:pPr algn="ctr"/>
+                      <a:r>
+                        <a:rPr sz="950" b="1">
+                          <a:solidFill>
+                            <a:srgbClr val="3A3A3A"/>
+                          </a:solidFill>
+                          <a:latin typeface="맑은 고딕"/>
+                        </a:rPr>
+                        <a:t>70</a:t>
+                      </a:r>
+                    </a:p>
+                  </a:txBody>
+                  <a:tcPr marL="38100" marR="38100" marT="12700" marB="12700" anchor="ctr">
+                    <a:solidFill>
+                      <a:srgbClr val="EEF2F7"/>
+                    </a:solidFill>
+                  </a:tcPr>
+                </a:tc>
+                <a:tc>
+                  <a:txBody>
+                    <a:bodyPr/>
+                    <a:lstStyle/>
+                    <a:p>
+                      <a:pPr algn="ctr"/>
+                      <a:r>
+                        <a:rPr sz="950" b="0">
+                          <a:solidFill>
+                            <a:srgbClr val="3A3A3A"/>
+                          </a:solidFill>
+                          <a:latin typeface="맑은 고딕"/>
+                        </a:rPr>
+                        <a:t>60%</a:t>
+                      </a:r>
+                    </a:p>
+                  </a:txBody>
+                  <a:tcPr marL="38100" marR="38100" marT="12700" marB="12700" anchor="ctr">
+                    <a:solidFill>
+                      <a:srgbClr val="EEF2F7"/>
+                    </a:solidFill>
+                  </a:tcPr>
+                </a:tc>
+                <a:tc>
+                  <a:txBody>
+                    <a:bodyPr/>
+                    <a:lstStyle/>
+                    <a:p>
+                      <a:pPr algn="ctr"/>
+                      <a:r>
+                        <a:rPr sz="950" b="0">
+                          <a:solidFill>
+                            <a:srgbClr val="3A3A3A"/>
+                          </a:solidFill>
+                          <a:latin typeface="맑은 고딕"/>
+                        </a:rPr>
+                        <a:t>65%</a:t>
+                      </a:r>
+                    </a:p>
+                  </a:txBody>
+                  <a:tcPr marL="38100" marR="38100" marT="12700" marB="12700" anchor="ctr">
+                    <a:solidFill>
+                      <a:srgbClr val="EEF2F7"/>
+                    </a:solidFill>
+                  </a:tcPr>
+                </a:tc>
+                <a:tc>
+                  <a:txBody>
+                    <a:bodyPr/>
+                    <a:lstStyle/>
+                    <a:p>
+                      <a:pPr algn="ctr"/>
+                      <a:r>
+                        <a:rPr sz="950" b="0">
+                          <a:solidFill>
+                            <a:srgbClr val="3A3A3A"/>
+                          </a:solidFill>
+                          <a:latin typeface="맑은 고딕"/>
+                        </a:rPr>
+                        <a:t>72%</a:t>
+                      </a:r>
+                    </a:p>
+                  </a:txBody>
+                  <a:tcPr marL="38100" marR="38100" marT="12700" marB="12700" anchor="ctr">
+                    <a:solidFill>
+                      <a:srgbClr val="EEF2F7"/>
+                    </a:solidFill>
+                  </a:tcPr>
+                </a:tc>
+                <a:tc>
+                  <a:txBody>
+                    <a:bodyPr/>
+                    <a:lstStyle/>
+                    <a:p>
+                      <a:pPr algn="ctr"/>
+                      <a:r>
+                        <a:rPr sz="950" b="0">
+                          <a:solidFill>
+                            <a:srgbClr val="3A3A3A"/>
+                          </a:solidFill>
+                          <a:latin typeface="맑은 고딕"/>
+                        </a:rPr>
+                        <a:t>84%</a:t>
+                      </a:r>
+                    </a:p>
+                  </a:txBody>
+                  <a:tcPr marL="38100" marR="38100" marT="12700" marB="12700" anchor="ctr">
+                    <a:solidFill>
+                      <a:srgbClr val="EEF2F7"/>
+                    </a:solidFill>
+                  </a:tcPr>
+                </a:tc>
+                <a:tc>
+                  <a:txBody>
+                    <a:bodyPr/>
+                    <a:lstStyle/>
+                    <a:p>
+                      <a:pPr algn="ctr"/>
+                      <a:r>
+                        <a:rPr sz="950" b="0">
+                          <a:solidFill>
+                            <a:srgbClr val="3A3A3A"/>
+                          </a:solidFill>
+                          <a:latin typeface="맑은 고딕"/>
+                        </a:rPr>
+                        <a:t>97%</a:t>
+                      </a:r>
+                    </a:p>
+                  </a:txBody>
+                  <a:tcPr marL="38100" marR="38100" marT="12700" marB="12700" anchor="ctr">
+                    <a:solidFill>
+                      <a:srgbClr val="EEF2F7"/>
+                    </a:solidFill>
+                  </a:tcPr>
+                </a:tc>
+              </a:tr>
+              <a:tr h="301752">
+                <a:tc>
+                  <a:txBody>
+                    <a:bodyPr/>
+                    <a:lstStyle/>
+                    <a:p>
+                      <a:pPr algn="ctr"/>
+                      <a:r>
+                        <a:rPr sz="950" b="1">
+                          <a:solidFill>
+                            <a:srgbClr val="3A3A3A"/>
+                          </a:solidFill>
+                          <a:latin typeface="맑은 고딕"/>
+                        </a:rPr>
+                        <a:t>60</a:t>
+                      </a:r>
+                    </a:p>
+                  </a:txBody>
+                  <a:tcPr marL="38100" marR="38100" marT="12700" marB="12700" anchor="ctr">
+                    <a:solidFill>
+                      <a:srgbClr val="FFFFFF"/>
+                    </a:solidFill>
+                  </a:tcPr>
+                </a:tc>
+                <a:tc>
+                  <a:txBody>
+                    <a:bodyPr/>
+                    <a:lstStyle/>
+                    <a:p>
+                      <a:pPr algn="ctr"/>
+                      <a:r>
+                        <a:rPr sz="950" b="0">
+                          <a:solidFill>
+                            <a:srgbClr val="3A3A3A"/>
+                          </a:solidFill>
+                          <a:latin typeface="맑은 고딕"/>
+                        </a:rPr>
+                        <a:t>69%</a:t>
+                      </a:r>
+                    </a:p>
+                  </a:txBody>
+                  <a:tcPr marL="38100" marR="38100" marT="12700" marB="12700" anchor="ctr">
+                    <a:solidFill>
+                      <a:srgbClr val="FFFFFF"/>
+                    </a:solidFill>
+                  </a:tcPr>
+                </a:tc>
+                <a:tc>
+                  <a:txBody>
+                    <a:bodyPr/>
+                    <a:lstStyle/>
+                    <a:p>
+                      <a:pPr algn="ctr"/>
+                      <a:r>
+                        <a:rPr sz="950" b="0">
+                          <a:solidFill>
+                            <a:srgbClr val="3A3A3A"/>
+                          </a:solidFill>
+                          <a:latin typeface="맑은 고딕"/>
+                        </a:rPr>
+                        <a:t>75%</a:t>
+                      </a:r>
+                    </a:p>
+                  </a:txBody>
+                  <a:tcPr marL="38100" marR="38100" marT="12700" marB="12700" anchor="ctr">
+                    <a:solidFill>
+                      <a:srgbClr val="FFFFFF"/>
+                    </a:solidFill>
+                  </a:tcPr>
+                </a:tc>
+                <a:tc>
+                  <a:txBody>
+                    <a:bodyPr/>
+                    <a:lstStyle/>
+                    <a:p>
+                      <a:pPr algn="ctr"/>
+                      <a:r>
+                        <a:rPr sz="950" b="0">
+                          <a:solidFill>
+                            <a:srgbClr val="3A3A3A"/>
+                          </a:solidFill>
+                          <a:latin typeface="맑은 고딕"/>
+                        </a:rPr>
+                        <a:t>83%</a:t>
+                      </a:r>
+                    </a:p>
+                  </a:txBody>
+                  <a:tcPr marL="38100" marR="38100" marT="12700" marB="12700" anchor="ctr">
+                    <a:solidFill>
+                      <a:srgbClr val="FFFFFF"/>
+                    </a:solidFill>
+                  </a:tcPr>
+                </a:tc>
+                <a:tc>
+                  <a:txBody>
+                    <a:bodyPr/>
+                    <a:lstStyle/>
+                    <a:p>
+                      <a:pPr algn="ctr"/>
+                      <a:r>
+                        <a:rPr sz="950" b="0">
+                          <a:solidFill>
+                            <a:srgbClr val="3A3A3A"/>
+                          </a:solidFill>
+                          <a:latin typeface="맑은 고딕"/>
+                        </a:rPr>
+                        <a:t>93%</a:t>
+                      </a:r>
+                    </a:p>
+                  </a:txBody>
+                  <a:tcPr marL="38100" marR="38100" marT="12700" marB="12700" anchor="ctr">
+                    <a:solidFill>
+                      <a:srgbClr val="FFFFFF"/>
+                    </a:solidFill>
+                  </a:tcPr>
+                </a:tc>
+                <a:tc>
+                  <a:txBody>
+                    <a:bodyPr/>
+                    <a:lstStyle/>
+                    <a:p>
+                      <a:pPr algn="ctr"/>
+                      <a:r>
+                        <a:rPr sz="950" b="0">
+                          <a:solidFill>
+                            <a:srgbClr val="3A3A3A"/>
+                          </a:solidFill>
+                          <a:latin typeface="맑은 고딕"/>
+                        </a:rPr>
+                        <a:t>100%</a:t>
+                      </a:r>
+                    </a:p>
+                  </a:txBody>
+                  <a:tcPr marL="38100" marR="38100" marT="12700" marB="12700" anchor="ctr">
+                    <a:solidFill>
+                      <a:srgbClr val="FFFFFF"/>
+                    </a:solidFill>
+                  </a:tcPr>
+                </a:tc>
+              </a:tr>
+            </a:tbl>
+          </a:graphicData>
+        </a:graphic>
+      </p:graphicFrame>
+      <p:sp>
+        <p:nvSpPr>
+          <p:cNvPr id="11" name="TextBox 10"/>
+          <p:cNvSpPr txBox="1"/>
+          <p:nvPr/>
+        </p:nvSpPr>
+        <p:spPr>
+          <a:xfrm>
+            <a:off x="548640" y="5349240"/>
+            <a:ext cx="8778240" cy="640080"/>
+          </a:xfrm>
+          <a:prstGeom prst="rect">
+            <a:avLst/>
+          </a:prstGeom>
+          <a:noFill/>
+        </p:spPr>
+        <p:txBody>
+          <a:bodyPr wrap="square" anchor="t" lIns="25400" rIns="25400" tIns="12700" bIns="12700">
+            <a:spAutoFit/>
+          </a:bodyPr>
+          <a:lstStyle/>
+          <a:p>
+            <a:pPr algn="l">
+              <a:lnSpc>
+                <a:spcPct val="125000"/>
+              </a:lnSpc>
+            </a:pPr>
+            <a:r>
+              <a:rPr sz="950" b="0">
+                <a:solidFill>
+                  <a:srgbClr val="84888B"/>
+                </a:solidFill>
+                <a:latin typeface="맑은 고딕"/>
+              </a:rPr>
+              <a:t>· 변동성 60%·금리 3%·배당 2% 가정, 지수 10포인트 단위(60~140). 성장형은 지수 60 이하 도달 시 '낙아웃'(하방 완충 소멸) 후 주식형과 유사하게 운용.</a:t>
+            </a:r>
+          </a:p>
+          <a:p>
+            <a:pPr algn="l">
+              <a:lnSpc>
+                <a:spcPct val="125000"/>
+              </a:lnSpc>
+            </a:pPr>
+            <a:r>
+              <a:rPr sz="950" b="0">
+                <a:solidFill>
+                  <a:srgbClr val="84888B"/>
+                </a:solidFill>
+                <a:latin typeface="맑은 고딕"/>
+              </a:rPr>
+              <a:t>· 표의 편입비는 모형상 목표치이며, 실제 운용에서는 자체 드리프트·거래비용을 감안해 소폭 다를 수 있습니다.</a:t>
+            </a:r>
+          </a:p>
+        </p:txBody>
+      </p:sp>
+      <p:sp>
+        <p:nvSpPr>
+          <p:cNvPr id="12" name="TextBox 11"/>
+          <p:cNvSpPr txBox="1"/>
+          <p:nvPr/>
+        </p:nvSpPr>
+        <p:spPr>
+          <a:xfrm>
+            <a:off x="457200" y="6510528"/>
+            <a:ext cx="7863840" cy="292608"/>
+          </a:xfrm>
+          <a:prstGeom prst="rect">
+            <a:avLst/>
+          </a:prstGeom>
+          <a:noFill/>
+        </p:spPr>
+        <p:txBody>
+          <a:bodyPr wrap="square" anchor="t" lIns="25400" rIns="25400" tIns="12700" bIns="12700">
+            <a:spAutoFit/>
+          </a:bodyPr>
+          <a:lstStyle/>
+          <a:p>
+            <a:pPr algn="l">
+              <a:lnSpc>
+                <a:spcPct val="100000"/>
+              </a:lnSpc>
+            </a:pPr>
+            <a:r>
+              <a:rPr sz="700" b="0">
+                <a:solidFill>
+                  <a:srgbClr val="84888B"/>
+                </a:solidFill>
+                <a:latin typeface="맑은 고딕"/>
+              </a:rPr>
+              <a:t>※ 상기 자료는 이해를 돕기 위한 예시이며 실제 투자내용을 의미하지 않습니다. 시뮬레이션은 가정에 따른 것으로 실제와 다를 수 있습니다.</a:t>
             </a:r>
           </a:p>
         </p:txBody>

--- a/제안서/변동성하베스트펀드_AITop2_v1_20260715.pptx
+++ b/제안서/변동성하베스트펀드_AITop2_v1_20260715.pptx
@@ -19,6 +19,7 @@
     <p:sldId id="263" r:id="rId10"/>
     <p:sldId id="264" r:id="rId11"/>
     <p:sldId id="1040" r:id="rId20"/>
+    <p:sldId id="1041" r:id="rId21"/>
     <p:sldId id="265" r:id="rId12"/>
     <p:sldId id="266" r:id="rId13"/>
     <p:sldId id="267" r:id="rId14"/>
@@ -10015,7 +10016,7 @@
 </file>
 
 <file path=ppt/slides/slide10.xml><?xml version="1.0" encoding="utf-8"?>
-<p:sld xmlns:a="http://schemas.openxmlformats.org/drawingml/2006/main" xmlns:r="http://schemas.openxmlformats.org/officeDocument/2006/relationships" xmlns:p="http://schemas.openxmlformats.org/presentationml/2006/main">
+<p:sld xmlns:a="http://schemas.openxmlformats.org/drawingml/2006/main" xmlns:p="http://schemas.openxmlformats.org/presentationml/2006/main" xmlns:r="http://schemas.openxmlformats.org/officeDocument/2006/relationships">
   <p:cSld>
     <p:spTree>
       <p:nvGrpSpPr>
@@ -10023,14 +10024,7 @@
         <p:cNvGrpSpPr/>
         <p:nvPr/>
       </p:nvGrpSpPr>
-      <p:grpSpPr>
-        <a:xfrm>
-          <a:off x="0" y="0"/>
-          <a:ext cx="0" cy="0"/>
-          <a:chOff x="0" y="0"/>
-          <a:chExt cx="0" cy="0"/>
-        </a:xfrm>
-      </p:grpSpPr>
+      <p:grpSpPr/>
       <p:sp>
         <p:nvSpPr>
           <p:cNvPr id="2" name="Rectangle 1"/>
@@ -10040,7 +10034,7 @@
         <p:spPr>
           <a:xfrm>
             <a:off x="0" y="0"/>
-            <a:ext cx="9875520" cy="6858000"/>
+            <a:ext cx="9875838" cy="6858000"/>
           </a:xfrm>
           <a:prstGeom prst="rect">
             <a:avLst/>
@@ -10072,7 +10066,6 @@
           <a:lstStyle/>
           <a:p>
             <a:pPr algn="ctr"/>
-            <a:endParaRPr/>
           </a:p>
         </p:txBody>
       </p:sp>
@@ -10117,7 +10110,6 @@
           <a:lstStyle/>
           <a:p>
             <a:pPr algn="ctr"/>
-            <a:endParaRPr/>
           </a:p>
         </p:txBody>
       </p:sp>
@@ -10129,8 +10121,8 @@
         </p:nvSpPr>
         <p:spPr>
           <a:xfrm>
-            <a:off x="585216" y="342021"/>
-            <a:ext cx="8229600" cy="210314"/>
+            <a:off x="685800" y="457200"/>
+            <a:ext cx="8229600" cy="320040"/>
           </a:xfrm>
           <a:prstGeom prst="rect">
             <a:avLst/>
@@ -10138,7 +10130,7 @@
           <a:noFill/>
         </p:spPr>
         <p:txBody>
-          <a:bodyPr wrap="square" lIns="25400" tIns="12700" rIns="25400" bIns="12700" anchor="t">
+          <a:bodyPr wrap="square" anchor="t" lIns="25400" rIns="25400" tIns="12700" bIns="12700">
             <a:spAutoFit/>
           </a:bodyPr>
           <a:lstStyle/>
@@ -10149,31 +10141,13 @@
               </a:lnSpc>
             </a:pPr>
             <a:r>
-              <a:rPr sz="1200" b="1" dirty="0">
+              <a:rPr sz="1200" b="1">
                 <a:solidFill>
                   <a:srgbClr val="F58220"/>
                 </a:solidFill>
                 <a:latin typeface="맑은 고딕"/>
               </a:rPr>
-              <a:t>0</a:t>
-            </a:r>
-            <a:r>
-              <a:rPr lang="en-US" altLang="ko-KR" sz="1200" b="1" dirty="0">
-                <a:solidFill>
-                  <a:srgbClr val="F58220"/>
-                </a:solidFill>
-                <a:latin typeface="맑은 고딕"/>
-              </a:rPr>
-              <a:t>8</a:t>
-            </a:r>
-            <a:r>
-              <a:rPr sz="1200" b="1" dirty="0">
-                <a:solidFill>
-                  <a:srgbClr val="F58220"/>
-                </a:solidFill>
-                <a:latin typeface="맑은 고딕"/>
-              </a:rPr>
-              <a:t>  PAYOFF</a:t>
+              <a:t>08  HOW</a:t>
             </a:r>
           </a:p>
         </p:txBody>
@@ -10186,8 +10160,8 @@
         </p:nvSpPr>
         <p:spPr>
           <a:xfrm>
-            <a:off x="640080" y="585328"/>
-            <a:ext cx="8686800" cy="379591"/>
+            <a:off x="685800" y="731520"/>
+            <a:ext cx="8686800" cy="502920"/>
           </a:xfrm>
           <a:prstGeom prst="rect">
             <a:avLst/>
@@ -10195,7 +10169,7 @@
           <a:noFill/>
         </p:spPr>
         <p:txBody>
-          <a:bodyPr wrap="square" lIns="25400" tIns="12700" rIns="25400" bIns="12700" anchor="t">
+          <a:bodyPr wrap="square" anchor="t" lIns="25400" rIns="25400" tIns="12700" bIns="12700">
             <a:spAutoFit/>
           </a:bodyPr>
           <a:lstStyle/>
@@ -10206,130 +10180,13 @@
               </a:lnSpc>
             </a:pPr>
             <a:r>
-              <a:rPr sz="2300" b="1" dirty="0" err="1">
+              <a:rPr sz="2300" b="1">
                 <a:solidFill>
                   <a:srgbClr val="043B72"/>
                 </a:solidFill>
                 <a:latin typeface="맑은 고딕"/>
               </a:rPr>
-              <a:t>수익</a:t>
-            </a:r>
-            <a:r>
-              <a:rPr sz="2300" b="1" dirty="0">
-                <a:solidFill>
-                  <a:srgbClr val="043B72"/>
-                </a:solidFill>
-                <a:latin typeface="맑은 고딕"/>
-              </a:rPr>
-              <a:t> 구조</a:t>
-            </a:r>
-            <a:r>
-              <a:rPr lang="en-US" altLang="ko-KR" sz="2300" b="1" dirty="0">
-                <a:solidFill>
-                  <a:srgbClr val="043B72"/>
-                </a:solidFill>
-                <a:latin typeface="맑은 고딕"/>
-              </a:rPr>
-              <a:t>1</a:t>
-            </a:r>
-            <a:r>
-              <a:rPr sz="2300" b="1" dirty="0">
-                <a:solidFill>
-                  <a:srgbClr val="043B72"/>
-                </a:solidFill>
-                <a:latin typeface="맑은 고딕"/>
-              </a:rPr>
-              <a:t> — </a:t>
-            </a:r>
-            <a:r>
-              <a:rPr sz="2300" b="1" dirty="0" err="1">
-                <a:solidFill>
-                  <a:srgbClr val="043B72"/>
-                </a:solidFill>
-                <a:latin typeface="맑은 고딕"/>
-              </a:rPr>
-              <a:t>성장변동성펀드</a:t>
-            </a:r>
-            <a:r>
-              <a:rPr sz="2300" b="1" dirty="0">
-                <a:solidFill>
-                  <a:srgbClr val="043B72"/>
-                </a:solidFill>
-                <a:latin typeface="맑은 고딕"/>
-              </a:rPr>
-              <a:t> (</a:t>
-            </a:r>
-            <a:r>
-              <a:rPr sz="2300" b="1" dirty="0" err="1">
-                <a:solidFill>
-                  <a:srgbClr val="043B72"/>
-                </a:solidFill>
-                <a:latin typeface="맑은 고딕"/>
-              </a:rPr>
-              <a:t>변동성</a:t>
-            </a:r>
-            <a:r>
-              <a:rPr sz="2300" b="1" dirty="0">
-                <a:solidFill>
-                  <a:srgbClr val="043B72"/>
-                </a:solidFill>
-                <a:latin typeface="맑은 고딕"/>
-              </a:rPr>
-              <a:t> </a:t>
-            </a:r>
-            <a:r>
-              <a:rPr sz="2300" b="1" dirty="0" err="1">
-                <a:solidFill>
-                  <a:srgbClr val="043B72"/>
-                </a:solidFill>
-                <a:latin typeface="맑은 고딕"/>
-              </a:rPr>
-              <a:t>매매</a:t>
-            </a:r>
-            <a:r>
-              <a:rPr sz="2300" b="1" dirty="0">
-                <a:solidFill>
-                  <a:srgbClr val="043B72"/>
-                </a:solidFill>
-                <a:latin typeface="맑은 고딕"/>
-              </a:rPr>
-              <a:t> + </a:t>
-            </a:r>
-            <a:r>
-              <a:rPr sz="2300" b="1" dirty="0" err="1">
-                <a:solidFill>
-                  <a:srgbClr val="043B72"/>
-                </a:solidFill>
-                <a:latin typeface="맑은 고딕"/>
-              </a:rPr>
-              <a:t>상승</a:t>
-            </a:r>
-            <a:r>
-              <a:rPr sz="2300" b="1" dirty="0">
-                <a:solidFill>
-                  <a:srgbClr val="043B72"/>
-                </a:solidFill>
-                <a:latin typeface="맑은 고딕"/>
-              </a:rPr>
-              <a:t> </a:t>
-            </a:r>
-            <a:r>
-              <a:rPr sz="2300" b="1" dirty="0" err="1">
-                <a:solidFill>
-                  <a:srgbClr val="043B72"/>
-                </a:solidFill>
-                <a:latin typeface="맑은 고딕"/>
-              </a:rPr>
-              <a:t>참여</a:t>
-            </a:r>
-            <a:r>
-              <a:rPr sz="2300" b="1" dirty="0">
-                <a:solidFill>
-                  <a:srgbClr val="043B72"/>
-                </a:solidFill>
-                <a:latin typeface="맑은 고딕"/>
-              </a:rPr>
-              <a:t>)</a:t>
+              <a:t>지수대별 실제 편입비 — 만기까지 남은 시간 활용</a:t>
             </a:r>
           </a:p>
         </p:txBody>
@@ -10342,7 +10199,7 @@
         </p:nvSpPr>
         <p:spPr>
           <a:xfrm>
-            <a:off x="685800" y="960120"/>
+            <a:off x="685800" y="1298448"/>
             <a:ext cx="8686800" cy="365760"/>
           </a:xfrm>
           <a:prstGeom prst="rect">
@@ -10351,7 +10208,7 @@
           <a:noFill/>
         </p:spPr>
         <p:txBody>
-          <a:bodyPr wrap="square" lIns="25400" tIns="12700" rIns="25400" bIns="12700" anchor="t">
+          <a:bodyPr wrap="square" anchor="t" lIns="25400" rIns="25400" tIns="12700" bIns="12700">
             <a:spAutoFit/>
           </a:bodyPr>
           <a:lstStyle/>
@@ -10368,11 +10225,1489 @@
                 </a:solidFill>
                 <a:latin typeface="맑은 고딕"/>
               </a:rPr>
-              <a:t>운용 중 -40% 미도달 시 상승에 참여, -40% 도달 시 하방에 노출됩니다. 시뮬레이션 결과(각 점=1회).</a:t>
+              <a:t>리밸런싱일 지수=100 기준 · 편입비는 잔존만기가 짧아질수록 가팔라짐 · 최대 편입비 100%</a:t>
             </a:r>
           </a:p>
         </p:txBody>
       </p:sp>
+      <p:sp>
+        <p:nvSpPr>
+          <p:cNvPr id="7" name="TextBox 6"/>
+          <p:cNvSpPr txBox="1"/>
+          <p:nvPr/>
+        </p:nvSpPr>
+        <p:spPr>
+          <a:xfrm>
+            <a:off x="548640" y="1783080"/>
+            <a:ext cx="4297680" cy="320040"/>
+          </a:xfrm>
+          <a:prstGeom prst="rect">
+            <a:avLst/>
+          </a:prstGeom>
+          <a:noFill/>
+        </p:spPr>
+        <p:txBody>
+          <a:bodyPr wrap="square" anchor="t" lIns="25400" rIns="25400" tIns="12700" bIns="12700">
+            <a:spAutoFit/>
+          </a:bodyPr>
+          <a:lstStyle/>
+          <a:p>
+            <a:pPr algn="l">
+              <a:lnSpc>
+                <a:spcPct val="100000"/>
+              </a:lnSpc>
+            </a:pPr>
+            <a:r>
+              <a:rPr sz="1400" b="1">
+                <a:solidFill>
+                  <a:srgbClr val="F58220"/>
+                </a:solidFill>
+                <a:latin typeface="맑은 고딕"/>
+              </a:rPr>
+              <a:t>성장변동성펀드</a:t>
+            </a:r>
+            <a:r>
+              <a:rPr sz="1050" b="0">
+                <a:solidFill>
+                  <a:srgbClr val="84888B"/>
+                </a:solidFill>
+                <a:latin typeface="맑은 고딕"/>
+              </a:rPr>
+              <a:t>  (변동성 매매 + 상승 참여)</a:t>
+            </a:r>
+          </a:p>
+        </p:txBody>
+      </p:sp>
+      <p:graphicFrame>
+        <p:nvGraphicFramePr>
+          <p:cNvPr id="8" name="Table 7"/>
+          <p:cNvGraphicFramePr>
+            <a:graphicFrameLocks noGrp="1"/>
+          </p:cNvGraphicFramePr>
+          <p:nvPr/>
+        </p:nvGraphicFramePr>
+        <p:xfrm>
+          <a:off x="548640" y="2121408"/>
+          <a:ext cx="4343400" cy="3017520"/>
+        </p:xfrm>
+        <a:graphic>
+          <a:graphicData uri="http://schemas.openxmlformats.org/drawingml/2006/table">
+            <a:tbl>
+              <a:tblPr firstRow="1" bandRow="1">
+                <a:tableStyleId>{5C22544A-7EE6-4342-B048-85BDC9FD1C3A}</a:tableStyleId>
+              </a:tblPr>
+              <a:tblGrid>
+                <a:gridCol w="868680"/>
+                <a:gridCol w="694944"/>
+                <a:gridCol w="694944"/>
+                <a:gridCol w="694944"/>
+                <a:gridCol w="694944"/>
+                <a:gridCol w="694944"/>
+              </a:tblGrid>
+              <a:tr h="301752">
+                <a:tc>
+                  <a:txBody>
+                    <a:bodyPr/>
+                    <a:lstStyle/>
+                    <a:p>
+                      <a:pPr algn="ctr"/>
+                      <a:r>
+                        <a:rPr sz="950" b="1">
+                          <a:solidFill>
+                            <a:srgbClr val="FFFFFF"/>
+                          </a:solidFill>
+                          <a:latin typeface="맑은 고딕"/>
+                        </a:rPr>
+                        <a:t>지수 \ 잔존</a:t>
+                      </a:r>
+                    </a:p>
+                  </a:txBody>
+                  <a:tcPr marL="38100" marR="38100" marT="12700" marB="12700" anchor="ctr">
+                    <a:solidFill>
+                      <a:srgbClr val="F58220"/>
+                    </a:solidFill>
+                  </a:tcPr>
+                </a:tc>
+                <a:tc>
+                  <a:txBody>
+                    <a:bodyPr/>
+                    <a:lstStyle/>
+                    <a:p>
+                      <a:pPr algn="ctr"/>
+                      <a:r>
+                        <a:rPr sz="950" b="1">
+                          <a:solidFill>
+                            <a:srgbClr val="FFFFFF"/>
+                          </a:solidFill>
+                          <a:latin typeface="맑은 고딕"/>
+                        </a:rPr>
+                        <a:t>12개월</a:t>
+                      </a:r>
+                    </a:p>
+                  </a:txBody>
+                  <a:tcPr marL="38100" marR="38100" marT="12700" marB="12700" anchor="ctr">
+                    <a:solidFill>
+                      <a:srgbClr val="F58220"/>
+                    </a:solidFill>
+                  </a:tcPr>
+                </a:tc>
+                <a:tc>
+                  <a:txBody>
+                    <a:bodyPr/>
+                    <a:lstStyle/>
+                    <a:p>
+                      <a:pPr algn="ctr"/>
+                      <a:r>
+                        <a:rPr sz="950" b="1">
+                          <a:solidFill>
+                            <a:srgbClr val="FFFFFF"/>
+                          </a:solidFill>
+                          <a:latin typeface="맑은 고딕"/>
+                        </a:rPr>
+                        <a:t>9개월</a:t>
+                      </a:r>
+                    </a:p>
+                  </a:txBody>
+                  <a:tcPr marL="38100" marR="38100" marT="12700" marB="12700" anchor="ctr">
+                    <a:solidFill>
+                      <a:srgbClr val="F58220"/>
+                    </a:solidFill>
+                  </a:tcPr>
+                </a:tc>
+                <a:tc>
+                  <a:txBody>
+                    <a:bodyPr/>
+                    <a:lstStyle/>
+                    <a:p>
+                      <a:pPr algn="ctr"/>
+                      <a:r>
+                        <a:rPr sz="950" b="1">
+                          <a:solidFill>
+                            <a:srgbClr val="FFFFFF"/>
+                          </a:solidFill>
+                          <a:latin typeface="맑은 고딕"/>
+                        </a:rPr>
+                        <a:t>6개월</a:t>
+                      </a:r>
+                    </a:p>
+                  </a:txBody>
+                  <a:tcPr marL="38100" marR="38100" marT="12700" marB="12700" anchor="ctr">
+                    <a:solidFill>
+                      <a:srgbClr val="F58220"/>
+                    </a:solidFill>
+                  </a:tcPr>
+                </a:tc>
+                <a:tc>
+                  <a:txBody>
+                    <a:bodyPr/>
+                    <a:lstStyle/>
+                    <a:p>
+                      <a:pPr algn="ctr"/>
+                      <a:r>
+                        <a:rPr sz="950" b="1">
+                          <a:solidFill>
+                            <a:srgbClr val="FFFFFF"/>
+                          </a:solidFill>
+                          <a:latin typeface="맑은 고딕"/>
+                        </a:rPr>
+                        <a:t>3개월</a:t>
+                      </a:r>
+                    </a:p>
+                  </a:txBody>
+                  <a:tcPr marL="38100" marR="38100" marT="12700" marB="12700" anchor="ctr">
+                    <a:solidFill>
+                      <a:srgbClr val="F58220"/>
+                    </a:solidFill>
+                  </a:tcPr>
+                </a:tc>
+                <a:tc>
+                  <a:txBody>
+                    <a:bodyPr/>
+                    <a:lstStyle/>
+                    <a:p>
+                      <a:pPr algn="ctr"/>
+                      <a:r>
+                        <a:rPr sz="950" b="1">
+                          <a:solidFill>
+                            <a:srgbClr val="FFFFFF"/>
+                          </a:solidFill>
+                          <a:latin typeface="맑은 고딕"/>
+                        </a:rPr>
+                        <a:t>1개월</a:t>
+                      </a:r>
+                    </a:p>
+                  </a:txBody>
+                  <a:tcPr marL="38100" marR="38100" marT="12700" marB="12700" anchor="ctr">
+                    <a:solidFill>
+                      <a:srgbClr val="F58220"/>
+                    </a:solidFill>
+                  </a:tcPr>
+                </a:tc>
+              </a:tr>
+              <a:tr h="301752">
+                <a:tc>
+                  <a:txBody>
+                    <a:bodyPr/>
+                    <a:lstStyle/>
+                    <a:p>
+                      <a:pPr algn="ctr"/>
+                      <a:r>
+                        <a:rPr sz="950" b="1">
+                          <a:solidFill>
+                            <a:srgbClr val="3A3A3A"/>
+                          </a:solidFill>
+                          <a:latin typeface="맑은 고딕"/>
+                        </a:rPr>
+                        <a:t>140</a:t>
+                      </a:r>
+                    </a:p>
+                  </a:txBody>
+                  <a:tcPr marL="38100" marR="38100" marT="12700" marB="12700" anchor="ctr">
+                    <a:solidFill>
+                      <a:srgbClr val="FFFFFF"/>
+                    </a:solidFill>
+                  </a:tcPr>
+                </a:tc>
+                <a:tc>
+                  <a:txBody>
+                    <a:bodyPr/>
+                    <a:lstStyle/>
+                    <a:p>
+                      <a:pPr algn="ctr"/>
+                      <a:r>
+                        <a:rPr sz="950" b="0">
+                          <a:solidFill>
+                            <a:srgbClr val="3A3A3A"/>
+                          </a:solidFill>
+                          <a:latin typeface="맑은 고딕"/>
+                        </a:rPr>
+                        <a:t>36%</a:t>
+                      </a:r>
+                    </a:p>
+                  </a:txBody>
+                  <a:tcPr marL="38100" marR="38100" marT="12700" marB="12700" anchor="ctr">
+                    <a:solidFill>
+                      <a:srgbClr val="FFFFFF"/>
+                    </a:solidFill>
+                  </a:tcPr>
+                </a:tc>
+                <a:tc>
+                  <a:txBody>
+                    <a:bodyPr/>
+                    <a:lstStyle/>
+                    <a:p>
+                      <a:pPr algn="ctr"/>
+                      <a:r>
+                        <a:rPr sz="950" b="0">
+                          <a:solidFill>
+                            <a:srgbClr val="3A3A3A"/>
+                          </a:solidFill>
+                          <a:latin typeface="맑은 고딕"/>
+                        </a:rPr>
+                        <a:t>36%</a:t>
+                      </a:r>
+                    </a:p>
+                  </a:txBody>
+                  <a:tcPr marL="38100" marR="38100" marT="12700" marB="12700" anchor="ctr">
+                    <a:solidFill>
+                      <a:srgbClr val="FFFFFF"/>
+                    </a:solidFill>
+                  </a:tcPr>
+                </a:tc>
+                <a:tc>
+                  <a:txBody>
+                    <a:bodyPr/>
+                    <a:lstStyle/>
+                    <a:p>
+                      <a:pPr algn="ctr"/>
+                      <a:r>
+                        <a:rPr sz="950" b="0">
+                          <a:solidFill>
+                            <a:srgbClr val="3A3A3A"/>
+                          </a:solidFill>
+                          <a:latin typeface="맑은 고딕"/>
+                        </a:rPr>
+                        <a:t>36%</a:t>
+                      </a:r>
+                    </a:p>
+                  </a:txBody>
+                  <a:tcPr marL="38100" marR="38100" marT="12700" marB="12700" anchor="ctr">
+                    <a:solidFill>
+                      <a:srgbClr val="FFFFFF"/>
+                    </a:solidFill>
+                  </a:tcPr>
+                </a:tc>
+                <a:tc>
+                  <a:txBody>
+                    <a:bodyPr/>
+                    <a:lstStyle/>
+                    <a:p>
+                      <a:pPr algn="ctr"/>
+                      <a:r>
+                        <a:rPr sz="950" b="0">
+                          <a:solidFill>
+                            <a:srgbClr val="3A3A3A"/>
+                          </a:solidFill>
+                          <a:latin typeface="맑은 고딕"/>
+                        </a:rPr>
+                        <a:t>38%</a:t>
+                      </a:r>
+                    </a:p>
+                  </a:txBody>
+                  <a:tcPr marL="38100" marR="38100" marT="12700" marB="12700" anchor="ctr">
+                    <a:solidFill>
+                      <a:srgbClr val="FFFFFF"/>
+                    </a:solidFill>
+                  </a:tcPr>
+                </a:tc>
+                <a:tc>
+                  <a:txBody>
+                    <a:bodyPr/>
+                    <a:lstStyle/>
+                    <a:p>
+                      <a:pPr algn="ctr"/>
+                      <a:r>
+                        <a:rPr sz="950" b="0">
+                          <a:solidFill>
+                            <a:srgbClr val="3A3A3A"/>
+                          </a:solidFill>
+                          <a:latin typeface="맑은 고딕"/>
+                        </a:rPr>
+                        <a:t>55%</a:t>
+                      </a:r>
+                    </a:p>
+                  </a:txBody>
+                  <a:tcPr marL="38100" marR="38100" marT="12700" marB="12700" anchor="ctr">
+                    <a:solidFill>
+                      <a:srgbClr val="FFFFFF"/>
+                    </a:solidFill>
+                  </a:tcPr>
+                </a:tc>
+              </a:tr>
+              <a:tr h="301752">
+                <a:tc>
+                  <a:txBody>
+                    <a:bodyPr/>
+                    <a:lstStyle/>
+                    <a:p>
+                      <a:pPr algn="ctr"/>
+                      <a:r>
+                        <a:rPr sz="950" b="1">
+                          <a:solidFill>
+                            <a:srgbClr val="3A3A3A"/>
+                          </a:solidFill>
+                          <a:latin typeface="맑은 고딕"/>
+                        </a:rPr>
+                        <a:t>130</a:t>
+                      </a:r>
+                    </a:p>
+                  </a:txBody>
+                  <a:tcPr marL="38100" marR="38100" marT="12700" marB="12700" anchor="ctr">
+                    <a:solidFill>
+                      <a:srgbClr val="EEF2F7"/>
+                    </a:solidFill>
+                  </a:tcPr>
+                </a:tc>
+                <a:tc>
+                  <a:txBody>
+                    <a:bodyPr/>
+                    <a:lstStyle/>
+                    <a:p>
+                      <a:pPr algn="ctr"/>
+                      <a:r>
+                        <a:rPr sz="950" b="0">
+                          <a:solidFill>
+                            <a:srgbClr val="3A3A3A"/>
+                          </a:solidFill>
+                          <a:latin typeface="맑은 고딕"/>
+                        </a:rPr>
+                        <a:t>41%</a:t>
+                      </a:r>
+                    </a:p>
+                  </a:txBody>
+                  <a:tcPr marL="38100" marR="38100" marT="12700" marB="12700" anchor="ctr">
+                    <a:solidFill>
+                      <a:srgbClr val="EEF2F7"/>
+                    </a:solidFill>
+                  </a:tcPr>
+                </a:tc>
+                <a:tc>
+                  <a:txBody>
+                    <a:bodyPr/>
+                    <a:lstStyle/>
+                    <a:p>
+                      <a:pPr algn="ctr"/>
+                      <a:r>
+                        <a:rPr sz="950" b="0">
+                          <a:solidFill>
+                            <a:srgbClr val="3A3A3A"/>
+                          </a:solidFill>
+                          <a:latin typeface="맑은 고딕"/>
+                        </a:rPr>
+                        <a:t>41%</a:t>
+                      </a:r>
+                    </a:p>
+                  </a:txBody>
+                  <a:tcPr marL="38100" marR="38100" marT="12700" marB="12700" anchor="ctr">
+                    <a:solidFill>
+                      <a:srgbClr val="EEF2F7"/>
+                    </a:solidFill>
+                  </a:tcPr>
+                </a:tc>
+                <a:tc>
+                  <a:txBody>
+                    <a:bodyPr/>
+                    <a:lstStyle/>
+                    <a:p>
+                      <a:pPr algn="ctr"/>
+                      <a:r>
+                        <a:rPr sz="950" b="0">
+                          <a:solidFill>
+                            <a:srgbClr val="3A3A3A"/>
+                          </a:solidFill>
+                          <a:latin typeface="맑은 고딕"/>
+                        </a:rPr>
+                        <a:t>41%</a:t>
+                      </a:r>
+                    </a:p>
+                  </a:txBody>
+                  <a:tcPr marL="38100" marR="38100" marT="12700" marB="12700" anchor="ctr">
+                    <a:solidFill>
+                      <a:srgbClr val="EEF2F7"/>
+                    </a:solidFill>
+                  </a:tcPr>
+                </a:tc>
+                <a:tc>
+                  <a:txBody>
+                    <a:bodyPr/>
+                    <a:lstStyle/>
+                    <a:p>
+                      <a:pPr algn="ctr"/>
+                      <a:r>
+                        <a:rPr sz="950" b="0">
+                          <a:solidFill>
+                            <a:srgbClr val="3A3A3A"/>
+                          </a:solidFill>
+                          <a:latin typeface="맑은 고딕"/>
+                        </a:rPr>
+                        <a:t>43%</a:t>
+                      </a:r>
+                    </a:p>
+                  </a:txBody>
+                  <a:tcPr marL="38100" marR="38100" marT="12700" marB="12700" anchor="ctr">
+                    <a:solidFill>
+                      <a:srgbClr val="EEF2F7"/>
+                    </a:solidFill>
+                  </a:tcPr>
+                </a:tc>
+                <a:tc>
+                  <a:txBody>
+                    <a:bodyPr/>
+                    <a:lstStyle/>
+                    <a:p>
+                      <a:pPr algn="ctr"/>
+                      <a:r>
+                        <a:rPr sz="950" b="0">
+                          <a:solidFill>
+                            <a:srgbClr val="3A3A3A"/>
+                          </a:solidFill>
+                          <a:latin typeface="맑은 고딕"/>
+                        </a:rPr>
+                        <a:t>62%</a:t>
+                      </a:r>
+                    </a:p>
+                  </a:txBody>
+                  <a:tcPr marL="38100" marR="38100" marT="12700" marB="12700" anchor="ctr">
+                    <a:solidFill>
+                      <a:srgbClr val="EEF2F7"/>
+                    </a:solidFill>
+                  </a:tcPr>
+                </a:tc>
+              </a:tr>
+              <a:tr h="301752">
+                <a:tc>
+                  <a:txBody>
+                    <a:bodyPr/>
+                    <a:lstStyle/>
+                    <a:p>
+                      <a:pPr algn="ctr"/>
+                      <a:r>
+                        <a:rPr sz="950" b="1">
+                          <a:solidFill>
+                            <a:srgbClr val="3A3A3A"/>
+                          </a:solidFill>
+                          <a:latin typeface="맑은 고딕"/>
+                        </a:rPr>
+                        <a:t>120</a:t>
+                      </a:r>
+                    </a:p>
+                  </a:txBody>
+                  <a:tcPr marL="38100" marR="38100" marT="12700" marB="12700" anchor="ctr">
+                    <a:solidFill>
+                      <a:srgbClr val="FFFFFF"/>
+                    </a:solidFill>
+                  </a:tcPr>
+                </a:tc>
+                <a:tc>
+                  <a:txBody>
+                    <a:bodyPr/>
+                    <a:lstStyle/>
+                    <a:p>
+                      <a:pPr algn="ctr"/>
+                      <a:r>
+                        <a:rPr sz="950" b="0">
+                          <a:solidFill>
+                            <a:srgbClr val="3A3A3A"/>
+                          </a:solidFill>
+                          <a:latin typeface="맑은 고딕"/>
+                        </a:rPr>
+                        <a:t>46%</a:t>
+                      </a:r>
+                    </a:p>
+                  </a:txBody>
+                  <a:tcPr marL="38100" marR="38100" marT="12700" marB="12700" anchor="ctr">
+                    <a:solidFill>
+                      <a:srgbClr val="FFFFFF"/>
+                    </a:solidFill>
+                  </a:tcPr>
+                </a:tc>
+                <a:tc>
+                  <a:txBody>
+                    <a:bodyPr/>
+                    <a:lstStyle/>
+                    <a:p>
+                      <a:pPr algn="ctr"/>
+                      <a:r>
+                        <a:rPr sz="950" b="0">
+                          <a:solidFill>
+                            <a:srgbClr val="3A3A3A"/>
+                          </a:solidFill>
+                          <a:latin typeface="맑은 고딕"/>
+                        </a:rPr>
+                        <a:t>48%</a:t>
+                      </a:r>
+                    </a:p>
+                  </a:txBody>
+                  <a:tcPr marL="38100" marR="38100" marT="12700" marB="12700" anchor="ctr">
+                    <a:solidFill>
+                      <a:srgbClr val="FFFFFF"/>
+                    </a:solidFill>
+                  </a:tcPr>
+                </a:tc>
+                <a:tc>
+                  <a:txBody>
+                    <a:bodyPr/>
+                    <a:lstStyle/>
+                    <a:p>
+                      <a:pPr algn="ctr"/>
+                      <a:r>
+                        <a:rPr sz="950" b="0">
+                          <a:solidFill>
+                            <a:srgbClr val="3A3A3A"/>
+                          </a:solidFill>
+                          <a:latin typeface="맑은 고딕"/>
+                        </a:rPr>
+                        <a:t>48%</a:t>
+                      </a:r>
+                    </a:p>
+                  </a:txBody>
+                  <a:tcPr marL="38100" marR="38100" marT="12700" marB="12700" anchor="ctr">
+                    <a:solidFill>
+                      <a:srgbClr val="FFFFFF"/>
+                    </a:solidFill>
+                  </a:tcPr>
+                </a:tc>
+                <a:tc>
+                  <a:txBody>
+                    <a:bodyPr/>
+                    <a:lstStyle/>
+                    <a:p>
+                      <a:pPr algn="ctr"/>
+                      <a:r>
+                        <a:rPr sz="950" b="0">
+                          <a:solidFill>
+                            <a:srgbClr val="3A3A3A"/>
+                          </a:solidFill>
+                          <a:latin typeface="맑은 고딕"/>
+                        </a:rPr>
+                        <a:t>47%</a:t>
+                      </a:r>
+                    </a:p>
+                  </a:txBody>
+                  <a:tcPr marL="38100" marR="38100" marT="12700" marB="12700" anchor="ctr">
+                    <a:solidFill>
+                      <a:srgbClr val="FFFFFF"/>
+                    </a:solidFill>
+                  </a:tcPr>
+                </a:tc>
+                <a:tc>
+                  <a:txBody>
+                    <a:bodyPr/>
+                    <a:lstStyle/>
+                    <a:p>
+                      <a:pPr algn="ctr"/>
+                      <a:r>
+                        <a:rPr sz="950" b="0">
+                          <a:solidFill>
+                            <a:srgbClr val="3A3A3A"/>
+                          </a:solidFill>
+                          <a:latin typeface="맑은 고딕"/>
+                        </a:rPr>
+                        <a:t>61%</a:t>
+                      </a:r>
+                    </a:p>
+                  </a:txBody>
+                  <a:tcPr marL="38100" marR="38100" marT="12700" marB="12700" anchor="ctr">
+                    <a:solidFill>
+                      <a:srgbClr val="FFFFFF"/>
+                    </a:solidFill>
+                  </a:tcPr>
+                </a:tc>
+              </a:tr>
+              <a:tr h="301752">
+                <a:tc>
+                  <a:txBody>
+                    <a:bodyPr/>
+                    <a:lstStyle/>
+                    <a:p>
+                      <a:pPr algn="ctr"/>
+                      <a:r>
+                        <a:rPr sz="950" b="1">
+                          <a:solidFill>
+                            <a:srgbClr val="3A3A3A"/>
+                          </a:solidFill>
+                          <a:latin typeface="맑은 고딕"/>
+                        </a:rPr>
+                        <a:t>110</a:t>
+                      </a:r>
+                    </a:p>
+                  </a:txBody>
+                  <a:tcPr marL="38100" marR="38100" marT="12700" marB="12700" anchor="ctr">
+                    <a:solidFill>
+                      <a:srgbClr val="EEF2F7"/>
+                    </a:solidFill>
+                  </a:tcPr>
+                </a:tc>
+                <a:tc>
+                  <a:txBody>
+                    <a:bodyPr/>
+                    <a:lstStyle/>
+                    <a:p>
+                      <a:pPr algn="ctr"/>
+                      <a:r>
+                        <a:rPr sz="950" b="0">
+                          <a:solidFill>
+                            <a:srgbClr val="3A3A3A"/>
+                          </a:solidFill>
+                          <a:latin typeface="맑은 고딕"/>
+                        </a:rPr>
+                        <a:t>52%</a:t>
+                      </a:r>
+                    </a:p>
+                  </a:txBody>
+                  <a:tcPr marL="38100" marR="38100" marT="12700" marB="12700" anchor="ctr">
+                    <a:solidFill>
+                      <a:srgbClr val="EEF2F7"/>
+                    </a:solidFill>
+                  </a:tcPr>
+                </a:tc>
+                <a:tc>
+                  <a:txBody>
+                    <a:bodyPr/>
+                    <a:lstStyle/>
+                    <a:p>
+                      <a:pPr algn="ctr"/>
+                      <a:r>
+                        <a:rPr sz="950" b="0">
+                          <a:solidFill>
+                            <a:srgbClr val="3A3A3A"/>
+                          </a:solidFill>
+                          <a:latin typeface="맑은 고딕"/>
+                        </a:rPr>
+                        <a:t>55%</a:t>
+                      </a:r>
+                    </a:p>
+                  </a:txBody>
+                  <a:tcPr marL="38100" marR="38100" marT="12700" marB="12700" anchor="ctr">
+                    <a:solidFill>
+                      <a:srgbClr val="EEF2F7"/>
+                    </a:solidFill>
+                  </a:tcPr>
+                </a:tc>
+                <a:tc>
+                  <a:txBody>
+                    <a:bodyPr/>
+                    <a:lstStyle/>
+                    <a:p>
+                      <a:pPr algn="ctr"/>
+                      <a:r>
+                        <a:rPr sz="950" b="0">
+                          <a:solidFill>
+                            <a:srgbClr val="3A3A3A"/>
+                          </a:solidFill>
+                          <a:latin typeface="맑은 고딕"/>
+                        </a:rPr>
+                        <a:t>57%</a:t>
+                      </a:r>
+                    </a:p>
+                  </a:txBody>
+                  <a:tcPr marL="38100" marR="38100" marT="12700" marB="12700" anchor="ctr">
+                    <a:solidFill>
+                      <a:srgbClr val="EEF2F7"/>
+                    </a:solidFill>
+                  </a:tcPr>
+                </a:tc>
+                <a:tc>
+                  <a:txBody>
+                    <a:bodyPr/>
+                    <a:lstStyle/>
+                    <a:p>
+                      <a:pPr algn="ctr"/>
+                      <a:r>
+                        <a:rPr sz="950" b="0">
+                          <a:solidFill>
+                            <a:srgbClr val="3A3A3A"/>
+                          </a:solidFill>
+                          <a:latin typeface="맑은 고딕"/>
+                        </a:rPr>
+                        <a:t>53%</a:t>
+                      </a:r>
+                    </a:p>
+                  </a:txBody>
+                  <a:tcPr marL="38100" marR="38100" marT="12700" marB="12700" anchor="ctr">
+                    <a:solidFill>
+                      <a:srgbClr val="EEF2F7"/>
+                    </a:solidFill>
+                  </a:tcPr>
+                </a:tc>
+                <a:tc>
+                  <a:txBody>
+                    <a:bodyPr/>
+                    <a:lstStyle/>
+                    <a:p>
+                      <a:pPr algn="ctr"/>
+                      <a:r>
+                        <a:rPr sz="950" b="0">
+                          <a:solidFill>
+                            <a:srgbClr val="3A3A3A"/>
+                          </a:solidFill>
+                          <a:latin typeface="맑은 고딕"/>
+                        </a:rPr>
+                        <a:t>50%</a:t>
+                      </a:r>
+                    </a:p>
+                  </a:txBody>
+                  <a:tcPr marL="38100" marR="38100" marT="12700" marB="12700" anchor="ctr">
+                    <a:solidFill>
+                      <a:srgbClr val="EEF2F7"/>
+                    </a:solidFill>
+                  </a:tcPr>
+                </a:tc>
+              </a:tr>
+              <a:tr h="301752">
+                <a:tc>
+                  <a:txBody>
+                    <a:bodyPr/>
+                    <a:lstStyle/>
+                    <a:p>
+                      <a:pPr algn="ctr"/>
+                      <a:r>
+                        <a:rPr sz="950" b="1">
+                          <a:solidFill>
+                            <a:srgbClr val="3A3A3A"/>
+                          </a:solidFill>
+                          <a:latin typeface="맑은 고딕"/>
+                        </a:rPr>
+                        <a:t>100</a:t>
+                      </a:r>
+                    </a:p>
+                  </a:txBody>
+                  <a:tcPr marL="38100" marR="38100" marT="12700" marB="12700" anchor="ctr">
+                    <a:solidFill>
+                      <a:srgbClr val="FFFFFF"/>
+                    </a:solidFill>
+                  </a:tcPr>
+                </a:tc>
+                <a:tc>
+                  <a:txBody>
+                    <a:bodyPr/>
+                    <a:lstStyle/>
+                    <a:p>
+                      <a:pPr algn="ctr"/>
+                      <a:r>
+                        <a:rPr sz="950" b="1">
+                          <a:solidFill>
+                            <a:srgbClr val="3A3A3A"/>
+                          </a:solidFill>
+                          <a:latin typeface="맑은 고딕"/>
+                        </a:rPr>
+                        <a:t>59%</a:t>
+                      </a:r>
+                    </a:p>
+                  </a:txBody>
+                  <a:tcPr marL="38100" marR="38100" marT="12700" marB="12700" anchor="ctr">
+                    <a:solidFill>
+                      <a:srgbClr val="FFFFFF"/>
+                    </a:solidFill>
+                  </a:tcPr>
+                </a:tc>
+                <a:tc>
+                  <a:txBody>
+                    <a:bodyPr/>
+                    <a:lstStyle/>
+                    <a:p>
+                      <a:pPr algn="ctr"/>
+                      <a:r>
+                        <a:rPr sz="950" b="1">
+                          <a:solidFill>
+                            <a:srgbClr val="3A3A3A"/>
+                          </a:solidFill>
+                          <a:latin typeface="맑은 고딕"/>
+                        </a:rPr>
+                        <a:t>64%</a:t>
+                      </a:r>
+                    </a:p>
+                  </a:txBody>
+                  <a:tcPr marL="38100" marR="38100" marT="12700" marB="12700" anchor="ctr">
+                    <a:solidFill>
+                      <a:srgbClr val="FFFFFF"/>
+                    </a:solidFill>
+                  </a:tcPr>
+                </a:tc>
+                <a:tc>
+                  <a:txBody>
+                    <a:bodyPr/>
+                    <a:lstStyle/>
+                    <a:p>
+                      <a:pPr algn="ctr"/>
+                      <a:r>
+                        <a:rPr sz="950" b="1">
+                          <a:solidFill>
+                            <a:srgbClr val="3A3A3A"/>
+                          </a:solidFill>
+                          <a:latin typeface="맑은 고딕"/>
+                        </a:rPr>
+                        <a:t>67%</a:t>
+                      </a:r>
+                    </a:p>
+                  </a:txBody>
+                  <a:tcPr marL="38100" marR="38100" marT="12700" marB="12700" anchor="ctr">
+                    <a:solidFill>
+                      <a:srgbClr val="FFFFFF"/>
+                    </a:solidFill>
+                  </a:tcPr>
+                </a:tc>
+                <a:tc>
+                  <a:txBody>
+                    <a:bodyPr/>
+                    <a:lstStyle/>
+                    <a:p>
+                      <a:pPr algn="ctr"/>
+                      <a:r>
+                        <a:rPr sz="950" b="1">
+                          <a:solidFill>
+                            <a:srgbClr val="3A3A3A"/>
+                          </a:solidFill>
+                          <a:latin typeface="맑은 고딕"/>
+                        </a:rPr>
+                        <a:t>61%</a:t>
+                      </a:r>
+                    </a:p>
+                  </a:txBody>
+                  <a:tcPr marL="38100" marR="38100" marT="12700" marB="12700" anchor="ctr">
+                    <a:solidFill>
+                      <a:srgbClr val="FFFFFF"/>
+                    </a:solidFill>
+                  </a:tcPr>
+                </a:tc>
+                <a:tc>
+                  <a:txBody>
+                    <a:bodyPr/>
+                    <a:lstStyle/>
+                    <a:p>
+                      <a:pPr algn="ctr"/>
+                      <a:r>
+                        <a:rPr sz="950" b="1">
+                          <a:solidFill>
+                            <a:srgbClr val="3A3A3A"/>
+                          </a:solidFill>
+                          <a:latin typeface="맑은 고딕"/>
+                        </a:rPr>
+                        <a:t>34%</a:t>
+                      </a:r>
+                    </a:p>
+                  </a:txBody>
+                  <a:tcPr marL="38100" marR="38100" marT="12700" marB="12700" anchor="ctr">
+                    <a:solidFill>
+                      <a:srgbClr val="FFFFFF"/>
+                    </a:solidFill>
+                  </a:tcPr>
+                </a:tc>
+              </a:tr>
+              <a:tr h="301752">
+                <a:tc>
+                  <a:txBody>
+                    <a:bodyPr/>
+                    <a:lstStyle/>
+                    <a:p>
+                      <a:pPr algn="ctr"/>
+                      <a:r>
+                        <a:rPr sz="950" b="1">
+                          <a:solidFill>
+                            <a:srgbClr val="3A3A3A"/>
+                          </a:solidFill>
+                          <a:latin typeface="맑은 고딕"/>
+                        </a:rPr>
+                        <a:t>90</a:t>
+                      </a:r>
+                    </a:p>
+                  </a:txBody>
+                  <a:tcPr marL="38100" marR="38100" marT="12700" marB="12700" anchor="ctr">
+                    <a:solidFill>
+                      <a:srgbClr val="EEF2F7"/>
+                    </a:solidFill>
+                  </a:tcPr>
+                </a:tc>
+                <a:tc>
+                  <a:txBody>
+                    <a:bodyPr/>
+                    <a:lstStyle/>
+                    <a:p>
+                      <a:pPr algn="ctr"/>
+                      <a:r>
+                        <a:rPr sz="950" b="0">
+                          <a:solidFill>
+                            <a:srgbClr val="3A3A3A"/>
+                          </a:solidFill>
+                          <a:latin typeface="맑은 고딕"/>
+                        </a:rPr>
+                        <a:t>67%</a:t>
+                      </a:r>
+                    </a:p>
+                  </a:txBody>
+                  <a:tcPr marL="38100" marR="38100" marT="12700" marB="12700" anchor="ctr">
+                    <a:solidFill>
+                      <a:srgbClr val="EEF2F7"/>
+                    </a:solidFill>
+                  </a:tcPr>
+                </a:tc>
+                <a:tc>
+                  <a:txBody>
+                    <a:bodyPr/>
+                    <a:lstStyle/>
+                    <a:p>
+                      <a:pPr algn="ctr"/>
+                      <a:r>
+                        <a:rPr sz="950" b="0">
+                          <a:solidFill>
+                            <a:srgbClr val="3A3A3A"/>
+                          </a:solidFill>
+                          <a:latin typeface="맑은 고딕"/>
+                        </a:rPr>
+                        <a:t>73%</a:t>
+                      </a:r>
+                    </a:p>
+                  </a:txBody>
+                  <a:tcPr marL="38100" marR="38100" marT="12700" marB="12700" anchor="ctr">
+                    <a:solidFill>
+                      <a:srgbClr val="EEF2F7"/>
+                    </a:solidFill>
+                  </a:tcPr>
+                </a:tc>
+                <a:tc>
+                  <a:txBody>
+                    <a:bodyPr/>
+                    <a:lstStyle/>
+                    <a:p>
+                      <a:pPr algn="ctr"/>
+                      <a:r>
+                        <a:rPr sz="950" b="0">
+                          <a:solidFill>
+                            <a:srgbClr val="3A3A3A"/>
+                          </a:solidFill>
+                          <a:latin typeface="맑은 고딕"/>
+                        </a:rPr>
+                        <a:t>79%</a:t>
+                      </a:r>
+                    </a:p>
+                  </a:txBody>
+                  <a:tcPr marL="38100" marR="38100" marT="12700" marB="12700" anchor="ctr">
+                    <a:solidFill>
+                      <a:srgbClr val="EEF2F7"/>
+                    </a:solidFill>
+                  </a:tcPr>
+                </a:tc>
+                <a:tc>
+                  <a:txBody>
+                    <a:bodyPr/>
+                    <a:lstStyle/>
+                    <a:p>
+                      <a:pPr algn="ctr"/>
+                      <a:r>
+                        <a:rPr sz="950" b="0">
+                          <a:solidFill>
+                            <a:srgbClr val="3A3A3A"/>
+                          </a:solidFill>
+                          <a:latin typeface="맑은 고딕"/>
+                        </a:rPr>
+                        <a:t>77%</a:t>
+                      </a:r>
+                    </a:p>
+                  </a:txBody>
+                  <a:tcPr marL="38100" marR="38100" marT="12700" marB="12700" anchor="ctr">
+                    <a:solidFill>
+                      <a:srgbClr val="EEF2F7"/>
+                    </a:solidFill>
+                  </a:tcPr>
+                </a:tc>
+                <a:tc>
+                  <a:txBody>
+                    <a:bodyPr/>
+                    <a:lstStyle/>
+                    <a:p>
+                      <a:pPr algn="ctr"/>
+                      <a:r>
+                        <a:rPr sz="950" b="0">
+                          <a:solidFill>
+                            <a:srgbClr val="3A3A3A"/>
+                          </a:solidFill>
+                          <a:latin typeface="맑은 고딕"/>
+                        </a:rPr>
+                        <a:t>29%</a:t>
+                      </a:r>
+                    </a:p>
+                  </a:txBody>
+                  <a:tcPr marL="38100" marR="38100" marT="12700" marB="12700" anchor="ctr">
+                    <a:solidFill>
+                      <a:srgbClr val="EEF2F7"/>
+                    </a:solidFill>
+                  </a:tcPr>
+                </a:tc>
+              </a:tr>
+              <a:tr h="301752">
+                <a:tc>
+                  <a:txBody>
+                    <a:bodyPr/>
+                    <a:lstStyle/>
+                    <a:p>
+                      <a:pPr algn="ctr"/>
+                      <a:r>
+                        <a:rPr sz="950" b="1">
+                          <a:solidFill>
+                            <a:srgbClr val="3A3A3A"/>
+                          </a:solidFill>
+                          <a:latin typeface="맑은 고딕"/>
+                        </a:rPr>
+                        <a:t>80</a:t>
+                      </a:r>
+                    </a:p>
+                  </a:txBody>
+                  <a:tcPr marL="38100" marR="38100" marT="12700" marB="12700" anchor="ctr">
+                    <a:solidFill>
+                      <a:srgbClr val="FFFFFF"/>
+                    </a:solidFill>
+                  </a:tcPr>
+                </a:tc>
+                <a:tc>
+                  <a:txBody>
+                    <a:bodyPr/>
+                    <a:lstStyle/>
+                    <a:p>
+                      <a:pPr algn="ctr"/>
+                      <a:r>
+                        <a:rPr sz="950" b="0">
+                          <a:solidFill>
+                            <a:srgbClr val="3A3A3A"/>
+                          </a:solidFill>
+                          <a:latin typeface="맑은 고딕"/>
+                        </a:rPr>
+                        <a:t>75%</a:t>
+                      </a:r>
+                    </a:p>
+                  </a:txBody>
+                  <a:tcPr marL="38100" marR="38100" marT="12700" marB="12700" anchor="ctr">
+                    <a:solidFill>
+                      <a:srgbClr val="FFFFFF"/>
+                    </a:solidFill>
+                  </a:tcPr>
+                </a:tc>
+                <a:tc>
+                  <a:txBody>
+                    <a:bodyPr/>
+                    <a:lstStyle/>
+                    <a:p>
+                      <a:pPr algn="ctr"/>
+                      <a:r>
+                        <a:rPr sz="950" b="0">
+                          <a:solidFill>
+                            <a:srgbClr val="3A3A3A"/>
+                          </a:solidFill>
+                          <a:latin typeface="맑은 고딕"/>
+                        </a:rPr>
+                        <a:t>83%</a:t>
+                      </a:r>
+                    </a:p>
+                  </a:txBody>
+                  <a:tcPr marL="38100" marR="38100" marT="12700" marB="12700" anchor="ctr">
+                    <a:solidFill>
+                      <a:srgbClr val="FFFFFF"/>
+                    </a:solidFill>
+                  </a:tcPr>
+                </a:tc>
+                <a:tc>
+                  <a:txBody>
+                    <a:bodyPr/>
+                    <a:lstStyle/>
+                    <a:p>
+                      <a:pPr algn="ctr"/>
+                      <a:r>
+                        <a:rPr sz="950" b="0">
+                          <a:solidFill>
+                            <a:srgbClr val="3A3A3A"/>
+                          </a:solidFill>
+                          <a:latin typeface="맑은 고딕"/>
+                        </a:rPr>
+                        <a:t>93%</a:t>
+                      </a:r>
+                    </a:p>
+                  </a:txBody>
+                  <a:tcPr marL="38100" marR="38100" marT="12700" marB="12700" anchor="ctr">
+                    <a:solidFill>
+                      <a:srgbClr val="FFFFFF"/>
+                    </a:solidFill>
+                  </a:tcPr>
+                </a:tc>
+                <a:tc>
+                  <a:txBody>
+                    <a:bodyPr/>
+                    <a:lstStyle/>
+                    <a:p>
+                      <a:pPr algn="ctr"/>
+                      <a:r>
+                        <a:rPr sz="950" b="0">
+                          <a:solidFill>
+                            <a:srgbClr val="3A3A3A"/>
+                          </a:solidFill>
+                          <a:latin typeface="맑은 고딕"/>
+                        </a:rPr>
+                        <a:t>100%</a:t>
+                      </a:r>
+                    </a:p>
+                  </a:txBody>
+                  <a:tcPr marL="38100" marR="38100" marT="12700" marB="12700" anchor="ctr">
+                    <a:solidFill>
+                      <a:srgbClr val="FFFFFF"/>
+                    </a:solidFill>
+                  </a:tcPr>
+                </a:tc>
+                <a:tc>
+                  <a:txBody>
+                    <a:bodyPr/>
+                    <a:lstStyle/>
+                    <a:p>
+                      <a:pPr algn="ctr"/>
+                      <a:r>
+                        <a:rPr sz="950" b="0">
+                          <a:solidFill>
+                            <a:srgbClr val="3A3A3A"/>
+                          </a:solidFill>
+                          <a:latin typeface="맑은 고딕"/>
+                        </a:rPr>
+                        <a:t>67%</a:t>
+                      </a:r>
+                    </a:p>
+                  </a:txBody>
+                  <a:tcPr marL="38100" marR="38100" marT="12700" marB="12700" anchor="ctr">
+                    <a:solidFill>
+                      <a:srgbClr val="FFFFFF"/>
+                    </a:solidFill>
+                  </a:tcPr>
+                </a:tc>
+              </a:tr>
+              <a:tr h="301752">
+                <a:tc>
+                  <a:txBody>
+                    <a:bodyPr/>
+                    <a:lstStyle/>
+                    <a:p>
+                      <a:pPr algn="ctr"/>
+                      <a:r>
+                        <a:rPr sz="950" b="1">
+                          <a:solidFill>
+                            <a:srgbClr val="3A3A3A"/>
+                          </a:solidFill>
+                          <a:latin typeface="맑은 고딕"/>
+                        </a:rPr>
+                        <a:t>70</a:t>
+                      </a:r>
+                    </a:p>
+                  </a:txBody>
+                  <a:tcPr marL="38100" marR="38100" marT="12700" marB="12700" anchor="ctr">
+                    <a:solidFill>
+                      <a:srgbClr val="EEF2F7"/>
+                    </a:solidFill>
+                  </a:tcPr>
+                </a:tc>
+                <a:tc>
+                  <a:txBody>
+                    <a:bodyPr/>
+                    <a:lstStyle/>
+                    <a:p>
+                      <a:pPr algn="ctr"/>
+                      <a:r>
+                        <a:rPr sz="950" b="0">
+                          <a:solidFill>
+                            <a:srgbClr val="3A3A3A"/>
+                          </a:solidFill>
+                          <a:latin typeface="맑은 고딕"/>
+                        </a:rPr>
+                        <a:t>84%</a:t>
+                      </a:r>
+                    </a:p>
+                  </a:txBody>
+                  <a:tcPr marL="38100" marR="38100" marT="12700" marB="12700" anchor="ctr">
+                    <a:solidFill>
+                      <a:srgbClr val="EEF2F7"/>
+                    </a:solidFill>
+                  </a:tcPr>
+                </a:tc>
+                <a:tc>
+                  <a:txBody>
+                    <a:bodyPr/>
+                    <a:lstStyle/>
+                    <a:p>
+                      <a:pPr algn="ctr"/>
+                      <a:r>
+                        <a:rPr sz="950" b="0">
+                          <a:solidFill>
+                            <a:srgbClr val="3A3A3A"/>
+                          </a:solidFill>
+                          <a:latin typeface="맑은 고딕"/>
+                        </a:rPr>
+                        <a:t>93%</a:t>
+                      </a:r>
+                    </a:p>
+                  </a:txBody>
+                  <a:tcPr marL="38100" marR="38100" marT="12700" marB="12700" anchor="ctr">
+                    <a:solidFill>
+                      <a:srgbClr val="EEF2F7"/>
+                    </a:solidFill>
+                  </a:tcPr>
+                </a:tc>
+                <a:tc>
+                  <a:txBody>
+                    <a:bodyPr/>
+                    <a:lstStyle/>
+                    <a:p>
+                      <a:pPr algn="ctr"/>
+                      <a:r>
+                        <a:rPr sz="950" b="0">
+                          <a:solidFill>
+                            <a:srgbClr val="3A3A3A"/>
+                          </a:solidFill>
+                          <a:latin typeface="맑은 고딕"/>
+                        </a:rPr>
+                        <a:t>100%</a:t>
+                      </a:r>
+                    </a:p>
+                  </a:txBody>
+                  <a:tcPr marL="38100" marR="38100" marT="12700" marB="12700" anchor="ctr">
+                    <a:solidFill>
+                      <a:srgbClr val="EEF2F7"/>
+                    </a:solidFill>
+                  </a:tcPr>
+                </a:tc>
+                <a:tc>
+                  <a:txBody>
+                    <a:bodyPr/>
+                    <a:lstStyle/>
+                    <a:p>
+                      <a:pPr algn="ctr"/>
+                      <a:r>
+                        <a:rPr sz="950" b="0">
+                          <a:solidFill>
+                            <a:srgbClr val="3A3A3A"/>
+                          </a:solidFill>
+                          <a:latin typeface="맑은 고딕"/>
+                        </a:rPr>
+                        <a:t>100%</a:t>
+                      </a:r>
+                    </a:p>
+                  </a:txBody>
+                  <a:tcPr marL="38100" marR="38100" marT="12700" marB="12700" anchor="ctr">
+                    <a:solidFill>
+                      <a:srgbClr val="EEF2F7"/>
+                    </a:solidFill>
+                  </a:tcPr>
+                </a:tc>
+                <a:tc>
+                  <a:txBody>
+                    <a:bodyPr/>
+                    <a:lstStyle/>
+                    <a:p>
+                      <a:pPr algn="ctr"/>
+                      <a:r>
+                        <a:rPr sz="950" b="0">
+                          <a:solidFill>
+                            <a:srgbClr val="3A3A3A"/>
+                          </a:solidFill>
+                          <a:latin typeface="맑은 고딕"/>
+                        </a:rPr>
+                        <a:t>100%</a:t>
+                      </a:r>
+                    </a:p>
+                  </a:txBody>
+                  <a:tcPr marL="38100" marR="38100" marT="12700" marB="12700" anchor="ctr">
+                    <a:solidFill>
+                      <a:srgbClr val="EEF2F7"/>
+                    </a:solidFill>
+                  </a:tcPr>
+                </a:tc>
+              </a:tr>
+              <a:tr h="301752">
+                <a:tc>
+                  <a:txBody>
+                    <a:bodyPr/>
+                    <a:lstStyle/>
+                    <a:p>
+                      <a:pPr algn="ctr"/>
+                      <a:r>
+                        <a:rPr sz="950" b="1">
+                          <a:solidFill>
+                            <a:srgbClr val="3A3A3A"/>
+                          </a:solidFill>
+                          <a:latin typeface="맑은 고딕"/>
+                        </a:rPr>
+                        <a:t>60</a:t>
+                      </a:r>
+                    </a:p>
+                  </a:txBody>
+                  <a:tcPr marL="38100" marR="38100" marT="12700" marB="12700" anchor="ctr">
+                    <a:solidFill>
+                      <a:srgbClr val="FFFFFF"/>
+                    </a:solidFill>
+                  </a:tcPr>
+                </a:tc>
+                <a:tc>
+                  <a:txBody>
+                    <a:bodyPr/>
+                    <a:lstStyle/>
+                    <a:p>
+                      <a:pPr algn="ctr"/>
+                      <a:r>
+                        <a:rPr sz="950" b="0">
+                          <a:solidFill>
+                            <a:srgbClr val="3A3A3A"/>
+                          </a:solidFill>
+                          <a:latin typeface="맑은 고딕"/>
+                        </a:rPr>
+                        <a:t>낙아웃</a:t>
+                      </a:r>
+                    </a:p>
+                  </a:txBody>
+                  <a:tcPr marL="38100" marR="38100" marT="12700" marB="12700" anchor="ctr">
+                    <a:solidFill>
+                      <a:srgbClr val="FFFFFF"/>
+                    </a:solidFill>
+                  </a:tcPr>
+                </a:tc>
+                <a:tc>
+                  <a:txBody>
+                    <a:bodyPr/>
+                    <a:lstStyle/>
+                    <a:p>
+                      <a:pPr algn="ctr"/>
+                      <a:r>
+                        <a:rPr sz="950" b="0">
+                          <a:solidFill>
+                            <a:srgbClr val="3A3A3A"/>
+                          </a:solidFill>
+                          <a:latin typeface="맑은 고딕"/>
+                        </a:rPr>
+                        <a:t>낙아웃</a:t>
+                      </a:r>
+                    </a:p>
+                  </a:txBody>
+                  <a:tcPr marL="38100" marR="38100" marT="12700" marB="12700" anchor="ctr">
+                    <a:solidFill>
+                      <a:srgbClr val="FFFFFF"/>
+                    </a:solidFill>
+                  </a:tcPr>
+                </a:tc>
+                <a:tc>
+                  <a:txBody>
+                    <a:bodyPr/>
+                    <a:lstStyle/>
+                    <a:p>
+                      <a:pPr algn="ctr"/>
+                      <a:r>
+                        <a:rPr sz="950" b="0">
+                          <a:solidFill>
+                            <a:srgbClr val="3A3A3A"/>
+                          </a:solidFill>
+                          <a:latin typeface="맑은 고딕"/>
+                        </a:rPr>
+                        <a:t>낙아웃</a:t>
+                      </a:r>
+                    </a:p>
+                  </a:txBody>
+                  <a:tcPr marL="38100" marR="38100" marT="12700" marB="12700" anchor="ctr">
+                    <a:solidFill>
+                      <a:srgbClr val="FFFFFF"/>
+                    </a:solidFill>
+                  </a:tcPr>
+                </a:tc>
+                <a:tc>
+                  <a:txBody>
+                    <a:bodyPr/>
+                    <a:lstStyle/>
+                    <a:p>
+                      <a:pPr algn="ctr"/>
+                      <a:r>
+                        <a:rPr sz="950" b="0">
+                          <a:solidFill>
+                            <a:srgbClr val="3A3A3A"/>
+                          </a:solidFill>
+                          <a:latin typeface="맑은 고딕"/>
+                        </a:rPr>
+                        <a:t>낙아웃</a:t>
+                      </a:r>
+                    </a:p>
+                  </a:txBody>
+                  <a:tcPr marL="38100" marR="38100" marT="12700" marB="12700" anchor="ctr">
+                    <a:solidFill>
+                      <a:srgbClr val="FFFFFF"/>
+                    </a:solidFill>
+                  </a:tcPr>
+                </a:tc>
+                <a:tc>
+                  <a:txBody>
+                    <a:bodyPr/>
+                    <a:lstStyle/>
+                    <a:p>
+                      <a:pPr algn="ctr"/>
+                      <a:r>
+                        <a:rPr sz="950" b="0">
+                          <a:solidFill>
+                            <a:srgbClr val="3A3A3A"/>
+                          </a:solidFill>
+                          <a:latin typeface="맑은 고딕"/>
+                        </a:rPr>
+                        <a:t>낙아웃</a:t>
+                      </a:r>
+                    </a:p>
+                  </a:txBody>
+                  <a:tcPr marL="38100" marR="38100" marT="12700" marB="12700" anchor="ctr">
+                    <a:solidFill>
+                      <a:srgbClr val="FFFFFF"/>
+                    </a:solidFill>
+                  </a:tcPr>
+                </a:tc>
+              </a:tr>
+            </a:tbl>
+          </a:graphicData>
+        </a:graphic>
+      </p:graphicFrame>
       <p:sp>
         <p:nvSpPr>
           <p:cNvPr id="9" name="TextBox 8"/>
@@ -10381,8 +11716,8 @@
         </p:nvSpPr>
         <p:spPr>
           <a:xfrm>
-            <a:off x="777240" y="5004936"/>
-            <a:ext cx="8595360" cy="365760"/>
+            <a:off x="5120640" y="1783080"/>
+            <a:ext cx="4297680" cy="320040"/>
           </a:xfrm>
           <a:prstGeom prst="rect">
             <a:avLst/>
@@ -10390,7 +11725,7 @@
           <a:noFill/>
         </p:spPr>
         <p:txBody>
-          <a:bodyPr wrap="square" lIns="25400" tIns="12700" rIns="25400" bIns="12700" anchor="t">
+          <a:bodyPr wrap="square" anchor="t" lIns="25400" rIns="25400" tIns="12700" bIns="12700">
             <a:spAutoFit/>
           </a:bodyPr>
           <a:lstStyle/>
@@ -10401,227 +11736,1514 @@
               </a:lnSpc>
             </a:pPr>
             <a:r>
-              <a:rPr sz="900" b="0" dirty="0" err="1">
+              <a:rPr sz="1400" b="1">
+                <a:solidFill>
+                  <a:srgbClr val="043B72"/>
+                </a:solidFill>
+                <a:latin typeface="맑은 고딕"/>
+              </a:rPr>
+              <a:t>안정변동성펀드</a:t>
+            </a:r>
+            <a:r>
+              <a:rPr sz="1050" b="0">
                 <a:solidFill>
                   <a:srgbClr val="84888B"/>
                 </a:solidFill>
                 <a:latin typeface="맑은 고딕"/>
               </a:rPr>
-              <a:t>변동성 60% 가정 · 점=시뮬 1회 · 노란선=구간 평균 · 데이터: 자체 시뮬레이션(거래비용·운용오차 포함)</a:t>
-            </a:r>
-            <a:r>
-              <a:rPr sz="900" b="0" dirty="0">
+              <a:t>  (안정 변동성 매매)</a:t>
+            </a:r>
+          </a:p>
+        </p:txBody>
+      </p:sp>
+      <p:graphicFrame>
+        <p:nvGraphicFramePr>
+          <p:cNvPr id="10" name="Table 9"/>
+          <p:cNvGraphicFramePr>
+            <a:graphicFrameLocks noGrp="1"/>
+          </p:cNvGraphicFramePr>
+          <p:nvPr/>
+        </p:nvGraphicFramePr>
+        <p:xfrm>
+          <a:off x="5120640" y="2121408"/>
+          <a:ext cx="4343400" cy="3017520"/>
+        </p:xfrm>
+        <a:graphic>
+          <a:graphicData uri="http://schemas.openxmlformats.org/drawingml/2006/table">
+            <a:tbl>
+              <a:tblPr firstRow="1" bandRow="1">
+                <a:tableStyleId>{5C22544A-7EE6-4342-B048-85BDC9FD1C3A}</a:tableStyleId>
+              </a:tblPr>
+              <a:tblGrid>
+                <a:gridCol w="868680"/>
+                <a:gridCol w="694944"/>
+                <a:gridCol w="694944"/>
+                <a:gridCol w="694944"/>
+                <a:gridCol w="694944"/>
+                <a:gridCol w="694944"/>
+              </a:tblGrid>
+              <a:tr h="301752">
+                <a:tc>
+                  <a:txBody>
+                    <a:bodyPr/>
+                    <a:lstStyle/>
+                    <a:p>
+                      <a:pPr algn="ctr"/>
+                      <a:r>
+                        <a:rPr sz="950" b="1">
+                          <a:solidFill>
+                            <a:srgbClr val="FFFFFF"/>
+                          </a:solidFill>
+                          <a:latin typeface="맑은 고딕"/>
+                        </a:rPr>
+                        <a:t>지수 \ 잔존</a:t>
+                      </a:r>
+                    </a:p>
+                  </a:txBody>
+                  <a:tcPr marL="38100" marR="38100" marT="12700" marB="12700" anchor="ctr">
+                    <a:solidFill>
+                      <a:srgbClr val="043B72"/>
+                    </a:solidFill>
+                  </a:tcPr>
+                </a:tc>
+                <a:tc>
+                  <a:txBody>
+                    <a:bodyPr/>
+                    <a:lstStyle/>
+                    <a:p>
+                      <a:pPr algn="ctr"/>
+                      <a:r>
+                        <a:rPr sz="950" b="1">
+                          <a:solidFill>
+                            <a:srgbClr val="FFFFFF"/>
+                          </a:solidFill>
+                          <a:latin typeface="맑은 고딕"/>
+                        </a:rPr>
+                        <a:t>12개월</a:t>
+                      </a:r>
+                    </a:p>
+                  </a:txBody>
+                  <a:tcPr marL="38100" marR="38100" marT="12700" marB="12700" anchor="ctr">
+                    <a:solidFill>
+                      <a:srgbClr val="043B72"/>
+                    </a:solidFill>
+                  </a:tcPr>
+                </a:tc>
+                <a:tc>
+                  <a:txBody>
+                    <a:bodyPr/>
+                    <a:lstStyle/>
+                    <a:p>
+                      <a:pPr algn="ctr"/>
+                      <a:r>
+                        <a:rPr sz="950" b="1">
+                          <a:solidFill>
+                            <a:srgbClr val="FFFFFF"/>
+                          </a:solidFill>
+                          <a:latin typeface="맑은 고딕"/>
+                        </a:rPr>
+                        <a:t>9개월</a:t>
+                      </a:r>
+                    </a:p>
+                  </a:txBody>
+                  <a:tcPr marL="38100" marR="38100" marT="12700" marB="12700" anchor="ctr">
+                    <a:solidFill>
+                      <a:srgbClr val="043B72"/>
+                    </a:solidFill>
+                  </a:tcPr>
+                </a:tc>
+                <a:tc>
+                  <a:txBody>
+                    <a:bodyPr/>
+                    <a:lstStyle/>
+                    <a:p>
+                      <a:pPr algn="ctr"/>
+                      <a:r>
+                        <a:rPr sz="950" b="1">
+                          <a:solidFill>
+                            <a:srgbClr val="FFFFFF"/>
+                          </a:solidFill>
+                          <a:latin typeface="맑은 고딕"/>
+                        </a:rPr>
+                        <a:t>6개월</a:t>
+                      </a:r>
+                    </a:p>
+                  </a:txBody>
+                  <a:tcPr marL="38100" marR="38100" marT="12700" marB="12700" anchor="ctr">
+                    <a:solidFill>
+                      <a:srgbClr val="043B72"/>
+                    </a:solidFill>
+                  </a:tcPr>
+                </a:tc>
+                <a:tc>
+                  <a:txBody>
+                    <a:bodyPr/>
+                    <a:lstStyle/>
+                    <a:p>
+                      <a:pPr algn="ctr"/>
+                      <a:r>
+                        <a:rPr sz="950" b="1">
+                          <a:solidFill>
+                            <a:srgbClr val="FFFFFF"/>
+                          </a:solidFill>
+                          <a:latin typeface="맑은 고딕"/>
+                        </a:rPr>
+                        <a:t>3개월</a:t>
+                      </a:r>
+                    </a:p>
+                  </a:txBody>
+                  <a:tcPr marL="38100" marR="38100" marT="12700" marB="12700" anchor="ctr">
+                    <a:solidFill>
+                      <a:srgbClr val="043B72"/>
+                    </a:solidFill>
+                  </a:tcPr>
+                </a:tc>
+                <a:tc>
+                  <a:txBody>
+                    <a:bodyPr/>
+                    <a:lstStyle/>
+                    <a:p>
+                      <a:pPr algn="ctr"/>
+                      <a:r>
+                        <a:rPr sz="950" b="1">
+                          <a:solidFill>
+                            <a:srgbClr val="FFFFFF"/>
+                          </a:solidFill>
+                          <a:latin typeface="맑은 고딕"/>
+                        </a:rPr>
+                        <a:t>1개월</a:t>
+                      </a:r>
+                    </a:p>
+                  </a:txBody>
+                  <a:tcPr marL="38100" marR="38100" marT="12700" marB="12700" anchor="ctr">
+                    <a:solidFill>
+                      <a:srgbClr val="043B72"/>
+                    </a:solidFill>
+                  </a:tcPr>
+                </a:tc>
+              </a:tr>
+              <a:tr h="301752">
+                <a:tc>
+                  <a:txBody>
+                    <a:bodyPr/>
+                    <a:lstStyle/>
+                    <a:p>
+                      <a:pPr algn="ctr"/>
+                      <a:r>
+                        <a:rPr sz="950" b="1">
+                          <a:solidFill>
+                            <a:srgbClr val="3A3A3A"/>
+                          </a:solidFill>
+                          <a:latin typeface="맑은 고딕"/>
+                        </a:rPr>
+                        <a:t>140</a:t>
+                      </a:r>
+                    </a:p>
+                  </a:txBody>
+                  <a:tcPr marL="38100" marR="38100" marT="12700" marB="12700" anchor="ctr">
+                    <a:solidFill>
+                      <a:srgbClr val="FFFFFF"/>
+                    </a:solidFill>
+                  </a:tcPr>
+                </a:tc>
+                <a:tc>
+                  <a:txBody>
+                    <a:bodyPr/>
+                    <a:lstStyle/>
+                    <a:p>
+                      <a:pPr algn="ctr"/>
+                      <a:r>
+                        <a:rPr sz="950" b="0">
+                          <a:solidFill>
+                            <a:srgbClr val="3A3A3A"/>
+                          </a:solidFill>
+                          <a:latin typeface="맑은 고딕"/>
+                        </a:rPr>
+                        <a:t>19%</a:t>
+                      </a:r>
+                    </a:p>
+                  </a:txBody>
+                  <a:tcPr marL="38100" marR="38100" marT="12700" marB="12700" anchor="ctr">
+                    <a:solidFill>
+                      <a:srgbClr val="FFFFFF"/>
+                    </a:solidFill>
+                  </a:tcPr>
+                </a:tc>
+                <a:tc>
+                  <a:txBody>
+                    <a:bodyPr/>
+                    <a:lstStyle/>
+                    <a:p>
+                      <a:pPr algn="ctr"/>
+                      <a:r>
+                        <a:rPr sz="950" b="0">
+                          <a:solidFill>
+                            <a:srgbClr val="3A3A3A"/>
+                          </a:solidFill>
+                          <a:latin typeface="맑은 고딕"/>
+                        </a:rPr>
+                        <a:t>18%</a:t>
+                      </a:r>
+                    </a:p>
+                  </a:txBody>
+                  <a:tcPr marL="38100" marR="38100" marT="12700" marB="12700" anchor="ctr">
+                    <a:solidFill>
+                      <a:srgbClr val="FFFFFF"/>
+                    </a:solidFill>
+                  </a:tcPr>
+                </a:tc>
+                <a:tc>
+                  <a:txBody>
+                    <a:bodyPr/>
+                    <a:lstStyle/>
+                    <a:p>
+                      <a:pPr algn="ctr"/>
+                      <a:r>
+                        <a:rPr sz="950" b="0">
+                          <a:solidFill>
+                            <a:srgbClr val="3A3A3A"/>
+                          </a:solidFill>
+                          <a:latin typeface="맑은 고딕"/>
+                        </a:rPr>
+                        <a:t>15%</a:t>
+                      </a:r>
+                    </a:p>
+                  </a:txBody>
+                  <a:tcPr marL="38100" marR="38100" marT="12700" marB="12700" anchor="ctr">
+                    <a:solidFill>
+                      <a:srgbClr val="FFFFFF"/>
+                    </a:solidFill>
+                  </a:tcPr>
+                </a:tc>
+                <a:tc>
+                  <a:txBody>
+                    <a:bodyPr/>
+                    <a:lstStyle/>
+                    <a:p>
+                      <a:pPr algn="ctr"/>
+                      <a:r>
+                        <a:rPr sz="950" b="0">
+                          <a:solidFill>
+                            <a:srgbClr val="3A3A3A"/>
+                          </a:solidFill>
+                          <a:latin typeface="맑은 고딕"/>
+                        </a:rPr>
+                        <a:t>10%</a:t>
+                      </a:r>
+                    </a:p>
+                  </a:txBody>
+                  <a:tcPr marL="38100" marR="38100" marT="12700" marB="12700" anchor="ctr">
+                    <a:solidFill>
+                      <a:srgbClr val="FFFFFF"/>
+                    </a:solidFill>
+                  </a:tcPr>
+                </a:tc>
+                <a:tc>
+                  <a:txBody>
+                    <a:bodyPr/>
+                    <a:lstStyle/>
+                    <a:p>
+                      <a:pPr algn="ctr"/>
+                      <a:r>
+                        <a:rPr sz="950" b="0">
+                          <a:solidFill>
+                            <a:srgbClr val="3A3A3A"/>
+                          </a:solidFill>
+                          <a:latin typeface="맑은 고딕"/>
+                        </a:rPr>
+                        <a:t>2%</a:t>
+                      </a:r>
+                    </a:p>
+                  </a:txBody>
+                  <a:tcPr marL="38100" marR="38100" marT="12700" marB="12700" anchor="ctr">
+                    <a:solidFill>
+                      <a:srgbClr val="FFFFFF"/>
+                    </a:solidFill>
+                  </a:tcPr>
+                </a:tc>
+              </a:tr>
+              <a:tr h="301752">
+                <a:tc>
+                  <a:txBody>
+                    <a:bodyPr/>
+                    <a:lstStyle/>
+                    <a:p>
+                      <a:pPr algn="ctr"/>
+                      <a:r>
+                        <a:rPr sz="950" b="1">
+                          <a:solidFill>
+                            <a:srgbClr val="3A3A3A"/>
+                          </a:solidFill>
+                          <a:latin typeface="맑은 고딕"/>
+                        </a:rPr>
+                        <a:t>130</a:t>
+                      </a:r>
+                    </a:p>
+                  </a:txBody>
+                  <a:tcPr marL="38100" marR="38100" marT="12700" marB="12700" anchor="ctr">
+                    <a:solidFill>
+                      <a:srgbClr val="EEF2F7"/>
+                    </a:solidFill>
+                  </a:tcPr>
+                </a:tc>
+                <a:tc>
+                  <a:txBody>
+                    <a:bodyPr/>
+                    <a:lstStyle/>
+                    <a:p>
+                      <a:pPr algn="ctr"/>
+                      <a:r>
+                        <a:rPr sz="950" b="0">
+                          <a:solidFill>
+                            <a:srgbClr val="3A3A3A"/>
+                          </a:solidFill>
+                          <a:latin typeface="맑은 고딕"/>
+                        </a:rPr>
+                        <a:t>22%</a:t>
+                      </a:r>
+                    </a:p>
+                  </a:txBody>
+                  <a:tcPr marL="38100" marR="38100" marT="12700" marB="12700" anchor="ctr">
+                    <a:solidFill>
+                      <a:srgbClr val="EEF2F7"/>
+                    </a:solidFill>
+                  </a:tcPr>
+                </a:tc>
+                <a:tc>
+                  <a:txBody>
+                    <a:bodyPr/>
+                    <a:lstStyle/>
+                    <a:p>
+                      <a:pPr algn="ctr"/>
+                      <a:r>
+                        <a:rPr sz="950" b="0">
+                          <a:solidFill>
+                            <a:srgbClr val="3A3A3A"/>
+                          </a:solidFill>
+                          <a:latin typeface="맑은 고딕"/>
+                        </a:rPr>
+                        <a:t>21%</a:t>
+                      </a:r>
+                    </a:p>
+                  </a:txBody>
+                  <a:tcPr marL="38100" marR="38100" marT="12700" marB="12700" anchor="ctr">
+                    <a:solidFill>
+                      <a:srgbClr val="EEF2F7"/>
+                    </a:solidFill>
+                  </a:tcPr>
+                </a:tc>
+                <a:tc>
+                  <a:txBody>
+                    <a:bodyPr/>
+                    <a:lstStyle/>
+                    <a:p>
+                      <a:pPr algn="ctr"/>
+                      <a:r>
+                        <a:rPr sz="950" b="0">
+                          <a:solidFill>
+                            <a:srgbClr val="3A3A3A"/>
+                          </a:solidFill>
+                          <a:latin typeface="맑은 고딕"/>
+                        </a:rPr>
+                        <a:t>20%</a:t>
+                      </a:r>
+                    </a:p>
+                  </a:txBody>
+                  <a:tcPr marL="38100" marR="38100" marT="12700" marB="12700" anchor="ctr">
+                    <a:solidFill>
+                      <a:srgbClr val="EEF2F7"/>
+                    </a:solidFill>
+                  </a:tcPr>
+                </a:tc>
+                <a:tc>
+                  <a:txBody>
+                    <a:bodyPr/>
+                    <a:lstStyle/>
+                    <a:p>
+                      <a:pPr algn="ctr"/>
+                      <a:r>
+                        <a:rPr sz="950" b="0">
+                          <a:solidFill>
+                            <a:srgbClr val="3A3A3A"/>
+                          </a:solidFill>
+                          <a:latin typeface="맑은 고딕"/>
+                        </a:rPr>
+                        <a:t>15%</a:t>
+                      </a:r>
+                    </a:p>
+                  </a:txBody>
+                  <a:tcPr marL="38100" marR="38100" marT="12700" marB="12700" anchor="ctr">
+                    <a:solidFill>
+                      <a:srgbClr val="EEF2F7"/>
+                    </a:solidFill>
+                  </a:tcPr>
+                </a:tc>
+                <a:tc>
+                  <a:txBody>
+                    <a:bodyPr/>
+                    <a:lstStyle/>
+                    <a:p>
+                      <a:pPr algn="ctr"/>
+                      <a:r>
+                        <a:rPr sz="950" b="0">
+                          <a:solidFill>
+                            <a:srgbClr val="3A3A3A"/>
+                          </a:solidFill>
+                          <a:latin typeface="맑은 고딕"/>
+                        </a:rPr>
+                        <a:t>5%</a:t>
+                      </a:r>
+                    </a:p>
+                  </a:txBody>
+                  <a:tcPr marL="38100" marR="38100" marT="12700" marB="12700" anchor="ctr">
+                    <a:solidFill>
+                      <a:srgbClr val="EEF2F7"/>
+                    </a:solidFill>
+                  </a:tcPr>
+                </a:tc>
+              </a:tr>
+              <a:tr h="301752">
+                <a:tc>
+                  <a:txBody>
+                    <a:bodyPr/>
+                    <a:lstStyle/>
+                    <a:p>
+                      <a:pPr algn="ctr"/>
+                      <a:r>
+                        <a:rPr sz="950" b="1">
+                          <a:solidFill>
+                            <a:srgbClr val="3A3A3A"/>
+                          </a:solidFill>
+                          <a:latin typeface="맑은 고딕"/>
+                        </a:rPr>
+                        <a:t>120</a:t>
+                      </a:r>
+                    </a:p>
+                  </a:txBody>
+                  <a:tcPr marL="38100" marR="38100" marT="12700" marB="12700" anchor="ctr">
+                    <a:solidFill>
+                      <a:srgbClr val="FFFFFF"/>
+                    </a:solidFill>
+                  </a:tcPr>
+                </a:tc>
+                <a:tc>
+                  <a:txBody>
+                    <a:bodyPr/>
+                    <a:lstStyle/>
+                    <a:p>
+                      <a:pPr algn="ctr"/>
+                      <a:r>
+                        <a:rPr sz="950" b="0">
+                          <a:solidFill>
+                            <a:srgbClr val="3A3A3A"/>
+                          </a:solidFill>
+                          <a:latin typeface="맑은 고딕"/>
+                        </a:rPr>
+                        <a:t>26%</a:t>
+                      </a:r>
+                    </a:p>
+                  </a:txBody>
+                  <a:tcPr marL="38100" marR="38100" marT="12700" marB="12700" anchor="ctr">
+                    <a:solidFill>
+                      <a:srgbClr val="FFFFFF"/>
+                    </a:solidFill>
+                  </a:tcPr>
+                </a:tc>
+                <a:tc>
+                  <a:txBody>
+                    <a:bodyPr/>
+                    <a:lstStyle/>
+                    <a:p>
+                      <a:pPr algn="ctr"/>
+                      <a:r>
+                        <a:rPr sz="950" b="0">
+                          <a:solidFill>
+                            <a:srgbClr val="3A3A3A"/>
+                          </a:solidFill>
+                          <a:latin typeface="맑은 고딕"/>
+                        </a:rPr>
+                        <a:t>26%</a:t>
+                      </a:r>
+                    </a:p>
+                  </a:txBody>
+                  <a:tcPr marL="38100" marR="38100" marT="12700" marB="12700" anchor="ctr">
+                    <a:solidFill>
+                      <a:srgbClr val="FFFFFF"/>
+                    </a:solidFill>
+                  </a:tcPr>
+                </a:tc>
+                <a:tc>
+                  <a:txBody>
+                    <a:bodyPr/>
+                    <a:lstStyle/>
+                    <a:p>
+                      <a:pPr algn="ctr"/>
+                      <a:r>
+                        <a:rPr sz="950" b="0">
+                          <a:solidFill>
+                            <a:srgbClr val="3A3A3A"/>
+                          </a:solidFill>
+                          <a:latin typeface="맑은 고딕"/>
+                        </a:rPr>
+                        <a:t>25%</a:t>
+                      </a:r>
+                    </a:p>
+                  </a:txBody>
+                  <a:tcPr marL="38100" marR="38100" marT="12700" marB="12700" anchor="ctr">
+                    <a:solidFill>
+                      <a:srgbClr val="FFFFFF"/>
+                    </a:solidFill>
+                  </a:tcPr>
+                </a:tc>
+                <a:tc>
+                  <a:txBody>
+                    <a:bodyPr/>
+                    <a:lstStyle/>
+                    <a:p>
+                      <a:pPr algn="ctr"/>
+                      <a:r>
+                        <a:rPr sz="950" b="0">
+                          <a:solidFill>
+                            <a:srgbClr val="3A3A3A"/>
+                          </a:solidFill>
+                          <a:latin typeface="맑은 고딕"/>
+                        </a:rPr>
+                        <a:t>22%</a:t>
+                      </a:r>
+                    </a:p>
+                  </a:txBody>
+                  <a:tcPr marL="38100" marR="38100" marT="12700" marB="12700" anchor="ctr">
+                    <a:solidFill>
+                      <a:srgbClr val="FFFFFF"/>
+                    </a:solidFill>
+                  </a:tcPr>
+                </a:tc>
+                <a:tc>
+                  <a:txBody>
+                    <a:bodyPr/>
+                    <a:lstStyle/>
+                    <a:p>
+                      <a:pPr algn="ctr"/>
+                      <a:r>
+                        <a:rPr sz="950" b="0">
+                          <a:solidFill>
+                            <a:srgbClr val="3A3A3A"/>
+                          </a:solidFill>
+                          <a:latin typeface="맑은 고딕"/>
+                        </a:rPr>
+                        <a:t>13%</a:t>
+                      </a:r>
+                    </a:p>
+                  </a:txBody>
+                  <a:tcPr marL="38100" marR="38100" marT="12700" marB="12700" anchor="ctr">
+                    <a:solidFill>
+                      <a:srgbClr val="FFFFFF"/>
+                    </a:solidFill>
+                  </a:tcPr>
+                </a:tc>
+              </a:tr>
+              <a:tr h="301752">
+                <a:tc>
+                  <a:txBody>
+                    <a:bodyPr/>
+                    <a:lstStyle/>
+                    <a:p>
+                      <a:pPr algn="ctr"/>
+                      <a:r>
+                        <a:rPr sz="950" b="1">
+                          <a:solidFill>
+                            <a:srgbClr val="3A3A3A"/>
+                          </a:solidFill>
+                          <a:latin typeface="맑은 고딕"/>
+                        </a:rPr>
+                        <a:t>110</a:t>
+                      </a:r>
+                    </a:p>
+                  </a:txBody>
+                  <a:tcPr marL="38100" marR="38100" marT="12700" marB="12700" anchor="ctr">
+                    <a:solidFill>
+                      <a:srgbClr val="EEF2F7"/>
+                    </a:solidFill>
+                  </a:tcPr>
+                </a:tc>
+                <a:tc>
+                  <a:txBody>
+                    <a:bodyPr/>
+                    <a:lstStyle/>
+                    <a:p>
+                      <a:pPr algn="ctr"/>
+                      <a:r>
+                        <a:rPr sz="950" b="0">
+                          <a:solidFill>
+                            <a:srgbClr val="3A3A3A"/>
+                          </a:solidFill>
+                          <a:latin typeface="맑은 고딕"/>
+                        </a:rPr>
+                        <a:t>31%</a:t>
+                      </a:r>
+                    </a:p>
+                  </a:txBody>
+                  <a:tcPr marL="38100" marR="38100" marT="12700" marB="12700" anchor="ctr">
+                    <a:solidFill>
+                      <a:srgbClr val="EEF2F7"/>
+                    </a:solidFill>
+                  </a:tcPr>
+                </a:tc>
+                <a:tc>
+                  <a:txBody>
+                    <a:bodyPr/>
+                    <a:lstStyle/>
+                    <a:p>
+                      <a:pPr algn="ctr"/>
+                      <a:r>
+                        <a:rPr sz="950" b="0">
+                          <a:solidFill>
+                            <a:srgbClr val="3A3A3A"/>
+                          </a:solidFill>
+                          <a:latin typeface="맑은 고딕"/>
+                        </a:rPr>
+                        <a:t>32%</a:t>
+                      </a:r>
+                    </a:p>
+                  </a:txBody>
+                  <a:tcPr marL="38100" marR="38100" marT="12700" marB="12700" anchor="ctr">
+                    <a:solidFill>
+                      <a:srgbClr val="EEF2F7"/>
+                    </a:solidFill>
+                  </a:tcPr>
+                </a:tc>
+                <a:tc>
+                  <a:txBody>
+                    <a:bodyPr/>
+                    <a:lstStyle/>
+                    <a:p>
+                      <a:pPr algn="ctr"/>
+                      <a:r>
+                        <a:rPr sz="950" b="0">
+                          <a:solidFill>
+                            <a:srgbClr val="3A3A3A"/>
+                          </a:solidFill>
+                          <a:latin typeface="맑은 고딕"/>
+                        </a:rPr>
+                        <a:t>32%</a:t>
+                      </a:r>
+                    </a:p>
+                  </a:txBody>
+                  <a:tcPr marL="38100" marR="38100" marT="12700" marB="12700" anchor="ctr">
+                    <a:solidFill>
+                      <a:srgbClr val="EEF2F7"/>
+                    </a:solidFill>
+                  </a:tcPr>
+                </a:tc>
+                <a:tc>
+                  <a:txBody>
+                    <a:bodyPr/>
+                    <a:lstStyle/>
+                    <a:p>
+                      <a:pPr algn="ctr"/>
+                      <a:r>
+                        <a:rPr sz="950" b="0">
+                          <a:solidFill>
+                            <a:srgbClr val="3A3A3A"/>
+                          </a:solidFill>
+                          <a:latin typeface="맑은 고딕"/>
+                        </a:rPr>
+                        <a:t>32%</a:t>
+                      </a:r>
+                    </a:p>
+                  </a:txBody>
+                  <a:tcPr marL="38100" marR="38100" marT="12700" marB="12700" anchor="ctr">
+                    <a:solidFill>
+                      <a:srgbClr val="EEF2F7"/>
+                    </a:solidFill>
+                  </a:tcPr>
+                </a:tc>
+                <a:tc>
+                  <a:txBody>
+                    <a:bodyPr/>
+                    <a:lstStyle/>
+                    <a:p>
+                      <a:pPr algn="ctr"/>
+                      <a:r>
+                        <a:rPr sz="950" b="0">
+                          <a:solidFill>
+                            <a:srgbClr val="3A3A3A"/>
+                          </a:solidFill>
+                          <a:latin typeface="맑은 고딕"/>
+                        </a:rPr>
+                        <a:t>26%</a:t>
+                      </a:r>
+                    </a:p>
+                  </a:txBody>
+                  <a:tcPr marL="38100" marR="38100" marT="12700" marB="12700" anchor="ctr">
+                    <a:solidFill>
+                      <a:srgbClr val="EEF2F7"/>
+                    </a:solidFill>
+                  </a:tcPr>
+                </a:tc>
+              </a:tr>
+              <a:tr h="301752">
+                <a:tc>
+                  <a:txBody>
+                    <a:bodyPr/>
+                    <a:lstStyle/>
+                    <a:p>
+                      <a:pPr algn="ctr"/>
+                      <a:r>
+                        <a:rPr sz="950" b="1">
+                          <a:solidFill>
+                            <a:srgbClr val="3A3A3A"/>
+                          </a:solidFill>
+                          <a:latin typeface="맑은 고딕"/>
+                        </a:rPr>
+                        <a:t>100</a:t>
+                      </a:r>
+                    </a:p>
+                  </a:txBody>
+                  <a:tcPr marL="38100" marR="38100" marT="12700" marB="12700" anchor="ctr">
+                    <a:solidFill>
+                      <a:srgbClr val="FFFFFF"/>
+                    </a:solidFill>
+                  </a:tcPr>
+                </a:tc>
+                <a:tc>
+                  <a:txBody>
+                    <a:bodyPr/>
+                    <a:lstStyle/>
+                    <a:p>
+                      <a:pPr algn="ctr"/>
+                      <a:r>
+                        <a:rPr sz="950" b="1">
+                          <a:solidFill>
+                            <a:srgbClr val="3A3A3A"/>
+                          </a:solidFill>
+                          <a:latin typeface="맑은 고딕"/>
+                        </a:rPr>
+                        <a:t>37%</a:t>
+                      </a:r>
+                    </a:p>
+                  </a:txBody>
+                  <a:tcPr marL="38100" marR="38100" marT="12700" marB="12700" anchor="ctr">
+                    <a:solidFill>
+                      <a:srgbClr val="FFFFFF"/>
+                    </a:solidFill>
+                  </a:tcPr>
+                </a:tc>
+                <a:tc>
+                  <a:txBody>
+                    <a:bodyPr/>
+                    <a:lstStyle/>
+                    <a:p>
+                      <a:pPr algn="ctr"/>
+                      <a:r>
+                        <a:rPr sz="950" b="1">
+                          <a:solidFill>
+                            <a:srgbClr val="3A3A3A"/>
+                          </a:solidFill>
+                          <a:latin typeface="맑은 고딕"/>
+                        </a:rPr>
+                        <a:t>39%</a:t>
+                      </a:r>
+                    </a:p>
+                  </a:txBody>
+                  <a:tcPr marL="38100" marR="38100" marT="12700" marB="12700" anchor="ctr">
+                    <a:solidFill>
+                      <a:srgbClr val="FFFFFF"/>
+                    </a:solidFill>
+                  </a:tcPr>
+                </a:tc>
+                <a:tc>
+                  <a:txBody>
+                    <a:bodyPr/>
+                    <a:lstStyle/>
+                    <a:p>
+                      <a:pPr algn="ctr"/>
+                      <a:r>
+                        <a:rPr sz="950" b="1">
+                          <a:solidFill>
+                            <a:srgbClr val="3A3A3A"/>
+                          </a:solidFill>
+                          <a:latin typeface="맑은 고딕"/>
+                        </a:rPr>
+                        <a:t>41%</a:t>
+                      </a:r>
+                    </a:p>
+                  </a:txBody>
+                  <a:tcPr marL="38100" marR="38100" marT="12700" marB="12700" anchor="ctr">
+                    <a:solidFill>
+                      <a:srgbClr val="FFFFFF"/>
+                    </a:solidFill>
+                  </a:tcPr>
+                </a:tc>
+                <a:tc>
+                  <a:txBody>
+                    <a:bodyPr/>
+                    <a:lstStyle/>
+                    <a:p>
+                      <a:pPr algn="ctr"/>
+                      <a:r>
+                        <a:rPr sz="950" b="1">
+                          <a:solidFill>
+                            <a:srgbClr val="3A3A3A"/>
+                          </a:solidFill>
+                          <a:latin typeface="맑은 고딕"/>
+                        </a:rPr>
+                        <a:t>43%</a:t>
+                      </a:r>
+                    </a:p>
+                  </a:txBody>
+                  <a:tcPr marL="38100" marR="38100" marT="12700" marB="12700" anchor="ctr">
+                    <a:solidFill>
+                      <a:srgbClr val="FFFFFF"/>
+                    </a:solidFill>
+                  </a:tcPr>
+                </a:tc>
+                <a:tc>
+                  <a:txBody>
+                    <a:bodyPr/>
+                    <a:lstStyle/>
+                    <a:p>
+                      <a:pPr algn="ctr"/>
+                      <a:r>
+                        <a:rPr sz="950" b="1">
+                          <a:solidFill>
+                            <a:srgbClr val="3A3A3A"/>
+                          </a:solidFill>
+                          <a:latin typeface="맑은 고딕"/>
+                        </a:rPr>
+                        <a:t>46%</a:t>
+                      </a:r>
+                    </a:p>
+                  </a:txBody>
+                  <a:tcPr marL="38100" marR="38100" marT="12700" marB="12700" anchor="ctr">
+                    <a:solidFill>
+                      <a:srgbClr val="FFFFFF"/>
+                    </a:solidFill>
+                  </a:tcPr>
+                </a:tc>
+              </a:tr>
+              <a:tr h="301752">
+                <a:tc>
+                  <a:txBody>
+                    <a:bodyPr/>
+                    <a:lstStyle/>
+                    <a:p>
+                      <a:pPr algn="ctr"/>
+                      <a:r>
+                        <a:rPr sz="950" b="1">
+                          <a:solidFill>
+                            <a:srgbClr val="3A3A3A"/>
+                          </a:solidFill>
+                          <a:latin typeface="맑은 고딕"/>
+                        </a:rPr>
+                        <a:t>90</a:t>
+                      </a:r>
+                    </a:p>
+                  </a:txBody>
+                  <a:tcPr marL="38100" marR="38100" marT="12700" marB="12700" anchor="ctr">
+                    <a:solidFill>
+                      <a:srgbClr val="EEF2F7"/>
+                    </a:solidFill>
+                  </a:tcPr>
+                </a:tc>
+                <a:tc>
+                  <a:txBody>
+                    <a:bodyPr/>
+                    <a:lstStyle/>
+                    <a:p>
+                      <a:pPr algn="ctr"/>
+                      <a:r>
+                        <a:rPr sz="950" b="0">
+                          <a:solidFill>
+                            <a:srgbClr val="3A3A3A"/>
+                          </a:solidFill>
+                          <a:latin typeface="맑은 고딕"/>
+                        </a:rPr>
+                        <a:t>44%</a:t>
+                      </a:r>
+                    </a:p>
+                  </a:txBody>
+                  <a:tcPr marL="38100" marR="38100" marT="12700" marB="12700" anchor="ctr">
+                    <a:solidFill>
+                      <a:srgbClr val="EEF2F7"/>
+                    </a:solidFill>
+                  </a:tcPr>
+                </a:tc>
+                <a:tc>
+                  <a:txBody>
+                    <a:bodyPr/>
+                    <a:lstStyle/>
+                    <a:p>
+                      <a:pPr algn="ctr"/>
+                      <a:r>
+                        <a:rPr sz="950" b="0">
+                          <a:solidFill>
+                            <a:srgbClr val="3A3A3A"/>
+                          </a:solidFill>
+                          <a:latin typeface="맑은 고딕"/>
+                        </a:rPr>
+                        <a:t>46%</a:t>
+                      </a:r>
+                    </a:p>
+                  </a:txBody>
+                  <a:tcPr marL="38100" marR="38100" marT="12700" marB="12700" anchor="ctr">
+                    <a:solidFill>
+                      <a:srgbClr val="EEF2F7"/>
+                    </a:solidFill>
+                  </a:tcPr>
+                </a:tc>
+                <a:tc>
+                  <a:txBody>
+                    <a:bodyPr/>
+                    <a:lstStyle/>
+                    <a:p>
+                      <a:pPr algn="ctr"/>
+                      <a:r>
+                        <a:rPr sz="950" b="0">
+                          <a:solidFill>
+                            <a:srgbClr val="3A3A3A"/>
+                          </a:solidFill>
+                          <a:latin typeface="맑은 고딕"/>
+                        </a:rPr>
+                        <a:t>50%</a:t>
+                      </a:r>
+                    </a:p>
+                  </a:txBody>
+                  <a:tcPr marL="38100" marR="38100" marT="12700" marB="12700" anchor="ctr">
+                    <a:solidFill>
+                      <a:srgbClr val="EEF2F7"/>
+                    </a:solidFill>
+                  </a:tcPr>
+                </a:tc>
+                <a:tc>
+                  <a:txBody>
+                    <a:bodyPr/>
+                    <a:lstStyle/>
+                    <a:p>
+                      <a:pPr algn="ctr"/>
+                      <a:r>
+                        <a:rPr sz="950" b="0">
+                          <a:solidFill>
+                            <a:srgbClr val="3A3A3A"/>
+                          </a:solidFill>
+                          <a:latin typeface="맑은 고딕"/>
+                        </a:rPr>
+                        <a:t>57%</a:t>
+                      </a:r>
+                    </a:p>
+                  </a:txBody>
+                  <a:tcPr marL="38100" marR="38100" marT="12700" marB="12700" anchor="ctr">
+                    <a:solidFill>
+                      <a:srgbClr val="EEF2F7"/>
+                    </a:solidFill>
+                  </a:tcPr>
+                </a:tc>
+                <a:tc>
+                  <a:txBody>
+                    <a:bodyPr/>
+                    <a:lstStyle/>
+                    <a:p>
+                      <a:pPr algn="ctr"/>
+                      <a:r>
+                        <a:rPr sz="950" b="0">
+                          <a:solidFill>
+                            <a:srgbClr val="3A3A3A"/>
+                          </a:solidFill>
+                          <a:latin typeface="맑은 고딕"/>
+                        </a:rPr>
+                        <a:t>70%</a:t>
+                      </a:r>
+                    </a:p>
+                  </a:txBody>
+                  <a:tcPr marL="38100" marR="38100" marT="12700" marB="12700" anchor="ctr">
+                    <a:solidFill>
+                      <a:srgbClr val="EEF2F7"/>
+                    </a:solidFill>
+                  </a:tcPr>
+                </a:tc>
+              </a:tr>
+              <a:tr h="301752">
+                <a:tc>
+                  <a:txBody>
+                    <a:bodyPr/>
+                    <a:lstStyle/>
+                    <a:p>
+                      <a:pPr algn="ctr"/>
+                      <a:r>
+                        <a:rPr sz="950" b="1">
+                          <a:solidFill>
+                            <a:srgbClr val="3A3A3A"/>
+                          </a:solidFill>
+                          <a:latin typeface="맑은 고딕"/>
+                        </a:rPr>
+                        <a:t>80</a:t>
+                      </a:r>
+                    </a:p>
+                  </a:txBody>
+                  <a:tcPr marL="38100" marR="38100" marT="12700" marB="12700" anchor="ctr">
+                    <a:solidFill>
+                      <a:srgbClr val="FFFFFF"/>
+                    </a:solidFill>
+                  </a:tcPr>
+                </a:tc>
+                <a:tc>
+                  <a:txBody>
+                    <a:bodyPr/>
+                    <a:lstStyle/>
+                    <a:p>
+                      <a:pPr algn="ctr"/>
+                      <a:r>
+                        <a:rPr sz="950" b="0">
+                          <a:solidFill>
+                            <a:srgbClr val="3A3A3A"/>
+                          </a:solidFill>
+                          <a:latin typeface="맑은 고딕"/>
+                        </a:rPr>
+                        <a:t>51%</a:t>
+                      </a:r>
+                    </a:p>
+                  </a:txBody>
+                  <a:tcPr marL="38100" marR="38100" marT="12700" marB="12700" anchor="ctr">
+                    <a:solidFill>
+                      <a:srgbClr val="FFFFFF"/>
+                    </a:solidFill>
+                  </a:tcPr>
+                </a:tc>
+                <a:tc>
+                  <a:txBody>
+                    <a:bodyPr/>
+                    <a:lstStyle/>
+                    <a:p>
+                      <a:pPr algn="ctr"/>
+                      <a:r>
+                        <a:rPr sz="950" b="0">
+                          <a:solidFill>
+                            <a:srgbClr val="3A3A3A"/>
+                          </a:solidFill>
+                          <a:latin typeface="맑은 고딕"/>
+                        </a:rPr>
+                        <a:t>55%</a:t>
+                      </a:r>
+                    </a:p>
+                  </a:txBody>
+                  <a:tcPr marL="38100" marR="38100" marT="12700" marB="12700" anchor="ctr">
+                    <a:solidFill>
+                      <a:srgbClr val="FFFFFF"/>
+                    </a:solidFill>
+                  </a:tcPr>
+                </a:tc>
+                <a:tc>
+                  <a:txBody>
+                    <a:bodyPr/>
+                    <a:lstStyle/>
+                    <a:p>
+                      <a:pPr algn="ctr"/>
+                      <a:r>
+                        <a:rPr sz="950" b="0">
+                          <a:solidFill>
+                            <a:srgbClr val="3A3A3A"/>
+                          </a:solidFill>
+                          <a:latin typeface="맑은 고딕"/>
+                        </a:rPr>
+                        <a:t>61%</a:t>
+                      </a:r>
+                    </a:p>
+                  </a:txBody>
+                  <a:tcPr marL="38100" marR="38100" marT="12700" marB="12700" anchor="ctr">
+                    <a:solidFill>
+                      <a:srgbClr val="FFFFFF"/>
+                    </a:solidFill>
+                  </a:tcPr>
+                </a:tc>
+                <a:tc>
+                  <a:txBody>
+                    <a:bodyPr/>
+                    <a:lstStyle/>
+                    <a:p>
+                      <a:pPr algn="ctr"/>
+                      <a:r>
+                        <a:rPr sz="950" b="0">
+                          <a:solidFill>
+                            <a:srgbClr val="3A3A3A"/>
+                          </a:solidFill>
+                          <a:latin typeface="맑은 고딕"/>
+                        </a:rPr>
+                        <a:t>72%</a:t>
+                      </a:r>
+                    </a:p>
+                  </a:txBody>
+                  <a:tcPr marL="38100" marR="38100" marT="12700" marB="12700" anchor="ctr">
+                    <a:solidFill>
+                      <a:srgbClr val="FFFFFF"/>
+                    </a:solidFill>
+                  </a:tcPr>
+                </a:tc>
+                <a:tc>
+                  <a:txBody>
+                    <a:bodyPr/>
+                    <a:lstStyle/>
+                    <a:p>
+                      <a:pPr algn="ctr"/>
+                      <a:r>
+                        <a:rPr sz="950" b="0">
+                          <a:solidFill>
+                            <a:srgbClr val="3A3A3A"/>
+                          </a:solidFill>
+                          <a:latin typeface="맑은 고딕"/>
+                        </a:rPr>
+                        <a:t>88%</a:t>
+                      </a:r>
+                    </a:p>
+                  </a:txBody>
+                  <a:tcPr marL="38100" marR="38100" marT="12700" marB="12700" anchor="ctr">
+                    <a:solidFill>
+                      <a:srgbClr val="FFFFFF"/>
+                    </a:solidFill>
+                  </a:tcPr>
+                </a:tc>
+              </a:tr>
+              <a:tr h="301752">
+                <a:tc>
+                  <a:txBody>
+                    <a:bodyPr/>
+                    <a:lstStyle/>
+                    <a:p>
+                      <a:pPr algn="ctr"/>
+                      <a:r>
+                        <a:rPr sz="950" b="1">
+                          <a:solidFill>
+                            <a:srgbClr val="3A3A3A"/>
+                          </a:solidFill>
+                          <a:latin typeface="맑은 고딕"/>
+                        </a:rPr>
+                        <a:t>70</a:t>
+                      </a:r>
+                    </a:p>
+                  </a:txBody>
+                  <a:tcPr marL="38100" marR="38100" marT="12700" marB="12700" anchor="ctr">
+                    <a:solidFill>
+                      <a:srgbClr val="EEF2F7"/>
+                    </a:solidFill>
+                  </a:tcPr>
+                </a:tc>
+                <a:tc>
+                  <a:txBody>
+                    <a:bodyPr/>
+                    <a:lstStyle/>
+                    <a:p>
+                      <a:pPr algn="ctr"/>
+                      <a:r>
+                        <a:rPr sz="950" b="0">
+                          <a:solidFill>
+                            <a:srgbClr val="3A3A3A"/>
+                          </a:solidFill>
+                          <a:latin typeface="맑은 고딕"/>
+                        </a:rPr>
+                        <a:t>60%</a:t>
+                      </a:r>
+                    </a:p>
+                  </a:txBody>
+                  <a:tcPr marL="38100" marR="38100" marT="12700" marB="12700" anchor="ctr">
+                    <a:solidFill>
+                      <a:srgbClr val="EEF2F7"/>
+                    </a:solidFill>
+                  </a:tcPr>
+                </a:tc>
+                <a:tc>
+                  <a:txBody>
+                    <a:bodyPr/>
+                    <a:lstStyle/>
+                    <a:p>
+                      <a:pPr algn="ctr"/>
+                      <a:r>
+                        <a:rPr sz="950" b="0">
+                          <a:solidFill>
+                            <a:srgbClr val="3A3A3A"/>
+                          </a:solidFill>
+                          <a:latin typeface="맑은 고딕"/>
+                        </a:rPr>
+                        <a:t>65%</a:t>
+                      </a:r>
+                    </a:p>
+                  </a:txBody>
+                  <a:tcPr marL="38100" marR="38100" marT="12700" marB="12700" anchor="ctr">
+                    <a:solidFill>
+                      <a:srgbClr val="EEF2F7"/>
+                    </a:solidFill>
+                  </a:tcPr>
+                </a:tc>
+                <a:tc>
+                  <a:txBody>
+                    <a:bodyPr/>
+                    <a:lstStyle/>
+                    <a:p>
+                      <a:pPr algn="ctr"/>
+                      <a:r>
+                        <a:rPr sz="950" b="0">
+                          <a:solidFill>
+                            <a:srgbClr val="3A3A3A"/>
+                          </a:solidFill>
+                          <a:latin typeface="맑은 고딕"/>
+                        </a:rPr>
+                        <a:t>72%</a:t>
+                      </a:r>
+                    </a:p>
+                  </a:txBody>
+                  <a:tcPr marL="38100" marR="38100" marT="12700" marB="12700" anchor="ctr">
+                    <a:solidFill>
+                      <a:srgbClr val="EEF2F7"/>
+                    </a:solidFill>
+                  </a:tcPr>
+                </a:tc>
+                <a:tc>
+                  <a:txBody>
+                    <a:bodyPr/>
+                    <a:lstStyle/>
+                    <a:p>
+                      <a:pPr algn="ctr"/>
+                      <a:r>
+                        <a:rPr sz="950" b="0">
+                          <a:solidFill>
+                            <a:srgbClr val="3A3A3A"/>
+                          </a:solidFill>
+                          <a:latin typeface="맑은 고딕"/>
+                        </a:rPr>
+                        <a:t>84%</a:t>
+                      </a:r>
+                    </a:p>
+                  </a:txBody>
+                  <a:tcPr marL="38100" marR="38100" marT="12700" marB="12700" anchor="ctr">
+                    <a:solidFill>
+                      <a:srgbClr val="EEF2F7"/>
+                    </a:solidFill>
+                  </a:tcPr>
+                </a:tc>
+                <a:tc>
+                  <a:txBody>
+                    <a:bodyPr/>
+                    <a:lstStyle/>
+                    <a:p>
+                      <a:pPr algn="ctr"/>
+                      <a:r>
+                        <a:rPr sz="950" b="0">
+                          <a:solidFill>
+                            <a:srgbClr val="3A3A3A"/>
+                          </a:solidFill>
+                          <a:latin typeface="맑은 고딕"/>
+                        </a:rPr>
+                        <a:t>97%</a:t>
+                      </a:r>
+                    </a:p>
+                  </a:txBody>
+                  <a:tcPr marL="38100" marR="38100" marT="12700" marB="12700" anchor="ctr">
+                    <a:solidFill>
+                      <a:srgbClr val="EEF2F7"/>
+                    </a:solidFill>
+                  </a:tcPr>
+                </a:tc>
+              </a:tr>
+              <a:tr h="301752">
+                <a:tc>
+                  <a:txBody>
+                    <a:bodyPr/>
+                    <a:lstStyle/>
+                    <a:p>
+                      <a:pPr algn="ctr"/>
+                      <a:r>
+                        <a:rPr sz="950" b="1">
+                          <a:solidFill>
+                            <a:srgbClr val="3A3A3A"/>
+                          </a:solidFill>
+                          <a:latin typeface="맑은 고딕"/>
+                        </a:rPr>
+                        <a:t>60</a:t>
+                      </a:r>
+                    </a:p>
+                  </a:txBody>
+                  <a:tcPr marL="38100" marR="38100" marT="12700" marB="12700" anchor="ctr">
+                    <a:solidFill>
+                      <a:srgbClr val="FFFFFF"/>
+                    </a:solidFill>
+                  </a:tcPr>
+                </a:tc>
+                <a:tc>
+                  <a:txBody>
+                    <a:bodyPr/>
+                    <a:lstStyle/>
+                    <a:p>
+                      <a:pPr algn="ctr"/>
+                      <a:r>
+                        <a:rPr sz="950" b="0">
+                          <a:solidFill>
+                            <a:srgbClr val="3A3A3A"/>
+                          </a:solidFill>
+                          <a:latin typeface="맑은 고딕"/>
+                        </a:rPr>
+                        <a:t>69%</a:t>
+                      </a:r>
+                    </a:p>
+                  </a:txBody>
+                  <a:tcPr marL="38100" marR="38100" marT="12700" marB="12700" anchor="ctr">
+                    <a:solidFill>
+                      <a:srgbClr val="FFFFFF"/>
+                    </a:solidFill>
+                  </a:tcPr>
+                </a:tc>
+                <a:tc>
+                  <a:txBody>
+                    <a:bodyPr/>
+                    <a:lstStyle/>
+                    <a:p>
+                      <a:pPr algn="ctr"/>
+                      <a:r>
+                        <a:rPr sz="950" b="0">
+                          <a:solidFill>
+                            <a:srgbClr val="3A3A3A"/>
+                          </a:solidFill>
+                          <a:latin typeface="맑은 고딕"/>
+                        </a:rPr>
+                        <a:t>75%</a:t>
+                      </a:r>
+                    </a:p>
+                  </a:txBody>
+                  <a:tcPr marL="38100" marR="38100" marT="12700" marB="12700" anchor="ctr">
+                    <a:solidFill>
+                      <a:srgbClr val="FFFFFF"/>
+                    </a:solidFill>
+                  </a:tcPr>
+                </a:tc>
+                <a:tc>
+                  <a:txBody>
+                    <a:bodyPr/>
+                    <a:lstStyle/>
+                    <a:p>
+                      <a:pPr algn="ctr"/>
+                      <a:r>
+                        <a:rPr sz="950" b="0">
+                          <a:solidFill>
+                            <a:srgbClr val="3A3A3A"/>
+                          </a:solidFill>
+                          <a:latin typeface="맑은 고딕"/>
+                        </a:rPr>
+                        <a:t>83%</a:t>
+                      </a:r>
+                    </a:p>
+                  </a:txBody>
+                  <a:tcPr marL="38100" marR="38100" marT="12700" marB="12700" anchor="ctr">
+                    <a:solidFill>
+                      <a:srgbClr val="FFFFFF"/>
+                    </a:solidFill>
+                  </a:tcPr>
+                </a:tc>
+                <a:tc>
+                  <a:txBody>
+                    <a:bodyPr/>
+                    <a:lstStyle/>
+                    <a:p>
+                      <a:pPr algn="ctr"/>
+                      <a:r>
+                        <a:rPr sz="950" b="0">
+                          <a:solidFill>
+                            <a:srgbClr val="3A3A3A"/>
+                          </a:solidFill>
+                          <a:latin typeface="맑은 고딕"/>
+                        </a:rPr>
+                        <a:t>93%</a:t>
+                      </a:r>
+                    </a:p>
+                  </a:txBody>
+                  <a:tcPr marL="38100" marR="38100" marT="12700" marB="12700" anchor="ctr">
+                    <a:solidFill>
+                      <a:srgbClr val="FFFFFF"/>
+                    </a:solidFill>
+                  </a:tcPr>
+                </a:tc>
+                <a:tc>
+                  <a:txBody>
+                    <a:bodyPr/>
+                    <a:lstStyle/>
+                    <a:p>
+                      <a:pPr algn="ctr"/>
+                      <a:r>
+                        <a:rPr sz="950" b="0">
+                          <a:solidFill>
+                            <a:srgbClr val="3A3A3A"/>
+                          </a:solidFill>
+                          <a:latin typeface="맑은 고딕"/>
+                        </a:rPr>
+                        <a:t>100%</a:t>
+                      </a:r>
+                    </a:p>
+                  </a:txBody>
+                  <a:tcPr marL="38100" marR="38100" marT="12700" marB="12700" anchor="ctr">
+                    <a:solidFill>
+                      <a:srgbClr val="FFFFFF"/>
+                    </a:solidFill>
+                  </a:tcPr>
+                </a:tc>
+              </a:tr>
+            </a:tbl>
+          </a:graphicData>
+        </a:graphic>
+      </p:graphicFrame>
+      <p:sp>
+        <p:nvSpPr>
+          <p:cNvPr id="11" name="TextBox 10"/>
+          <p:cNvSpPr txBox="1"/>
+          <p:nvPr/>
+        </p:nvSpPr>
+        <p:spPr>
+          <a:xfrm>
+            <a:off x="548640" y="5349240"/>
+            <a:ext cx="8778240" cy="640080"/>
+          </a:xfrm>
+          <a:prstGeom prst="rect">
+            <a:avLst/>
+          </a:prstGeom>
+          <a:noFill/>
+        </p:spPr>
+        <p:txBody>
+          <a:bodyPr wrap="square" anchor="t" lIns="25400" rIns="25400" tIns="12700" bIns="12700">
+            <a:spAutoFit/>
+          </a:bodyPr>
+          <a:lstStyle/>
+          <a:p>
+            <a:pPr algn="l">
+              <a:lnSpc>
+                <a:spcPct val="125000"/>
+              </a:lnSpc>
+            </a:pPr>
+            <a:r>
+              <a:rPr sz="950" b="0">
                 <a:solidFill>
                   <a:srgbClr val="84888B"/>
                 </a:solidFill>
                 <a:latin typeface="맑은 고딕"/>
               </a:rPr>
-              <a:t/>
-            </a:r>
-            <a:r>
-              <a:rPr sz="900" b="0" dirty="0" err="1">
+              <a:t>· 변동성 60%·금리 3%·배당 2% 가정, 지수 10포인트 단위(60~140). 성장형은 지수 60 이하 도달 시 '낙아웃'(하방 완충 소멸) 후 주식형과 유사하게 운용.</a:t>
+            </a:r>
+          </a:p>
+          <a:p>
+            <a:pPr algn="l">
+              <a:lnSpc>
+                <a:spcPct val="125000"/>
+              </a:lnSpc>
+            </a:pPr>
+            <a:r>
+              <a:rPr sz="950" b="0">
                 <a:solidFill>
                   <a:srgbClr val="84888B"/>
                 </a:solidFill>
                 <a:latin typeface="맑은 고딕"/>
               </a:rPr>
-              <a:t/>
-            </a:r>
-            <a:r>
-              <a:rPr sz="900" b="0" dirty="0">
-                <a:solidFill>
-                  <a:srgbClr val="84888B"/>
-                </a:solidFill>
-                <a:latin typeface="맑은 고딕"/>
-              </a:rPr>
-              <a:t/>
-            </a:r>
-            <a:r>
-              <a:rPr sz="900" b="0" dirty="0" err="1">
-                <a:solidFill>
-                  <a:srgbClr val="84888B"/>
-                </a:solidFill>
-                <a:latin typeface="맑은 고딕"/>
-              </a:rPr>
-              <a:t/>
-            </a:r>
-            <a:r>
-              <a:rPr sz="900" b="0" dirty="0">
-                <a:solidFill>
-                  <a:srgbClr val="84888B"/>
-                </a:solidFill>
-                <a:latin typeface="맑은 고딕"/>
-              </a:rPr>
-              <a:t/>
-            </a:r>
-            <a:r>
-              <a:rPr sz="900" b="0" dirty="0" err="1">
-                <a:solidFill>
-                  <a:srgbClr val="84888B"/>
-                </a:solidFill>
-                <a:latin typeface="맑은 고딕"/>
-              </a:rPr>
-              <a:t/>
-            </a:r>
-            <a:r>
-              <a:rPr sz="900" b="0" dirty="0">
-                <a:solidFill>
-                  <a:srgbClr val="84888B"/>
-                </a:solidFill>
-                <a:latin typeface="맑은 고딕"/>
-              </a:rPr>
-              <a:t/>
-            </a:r>
-            <a:r>
-              <a:rPr sz="900" b="1" dirty="0" err="1">
-                <a:solidFill>
-                  <a:srgbClr val="F58220"/>
-                </a:solidFill>
-                <a:latin typeface="맑은 고딕"/>
-              </a:rPr>
-              <a:t/>
-            </a:r>
-            <a:r>
-              <a:rPr sz="900" b="1" dirty="0">
-                <a:solidFill>
-                  <a:srgbClr val="F58220"/>
-                </a:solidFill>
-                <a:latin typeface="맑은 고딕"/>
-              </a:rPr>
-              <a:t/>
-            </a:r>
-            <a:r>
-              <a:rPr sz="900" b="1" dirty="0" err="1">
-                <a:solidFill>
-                  <a:srgbClr val="F58220"/>
-                </a:solidFill>
-                <a:latin typeface="맑은 고딕"/>
-              </a:rPr>
-              <a:t/>
-            </a:r>
-            <a:r>
-              <a:rPr sz="900" b="1" dirty="0">
-                <a:solidFill>
-                  <a:srgbClr val="F58220"/>
-                </a:solidFill>
-                <a:latin typeface="맑은 고딕"/>
-              </a:rPr>
-              <a:t/>
-            </a:r>
-            <a:r>
-              <a:rPr sz="900" b="1" dirty="0" err="1">
-                <a:solidFill>
-                  <a:srgbClr val="F58220"/>
-                </a:solidFill>
-                <a:latin typeface="맑은 고딕"/>
-              </a:rPr>
-              <a:t/>
-            </a:r>
-            <a:r>
-              <a:rPr sz="900" b="0" dirty="0">
-                <a:solidFill>
-                  <a:srgbClr val="84888B"/>
-                </a:solidFill>
-                <a:latin typeface="맑은 고딕"/>
-              </a:rPr>
-              <a:t/>
-            </a:r>
-            <a:r>
-              <a:rPr sz="900" b="0" dirty="0" err="1">
-                <a:solidFill>
-                  <a:srgbClr val="84888B"/>
-                </a:solidFill>
-                <a:latin typeface="맑은 고딕"/>
-              </a:rPr>
-              <a:t/>
-            </a:r>
-            <a:r>
-              <a:rPr sz="900" b="0" dirty="0">
-                <a:solidFill>
-                  <a:srgbClr val="84888B"/>
-                </a:solidFill>
-                <a:latin typeface="맑은 고딕"/>
-              </a:rPr>
-              <a:t/>
-            </a:r>
-            <a:r>
-              <a:rPr sz="900" b="0" dirty="0" err="1">
-                <a:solidFill>
-                  <a:srgbClr val="84888B"/>
-                </a:solidFill>
-                <a:latin typeface="맑은 고딕"/>
-              </a:rPr>
-              <a:t/>
-            </a:r>
-            <a:r>
-              <a:rPr sz="900" b="0" dirty="0">
-                <a:solidFill>
-                  <a:srgbClr val="84888B"/>
-                </a:solidFill>
-                <a:latin typeface="맑은 고딕"/>
-              </a:rPr>
-              <a:t/>
-            </a:r>
-            <a:r>
-              <a:rPr sz="900" b="0" dirty="0" err="1">
-                <a:solidFill>
-                  <a:srgbClr val="84888B"/>
-                </a:solidFill>
-                <a:latin typeface="맑은 고딕"/>
-              </a:rPr>
-              <a:t/>
-            </a:r>
-            <a:r>
-              <a:rPr sz="900" b="0" dirty="0">
-                <a:solidFill>
-                  <a:srgbClr val="84888B"/>
-                </a:solidFill>
-                <a:latin typeface="맑은 고딕"/>
-              </a:rPr>
-              <a:t/>
-            </a:r>
-            <a:r>
-              <a:rPr sz="900" b="0" dirty="0" err="1">
-                <a:solidFill>
-                  <a:srgbClr val="84888B"/>
-                </a:solidFill>
-                <a:latin typeface="맑은 고딕"/>
-              </a:rPr>
-              <a:t/>
-            </a:r>
-            <a:r>
-              <a:rPr sz="900" b="0" dirty="0">
-                <a:solidFill>
-                  <a:srgbClr val="84888B"/>
-                </a:solidFill>
-                <a:latin typeface="맑은 고딕"/>
-              </a:rPr>
-              <a:t/>
-            </a:r>
-            <a:r>
-              <a:rPr sz="900" b="0" dirty="0" err="1">
-                <a:solidFill>
-                  <a:srgbClr val="84888B"/>
-                </a:solidFill>
-                <a:latin typeface="맑은 고딕"/>
-              </a:rPr>
-              <a:t/>
-            </a:r>
-            <a:r>
-              <a:rPr sz="900" b="0" dirty="0">
-                <a:solidFill>
-                  <a:srgbClr val="84888B"/>
-                </a:solidFill>
-                <a:latin typeface="맑은 고딕"/>
-              </a:rPr>
-              <a:t/>
+              <a:t>· 표의 편입비는 모형상 목표치이며, 실제 운용에서는 자체 드리프트·거래비용을 감안해 소폭 다를 수 있습니다.</a:t>
             </a:r>
           </a:p>
         </p:txBody>
       </p:sp>
       <p:sp>
         <p:nvSpPr>
-          <p:cNvPr id="10" name="TextBox 9"/>
+          <p:cNvPr id="12" name="TextBox 11"/>
           <p:cNvSpPr txBox="1"/>
           <p:nvPr/>
         </p:nvSpPr>
@@ -10636,7 +13258,7 @@
           <a:noFill/>
         </p:spPr>
         <p:txBody>
-          <a:bodyPr wrap="square" lIns="25400" tIns="12700" rIns="25400" bIns="12700" anchor="t">
+          <a:bodyPr wrap="square" anchor="t" lIns="25400" rIns="25400" tIns="12700" bIns="12700">
             <a:spAutoFit/>
           </a:bodyPr>
           <a:lstStyle/>
@@ -10658,429 +13280,6 @@
           </a:p>
         </p:txBody>
       </p:sp>
-      <p:sp>
-        <p:nvSpPr>
-          <p:cNvPr id="11" name="TextBox 10"/>
-          <p:cNvSpPr txBox="1"/>
-          <p:nvPr/>
-        </p:nvSpPr>
-        <p:spPr>
-          <a:xfrm>
-            <a:off x="9052560" y="6510528"/>
-            <a:ext cx="548640" cy="292608"/>
-          </a:xfrm>
-          <a:prstGeom prst="rect">
-            <a:avLst/>
-          </a:prstGeom>
-          <a:noFill/>
-        </p:spPr>
-        <p:txBody>
-          <a:bodyPr wrap="square" lIns="25400" tIns="12700" rIns="25400" bIns="12700" anchor="t">
-            <a:spAutoFit/>
-          </a:bodyPr>
-          <a:lstStyle/>
-          <a:p>
-            <a:pPr algn="r">
-              <a:lnSpc>
-                <a:spcPct val="100000"/>
-              </a:lnSpc>
-            </a:pPr>
-            <a:r>
-              <a:rPr sz="900" b="1">
-                <a:solidFill>
-                  <a:srgbClr val="84888B"/>
-                </a:solidFill>
-                <a:latin typeface="맑은 고딕"/>
-              </a:rPr>
-              <a:t>11</a:t>
-            </a:r>
-          </a:p>
-        </p:txBody>
-      </p:sp>
-      <p:sp>
-        <p:nvSpPr>
-          <p:cNvPr id="12" name="Rectangle 11"/>
-          <p:cNvSpPr/>
-          <p:nvPr/>
-        </p:nvSpPr>
-        <p:spPr>
-          <a:xfrm>
-            <a:off x="685800" y="5318819"/>
-            <a:ext cx="8503920" cy="731520"/>
-          </a:xfrm>
-          <a:prstGeom prst="rect">
-            <a:avLst/>
-          </a:prstGeom>
-          <a:solidFill>
-            <a:srgbClr val="FDF1E6"/>
-          </a:solidFill>
-          <a:ln>
-            <a:noFill/>
-          </a:ln>
-          <a:effectLst/>
-        </p:spPr>
-        <p:style>
-          <a:lnRef idx="1">
-            <a:schemeClr val="accent1"/>
-          </a:lnRef>
-          <a:fillRef idx="3">
-            <a:schemeClr val="accent1"/>
-          </a:fillRef>
-          <a:effectRef idx="2">
-            <a:schemeClr val="accent1"/>
-          </a:effectRef>
-          <a:fontRef idx="minor">
-            <a:schemeClr val="lt1"/>
-          </a:fontRef>
-        </p:style>
-        <p:txBody>
-          <a:bodyPr rtlCol="0" anchor="ctr"/>
-          <a:lstStyle/>
-          <a:p>
-            <a:pPr algn="ctr"/>
-            <a:endParaRPr/>
-          </a:p>
-        </p:txBody>
-      </p:sp>
-      <p:sp>
-        <p:nvSpPr>
-          <p:cNvPr id="13" name="TextBox 12"/>
-          <p:cNvSpPr txBox="1"/>
-          <p:nvPr/>
-        </p:nvSpPr>
-        <p:spPr>
-          <a:xfrm>
-            <a:off x="914400" y="5373683"/>
-            <a:ext cx="8138160" cy="731520"/>
-          </a:xfrm>
-          <a:prstGeom prst="rect">
-            <a:avLst/>
-          </a:prstGeom>
-          <a:noFill/>
-        </p:spPr>
-        <p:txBody>
-          <a:bodyPr wrap="square" anchor="ctr">
-            <a:spAutoFit/>
-          </a:bodyPr>
-          <a:lstStyle/>
-          <a:p>
-            <a:pPr>
-              <a:lnSpc>
-                <a:spcPct val="110000"/>
-              </a:lnSpc>
-            </a:pPr>
-            <a:r>
-              <a:rPr sz="1300" b="1" dirty="0">
-                <a:solidFill>
-                  <a:srgbClr val="F58220"/>
-                </a:solidFill>
-                <a:latin typeface="맑은 고딕"/>
-              </a:rPr>
-              <a:t>※ -40% </a:t>
-            </a:r>
-            <a:r>
-              <a:rPr sz="1300" b="1" dirty="0" err="1">
-                <a:solidFill>
-                  <a:srgbClr val="F58220"/>
-                </a:solidFill>
-                <a:latin typeface="맑은 고딕"/>
-              </a:rPr>
-              <a:t>도달</a:t>
-            </a:r>
-            <a:r>
-              <a:rPr sz="1300" b="1" dirty="0">
-                <a:solidFill>
-                  <a:srgbClr val="F58220"/>
-                </a:solidFill>
-                <a:latin typeface="맑은 고딕"/>
-              </a:rPr>
-              <a:t> </a:t>
-            </a:r>
-            <a:r>
-              <a:rPr sz="1300" b="1" dirty="0" err="1">
-                <a:solidFill>
-                  <a:srgbClr val="F58220"/>
-                </a:solidFill>
-                <a:latin typeface="맑은 고딕"/>
-              </a:rPr>
-              <a:t>시에는</a:t>
-            </a:r>
-            <a:r>
-              <a:rPr sz="1300" b="1" dirty="0">
-                <a:solidFill>
-                  <a:srgbClr val="F58220"/>
-                </a:solidFill>
-                <a:latin typeface="맑은 고딕"/>
-              </a:rPr>
-              <a:t> </a:t>
-            </a:r>
-            <a:r>
-              <a:rPr sz="1300" b="1" dirty="0" err="1">
-                <a:solidFill>
-                  <a:srgbClr val="3A3A3A"/>
-                </a:solidFill>
-                <a:latin typeface="맑은 고딕"/>
-              </a:rPr>
-              <a:t>상승에</a:t>
-            </a:r>
-            <a:r>
-              <a:rPr sz="1300" b="1" dirty="0">
-                <a:solidFill>
-                  <a:srgbClr val="3A3A3A"/>
-                </a:solidFill>
-                <a:latin typeface="맑은 고딕"/>
-              </a:rPr>
-              <a:t> </a:t>
-            </a:r>
-            <a:r>
-              <a:rPr sz="1300" b="1" dirty="0" err="1">
-                <a:solidFill>
-                  <a:srgbClr val="3A3A3A"/>
-                </a:solidFill>
-                <a:latin typeface="맑은 고딕"/>
-              </a:rPr>
-              <a:t>따른</a:t>
-            </a:r>
-            <a:r>
-              <a:rPr sz="1300" b="1" dirty="0">
-                <a:solidFill>
-                  <a:srgbClr val="3A3A3A"/>
-                </a:solidFill>
-                <a:latin typeface="맑은 고딕"/>
-              </a:rPr>
-              <a:t> </a:t>
-            </a:r>
-            <a:r>
-              <a:rPr sz="1300" b="1" dirty="0" err="1">
-                <a:solidFill>
-                  <a:srgbClr val="3A3A3A"/>
-                </a:solidFill>
-                <a:latin typeface="맑은 고딕"/>
-              </a:rPr>
-              <a:t>수익을</a:t>
-            </a:r>
-            <a:r>
-              <a:rPr sz="1300" b="1" dirty="0">
-                <a:solidFill>
-                  <a:srgbClr val="3A3A3A"/>
-                </a:solidFill>
-                <a:latin typeface="맑은 고딕"/>
-              </a:rPr>
-              <a:t> </a:t>
-            </a:r>
-            <a:r>
-              <a:rPr sz="1300" b="1" dirty="0" err="1">
-                <a:solidFill>
-                  <a:srgbClr val="3A3A3A"/>
-                </a:solidFill>
-                <a:latin typeface="맑은 고딕"/>
-              </a:rPr>
-              <a:t>수취하기</a:t>
-            </a:r>
-            <a:r>
-              <a:rPr sz="1300" b="1" dirty="0">
-                <a:solidFill>
-                  <a:srgbClr val="3A3A3A"/>
-                </a:solidFill>
-                <a:latin typeface="맑은 고딕"/>
-              </a:rPr>
-              <a:t> </a:t>
-            </a:r>
-            <a:r>
-              <a:rPr sz="1300" b="1" dirty="0" err="1">
-                <a:solidFill>
-                  <a:srgbClr val="3A3A3A"/>
-                </a:solidFill>
-                <a:latin typeface="맑은 고딕"/>
-              </a:rPr>
-              <a:t>위해</a:t>
-            </a:r>
-            <a:r>
-              <a:rPr sz="1300" b="1" dirty="0">
-                <a:solidFill>
-                  <a:srgbClr val="3A3A3A"/>
-                </a:solidFill>
-                <a:latin typeface="맑은 고딕"/>
-              </a:rPr>
-              <a:t> </a:t>
-            </a:r>
-            <a:r>
-              <a:rPr sz="1300" b="1" dirty="0" err="1">
-                <a:solidFill>
-                  <a:srgbClr val="3A3A3A"/>
-                </a:solidFill>
-                <a:latin typeface="맑은 고딕"/>
-              </a:rPr>
-              <a:t>변동성</a:t>
-            </a:r>
-            <a:r>
-              <a:rPr sz="1300" b="1" dirty="0">
-                <a:solidFill>
-                  <a:srgbClr val="3A3A3A"/>
-                </a:solidFill>
-                <a:latin typeface="맑은 고딕"/>
-              </a:rPr>
-              <a:t> </a:t>
-            </a:r>
-            <a:r>
-              <a:rPr sz="1300" b="1" dirty="0" err="1">
-                <a:solidFill>
-                  <a:srgbClr val="3A3A3A"/>
-                </a:solidFill>
-                <a:latin typeface="맑은 고딕"/>
-              </a:rPr>
-              <a:t>매매를</a:t>
-            </a:r>
-            <a:r>
-              <a:rPr sz="1300" b="1" dirty="0">
-                <a:solidFill>
-                  <a:srgbClr val="3A3A3A"/>
-                </a:solidFill>
-                <a:latin typeface="맑은 고딕"/>
-              </a:rPr>
-              <a:t> </a:t>
-            </a:r>
-            <a:r>
-              <a:rPr sz="1300" b="1" dirty="0" err="1">
-                <a:solidFill>
-                  <a:srgbClr val="3A3A3A"/>
-                </a:solidFill>
-                <a:latin typeface="맑은 고딕"/>
-              </a:rPr>
-              <a:t>수행하지</a:t>
-            </a:r>
-            <a:r>
-              <a:rPr sz="1300" b="1" dirty="0">
-                <a:solidFill>
-                  <a:srgbClr val="3A3A3A"/>
-                </a:solidFill>
-                <a:latin typeface="맑은 고딕"/>
-              </a:rPr>
-              <a:t> </a:t>
-            </a:r>
-            <a:r>
-              <a:rPr sz="1300" b="1" dirty="0" err="1">
-                <a:solidFill>
-                  <a:srgbClr val="3A3A3A"/>
-                </a:solidFill>
-                <a:latin typeface="맑은 고딕"/>
-              </a:rPr>
-              <a:t>않으며</a:t>
-            </a:r>
-            <a:r>
-              <a:rPr sz="1300" b="1" dirty="0">
-                <a:solidFill>
-                  <a:srgbClr val="3A3A3A"/>
-                </a:solidFill>
-                <a:latin typeface="맑은 고딕"/>
-              </a:rPr>
-              <a:t>, </a:t>
-            </a:r>
-            <a:r>
-              <a:rPr sz="1300" b="1" dirty="0" err="1">
-                <a:solidFill>
-                  <a:srgbClr val="3A3A3A"/>
-                </a:solidFill>
-                <a:latin typeface="맑은 고딕"/>
-              </a:rPr>
-              <a:t>주식형과</a:t>
-            </a:r>
-            <a:r>
-              <a:rPr sz="1300" b="1" dirty="0">
-                <a:solidFill>
-                  <a:srgbClr val="3A3A3A"/>
-                </a:solidFill>
-                <a:latin typeface="맑은 고딕"/>
-              </a:rPr>
-              <a:t> </a:t>
-            </a:r>
-            <a:r>
-              <a:rPr sz="1300" b="1" dirty="0" err="1">
-                <a:solidFill>
-                  <a:srgbClr val="3A3A3A"/>
-                </a:solidFill>
-                <a:latin typeface="맑은 고딕"/>
-              </a:rPr>
-              <a:t>유사하게</a:t>
-            </a:r>
-            <a:r>
-              <a:rPr sz="1300" b="1" dirty="0">
-                <a:solidFill>
-                  <a:srgbClr val="3A3A3A"/>
-                </a:solidFill>
-                <a:latin typeface="맑은 고딕"/>
-              </a:rPr>
-              <a:t> </a:t>
-            </a:r>
-            <a:r>
-              <a:rPr sz="1300" b="1" dirty="0" err="1">
-                <a:solidFill>
-                  <a:srgbClr val="3A3A3A"/>
-                </a:solidFill>
-                <a:latin typeface="맑은 고딕"/>
-              </a:rPr>
-              <a:t>운용됩니다</a:t>
-            </a:r>
-            <a:r>
-              <a:rPr sz="1300" b="1" dirty="0">
-                <a:solidFill>
-                  <a:srgbClr val="3A3A3A"/>
-                </a:solidFill>
-                <a:latin typeface="맑은 고딕"/>
-              </a:rPr>
-              <a:t>.</a:t>
-            </a:r>
-          </a:p>
-        </p:txBody>
-      </p:sp>
-      <p:pic>
-        <p:nvPicPr>
-          <p:cNvPr id="16" name="Picture 15" descr="scat_top2_growth_nt.png"/>
-          <p:cNvPicPr>
-            <a:picLocks noChangeAspect="1"/>
-          </p:cNvPicPr>
-          <p:nvPr/>
-        </p:nvPicPr>
-        <p:blipFill>
-          <a:blip r:embed="rId4"/>
-          <a:stretch>
-            <a:fillRect/>
-          </a:stretch>
-        </p:blipFill>
-        <p:spPr>
-          <a:xfrm>
-            <a:off x="320040" y="1417321"/>
-            <a:ext cx="4526280" cy="3650039"/>
-          </a:xfrm>
-          <a:prstGeom prst="rect">
-            <a:avLst/>
-          </a:prstGeom>
-        </p:spPr>
-      </p:pic>
-      <p:pic>
-        <p:nvPicPr>
-          <p:cNvPr id="17" name="Picture 16" descr="scat_top2_growth_t.png"/>
-          <p:cNvPicPr>
-            <a:picLocks noChangeAspect="1"/>
-          </p:cNvPicPr>
-          <p:nvPr/>
-        </p:nvPicPr>
-        <p:blipFill>
-          <a:blip r:embed="rId5"/>
-          <a:stretch>
-            <a:fillRect/>
-          </a:stretch>
-        </p:blipFill>
-        <p:spPr>
-          <a:xfrm>
-            <a:off x="4983480" y="1417321"/>
-            <a:ext cx="4526280" cy="3650039"/>
-          </a:xfrm>
-          <a:prstGeom prst="rect">
-            <a:avLst/>
-          </a:prstGeom>
-        </p:spPr>
-      </p:pic>
     </p:spTree>
   </p:cSld>
   <p:clrMapOvr>
@@ -11204,8 +13403,8 @@
         </p:nvSpPr>
         <p:spPr>
           <a:xfrm>
-            <a:off x="685800" y="393192"/>
-            <a:ext cx="8229600" cy="320040"/>
+            <a:off x="585216" y="342021"/>
+            <a:ext cx="8229600" cy="210314"/>
           </a:xfrm>
           <a:prstGeom prst="rect">
             <a:avLst/>
@@ -11230,7 +13429,25 @@
                 </a:solidFill>
                 <a:latin typeface="맑은 고딕"/>
               </a:rPr>
-              <a:t>10  PAYOFF</a:t>
+              <a:t>0</a:t>
+            </a:r>
+            <a:r>
+              <a:rPr lang="en-US" altLang="ko-KR" sz="1200" b="1" dirty="0">
+                <a:solidFill>
+                  <a:srgbClr val="F58220"/>
+                </a:solidFill>
+                <a:latin typeface="맑은 고딕"/>
+              </a:rPr>
+              <a:t>8</a:t>
+            </a:r>
+            <a:r>
+              <a:rPr sz="1200" b="1" dirty="0">
+                <a:solidFill>
+                  <a:srgbClr val="F58220"/>
+                </a:solidFill>
+                <a:latin typeface="맑은 고딕"/>
+              </a:rPr>
+              <a:t>  PAYOFF</a:t>
             </a:r>
           </a:p>
         </p:txBody>
@@ -11243,7 +13460,7 @@
         </p:nvSpPr>
         <p:spPr>
           <a:xfrm>
-            <a:off x="685800" y="630936"/>
+            <a:off x="640080" y="585328"/>
             <a:ext cx="8686800" cy="379591"/>
           </a:xfrm>
           <a:prstGeom prst="rect">
@@ -11287,7 +13504,7 @@
                 </a:solidFill>
                 <a:latin typeface="맑은 고딕"/>
               </a:rPr>
-              <a:t>2</a:t>
+              <a:t>1</a:t>
             </a:r>
             <a:r>
               <a:rPr sz="2300" b="1" dirty="0">
@@ -11305,7 +13522,7 @@
                 </a:solidFill>
                 <a:latin typeface="맑은 고딕"/>
               </a:rPr>
-              <a:t>안정변동성펀드</a:t>
+              <a:t>성장변동성펀드</a:t>
             </a:r>
             <a:r>
               <a:rPr sz="2300" b="1" dirty="0">
@@ -11323,7 +13540,7 @@
                 </a:solidFill>
                 <a:latin typeface="맑은 고딕"/>
               </a:rPr>
-              <a:t>안정</a:t>
+              <a:t>변동성</a:t>
             </a:r>
             <a:r>
               <a:rPr sz="2300" b="1" dirty="0">
@@ -11341,7 +13558,7 @@
                 </a:solidFill>
                 <a:latin typeface="맑은 고딕"/>
               </a:rPr>
-              <a:t>변동성</a:t>
+              <a:t>매매</a:t>
             </a:r>
             <a:r>
               <a:rPr sz="2300" b="1" dirty="0">
@@ -11350,6 +13567,24 @@
                 </a:solidFill>
                 <a:latin typeface="맑은 고딕"/>
               </a:rPr>
+              <a:t> + </a:t>
+            </a:r>
+            <a:r>
+              <a:rPr sz="2300" b="1" dirty="0" err="1">
+                <a:solidFill>
+                  <a:srgbClr val="043B72"/>
+                </a:solidFill>
+                <a:latin typeface="맑은 고딕"/>
+              </a:rPr>
+              <a:t>상승</a:t>
+            </a:r>
+            <a:r>
+              <a:rPr sz="2300" b="1" dirty="0">
+                <a:solidFill>
+                  <a:srgbClr val="043B72"/>
+                </a:solidFill>
+                <a:latin typeface="맑은 고딕"/>
+              </a:rPr>
               <a:t> </a:t>
             </a:r>
             <a:r>
@@ -11359,7 +13594,7 @@
                 </a:solidFill>
                 <a:latin typeface="맑은 고딕"/>
               </a:rPr>
-              <a:t>매매</a:t>
+              <a:t>참여</a:t>
             </a:r>
             <a:r>
               <a:rPr sz="2300" b="1" dirty="0">
@@ -11381,8 +13616,8 @@
         </p:nvSpPr>
         <p:spPr>
           <a:xfrm>
-            <a:off x="685800" y="1005840"/>
-            <a:ext cx="8686800" cy="225703"/>
+            <a:off x="685800" y="960120"/>
+            <a:ext cx="8686800" cy="365760"/>
           </a:xfrm>
           <a:prstGeom prst="rect">
             <a:avLst/>
@@ -11401,221 +13636,26 @@
               </a:lnSpc>
             </a:pPr>
             <a:r>
-              <a:rPr sz="1300" b="1" dirty="0" err="1">
+              <a:rPr sz="1250" b="1">
                 <a:solidFill>
                   <a:srgbClr val="3A3A3A"/>
                 </a:solidFill>
                 <a:latin typeface="맑은 고딕"/>
               </a:rPr>
-              <a:t>보합·상승</a:t>
-            </a:r>
-            <a:r>
-              <a:rPr sz="1300" b="1" dirty="0">
-                <a:solidFill>
-                  <a:srgbClr val="3A3A3A"/>
-                </a:solidFill>
-                <a:latin typeface="맑은 고딕"/>
-              </a:rPr>
-              <a:t> </a:t>
-            </a:r>
-            <a:r>
-              <a:rPr sz="1300" b="1" dirty="0" err="1">
-                <a:solidFill>
-                  <a:srgbClr val="3A3A3A"/>
-                </a:solidFill>
-                <a:latin typeface="맑은 고딕"/>
-              </a:rPr>
-              <a:t>구간에서</a:t>
-            </a:r>
-            <a:r>
-              <a:rPr sz="1300" b="1" dirty="0">
-                <a:solidFill>
-                  <a:srgbClr val="3A3A3A"/>
-                </a:solidFill>
-                <a:latin typeface="맑은 고딕"/>
-              </a:rPr>
-              <a:t> </a:t>
-            </a:r>
-            <a:r>
-              <a:rPr sz="1300" b="1" dirty="0" err="1">
-                <a:solidFill>
-                  <a:srgbClr val="3A3A3A"/>
-                </a:solidFill>
-                <a:latin typeface="맑은 고딕"/>
-              </a:rPr>
-              <a:t>변동성</a:t>
-            </a:r>
-            <a:r>
-              <a:rPr sz="1300" b="1" dirty="0">
-                <a:solidFill>
-                  <a:srgbClr val="3A3A3A"/>
-                </a:solidFill>
-                <a:latin typeface="맑은 고딕"/>
-              </a:rPr>
-              <a:t> </a:t>
-            </a:r>
-            <a:r>
-              <a:rPr sz="1300" b="1" dirty="0" err="1">
-                <a:solidFill>
-                  <a:srgbClr val="3A3A3A"/>
-                </a:solidFill>
-                <a:latin typeface="맑은 고딕"/>
-              </a:rPr>
-              <a:t>매매</a:t>
-            </a:r>
-            <a:r>
-              <a:rPr sz="1300" b="1" dirty="0">
-                <a:solidFill>
-                  <a:srgbClr val="3A3A3A"/>
-                </a:solidFill>
-                <a:latin typeface="맑은 고딕"/>
-              </a:rPr>
-              <a:t> </a:t>
-            </a:r>
-            <a:r>
-              <a:rPr sz="1300" b="1" dirty="0" err="1">
-                <a:solidFill>
-                  <a:srgbClr val="3A3A3A"/>
-                </a:solidFill>
-                <a:latin typeface="맑은 고딕"/>
-              </a:rPr>
-              <a:t>수익을</a:t>
-            </a:r>
-            <a:r>
-              <a:rPr sz="1300" b="1" dirty="0">
-                <a:solidFill>
-                  <a:srgbClr val="3A3A3A"/>
-                </a:solidFill>
-                <a:latin typeface="맑은 고딕"/>
-              </a:rPr>
-              <a:t> </a:t>
-            </a:r>
-            <a:r>
-              <a:rPr sz="1300" b="1" dirty="0" err="1">
-                <a:solidFill>
-                  <a:srgbClr val="3A3A3A"/>
-                </a:solidFill>
-                <a:latin typeface="맑은 고딕"/>
-              </a:rPr>
-              <a:t>안정적으로</a:t>
-            </a:r>
-            <a:r>
-              <a:rPr sz="1300" b="1" dirty="0">
-                <a:solidFill>
-                  <a:srgbClr val="3A3A3A"/>
-                </a:solidFill>
-                <a:latin typeface="맑은 고딕"/>
-              </a:rPr>
-              <a:t> </a:t>
-            </a:r>
-            <a:r>
-              <a:rPr sz="1300" b="1" dirty="0" err="1">
-                <a:solidFill>
-                  <a:srgbClr val="3A3A3A"/>
-                </a:solidFill>
-                <a:latin typeface="맑은 고딕"/>
-              </a:rPr>
-              <a:t>확보</a:t>
-            </a:r>
-            <a:r>
-              <a:rPr sz="1300" b="1" dirty="0">
-                <a:solidFill>
-                  <a:srgbClr val="3A3A3A"/>
-                </a:solidFill>
-                <a:latin typeface="맑은 고딕"/>
-              </a:rPr>
-              <a:t>(</a:t>
-            </a:r>
-            <a:r>
-              <a:rPr sz="1300" b="1" dirty="0" err="1">
-                <a:solidFill>
-                  <a:srgbClr val="3A3A3A"/>
-                </a:solidFill>
-                <a:latin typeface="맑은 고딕"/>
-              </a:rPr>
-              <a:t>상단</a:t>
-            </a:r>
-            <a:r>
-              <a:rPr sz="1300" b="1" dirty="0">
-                <a:solidFill>
-                  <a:srgbClr val="3A3A3A"/>
-                </a:solidFill>
-                <a:latin typeface="맑은 고딕"/>
-              </a:rPr>
-              <a:t> </a:t>
-            </a:r>
-            <a:r>
-              <a:rPr sz="1300" b="1" dirty="0" err="1">
-                <a:solidFill>
-                  <a:srgbClr val="3A3A3A"/>
-                </a:solidFill>
-                <a:latin typeface="맑은 고딕"/>
-              </a:rPr>
-              <a:t>고정</a:t>
-            </a:r>
-            <a:r>
-              <a:rPr sz="1300" b="1" dirty="0">
-                <a:solidFill>
-                  <a:srgbClr val="3A3A3A"/>
-                </a:solidFill>
-                <a:latin typeface="맑은 고딕"/>
-              </a:rPr>
-              <a:t>), </a:t>
-            </a:r>
-            <a:r>
-              <a:rPr lang="ko-KR" altLang="en-US" sz="1300" b="1" dirty="0">
-                <a:solidFill>
-                  <a:srgbClr val="3A3A3A"/>
-                </a:solidFill>
-                <a:latin typeface="맑은 고딕"/>
-              </a:rPr>
-              <a:t>단</a:t>
-            </a:r>
-            <a:r>
-              <a:rPr lang="en-US" altLang="ko-KR" sz="1300" b="1" dirty="0">
-                <a:solidFill>
-                  <a:srgbClr val="3A3A3A"/>
-                </a:solidFill>
-                <a:latin typeface="맑은 고딕"/>
-              </a:rPr>
-              <a:t>,</a:t>
-            </a:r>
-            <a:r>
-              <a:rPr lang="ko-KR" altLang="en-US" sz="1300" b="1" dirty="0">
-                <a:solidFill>
-                  <a:srgbClr val="3A3A3A"/>
-                </a:solidFill>
-                <a:latin typeface="맑은 고딕"/>
-              </a:rPr>
-              <a:t> 상승이 제한됩니다</a:t>
-            </a:r>
-            <a:r>
-              <a:rPr lang="en-US" altLang="ko-KR" sz="1300" b="1" dirty="0">
-                <a:solidFill>
-                  <a:srgbClr val="3A3A3A"/>
-                </a:solidFill>
-                <a:latin typeface="맑은 고딕"/>
-              </a:rPr>
-              <a:t>.</a:t>
-            </a:r>
-            <a:endParaRPr sz="1300" b="1" dirty="0">
-              <a:solidFill>
-                <a:srgbClr val="3A3A3A"/>
-              </a:solidFill>
-              <a:latin typeface="맑은 고딕"/>
-            </a:endParaRPr>
+              <a:t>운용 중 -40% 미도달 시 상승에 참여, -40% 도달 시 하방에 노출됩니다. 시뮬레이션 결과(각 점=1회).</a:t>
+            </a:r>
           </a:p>
         </p:txBody>
       </p:sp>
       <p:sp>
         <p:nvSpPr>
-          <p:cNvPr id="8" name="TextBox 7"/>
+          <p:cNvPr id="9" name="TextBox 8"/>
           <p:cNvSpPr txBox="1"/>
           <p:nvPr/>
         </p:nvSpPr>
         <p:spPr>
           <a:xfrm>
-            <a:off x="1280160" y="5556144"/>
+            <a:off x="777240" y="5004936"/>
             <a:ext cx="8595360" cy="365760"/>
           </a:xfrm>
           <a:prstGeom prst="rect">
@@ -11635,38 +13675,227 @@
               </a:lnSpc>
             </a:pPr>
             <a:r>
-              <a:rPr sz="900" b="0">
+              <a:rPr sz="900" b="0" dirty="0" err="1">
                 <a:solidFill>
                   <a:srgbClr val="84888B"/>
                 </a:solidFill>
                 <a:latin typeface="맑은 고딕"/>
               </a:rPr>
-              <a:t>변동성 60% 가정 · 점=시뮬 1회 · </a:t>
-            </a:r>
-            <a:r>
-              <a:rPr sz="900" b="1">
+              <a:t>변동성 60% 가정 · 점=시뮬 1회 · 노란선=구간 평균 · 데이터: 자체 시뮬레이션(거래비용·운용오차 포함)</a:t>
+            </a:r>
+            <a:r>
+              <a:rPr sz="900" b="0" dirty="0">
+                <a:solidFill>
+                  <a:srgbClr val="84888B"/>
+                </a:solidFill>
+                <a:latin typeface="맑은 고딕"/>
+              </a:rPr>
+              <a:t/>
+            </a:r>
+            <a:r>
+              <a:rPr sz="900" b="0" dirty="0" err="1">
+                <a:solidFill>
+                  <a:srgbClr val="84888B"/>
+                </a:solidFill>
+                <a:latin typeface="맑은 고딕"/>
+              </a:rPr>
+              <a:t/>
+            </a:r>
+            <a:r>
+              <a:rPr sz="900" b="0" dirty="0">
+                <a:solidFill>
+                  <a:srgbClr val="84888B"/>
+                </a:solidFill>
+                <a:latin typeface="맑은 고딕"/>
+              </a:rPr>
+              <a:t/>
+            </a:r>
+            <a:r>
+              <a:rPr sz="900" b="0" dirty="0" err="1">
+                <a:solidFill>
+                  <a:srgbClr val="84888B"/>
+                </a:solidFill>
+                <a:latin typeface="맑은 고딕"/>
+              </a:rPr>
+              <a:t/>
+            </a:r>
+            <a:r>
+              <a:rPr sz="900" b="0" dirty="0">
+                <a:solidFill>
+                  <a:srgbClr val="84888B"/>
+                </a:solidFill>
+                <a:latin typeface="맑은 고딕"/>
+              </a:rPr>
+              <a:t/>
+            </a:r>
+            <a:r>
+              <a:rPr sz="900" b="0" dirty="0" err="1">
+                <a:solidFill>
+                  <a:srgbClr val="84888B"/>
+                </a:solidFill>
+                <a:latin typeface="맑은 고딕"/>
+              </a:rPr>
+              <a:t/>
+            </a:r>
+            <a:r>
+              <a:rPr sz="900" b="0" dirty="0">
+                <a:solidFill>
+                  <a:srgbClr val="84888B"/>
+                </a:solidFill>
+                <a:latin typeface="맑은 고딕"/>
+              </a:rPr>
+              <a:t/>
+            </a:r>
+            <a:r>
+              <a:rPr sz="900" b="1" dirty="0" err="1">
                 <a:solidFill>
                   <a:srgbClr val="F58220"/>
                 </a:solidFill>
                 <a:latin typeface="맑은 고딕"/>
               </a:rPr>
-              <a:t>노란선=구간 평균</a:t>
-            </a:r>
-            <a:r>
-              <a:rPr sz="900" b="0">
+              <a:t/>
+            </a:r>
+            <a:r>
+              <a:rPr sz="900" b="1" dirty="0">
+                <a:solidFill>
+                  <a:srgbClr val="F58220"/>
+                </a:solidFill>
+                <a:latin typeface="맑은 고딕"/>
+              </a:rPr>
+              <a:t/>
+            </a:r>
+            <a:r>
+              <a:rPr sz="900" b="1" dirty="0" err="1">
+                <a:solidFill>
+                  <a:srgbClr val="F58220"/>
+                </a:solidFill>
+                <a:latin typeface="맑은 고딕"/>
+              </a:rPr>
+              <a:t/>
+            </a:r>
+            <a:r>
+              <a:rPr sz="900" b="1" dirty="0">
+                <a:solidFill>
+                  <a:srgbClr val="F58220"/>
+                </a:solidFill>
+                <a:latin typeface="맑은 고딕"/>
+              </a:rPr>
+              <a:t/>
+            </a:r>
+            <a:r>
+              <a:rPr sz="900" b="1" dirty="0" err="1">
+                <a:solidFill>
+                  <a:srgbClr val="F58220"/>
+                </a:solidFill>
+                <a:latin typeface="맑은 고딕"/>
+              </a:rPr>
+              <a:t/>
+            </a:r>
+            <a:r>
+              <a:rPr sz="900" b="0" dirty="0">
                 <a:solidFill>
                   <a:srgbClr val="84888B"/>
                 </a:solidFill>
                 <a:latin typeface="맑은 고딕"/>
               </a:rPr>
-              <a:t> · 데이터: 자체 시뮬레이션(거래비용·운용오차 포함)</a:t>
+              <a:t/>
+            </a:r>
+            <a:r>
+              <a:rPr sz="900" b="0" dirty="0" err="1">
+                <a:solidFill>
+                  <a:srgbClr val="84888B"/>
+                </a:solidFill>
+                <a:latin typeface="맑은 고딕"/>
+              </a:rPr>
+              <a:t/>
+            </a:r>
+            <a:r>
+              <a:rPr sz="900" b="0" dirty="0">
+                <a:solidFill>
+                  <a:srgbClr val="84888B"/>
+                </a:solidFill>
+                <a:latin typeface="맑은 고딕"/>
+              </a:rPr>
+              <a:t/>
+            </a:r>
+            <a:r>
+              <a:rPr sz="900" b="0" dirty="0" err="1">
+                <a:solidFill>
+                  <a:srgbClr val="84888B"/>
+                </a:solidFill>
+                <a:latin typeface="맑은 고딕"/>
+              </a:rPr>
+              <a:t/>
+            </a:r>
+            <a:r>
+              <a:rPr sz="900" b="0" dirty="0">
+                <a:solidFill>
+                  <a:srgbClr val="84888B"/>
+                </a:solidFill>
+                <a:latin typeface="맑은 고딕"/>
+              </a:rPr>
+              <a:t/>
+            </a:r>
+            <a:r>
+              <a:rPr sz="900" b="0" dirty="0" err="1">
+                <a:solidFill>
+                  <a:srgbClr val="84888B"/>
+                </a:solidFill>
+                <a:latin typeface="맑은 고딕"/>
+              </a:rPr>
+              <a:t/>
+            </a:r>
+            <a:r>
+              <a:rPr sz="900" b="0" dirty="0">
+                <a:solidFill>
+                  <a:srgbClr val="84888B"/>
+                </a:solidFill>
+                <a:latin typeface="맑은 고딕"/>
+              </a:rPr>
+              <a:t/>
+            </a:r>
+            <a:r>
+              <a:rPr sz="900" b="0" dirty="0" err="1">
+                <a:solidFill>
+                  <a:srgbClr val="84888B"/>
+                </a:solidFill>
+                <a:latin typeface="맑은 고딕"/>
+              </a:rPr>
+              <a:t/>
+            </a:r>
+            <a:r>
+              <a:rPr sz="900" b="0" dirty="0">
+                <a:solidFill>
+                  <a:srgbClr val="84888B"/>
+                </a:solidFill>
+                <a:latin typeface="맑은 고딕"/>
+              </a:rPr>
+              <a:t/>
+            </a:r>
+            <a:r>
+              <a:rPr sz="900" b="0" dirty="0" err="1">
+                <a:solidFill>
+                  <a:srgbClr val="84888B"/>
+                </a:solidFill>
+                <a:latin typeface="맑은 고딕"/>
+              </a:rPr>
+              <a:t/>
+            </a:r>
+            <a:r>
+              <a:rPr sz="900" b="0" dirty="0">
+                <a:solidFill>
+                  <a:srgbClr val="84888B"/>
+                </a:solidFill>
+                <a:latin typeface="맑은 고딕"/>
+              </a:rPr>
+              <a:t/>
             </a:r>
           </a:p>
         </p:txBody>
       </p:sp>
       <p:sp>
         <p:nvSpPr>
-          <p:cNvPr id="9" name="TextBox 8"/>
+          <p:cNvPr id="10" name="TextBox 9"/>
           <p:cNvSpPr txBox="1"/>
           <p:nvPr/>
         </p:nvSpPr>
@@ -11692,344 +13921,20 @@
               </a:lnSpc>
             </a:pPr>
             <a:r>
-              <a:rPr sz="700" b="0" dirty="0">
+              <a:rPr sz="700" b="0">
                 <a:solidFill>
                   <a:srgbClr val="84888B"/>
                 </a:solidFill>
                 <a:latin typeface="맑은 고딕"/>
               </a:rPr>
-              <a:t>※ </a:t>
-            </a:r>
-            <a:r>
-              <a:rPr sz="700" b="0" dirty="0" err="1">
-                <a:solidFill>
-                  <a:srgbClr val="84888B"/>
-                </a:solidFill>
-                <a:latin typeface="맑은 고딕"/>
-              </a:rPr>
-              <a:t>상기</a:t>
-            </a:r>
-            <a:r>
-              <a:rPr sz="700" b="0" dirty="0">
-                <a:solidFill>
-                  <a:srgbClr val="84888B"/>
-                </a:solidFill>
-                <a:latin typeface="맑은 고딕"/>
-              </a:rPr>
-              <a:t> </a:t>
-            </a:r>
-            <a:r>
-              <a:rPr sz="700" b="0" dirty="0" err="1">
-                <a:solidFill>
-                  <a:srgbClr val="84888B"/>
-                </a:solidFill>
-                <a:latin typeface="맑은 고딕"/>
-              </a:rPr>
-              <a:t>자료는</a:t>
-            </a:r>
-            <a:r>
-              <a:rPr sz="700" b="0" dirty="0">
-                <a:solidFill>
-                  <a:srgbClr val="84888B"/>
-                </a:solidFill>
-                <a:latin typeface="맑은 고딕"/>
-              </a:rPr>
-              <a:t> </a:t>
-            </a:r>
-            <a:r>
-              <a:rPr sz="700" b="0" dirty="0" err="1">
-                <a:solidFill>
-                  <a:srgbClr val="84888B"/>
-                </a:solidFill>
-                <a:latin typeface="맑은 고딕"/>
-              </a:rPr>
-              <a:t>이해를</a:t>
-            </a:r>
-            <a:r>
-              <a:rPr sz="700" b="0" dirty="0">
-                <a:solidFill>
-                  <a:srgbClr val="84888B"/>
-                </a:solidFill>
-                <a:latin typeface="맑은 고딕"/>
-              </a:rPr>
-              <a:t> </a:t>
-            </a:r>
-            <a:r>
-              <a:rPr sz="700" b="0" dirty="0" err="1">
-                <a:solidFill>
-                  <a:srgbClr val="84888B"/>
-                </a:solidFill>
-                <a:latin typeface="맑은 고딕"/>
-              </a:rPr>
-              <a:t>돕기</a:t>
-            </a:r>
-            <a:r>
-              <a:rPr sz="700" b="0" dirty="0">
-                <a:solidFill>
-                  <a:srgbClr val="84888B"/>
-                </a:solidFill>
-                <a:latin typeface="맑은 고딕"/>
-              </a:rPr>
-              <a:t> </a:t>
-            </a:r>
-            <a:r>
-              <a:rPr sz="700" b="0" dirty="0" err="1">
-                <a:solidFill>
-                  <a:srgbClr val="84888B"/>
-                </a:solidFill>
-                <a:latin typeface="맑은 고딕"/>
-              </a:rPr>
-              <a:t>위한</a:t>
-            </a:r>
-            <a:r>
-              <a:rPr sz="700" b="0" dirty="0">
-                <a:solidFill>
-                  <a:srgbClr val="84888B"/>
-                </a:solidFill>
-                <a:latin typeface="맑은 고딕"/>
-              </a:rPr>
-              <a:t> </a:t>
-            </a:r>
-            <a:r>
-              <a:rPr sz="700" b="0" dirty="0" err="1">
-                <a:solidFill>
-                  <a:srgbClr val="84888B"/>
-                </a:solidFill>
-                <a:latin typeface="맑은 고딕"/>
-              </a:rPr>
-              <a:t>예시이며</a:t>
-            </a:r>
-            <a:r>
-              <a:rPr sz="700" b="0" dirty="0">
-                <a:solidFill>
-                  <a:srgbClr val="84888B"/>
-                </a:solidFill>
-                <a:latin typeface="맑은 고딕"/>
-              </a:rPr>
-              <a:t> </a:t>
-            </a:r>
-            <a:r>
-              <a:rPr sz="700" b="0" dirty="0" err="1">
-                <a:solidFill>
-                  <a:srgbClr val="84888B"/>
-                </a:solidFill>
-                <a:latin typeface="맑은 고딕"/>
-              </a:rPr>
-              <a:t>실제</a:t>
-            </a:r>
-            <a:r>
-              <a:rPr sz="700" b="0" dirty="0">
-                <a:solidFill>
-                  <a:srgbClr val="84888B"/>
-                </a:solidFill>
-                <a:latin typeface="맑은 고딕"/>
-              </a:rPr>
-              <a:t> </a:t>
-            </a:r>
-            <a:r>
-              <a:rPr sz="700" b="0" dirty="0" err="1">
-                <a:solidFill>
-                  <a:srgbClr val="84888B"/>
-                </a:solidFill>
-                <a:latin typeface="맑은 고딕"/>
-              </a:rPr>
-              <a:t>투자내용을</a:t>
-            </a:r>
-            <a:r>
-              <a:rPr sz="700" b="0" dirty="0">
-                <a:solidFill>
-                  <a:srgbClr val="84888B"/>
-                </a:solidFill>
-                <a:latin typeface="맑은 고딕"/>
-              </a:rPr>
-              <a:t> </a:t>
-            </a:r>
-            <a:r>
-              <a:rPr sz="700" b="0" dirty="0" err="1">
-                <a:solidFill>
-                  <a:srgbClr val="84888B"/>
-                </a:solidFill>
-                <a:latin typeface="맑은 고딕"/>
-              </a:rPr>
-              <a:t>의미하지</a:t>
-            </a:r>
-            <a:r>
-              <a:rPr sz="700" b="0" dirty="0">
-                <a:solidFill>
-                  <a:srgbClr val="84888B"/>
-                </a:solidFill>
-                <a:latin typeface="맑은 고딕"/>
-              </a:rPr>
-              <a:t> </a:t>
-            </a:r>
-            <a:r>
-              <a:rPr sz="700" b="0" dirty="0" err="1">
-                <a:solidFill>
-                  <a:srgbClr val="84888B"/>
-                </a:solidFill>
-                <a:latin typeface="맑은 고딕"/>
-              </a:rPr>
-              <a:t>않습니다</a:t>
-            </a:r>
-            <a:r>
-              <a:rPr sz="700" b="0" dirty="0">
-                <a:solidFill>
-                  <a:srgbClr val="84888B"/>
-                </a:solidFill>
-                <a:latin typeface="맑은 고딕"/>
-              </a:rPr>
-              <a:t>. </a:t>
-            </a:r>
-            <a:r>
-              <a:rPr sz="700" b="0" dirty="0" err="1">
-                <a:solidFill>
-                  <a:srgbClr val="84888B"/>
-                </a:solidFill>
-                <a:latin typeface="맑은 고딕"/>
-              </a:rPr>
-              <a:t>시뮬레이션은</a:t>
-            </a:r>
-            <a:r>
-              <a:rPr sz="700" b="0" dirty="0">
-                <a:solidFill>
-                  <a:srgbClr val="84888B"/>
-                </a:solidFill>
-                <a:latin typeface="맑은 고딕"/>
-              </a:rPr>
-              <a:t> </a:t>
-            </a:r>
-            <a:r>
-              <a:rPr sz="700" b="0" dirty="0" err="1">
-                <a:solidFill>
-                  <a:srgbClr val="84888B"/>
-                </a:solidFill>
-                <a:latin typeface="맑은 고딕"/>
-              </a:rPr>
-              <a:t>가정에</a:t>
-            </a:r>
-            <a:r>
-              <a:rPr sz="700" b="0" dirty="0">
-                <a:solidFill>
-                  <a:srgbClr val="84888B"/>
-                </a:solidFill>
-                <a:latin typeface="맑은 고딕"/>
-              </a:rPr>
-              <a:t> </a:t>
-            </a:r>
-            <a:r>
-              <a:rPr sz="700" b="0" dirty="0" err="1">
-                <a:solidFill>
-                  <a:srgbClr val="84888B"/>
-                </a:solidFill>
-                <a:latin typeface="맑은 고딕"/>
-              </a:rPr>
-              <a:t>따른</a:t>
-            </a:r>
-            <a:r>
-              <a:rPr sz="700" b="0" dirty="0">
-                <a:solidFill>
-                  <a:srgbClr val="84888B"/>
-                </a:solidFill>
-                <a:latin typeface="맑은 고딕"/>
-              </a:rPr>
-              <a:t> </a:t>
-            </a:r>
-            <a:r>
-              <a:rPr sz="700" b="0" dirty="0" err="1">
-                <a:solidFill>
-                  <a:srgbClr val="84888B"/>
-                </a:solidFill>
-                <a:latin typeface="맑은 고딕"/>
-              </a:rPr>
-              <a:t>것으로</a:t>
-            </a:r>
-            <a:r>
-              <a:rPr sz="700" b="0" dirty="0">
-                <a:solidFill>
-                  <a:srgbClr val="84888B"/>
-                </a:solidFill>
-                <a:latin typeface="맑은 고딕"/>
-              </a:rPr>
-              <a:t> </a:t>
-            </a:r>
-            <a:r>
-              <a:rPr sz="700" b="0" dirty="0" err="1">
-                <a:solidFill>
-                  <a:srgbClr val="84888B"/>
-                </a:solidFill>
-                <a:latin typeface="맑은 고딕"/>
-              </a:rPr>
-              <a:t>실제와</a:t>
-            </a:r>
-            <a:r>
-              <a:rPr sz="700" b="0" dirty="0">
-                <a:solidFill>
-                  <a:srgbClr val="84888B"/>
-                </a:solidFill>
-                <a:latin typeface="맑은 고딕"/>
-              </a:rPr>
-              <a:t> </a:t>
-            </a:r>
-            <a:r>
-              <a:rPr sz="700" b="0" dirty="0" err="1">
-                <a:solidFill>
-                  <a:srgbClr val="84888B"/>
-                </a:solidFill>
-                <a:latin typeface="맑은 고딕"/>
-              </a:rPr>
-              <a:t>다를</a:t>
-            </a:r>
-            <a:r>
-              <a:rPr sz="700" b="0" dirty="0">
-                <a:solidFill>
-                  <a:srgbClr val="84888B"/>
-                </a:solidFill>
-                <a:latin typeface="맑은 고딕"/>
-              </a:rPr>
-              <a:t> </a:t>
-            </a:r>
-            <a:r>
-              <a:rPr sz="700" b="0" dirty="0" err="1">
-                <a:solidFill>
-                  <a:srgbClr val="84888B"/>
-                </a:solidFill>
-                <a:latin typeface="맑은 고딕"/>
-              </a:rPr>
-              <a:t>수</a:t>
-            </a:r>
-            <a:r>
-              <a:rPr sz="700" b="0" dirty="0">
-                <a:solidFill>
-                  <a:srgbClr val="84888B"/>
-                </a:solidFill>
-                <a:latin typeface="맑은 고딕"/>
-              </a:rPr>
-              <a:t> </a:t>
-            </a:r>
-            <a:r>
-              <a:rPr sz="700" b="0" dirty="0" err="1">
-                <a:solidFill>
-                  <a:srgbClr val="84888B"/>
-                </a:solidFill>
-                <a:latin typeface="맑은 고딕"/>
-              </a:rPr>
-              <a:t>있습니다</a:t>
-            </a:r>
-            <a:r>
-              <a:rPr sz="700" b="0" dirty="0">
-                <a:solidFill>
-                  <a:srgbClr val="84888B"/>
-                </a:solidFill>
-                <a:latin typeface="맑은 고딕"/>
-              </a:rPr>
-              <a:t>.</a:t>
+              <a:t>※ 상기 자료는 이해를 돕기 위한 예시이며 실제 투자내용을 의미하지 않습니다. 시뮬레이션은 가정에 따른 것으로 실제와 다를 수 있습니다.</a:t>
             </a:r>
           </a:p>
         </p:txBody>
       </p:sp>
       <p:sp>
         <p:nvSpPr>
-          <p:cNvPr id="10" name="TextBox 9"/>
+          <p:cNvPr id="11" name="TextBox 10"/>
           <p:cNvSpPr txBox="1"/>
           <p:nvPr/>
         </p:nvSpPr>
@@ -12061,29 +13966,389 @@
                 </a:solidFill>
                 <a:latin typeface="맑은 고딕"/>
               </a:rPr>
-              <a:t>12</a:t>
+              <a:t>11</a:t>
+            </a:r>
+          </a:p>
+        </p:txBody>
+      </p:sp>
+      <p:sp>
+        <p:nvSpPr>
+          <p:cNvPr id="12" name="Rectangle 11"/>
+          <p:cNvSpPr/>
+          <p:nvPr/>
+        </p:nvSpPr>
+        <p:spPr>
+          <a:xfrm>
+            <a:off x="685800" y="5318819"/>
+            <a:ext cx="8503920" cy="731520"/>
+          </a:xfrm>
+          <a:prstGeom prst="rect">
+            <a:avLst/>
+          </a:prstGeom>
+          <a:solidFill>
+            <a:srgbClr val="FDF1E6"/>
+          </a:solidFill>
+          <a:ln>
+            <a:noFill/>
+          </a:ln>
+          <a:effectLst/>
+        </p:spPr>
+        <p:style>
+          <a:lnRef idx="1">
+            <a:schemeClr val="accent1"/>
+          </a:lnRef>
+          <a:fillRef idx="3">
+            <a:schemeClr val="accent1"/>
+          </a:fillRef>
+          <a:effectRef idx="2">
+            <a:schemeClr val="accent1"/>
+          </a:effectRef>
+          <a:fontRef idx="minor">
+            <a:schemeClr val="lt1"/>
+          </a:fontRef>
+        </p:style>
+        <p:txBody>
+          <a:bodyPr rtlCol="0" anchor="ctr"/>
+          <a:lstStyle/>
+          <a:p>
+            <a:pPr algn="ctr"/>
+            <a:endParaRPr/>
+          </a:p>
+        </p:txBody>
+      </p:sp>
+      <p:sp>
+        <p:nvSpPr>
+          <p:cNvPr id="13" name="TextBox 12"/>
+          <p:cNvSpPr txBox="1"/>
+          <p:nvPr/>
+        </p:nvSpPr>
+        <p:spPr>
+          <a:xfrm>
+            <a:off x="914400" y="5373683"/>
+            <a:ext cx="8138160" cy="731520"/>
+          </a:xfrm>
+          <a:prstGeom prst="rect">
+            <a:avLst/>
+          </a:prstGeom>
+          <a:noFill/>
+        </p:spPr>
+        <p:txBody>
+          <a:bodyPr wrap="square" anchor="ctr">
+            <a:spAutoFit/>
+          </a:bodyPr>
+          <a:lstStyle/>
+          <a:p>
+            <a:pPr>
+              <a:lnSpc>
+                <a:spcPct val="110000"/>
+              </a:lnSpc>
+            </a:pPr>
+            <a:r>
+              <a:rPr sz="1300" b="1" dirty="0">
+                <a:solidFill>
+                  <a:srgbClr val="F58220"/>
+                </a:solidFill>
+                <a:latin typeface="맑은 고딕"/>
+              </a:rPr>
+              <a:t>※ -40% </a:t>
+            </a:r>
+            <a:r>
+              <a:rPr sz="1300" b="1" dirty="0" err="1">
+                <a:solidFill>
+                  <a:srgbClr val="F58220"/>
+                </a:solidFill>
+                <a:latin typeface="맑은 고딕"/>
+              </a:rPr>
+              <a:t>도달</a:t>
+            </a:r>
+            <a:r>
+              <a:rPr sz="1300" b="1" dirty="0">
+                <a:solidFill>
+                  <a:srgbClr val="F58220"/>
+                </a:solidFill>
+                <a:latin typeface="맑은 고딕"/>
+              </a:rPr>
+              <a:t> </a:t>
+            </a:r>
+            <a:r>
+              <a:rPr sz="1300" b="1" dirty="0" err="1">
+                <a:solidFill>
+                  <a:srgbClr val="F58220"/>
+                </a:solidFill>
+                <a:latin typeface="맑은 고딕"/>
+              </a:rPr>
+              <a:t>시에는</a:t>
+            </a:r>
+            <a:r>
+              <a:rPr sz="1300" b="1" dirty="0">
+                <a:solidFill>
+                  <a:srgbClr val="F58220"/>
+                </a:solidFill>
+                <a:latin typeface="맑은 고딕"/>
+              </a:rPr>
+              <a:t> </a:t>
+            </a:r>
+            <a:r>
+              <a:rPr sz="1300" b="1" dirty="0" err="1">
+                <a:solidFill>
+                  <a:srgbClr val="3A3A3A"/>
+                </a:solidFill>
+                <a:latin typeface="맑은 고딕"/>
+              </a:rPr>
+              <a:t>상승에</a:t>
+            </a:r>
+            <a:r>
+              <a:rPr sz="1300" b="1" dirty="0">
+                <a:solidFill>
+                  <a:srgbClr val="3A3A3A"/>
+                </a:solidFill>
+                <a:latin typeface="맑은 고딕"/>
+              </a:rPr>
+              <a:t> </a:t>
+            </a:r>
+            <a:r>
+              <a:rPr sz="1300" b="1" dirty="0" err="1">
+                <a:solidFill>
+                  <a:srgbClr val="3A3A3A"/>
+                </a:solidFill>
+                <a:latin typeface="맑은 고딕"/>
+              </a:rPr>
+              <a:t>따른</a:t>
+            </a:r>
+            <a:r>
+              <a:rPr sz="1300" b="1" dirty="0">
+                <a:solidFill>
+                  <a:srgbClr val="3A3A3A"/>
+                </a:solidFill>
+                <a:latin typeface="맑은 고딕"/>
+              </a:rPr>
+              <a:t> </a:t>
+            </a:r>
+            <a:r>
+              <a:rPr sz="1300" b="1" dirty="0" err="1">
+                <a:solidFill>
+                  <a:srgbClr val="3A3A3A"/>
+                </a:solidFill>
+                <a:latin typeface="맑은 고딕"/>
+              </a:rPr>
+              <a:t>수익을</a:t>
+            </a:r>
+            <a:r>
+              <a:rPr sz="1300" b="1" dirty="0">
+                <a:solidFill>
+                  <a:srgbClr val="3A3A3A"/>
+                </a:solidFill>
+                <a:latin typeface="맑은 고딕"/>
+              </a:rPr>
+              <a:t> </a:t>
+            </a:r>
+            <a:r>
+              <a:rPr sz="1300" b="1" dirty="0" err="1">
+                <a:solidFill>
+                  <a:srgbClr val="3A3A3A"/>
+                </a:solidFill>
+                <a:latin typeface="맑은 고딕"/>
+              </a:rPr>
+              <a:t>수취하기</a:t>
+            </a:r>
+            <a:r>
+              <a:rPr sz="1300" b="1" dirty="0">
+                <a:solidFill>
+                  <a:srgbClr val="3A3A3A"/>
+                </a:solidFill>
+                <a:latin typeface="맑은 고딕"/>
+              </a:rPr>
+              <a:t> </a:t>
+            </a:r>
+            <a:r>
+              <a:rPr sz="1300" b="1" dirty="0" err="1">
+                <a:solidFill>
+                  <a:srgbClr val="3A3A3A"/>
+                </a:solidFill>
+                <a:latin typeface="맑은 고딕"/>
+              </a:rPr>
+              <a:t>위해</a:t>
+            </a:r>
+            <a:r>
+              <a:rPr sz="1300" b="1" dirty="0">
+                <a:solidFill>
+                  <a:srgbClr val="3A3A3A"/>
+                </a:solidFill>
+                <a:latin typeface="맑은 고딕"/>
+              </a:rPr>
+              <a:t> </a:t>
+            </a:r>
+            <a:r>
+              <a:rPr sz="1300" b="1" dirty="0" err="1">
+                <a:solidFill>
+                  <a:srgbClr val="3A3A3A"/>
+                </a:solidFill>
+                <a:latin typeface="맑은 고딕"/>
+              </a:rPr>
+              <a:t>변동성</a:t>
+            </a:r>
+            <a:r>
+              <a:rPr sz="1300" b="1" dirty="0">
+                <a:solidFill>
+                  <a:srgbClr val="3A3A3A"/>
+                </a:solidFill>
+                <a:latin typeface="맑은 고딕"/>
+              </a:rPr>
+              <a:t> </a:t>
+            </a:r>
+            <a:r>
+              <a:rPr sz="1300" b="1" dirty="0" err="1">
+                <a:solidFill>
+                  <a:srgbClr val="3A3A3A"/>
+                </a:solidFill>
+                <a:latin typeface="맑은 고딕"/>
+              </a:rPr>
+              <a:t>매매를</a:t>
+            </a:r>
+            <a:r>
+              <a:rPr sz="1300" b="1" dirty="0">
+                <a:solidFill>
+                  <a:srgbClr val="3A3A3A"/>
+                </a:solidFill>
+                <a:latin typeface="맑은 고딕"/>
+              </a:rPr>
+              <a:t> </a:t>
+            </a:r>
+            <a:r>
+              <a:rPr sz="1300" b="1" dirty="0" err="1">
+                <a:solidFill>
+                  <a:srgbClr val="3A3A3A"/>
+                </a:solidFill>
+                <a:latin typeface="맑은 고딕"/>
+              </a:rPr>
+              <a:t>수행하지</a:t>
+            </a:r>
+            <a:r>
+              <a:rPr sz="1300" b="1" dirty="0">
+                <a:solidFill>
+                  <a:srgbClr val="3A3A3A"/>
+                </a:solidFill>
+                <a:latin typeface="맑은 고딕"/>
+              </a:rPr>
+              <a:t> </a:t>
+            </a:r>
+            <a:r>
+              <a:rPr sz="1300" b="1" dirty="0" err="1">
+                <a:solidFill>
+                  <a:srgbClr val="3A3A3A"/>
+                </a:solidFill>
+                <a:latin typeface="맑은 고딕"/>
+              </a:rPr>
+              <a:t>않으며</a:t>
+            </a:r>
+            <a:r>
+              <a:rPr sz="1300" b="1" dirty="0">
+                <a:solidFill>
+                  <a:srgbClr val="3A3A3A"/>
+                </a:solidFill>
+                <a:latin typeface="맑은 고딕"/>
+              </a:rPr>
+              <a:t>, </a:t>
+            </a:r>
+            <a:r>
+              <a:rPr sz="1300" b="1" dirty="0" err="1">
+                <a:solidFill>
+                  <a:srgbClr val="3A3A3A"/>
+                </a:solidFill>
+                <a:latin typeface="맑은 고딕"/>
+              </a:rPr>
+              <a:t>주식형과</a:t>
+            </a:r>
+            <a:r>
+              <a:rPr sz="1300" b="1" dirty="0">
+                <a:solidFill>
+                  <a:srgbClr val="3A3A3A"/>
+                </a:solidFill>
+                <a:latin typeface="맑은 고딕"/>
+              </a:rPr>
+              <a:t> </a:t>
+            </a:r>
+            <a:r>
+              <a:rPr sz="1300" b="1" dirty="0" err="1">
+                <a:solidFill>
+                  <a:srgbClr val="3A3A3A"/>
+                </a:solidFill>
+                <a:latin typeface="맑은 고딕"/>
+              </a:rPr>
+              <a:t>유사하게</a:t>
+            </a:r>
+            <a:r>
+              <a:rPr sz="1300" b="1" dirty="0">
+                <a:solidFill>
+                  <a:srgbClr val="3A3A3A"/>
+                </a:solidFill>
+                <a:latin typeface="맑은 고딕"/>
+              </a:rPr>
+              <a:t> </a:t>
+            </a:r>
+            <a:r>
+              <a:rPr sz="1300" b="1" dirty="0" err="1">
+                <a:solidFill>
+                  <a:srgbClr val="3A3A3A"/>
+                </a:solidFill>
+                <a:latin typeface="맑은 고딕"/>
+              </a:rPr>
+              <a:t>운용됩니다</a:t>
+            </a:r>
+            <a:r>
+              <a:rPr sz="1300" b="1" dirty="0">
+                <a:solidFill>
+                  <a:srgbClr val="3A3A3A"/>
+                </a:solidFill>
+                <a:latin typeface="맑은 고딕"/>
+              </a:rPr>
+              <a:t>.</a:t>
             </a:r>
           </a:p>
         </p:txBody>
       </p:sp>
       <p:pic>
         <p:nvPicPr>
-          <p:cNvPr id="11" name="Picture 10" descr="scat_top2_stable.png"/>
+          <p:cNvPr id="16" name="Picture 15" descr="scat_top2_growth_nt.png"/>
           <p:cNvPicPr>
             <a:picLocks noChangeAspect="1"/>
           </p:cNvPicPr>
           <p:nvPr/>
         </p:nvPicPr>
         <p:blipFill>
-          <a:blip r:embed="rId3"/>
+          <a:blip r:embed="rId4"/>
           <a:stretch>
             <a:fillRect/>
           </a:stretch>
         </p:blipFill>
         <p:spPr>
           <a:xfrm>
-            <a:off x="1417320" y="1463040"/>
-            <a:ext cx="7040880" cy="4044487"/>
+            <a:off x="320040" y="1417321"/>
+            <a:ext cx="4526280" cy="3650039"/>
+          </a:xfrm>
+          <a:prstGeom prst="rect">
+            <a:avLst/>
+          </a:prstGeom>
+        </p:spPr>
+      </p:pic>
+      <p:pic>
+        <p:nvPicPr>
+          <p:cNvPr id="17" name="Picture 16" descr="scat_top2_growth_t.png"/>
+          <p:cNvPicPr>
+            <a:picLocks noChangeAspect="1"/>
+          </p:cNvPicPr>
+          <p:nvPr/>
+        </p:nvPicPr>
+        <p:blipFill>
+          <a:blip r:embed="rId5"/>
+          <a:stretch>
+            <a:fillRect/>
+          </a:stretch>
+        </p:blipFill>
+        <p:spPr>
+          <a:xfrm>
+            <a:off x="4983480" y="1417321"/>
+            <a:ext cx="4526280" cy="3650039"/>
           </a:xfrm>
           <a:prstGeom prst="rect">
             <a:avLst/>
@@ -12213,6 +14478,1015 @@
         </p:nvSpPr>
         <p:spPr>
           <a:xfrm>
+            <a:off x="685800" y="393192"/>
+            <a:ext cx="8229600" cy="320040"/>
+          </a:xfrm>
+          <a:prstGeom prst="rect">
+            <a:avLst/>
+          </a:prstGeom>
+          <a:noFill/>
+        </p:spPr>
+        <p:txBody>
+          <a:bodyPr wrap="square" lIns="25400" tIns="12700" rIns="25400" bIns="12700" anchor="t">
+            <a:spAutoFit/>
+          </a:bodyPr>
+          <a:lstStyle/>
+          <a:p>
+            <a:pPr algn="l">
+              <a:lnSpc>
+                <a:spcPct val="100000"/>
+              </a:lnSpc>
+            </a:pPr>
+            <a:r>
+              <a:rPr sz="1200" b="1" dirty="0">
+                <a:solidFill>
+                  <a:srgbClr val="F58220"/>
+                </a:solidFill>
+                <a:latin typeface="맑은 고딕"/>
+              </a:rPr>
+              <a:t>10  PAYOFF</a:t>
+            </a:r>
+          </a:p>
+        </p:txBody>
+      </p:sp>
+      <p:sp>
+        <p:nvSpPr>
+          <p:cNvPr id="5" name="TextBox 4"/>
+          <p:cNvSpPr txBox="1"/>
+          <p:nvPr/>
+        </p:nvSpPr>
+        <p:spPr>
+          <a:xfrm>
+            <a:off x="685800" y="630936"/>
+            <a:ext cx="8686800" cy="379591"/>
+          </a:xfrm>
+          <a:prstGeom prst="rect">
+            <a:avLst/>
+          </a:prstGeom>
+          <a:noFill/>
+        </p:spPr>
+        <p:txBody>
+          <a:bodyPr wrap="square" lIns="25400" tIns="12700" rIns="25400" bIns="12700" anchor="t">
+            <a:spAutoFit/>
+          </a:bodyPr>
+          <a:lstStyle/>
+          <a:p>
+            <a:pPr algn="l">
+              <a:lnSpc>
+                <a:spcPct val="100000"/>
+              </a:lnSpc>
+            </a:pPr>
+            <a:r>
+              <a:rPr sz="2300" b="1" dirty="0" err="1">
+                <a:solidFill>
+                  <a:srgbClr val="043B72"/>
+                </a:solidFill>
+                <a:latin typeface="맑은 고딕"/>
+              </a:rPr>
+              <a:t>수익</a:t>
+            </a:r>
+            <a:r>
+              <a:rPr sz="2300" b="1" dirty="0">
+                <a:solidFill>
+                  <a:srgbClr val="043B72"/>
+                </a:solidFill>
+                <a:latin typeface="맑은 고딕"/>
+              </a:rPr>
+              <a:t> 구조</a:t>
+            </a:r>
+            <a:r>
+              <a:rPr lang="en-US" altLang="ko-KR" sz="2300" b="1" dirty="0">
+                <a:solidFill>
+                  <a:srgbClr val="043B72"/>
+                </a:solidFill>
+                <a:latin typeface="맑은 고딕"/>
+              </a:rPr>
+              <a:t>2</a:t>
+            </a:r>
+            <a:r>
+              <a:rPr sz="2300" b="1" dirty="0">
+                <a:solidFill>
+                  <a:srgbClr val="043B72"/>
+                </a:solidFill>
+                <a:latin typeface="맑은 고딕"/>
+              </a:rPr>
+              <a:t> — </a:t>
+            </a:r>
+            <a:r>
+              <a:rPr sz="2300" b="1" dirty="0" err="1">
+                <a:solidFill>
+                  <a:srgbClr val="043B72"/>
+                </a:solidFill>
+                <a:latin typeface="맑은 고딕"/>
+              </a:rPr>
+              <a:t>안정변동성펀드</a:t>
+            </a:r>
+            <a:r>
+              <a:rPr sz="2300" b="1" dirty="0">
+                <a:solidFill>
+                  <a:srgbClr val="043B72"/>
+                </a:solidFill>
+                <a:latin typeface="맑은 고딕"/>
+              </a:rPr>
+              <a:t> (</a:t>
+            </a:r>
+            <a:r>
+              <a:rPr sz="2300" b="1" dirty="0" err="1">
+                <a:solidFill>
+                  <a:srgbClr val="043B72"/>
+                </a:solidFill>
+                <a:latin typeface="맑은 고딕"/>
+              </a:rPr>
+              <a:t>안정</a:t>
+            </a:r>
+            <a:r>
+              <a:rPr sz="2300" b="1" dirty="0">
+                <a:solidFill>
+                  <a:srgbClr val="043B72"/>
+                </a:solidFill>
+                <a:latin typeface="맑은 고딕"/>
+              </a:rPr>
+              <a:t> </a:t>
+            </a:r>
+            <a:r>
+              <a:rPr sz="2300" b="1" dirty="0" err="1">
+                <a:solidFill>
+                  <a:srgbClr val="043B72"/>
+                </a:solidFill>
+                <a:latin typeface="맑은 고딕"/>
+              </a:rPr>
+              <a:t>변동성</a:t>
+            </a:r>
+            <a:r>
+              <a:rPr sz="2300" b="1" dirty="0">
+                <a:solidFill>
+                  <a:srgbClr val="043B72"/>
+                </a:solidFill>
+                <a:latin typeface="맑은 고딕"/>
+              </a:rPr>
+              <a:t> </a:t>
+            </a:r>
+            <a:r>
+              <a:rPr sz="2300" b="1" dirty="0" err="1">
+                <a:solidFill>
+                  <a:srgbClr val="043B72"/>
+                </a:solidFill>
+                <a:latin typeface="맑은 고딕"/>
+              </a:rPr>
+              <a:t>매매</a:t>
+            </a:r>
+            <a:r>
+              <a:rPr sz="2300" b="1" dirty="0">
+                <a:solidFill>
+                  <a:srgbClr val="043B72"/>
+                </a:solidFill>
+                <a:latin typeface="맑은 고딕"/>
+              </a:rPr>
+              <a:t>)</a:t>
+            </a:r>
+          </a:p>
+        </p:txBody>
+      </p:sp>
+      <p:sp>
+        <p:nvSpPr>
+          <p:cNvPr id="6" name="TextBox 5"/>
+          <p:cNvSpPr txBox="1"/>
+          <p:nvPr/>
+        </p:nvSpPr>
+        <p:spPr>
+          <a:xfrm>
+            <a:off x="685800" y="1005840"/>
+            <a:ext cx="8686800" cy="225703"/>
+          </a:xfrm>
+          <a:prstGeom prst="rect">
+            <a:avLst/>
+          </a:prstGeom>
+          <a:noFill/>
+        </p:spPr>
+        <p:txBody>
+          <a:bodyPr wrap="square" lIns="25400" tIns="12700" rIns="25400" bIns="12700" anchor="t">
+            <a:spAutoFit/>
+          </a:bodyPr>
+          <a:lstStyle/>
+          <a:p>
+            <a:pPr algn="l">
+              <a:lnSpc>
+                <a:spcPct val="100000"/>
+              </a:lnSpc>
+            </a:pPr>
+            <a:r>
+              <a:rPr sz="1300" b="1" dirty="0" err="1">
+                <a:solidFill>
+                  <a:srgbClr val="3A3A3A"/>
+                </a:solidFill>
+                <a:latin typeface="맑은 고딕"/>
+              </a:rPr>
+              <a:t>보합·상승</a:t>
+            </a:r>
+            <a:r>
+              <a:rPr sz="1300" b="1" dirty="0">
+                <a:solidFill>
+                  <a:srgbClr val="3A3A3A"/>
+                </a:solidFill>
+                <a:latin typeface="맑은 고딕"/>
+              </a:rPr>
+              <a:t> </a:t>
+            </a:r>
+            <a:r>
+              <a:rPr sz="1300" b="1" dirty="0" err="1">
+                <a:solidFill>
+                  <a:srgbClr val="3A3A3A"/>
+                </a:solidFill>
+                <a:latin typeface="맑은 고딕"/>
+              </a:rPr>
+              <a:t>구간에서</a:t>
+            </a:r>
+            <a:r>
+              <a:rPr sz="1300" b="1" dirty="0">
+                <a:solidFill>
+                  <a:srgbClr val="3A3A3A"/>
+                </a:solidFill>
+                <a:latin typeface="맑은 고딕"/>
+              </a:rPr>
+              <a:t> </a:t>
+            </a:r>
+            <a:r>
+              <a:rPr sz="1300" b="1" dirty="0" err="1">
+                <a:solidFill>
+                  <a:srgbClr val="3A3A3A"/>
+                </a:solidFill>
+                <a:latin typeface="맑은 고딕"/>
+              </a:rPr>
+              <a:t>변동성</a:t>
+            </a:r>
+            <a:r>
+              <a:rPr sz="1300" b="1" dirty="0">
+                <a:solidFill>
+                  <a:srgbClr val="3A3A3A"/>
+                </a:solidFill>
+                <a:latin typeface="맑은 고딕"/>
+              </a:rPr>
+              <a:t> </a:t>
+            </a:r>
+            <a:r>
+              <a:rPr sz="1300" b="1" dirty="0" err="1">
+                <a:solidFill>
+                  <a:srgbClr val="3A3A3A"/>
+                </a:solidFill>
+                <a:latin typeface="맑은 고딕"/>
+              </a:rPr>
+              <a:t>매매</a:t>
+            </a:r>
+            <a:r>
+              <a:rPr sz="1300" b="1" dirty="0">
+                <a:solidFill>
+                  <a:srgbClr val="3A3A3A"/>
+                </a:solidFill>
+                <a:latin typeface="맑은 고딕"/>
+              </a:rPr>
+              <a:t> </a:t>
+            </a:r>
+            <a:r>
+              <a:rPr sz="1300" b="1" dirty="0" err="1">
+                <a:solidFill>
+                  <a:srgbClr val="3A3A3A"/>
+                </a:solidFill>
+                <a:latin typeface="맑은 고딕"/>
+              </a:rPr>
+              <a:t>수익을</a:t>
+            </a:r>
+            <a:r>
+              <a:rPr sz="1300" b="1" dirty="0">
+                <a:solidFill>
+                  <a:srgbClr val="3A3A3A"/>
+                </a:solidFill>
+                <a:latin typeface="맑은 고딕"/>
+              </a:rPr>
+              <a:t> </a:t>
+            </a:r>
+            <a:r>
+              <a:rPr sz="1300" b="1" dirty="0" err="1">
+                <a:solidFill>
+                  <a:srgbClr val="3A3A3A"/>
+                </a:solidFill>
+                <a:latin typeface="맑은 고딕"/>
+              </a:rPr>
+              <a:t>안정적으로</a:t>
+            </a:r>
+            <a:r>
+              <a:rPr sz="1300" b="1" dirty="0">
+                <a:solidFill>
+                  <a:srgbClr val="3A3A3A"/>
+                </a:solidFill>
+                <a:latin typeface="맑은 고딕"/>
+              </a:rPr>
+              <a:t> </a:t>
+            </a:r>
+            <a:r>
+              <a:rPr sz="1300" b="1" dirty="0" err="1">
+                <a:solidFill>
+                  <a:srgbClr val="3A3A3A"/>
+                </a:solidFill>
+                <a:latin typeface="맑은 고딕"/>
+              </a:rPr>
+              <a:t>확보</a:t>
+            </a:r>
+            <a:r>
+              <a:rPr sz="1300" b="1" dirty="0">
+                <a:solidFill>
+                  <a:srgbClr val="3A3A3A"/>
+                </a:solidFill>
+                <a:latin typeface="맑은 고딕"/>
+              </a:rPr>
+              <a:t>(</a:t>
+            </a:r>
+            <a:r>
+              <a:rPr sz="1300" b="1" dirty="0" err="1">
+                <a:solidFill>
+                  <a:srgbClr val="3A3A3A"/>
+                </a:solidFill>
+                <a:latin typeface="맑은 고딕"/>
+              </a:rPr>
+              <a:t>상단</a:t>
+            </a:r>
+            <a:r>
+              <a:rPr sz="1300" b="1" dirty="0">
+                <a:solidFill>
+                  <a:srgbClr val="3A3A3A"/>
+                </a:solidFill>
+                <a:latin typeface="맑은 고딕"/>
+              </a:rPr>
+              <a:t> </a:t>
+            </a:r>
+            <a:r>
+              <a:rPr sz="1300" b="1" dirty="0" err="1">
+                <a:solidFill>
+                  <a:srgbClr val="3A3A3A"/>
+                </a:solidFill>
+                <a:latin typeface="맑은 고딕"/>
+              </a:rPr>
+              <a:t>고정</a:t>
+            </a:r>
+            <a:r>
+              <a:rPr sz="1300" b="1" dirty="0">
+                <a:solidFill>
+                  <a:srgbClr val="3A3A3A"/>
+                </a:solidFill>
+                <a:latin typeface="맑은 고딕"/>
+              </a:rPr>
+              <a:t>), </a:t>
+            </a:r>
+            <a:r>
+              <a:rPr lang="ko-KR" altLang="en-US" sz="1300" b="1" dirty="0">
+                <a:solidFill>
+                  <a:srgbClr val="3A3A3A"/>
+                </a:solidFill>
+                <a:latin typeface="맑은 고딕"/>
+              </a:rPr>
+              <a:t>단</a:t>
+            </a:r>
+            <a:r>
+              <a:rPr lang="en-US" altLang="ko-KR" sz="1300" b="1" dirty="0">
+                <a:solidFill>
+                  <a:srgbClr val="3A3A3A"/>
+                </a:solidFill>
+                <a:latin typeface="맑은 고딕"/>
+              </a:rPr>
+              <a:t>,</a:t>
+            </a:r>
+            <a:r>
+              <a:rPr lang="ko-KR" altLang="en-US" sz="1300" b="1" dirty="0">
+                <a:solidFill>
+                  <a:srgbClr val="3A3A3A"/>
+                </a:solidFill>
+                <a:latin typeface="맑은 고딕"/>
+              </a:rPr>
+              <a:t> 상승이 제한됩니다</a:t>
+            </a:r>
+            <a:r>
+              <a:rPr lang="en-US" altLang="ko-KR" sz="1300" b="1" dirty="0">
+                <a:solidFill>
+                  <a:srgbClr val="3A3A3A"/>
+                </a:solidFill>
+                <a:latin typeface="맑은 고딕"/>
+              </a:rPr>
+              <a:t>.</a:t>
+            </a:r>
+            <a:endParaRPr sz="1300" b="1" dirty="0">
+              <a:solidFill>
+                <a:srgbClr val="3A3A3A"/>
+              </a:solidFill>
+              <a:latin typeface="맑은 고딕"/>
+            </a:endParaRPr>
+          </a:p>
+        </p:txBody>
+      </p:sp>
+      <p:sp>
+        <p:nvSpPr>
+          <p:cNvPr id="8" name="TextBox 7"/>
+          <p:cNvSpPr txBox="1"/>
+          <p:nvPr/>
+        </p:nvSpPr>
+        <p:spPr>
+          <a:xfrm>
+            <a:off x="1280160" y="5556144"/>
+            <a:ext cx="8595360" cy="365760"/>
+          </a:xfrm>
+          <a:prstGeom prst="rect">
+            <a:avLst/>
+          </a:prstGeom>
+          <a:noFill/>
+        </p:spPr>
+        <p:txBody>
+          <a:bodyPr wrap="square" lIns="25400" tIns="12700" rIns="25400" bIns="12700" anchor="t">
+            <a:spAutoFit/>
+          </a:bodyPr>
+          <a:lstStyle/>
+          <a:p>
+            <a:pPr algn="l">
+              <a:lnSpc>
+                <a:spcPct val="100000"/>
+              </a:lnSpc>
+            </a:pPr>
+            <a:r>
+              <a:rPr sz="900" b="0">
+                <a:solidFill>
+                  <a:srgbClr val="84888B"/>
+                </a:solidFill>
+                <a:latin typeface="맑은 고딕"/>
+              </a:rPr>
+              <a:t>변동성 60% 가정 · 점=시뮬 1회 · </a:t>
+            </a:r>
+            <a:r>
+              <a:rPr sz="900" b="1">
+                <a:solidFill>
+                  <a:srgbClr val="F58220"/>
+                </a:solidFill>
+                <a:latin typeface="맑은 고딕"/>
+              </a:rPr>
+              <a:t>노란선=구간 평균</a:t>
+            </a:r>
+            <a:r>
+              <a:rPr sz="900" b="0">
+                <a:solidFill>
+                  <a:srgbClr val="84888B"/>
+                </a:solidFill>
+                <a:latin typeface="맑은 고딕"/>
+              </a:rPr>
+              <a:t> · 데이터: 자체 시뮬레이션(거래비용·운용오차 포함)</a:t>
+            </a:r>
+          </a:p>
+        </p:txBody>
+      </p:sp>
+      <p:sp>
+        <p:nvSpPr>
+          <p:cNvPr id="9" name="TextBox 8"/>
+          <p:cNvSpPr txBox="1"/>
+          <p:nvPr/>
+        </p:nvSpPr>
+        <p:spPr>
+          <a:xfrm>
+            <a:off x="457200" y="6510528"/>
+            <a:ext cx="7863840" cy="292608"/>
+          </a:xfrm>
+          <a:prstGeom prst="rect">
+            <a:avLst/>
+          </a:prstGeom>
+          <a:noFill/>
+        </p:spPr>
+        <p:txBody>
+          <a:bodyPr wrap="square" lIns="25400" tIns="12700" rIns="25400" bIns="12700" anchor="t">
+            <a:spAutoFit/>
+          </a:bodyPr>
+          <a:lstStyle/>
+          <a:p>
+            <a:pPr algn="l">
+              <a:lnSpc>
+                <a:spcPct val="100000"/>
+              </a:lnSpc>
+            </a:pPr>
+            <a:r>
+              <a:rPr sz="700" b="0" dirty="0">
+                <a:solidFill>
+                  <a:srgbClr val="84888B"/>
+                </a:solidFill>
+                <a:latin typeface="맑은 고딕"/>
+              </a:rPr>
+              <a:t>※ </a:t>
+            </a:r>
+            <a:r>
+              <a:rPr sz="700" b="0" dirty="0" err="1">
+                <a:solidFill>
+                  <a:srgbClr val="84888B"/>
+                </a:solidFill>
+                <a:latin typeface="맑은 고딕"/>
+              </a:rPr>
+              <a:t>상기</a:t>
+            </a:r>
+            <a:r>
+              <a:rPr sz="700" b="0" dirty="0">
+                <a:solidFill>
+                  <a:srgbClr val="84888B"/>
+                </a:solidFill>
+                <a:latin typeface="맑은 고딕"/>
+              </a:rPr>
+              <a:t> </a:t>
+            </a:r>
+            <a:r>
+              <a:rPr sz="700" b="0" dirty="0" err="1">
+                <a:solidFill>
+                  <a:srgbClr val="84888B"/>
+                </a:solidFill>
+                <a:latin typeface="맑은 고딕"/>
+              </a:rPr>
+              <a:t>자료는</a:t>
+            </a:r>
+            <a:r>
+              <a:rPr sz="700" b="0" dirty="0">
+                <a:solidFill>
+                  <a:srgbClr val="84888B"/>
+                </a:solidFill>
+                <a:latin typeface="맑은 고딕"/>
+              </a:rPr>
+              <a:t> </a:t>
+            </a:r>
+            <a:r>
+              <a:rPr sz="700" b="0" dirty="0" err="1">
+                <a:solidFill>
+                  <a:srgbClr val="84888B"/>
+                </a:solidFill>
+                <a:latin typeface="맑은 고딕"/>
+              </a:rPr>
+              <a:t>이해를</a:t>
+            </a:r>
+            <a:r>
+              <a:rPr sz="700" b="0" dirty="0">
+                <a:solidFill>
+                  <a:srgbClr val="84888B"/>
+                </a:solidFill>
+                <a:latin typeface="맑은 고딕"/>
+              </a:rPr>
+              <a:t> </a:t>
+            </a:r>
+            <a:r>
+              <a:rPr sz="700" b="0" dirty="0" err="1">
+                <a:solidFill>
+                  <a:srgbClr val="84888B"/>
+                </a:solidFill>
+                <a:latin typeface="맑은 고딕"/>
+              </a:rPr>
+              <a:t>돕기</a:t>
+            </a:r>
+            <a:r>
+              <a:rPr sz="700" b="0" dirty="0">
+                <a:solidFill>
+                  <a:srgbClr val="84888B"/>
+                </a:solidFill>
+                <a:latin typeface="맑은 고딕"/>
+              </a:rPr>
+              <a:t> </a:t>
+            </a:r>
+            <a:r>
+              <a:rPr sz="700" b="0" dirty="0" err="1">
+                <a:solidFill>
+                  <a:srgbClr val="84888B"/>
+                </a:solidFill>
+                <a:latin typeface="맑은 고딕"/>
+              </a:rPr>
+              <a:t>위한</a:t>
+            </a:r>
+            <a:r>
+              <a:rPr sz="700" b="0" dirty="0">
+                <a:solidFill>
+                  <a:srgbClr val="84888B"/>
+                </a:solidFill>
+                <a:latin typeface="맑은 고딕"/>
+              </a:rPr>
+              <a:t> </a:t>
+            </a:r>
+            <a:r>
+              <a:rPr sz="700" b="0" dirty="0" err="1">
+                <a:solidFill>
+                  <a:srgbClr val="84888B"/>
+                </a:solidFill>
+                <a:latin typeface="맑은 고딕"/>
+              </a:rPr>
+              <a:t>예시이며</a:t>
+            </a:r>
+            <a:r>
+              <a:rPr sz="700" b="0" dirty="0">
+                <a:solidFill>
+                  <a:srgbClr val="84888B"/>
+                </a:solidFill>
+                <a:latin typeface="맑은 고딕"/>
+              </a:rPr>
+              <a:t> </a:t>
+            </a:r>
+            <a:r>
+              <a:rPr sz="700" b="0" dirty="0" err="1">
+                <a:solidFill>
+                  <a:srgbClr val="84888B"/>
+                </a:solidFill>
+                <a:latin typeface="맑은 고딕"/>
+              </a:rPr>
+              <a:t>실제</a:t>
+            </a:r>
+            <a:r>
+              <a:rPr sz="700" b="0" dirty="0">
+                <a:solidFill>
+                  <a:srgbClr val="84888B"/>
+                </a:solidFill>
+                <a:latin typeface="맑은 고딕"/>
+              </a:rPr>
+              <a:t> </a:t>
+            </a:r>
+            <a:r>
+              <a:rPr sz="700" b="0" dirty="0" err="1">
+                <a:solidFill>
+                  <a:srgbClr val="84888B"/>
+                </a:solidFill>
+                <a:latin typeface="맑은 고딕"/>
+              </a:rPr>
+              <a:t>투자내용을</a:t>
+            </a:r>
+            <a:r>
+              <a:rPr sz="700" b="0" dirty="0">
+                <a:solidFill>
+                  <a:srgbClr val="84888B"/>
+                </a:solidFill>
+                <a:latin typeface="맑은 고딕"/>
+              </a:rPr>
+              <a:t> </a:t>
+            </a:r>
+            <a:r>
+              <a:rPr sz="700" b="0" dirty="0" err="1">
+                <a:solidFill>
+                  <a:srgbClr val="84888B"/>
+                </a:solidFill>
+                <a:latin typeface="맑은 고딕"/>
+              </a:rPr>
+              <a:t>의미하지</a:t>
+            </a:r>
+            <a:r>
+              <a:rPr sz="700" b="0" dirty="0">
+                <a:solidFill>
+                  <a:srgbClr val="84888B"/>
+                </a:solidFill>
+                <a:latin typeface="맑은 고딕"/>
+              </a:rPr>
+              <a:t> </a:t>
+            </a:r>
+            <a:r>
+              <a:rPr sz="700" b="0" dirty="0" err="1">
+                <a:solidFill>
+                  <a:srgbClr val="84888B"/>
+                </a:solidFill>
+                <a:latin typeface="맑은 고딕"/>
+              </a:rPr>
+              <a:t>않습니다</a:t>
+            </a:r>
+            <a:r>
+              <a:rPr sz="700" b="0" dirty="0">
+                <a:solidFill>
+                  <a:srgbClr val="84888B"/>
+                </a:solidFill>
+                <a:latin typeface="맑은 고딕"/>
+              </a:rPr>
+              <a:t>. </a:t>
+            </a:r>
+            <a:r>
+              <a:rPr sz="700" b="0" dirty="0" err="1">
+                <a:solidFill>
+                  <a:srgbClr val="84888B"/>
+                </a:solidFill>
+                <a:latin typeface="맑은 고딕"/>
+              </a:rPr>
+              <a:t>시뮬레이션은</a:t>
+            </a:r>
+            <a:r>
+              <a:rPr sz="700" b="0" dirty="0">
+                <a:solidFill>
+                  <a:srgbClr val="84888B"/>
+                </a:solidFill>
+                <a:latin typeface="맑은 고딕"/>
+              </a:rPr>
+              <a:t> </a:t>
+            </a:r>
+            <a:r>
+              <a:rPr sz="700" b="0" dirty="0" err="1">
+                <a:solidFill>
+                  <a:srgbClr val="84888B"/>
+                </a:solidFill>
+                <a:latin typeface="맑은 고딕"/>
+              </a:rPr>
+              <a:t>가정에</a:t>
+            </a:r>
+            <a:r>
+              <a:rPr sz="700" b="0" dirty="0">
+                <a:solidFill>
+                  <a:srgbClr val="84888B"/>
+                </a:solidFill>
+                <a:latin typeface="맑은 고딕"/>
+              </a:rPr>
+              <a:t> </a:t>
+            </a:r>
+            <a:r>
+              <a:rPr sz="700" b="0" dirty="0" err="1">
+                <a:solidFill>
+                  <a:srgbClr val="84888B"/>
+                </a:solidFill>
+                <a:latin typeface="맑은 고딕"/>
+              </a:rPr>
+              <a:t>따른</a:t>
+            </a:r>
+            <a:r>
+              <a:rPr sz="700" b="0" dirty="0">
+                <a:solidFill>
+                  <a:srgbClr val="84888B"/>
+                </a:solidFill>
+                <a:latin typeface="맑은 고딕"/>
+              </a:rPr>
+              <a:t> </a:t>
+            </a:r>
+            <a:r>
+              <a:rPr sz="700" b="0" dirty="0" err="1">
+                <a:solidFill>
+                  <a:srgbClr val="84888B"/>
+                </a:solidFill>
+                <a:latin typeface="맑은 고딕"/>
+              </a:rPr>
+              <a:t>것으로</a:t>
+            </a:r>
+            <a:r>
+              <a:rPr sz="700" b="0" dirty="0">
+                <a:solidFill>
+                  <a:srgbClr val="84888B"/>
+                </a:solidFill>
+                <a:latin typeface="맑은 고딕"/>
+              </a:rPr>
+              <a:t> </a:t>
+            </a:r>
+            <a:r>
+              <a:rPr sz="700" b="0" dirty="0" err="1">
+                <a:solidFill>
+                  <a:srgbClr val="84888B"/>
+                </a:solidFill>
+                <a:latin typeface="맑은 고딕"/>
+              </a:rPr>
+              <a:t>실제와</a:t>
+            </a:r>
+            <a:r>
+              <a:rPr sz="700" b="0" dirty="0">
+                <a:solidFill>
+                  <a:srgbClr val="84888B"/>
+                </a:solidFill>
+                <a:latin typeface="맑은 고딕"/>
+              </a:rPr>
+              <a:t> </a:t>
+            </a:r>
+            <a:r>
+              <a:rPr sz="700" b="0" dirty="0" err="1">
+                <a:solidFill>
+                  <a:srgbClr val="84888B"/>
+                </a:solidFill>
+                <a:latin typeface="맑은 고딕"/>
+              </a:rPr>
+              <a:t>다를</a:t>
+            </a:r>
+            <a:r>
+              <a:rPr sz="700" b="0" dirty="0">
+                <a:solidFill>
+                  <a:srgbClr val="84888B"/>
+                </a:solidFill>
+                <a:latin typeface="맑은 고딕"/>
+              </a:rPr>
+              <a:t> </a:t>
+            </a:r>
+            <a:r>
+              <a:rPr sz="700" b="0" dirty="0" err="1">
+                <a:solidFill>
+                  <a:srgbClr val="84888B"/>
+                </a:solidFill>
+                <a:latin typeface="맑은 고딕"/>
+              </a:rPr>
+              <a:t>수</a:t>
+            </a:r>
+            <a:r>
+              <a:rPr sz="700" b="0" dirty="0">
+                <a:solidFill>
+                  <a:srgbClr val="84888B"/>
+                </a:solidFill>
+                <a:latin typeface="맑은 고딕"/>
+              </a:rPr>
+              <a:t> </a:t>
+            </a:r>
+            <a:r>
+              <a:rPr sz="700" b="0" dirty="0" err="1">
+                <a:solidFill>
+                  <a:srgbClr val="84888B"/>
+                </a:solidFill>
+                <a:latin typeface="맑은 고딕"/>
+              </a:rPr>
+              <a:t>있습니다</a:t>
+            </a:r>
+            <a:r>
+              <a:rPr sz="700" b="0" dirty="0">
+                <a:solidFill>
+                  <a:srgbClr val="84888B"/>
+                </a:solidFill>
+                <a:latin typeface="맑은 고딕"/>
+              </a:rPr>
+              <a:t>.</a:t>
+            </a:r>
+          </a:p>
+        </p:txBody>
+      </p:sp>
+      <p:sp>
+        <p:nvSpPr>
+          <p:cNvPr id="10" name="TextBox 9"/>
+          <p:cNvSpPr txBox="1"/>
+          <p:nvPr/>
+        </p:nvSpPr>
+        <p:spPr>
+          <a:xfrm>
+            <a:off x="9052560" y="6510528"/>
+            <a:ext cx="548640" cy="292608"/>
+          </a:xfrm>
+          <a:prstGeom prst="rect">
+            <a:avLst/>
+          </a:prstGeom>
+          <a:noFill/>
+        </p:spPr>
+        <p:txBody>
+          <a:bodyPr wrap="square" lIns="25400" tIns="12700" rIns="25400" bIns="12700" anchor="t">
+            <a:spAutoFit/>
+          </a:bodyPr>
+          <a:lstStyle/>
+          <a:p>
+            <a:pPr algn="r">
+              <a:lnSpc>
+                <a:spcPct val="100000"/>
+              </a:lnSpc>
+            </a:pPr>
+            <a:r>
+              <a:rPr sz="900" b="1">
+                <a:solidFill>
+                  <a:srgbClr val="84888B"/>
+                </a:solidFill>
+                <a:latin typeface="맑은 고딕"/>
+              </a:rPr>
+              <a:t>12</a:t>
+            </a:r>
+          </a:p>
+        </p:txBody>
+      </p:sp>
+      <p:pic>
+        <p:nvPicPr>
+          <p:cNvPr id="11" name="Picture 10" descr="scat_top2_stable.png"/>
+          <p:cNvPicPr>
+            <a:picLocks noChangeAspect="1"/>
+          </p:cNvPicPr>
+          <p:nvPr/>
+        </p:nvPicPr>
+        <p:blipFill>
+          <a:blip r:embed="rId3"/>
+          <a:stretch>
+            <a:fillRect/>
+          </a:stretch>
+        </p:blipFill>
+        <p:spPr>
+          <a:xfrm>
+            <a:off x="1417320" y="1463040"/>
+            <a:ext cx="7040880" cy="4044487"/>
+          </a:xfrm>
+          <a:prstGeom prst="rect">
+            <a:avLst/>
+          </a:prstGeom>
+        </p:spPr>
+      </p:pic>
+    </p:spTree>
+  </p:cSld>
+  <p:clrMapOvr>
+    <a:masterClrMapping/>
+  </p:clrMapOvr>
+</p:sld>
+</file>
+
+<file path=ppt/slides/slide13.xml><?xml version="1.0" encoding="utf-8"?>
+<p:sld xmlns:a="http://schemas.openxmlformats.org/drawingml/2006/main" xmlns:r="http://schemas.openxmlformats.org/officeDocument/2006/relationships" xmlns:p="http://schemas.openxmlformats.org/presentationml/2006/main">
+  <p:cSld>
+    <p:spTree>
+      <p:nvGrpSpPr>
+        <p:cNvPr id="1" name=""/>
+        <p:cNvGrpSpPr/>
+        <p:nvPr/>
+      </p:nvGrpSpPr>
+      <p:grpSpPr>
+        <a:xfrm>
+          <a:off x="0" y="0"/>
+          <a:ext cx="0" cy="0"/>
+          <a:chOff x="0" y="0"/>
+          <a:chExt cx="0" cy="0"/>
+        </a:xfrm>
+      </p:grpSpPr>
+      <p:sp>
+        <p:nvSpPr>
+          <p:cNvPr id="2" name="Rectangle 1"/>
+          <p:cNvSpPr/>
+          <p:nvPr/>
+        </p:nvSpPr>
+        <p:spPr>
+          <a:xfrm>
+            <a:off x="0" y="0"/>
+            <a:ext cx="9875520" cy="6858000"/>
+          </a:xfrm>
+          <a:prstGeom prst="rect">
+            <a:avLst/>
+          </a:prstGeom>
+          <a:solidFill>
+            <a:srgbClr val="FFFFFF"/>
+          </a:solidFill>
+          <a:ln>
+            <a:noFill/>
+          </a:ln>
+          <a:effectLst/>
+        </p:spPr>
+        <p:style>
+          <a:lnRef idx="1">
+            <a:schemeClr val="accent1"/>
+          </a:lnRef>
+          <a:fillRef idx="3">
+            <a:schemeClr val="accent1"/>
+          </a:fillRef>
+          <a:effectRef idx="2">
+            <a:schemeClr val="accent1"/>
+          </a:effectRef>
+          <a:fontRef idx="minor">
+            <a:schemeClr val="lt1"/>
+          </a:fontRef>
+        </p:style>
+        <p:txBody>
+          <a:bodyPr rtlCol="0" anchor="ctr"/>
+          <a:lstStyle/>
+          <a:p>
+            <a:pPr algn="ctr"/>
+            <a:endParaRPr/>
+          </a:p>
+        </p:txBody>
+      </p:sp>
+      <p:sp>
+        <p:nvSpPr>
+          <p:cNvPr id="3" name="Rectangle 2"/>
+          <p:cNvSpPr/>
+          <p:nvPr/>
+        </p:nvSpPr>
+        <p:spPr>
+          <a:xfrm>
+            <a:off x="457200" y="502920"/>
+            <a:ext cx="128016" cy="566928"/>
+          </a:xfrm>
+          <a:prstGeom prst="rect">
+            <a:avLst/>
+          </a:prstGeom>
+          <a:solidFill>
+            <a:srgbClr val="F58220"/>
+          </a:solidFill>
+          <a:ln>
+            <a:noFill/>
+          </a:ln>
+          <a:effectLst/>
+        </p:spPr>
+        <p:style>
+          <a:lnRef idx="1">
+            <a:schemeClr val="accent1"/>
+          </a:lnRef>
+          <a:fillRef idx="3">
+            <a:schemeClr val="accent1"/>
+          </a:fillRef>
+          <a:effectRef idx="2">
+            <a:schemeClr val="accent1"/>
+          </a:effectRef>
+          <a:fontRef idx="minor">
+            <a:schemeClr val="lt1"/>
+          </a:fontRef>
+        </p:style>
+        <p:txBody>
+          <a:bodyPr rtlCol="0" anchor="ctr"/>
+          <a:lstStyle/>
+          <a:p>
+            <a:pPr algn="ctr"/>
+            <a:endParaRPr/>
+          </a:p>
+        </p:txBody>
+      </p:sp>
+      <p:sp>
+        <p:nvSpPr>
+          <p:cNvPr id="4" name="TextBox 3"/>
+          <p:cNvSpPr txBox="1"/>
+          <p:nvPr/>
+        </p:nvSpPr>
+        <p:spPr>
+          <a:xfrm>
             <a:off x="685800" y="457200"/>
             <a:ext cx="8229600" cy="320040"/>
           </a:xfrm>
@@ -12606,7 +15880,7 @@
 </p:sld>
 </file>
 
-<file path=ppt/slides/slide13.xml><?xml version="1.0" encoding="utf-8"?>
+<file path=ppt/slides/slide14.xml><?xml version="1.0" encoding="utf-8"?>
 <p:sld xmlns:a="http://schemas.openxmlformats.org/drawingml/2006/main" xmlns:p="http://schemas.openxmlformats.org/presentationml/2006/main" xmlns:r="http://schemas.openxmlformats.org/officeDocument/2006/relationships">
   <p:cSld>
     <p:spTree>
@@ -12777,7 +16051,7 @@
                 </a:solidFill>
                 <a:latin typeface="맑은 고딕"/>
               </a:rPr>
-              <a:t>지수대별 실제 편입비 — 만기까지 남은 시간 활용</a:t>
+              <a:t>지수대별 실제 편입비 — 최대 편입비 180% 활용 시</a:t>
             </a:r>
           </a:p>
         </p:txBody>
@@ -12816,7 +16090,7 @@
                 </a:solidFill>
                 <a:latin typeface="맑은 고딕"/>
               </a:rPr>
-              <a:t>리밸런싱일 지수=100 기준 · 편입비는 잔존만기가 짧아질수록 가팔라짐 · 최대 편입비 100%</a:t>
+              <a:t>리밸런싱일 지수=100 기준 · 하락 구간에서 100%를 넘는 적극 편입 가능 · 최대 편입비 180%</a:t>
             </a:r>
           </a:p>
         </p:txBody>
@@ -13981,7 +17255,7 @@
                           </a:solidFill>
                           <a:latin typeface="맑은 고딕"/>
                         </a:rPr>
-                        <a:t>100%</a:t>
+                        <a:t>102%</a:t>
                       </a:r>
                     </a:p>
                   </a:txBody>
@@ -14098,7 +17372,7 @@
                           </a:solidFill>
                           <a:latin typeface="맑은 고딕"/>
                         </a:rPr>
-                        <a:t>100%</a:t>
+                        <a:t>106%</a:t>
                       </a:r>
                     </a:p>
                   </a:txBody>
@@ -14121,7 +17395,7 @@
                           </a:solidFill>
                           <a:latin typeface="맑은 고딕"/>
                         </a:rPr>
-                        <a:t>100%</a:t>
+                        <a:t>134%</a:t>
                       </a:r>
                     </a:p>
                   </a:txBody>
@@ -14144,7 +17418,7 @@
                           </a:solidFill>
                           <a:latin typeface="맑은 고딕"/>
                         </a:rPr>
-                        <a:t>100%</a:t>
+                        <a:t>180%</a:t>
                       </a:r>
                     </a:p>
                   </a:txBody>
@@ -15811,7 +19085,7 @@
                 </a:solidFill>
                 <a:latin typeface="맑은 고딕"/>
               </a:rPr>
-              <a:t>· 변동성 60%·금리 3%·배당 2% 가정, 지수 10포인트 단위(60~140). 성장형은 지수 60 이하 도달 시 '낙아웃'(하방 완충 소멸) 후 주식형과 유사하게 운용.</a:t>
+              <a:t>· 변동성 60% 가정, 지수 10포인트 단위(60~140), 최대 편입비 180%. 성장형은 지수 60 이하 도달 시 '낙아웃'(하방 완충 소멸) 후 주식형과 유사하게 운용.</a:t>
             </a:r>
           </a:p>
           <a:p>

--- a/제안서/변동성하베스트펀드_AITop2_v1_20260715.pptx
+++ b/제안서/변동성하베스트펀드_AITop2_v1_20260715.pptx
@@ -18,8 +18,8 @@
     <p:sldId id="261" r:id="rId9"/>
     <p:sldId id="263" r:id="rId10"/>
     <p:sldId id="264" r:id="rId11"/>
-    <p:sldId id="1042" r:id="rId22"/>
-    <p:sldId id="1043" r:id="rId23"/>
+    <p:sldId id="1044" r:id="rId21"/>
+    <p:sldId id="1045" r:id="rId20"/>
     <p:sldId id="265" r:id="rId12"/>
     <p:sldId id="266" r:id="rId13"/>
     <p:sldId id="267" r:id="rId14"/>
@@ -13086,7 +13086,7 @@
                           </a:solidFill>
                           <a:latin typeface="맑은 고딕"/>
                         </a:rPr>
-                        <a:t>15%</a:t>
+                        <a:t>16%</a:t>
                       </a:r>
                     </a:p>
                   </a:txBody>
@@ -13180,7 +13180,7 @@
                           </a:solidFill>
                           <a:latin typeface="맑은 고딕"/>
                         </a:rPr>
-                        <a:t>21%</a:t>
+                        <a:t>22%</a:t>
                       </a:r>
                     </a:p>
                   </a:txBody>
@@ -13274,7 +13274,30 @@
                           </a:solidFill>
                           <a:latin typeface="맑은 고딕"/>
                         </a:rPr>
-                        <a:t>26%</a:t>
+                        <a:t>27%</a:t>
+                      </a:r>
+                    </a:p>
+                  </a:txBody>
+                  <a:tcPr marL="38100" marR="38100" marT="12700" marB="12700" anchor="ctr">
+                    <a:solidFill>
+                      <a:srgbClr val="FFFFFF"/>
+                    </a:solidFill>
+                  </a:tcPr>
+                </a:tc>
+                <a:tc>
+                  <a:txBody>
+                    <a:bodyPr/>
+                    <a:lstStyle/>
+                    <a:p>
+                      <a:pPr algn="ctr"/>
+                      <a:r>
+                        <a:rPr sz="1000" b="0">
+                          <a:solidFill>
+                            <a:srgbClr val="3A3A3A"/>
+                          </a:solidFill>
+                          <a:latin typeface="맑은 고딕"/>
+                        </a:rPr>
+                        <a:t>27%</a:t>
                       </a:r>
                     </a:p>
                   </a:txBody>
@@ -13298,29 +13321,6 @@
                           <a:latin typeface="맑은 고딕"/>
                         </a:rPr>
                         <a:t>26%</a:t>
-                      </a:r>
-                    </a:p>
-                  </a:txBody>
-                  <a:tcPr marL="38100" marR="38100" marT="12700" marB="12700" anchor="ctr">
-                    <a:solidFill>
-                      <a:srgbClr val="FFFFFF"/>
-                    </a:solidFill>
-                  </a:tcPr>
-                </a:tc>
-                <a:tc>
-                  <a:txBody>
-                    <a:bodyPr/>
-                    <a:lstStyle/>
-                    <a:p>
-                      <a:pPr algn="ctr"/>
-                      <a:r>
-                        <a:rPr sz="1000" b="0">
-                          <a:solidFill>
-                            <a:srgbClr val="3A3A3A"/>
-                          </a:solidFill>
-                          <a:latin typeface="맑은 고딕"/>
-                        </a:rPr>
-                        <a:t>25%</a:t>
                       </a:r>
                     </a:p>
                   </a:txBody>
@@ -13391,7 +13391,7 @@
                           </a:solidFill>
                           <a:latin typeface="맑은 고딕"/>
                         </a:rPr>
-                        <a:t>31%</a:t>
+                        <a:t>32%</a:t>
                       </a:r>
                     </a:p>
                   </a:txBody>
@@ -13437,7 +13437,7 @@
                           </a:solidFill>
                           <a:latin typeface="맑은 고딕"/>
                         </a:rPr>
-                        <a:t>32%</a:t>
+                        <a:t>33%</a:t>
                       </a:r>
                     </a:p>
                   </a:txBody>
@@ -13577,7 +13577,7 @@
                           </a:solidFill>
                           <a:latin typeface="맑은 고딕"/>
                         </a:rPr>
-                        <a:t>43%</a:t>
+                        <a:t>44%</a:t>
                       </a:r>
                     </a:p>
                   </a:txBody>
@@ -13648,7 +13648,7 @@
                           </a:solidFill>
                           <a:latin typeface="맑은 고딕"/>
                         </a:rPr>
-                        <a:t>46%</a:t>
+                        <a:t>47%</a:t>
                       </a:r>
                     </a:p>
                   </a:txBody>
@@ -13671,7 +13671,7 @@
                           </a:solidFill>
                           <a:latin typeface="맑은 고딕"/>
                         </a:rPr>
-                        <a:t>50%</a:t>
+                        <a:t>51%</a:t>
                       </a:r>
                     </a:p>
                   </a:txBody>
@@ -13694,7 +13694,7 @@
                           </a:solidFill>
                           <a:latin typeface="맑은 고딕"/>
                         </a:rPr>
-                        <a:t>57%</a:t>
+                        <a:t>58%</a:t>
                       </a:r>
                     </a:p>
                   </a:txBody>
@@ -13742,7 +13742,7 @@
                           </a:solidFill>
                           <a:latin typeface="맑은 고딕"/>
                         </a:rPr>
-                        <a:t>51%</a:t>
+                        <a:t>52%</a:t>
                       </a:r>
                     </a:p>
                   </a:txBody>
@@ -13765,7 +13765,7 @@
                           </a:solidFill>
                           <a:latin typeface="맑은 고딕"/>
                         </a:rPr>
-                        <a:t>55%</a:t>
+                        <a:t>56%</a:t>
                       </a:r>
                     </a:p>
                   </a:txBody>
@@ -13788,7 +13788,7 @@
                           </a:solidFill>
                           <a:latin typeface="맑은 고딕"/>
                         </a:rPr>
-                        <a:t>61%</a:t>
+                        <a:t>62%</a:t>
                       </a:r>
                     </a:p>
                   </a:txBody>
@@ -13905,7 +13905,7 @@
                           </a:solidFill>
                           <a:latin typeface="맑은 고딕"/>
                         </a:rPr>
-                        <a:t>72%</a:t>
+                        <a:t>73%</a:t>
                       </a:r>
                     </a:p>
                   </a:txBody>
@@ -13928,7 +13928,7 @@
                           </a:solidFill>
                           <a:latin typeface="맑은 고딕"/>
                         </a:rPr>
-                        <a:t>84%</a:t>
+                        <a:t>85%</a:t>
                       </a:r>
                     </a:p>
                   </a:txBody>
@@ -14305,7 +14305,7 @@
                           </a:solidFill>
                           <a:latin typeface="맑은 고딕"/>
                         </a:rPr>
-                        <a:t>+10.7%</a:t>
+                        <a:t>+10.8%</a:t>
                       </a:r>
                     </a:p>
                   </a:txBody>
@@ -14328,7 +14328,7 @@
                           </a:solidFill>
                           <a:latin typeface="맑은 고딕"/>
                         </a:rPr>
-                        <a:t>+13.7%</a:t>
+                        <a:t>+13.9%</a:t>
                       </a:r>
                     </a:p>
                   </a:txBody>
@@ -14351,7 +14351,7 @@
                           </a:solidFill>
                           <a:latin typeface="맑은 고딕"/>
                         </a:rPr>
-                        <a:t>+17.0%</a:t>
+                        <a:t>+17.3%</a:t>
                       </a:r>
                     </a:p>
                   </a:txBody>
@@ -14374,7 +14374,7 @@
                           </a:solidFill>
                           <a:latin typeface="맑은 고딕"/>
                         </a:rPr>
-                        <a:t>+20.8%</a:t>
+                        <a:t>+21.1%</a:t>
                       </a:r>
                     </a:p>
                   </a:txBody>
@@ -14422,7 +14422,7 @@
                           </a:solidFill>
                           <a:latin typeface="맑은 고딕"/>
                         </a:rPr>
-                        <a:t>+8.7%</a:t>
+                        <a:t>+8.8%</a:t>
                       </a:r>
                     </a:p>
                   </a:txBody>
@@ -14445,7 +14445,7 @@
                           </a:solidFill>
                           <a:latin typeface="맑은 고딕"/>
                         </a:rPr>
-                        <a:t>+11.7%</a:t>
+                        <a:t>+11.9%</a:t>
                       </a:r>
                     </a:p>
                   </a:txBody>
@@ -14468,7 +14468,7 @@
                           </a:solidFill>
                           <a:latin typeface="맑은 고딕"/>
                         </a:rPr>
-                        <a:t>+15.3%</a:t>
+                        <a:t>+15.6%</a:t>
                       </a:r>
                     </a:p>
                   </a:txBody>
@@ -14491,7 +14491,7 @@
                           </a:solidFill>
                           <a:latin typeface="맑은 고딕"/>
                         </a:rPr>
-                        <a:t>+19.5%</a:t>
+                        <a:t>+19.9%</a:t>
                       </a:r>
                     </a:p>
                   </a:txBody>
@@ -14539,7 +14539,7 @@
                           </a:solidFill>
                           <a:latin typeface="맑은 고딕"/>
                         </a:rPr>
-                        <a:t>+6.2%</a:t>
+                        <a:t>+6.3%</a:t>
                       </a:r>
                     </a:p>
                   </a:txBody>
@@ -14562,7 +14562,7 @@
                           </a:solidFill>
                           <a:latin typeface="맑은 고딕"/>
                         </a:rPr>
-                        <a:t>+9.3%</a:t>
+                        <a:t>+9.5%</a:t>
                       </a:r>
                     </a:p>
                   </a:txBody>
@@ -14585,7 +14585,7 @@
                           </a:solidFill>
                           <a:latin typeface="맑은 고딕"/>
                         </a:rPr>
-                        <a:t>+13.0%</a:t>
+                        <a:t>+13.3%</a:t>
                       </a:r>
                     </a:p>
                   </a:txBody>
@@ -14608,7 +14608,7 @@
                           </a:solidFill>
                           <a:latin typeface="맑은 고딕"/>
                         </a:rPr>
-                        <a:t>+17.7%</a:t>
+                        <a:t>+18.0%</a:t>
                       </a:r>
                     </a:p>
                   </a:txBody>
@@ -14679,7 +14679,7 @@
                           </a:solidFill>
                           <a:latin typeface="맑은 고딕"/>
                         </a:rPr>
-                        <a:t>+6.4%</a:t>
+                        <a:t>+6.6%</a:t>
                       </a:r>
                     </a:p>
                   </a:txBody>
@@ -14702,7 +14702,7 @@
                           </a:solidFill>
                           <a:latin typeface="맑은 고딕"/>
                         </a:rPr>
-                        <a:t>+10.2%</a:t>
+                        <a:t>+10.4%</a:t>
                       </a:r>
                     </a:p>
                   </a:txBody>
@@ -14725,7 +14725,7 @@
                           </a:solidFill>
                           <a:latin typeface="맑은 고딕"/>
                         </a:rPr>
-                        <a:t>+15.0%</a:t>
+                        <a:t>+15.3%</a:t>
                       </a:r>
                     </a:p>
                   </a:txBody>
@@ -14796,7 +14796,7 @@
                           </a:solidFill>
                           <a:latin typeface="맑은 고딕"/>
                         </a:rPr>
-                        <a:t>+2.9%</a:t>
+                        <a:t>+3.0%</a:t>
                       </a:r>
                     </a:p>
                   </a:txBody>
@@ -14819,7 +14819,7 @@
                           </a:solidFill>
                           <a:latin typeface="맑은 고딕"/>
                         </a:rPr>
-                        <a:t>+6.5%</a:t>
+                        <a:t>+6.7%</a:t>
                       </a:r>
                     </a:p>
                   </a:txBody>
@@ -14842,7 +14842,7 @@
                           </a:solidFill>
                           <a:latin typeface="맑은 고딕"/>
                         </a:rPr>
-                        <a:t>+11.3%</a:t>
+                        <a:t>+11.6%</a:t>
                       </a:r>
                     </a:p>
                   </a:txBody>
@@ -14890,7 +14890,7 @@
                           </a:solidFill>
                           <a:latin typeface="맑은 고딕"/>
                         </a:rPr>
-                        <a:t>-4.0%</a:t>
+                        <a:t>-4.1%</a:t>
                       </a:r>
                     </a:p>
                   </a:txBody>
@@ -14936,7 +14936,7 @@
                           </a:solidFill>
                           <a:latin typeface="맑은 고딕"/>
                         </a:rPr>
-                        <a:t>+2.0%</a:t>
+                        <a:t>+2.1%</a:t>
                       </a:r>
                     </a:p>
                   </a:txBody>
@@ -14959,7 +14959,7 @@
                           </a:solidFill>
                           <a:latin typeface="맑은 고딕"/>
                         </a:rPr>
-                        <a:t>+6.3%</a:t>
+                        <a:t>+6.5%</a:t>
                       </a:r>
                     </a:p>
                   </a:txBody>
@@ -15007,7 +15007,7 @@
                           </a:solidFill>
                           <a:latin typeface="맑은 고딕"/>
                         </a:rPr>
-                        <a:t>-8.7%</a:t>
+                        <a:t>-8.8%</a:t>
                       </a:r>
                     </a:p>
                   </a:txBody>
@@ -15053,7 +15053,7 @@
                           </a:solidFill>
                           <a:latin typeface="맑은 고딕"/>
                         </a:rPr>
-                        <a:t>-3.6%</a:t>
+                        <a:t>-3.5%</a:t>
                       </a:r>
                     </a:p>
                   </a:txBody>
@@ -15076,7 +15076,7 @@
                           </a:solidFill>
                           <a:latin typeface="맑은 고딕"/>
                         </a:rPr>
-                        <a:t>-0.2%</a:t>
+                        <a:t>+0.0%</a:t>
                       </a:r>
                     </a:p>
                   </a:txBody>
@@ -15124,7 +15124,7 @@
                           </a:solidFill>
                           <a:latin typeface="맑은 고딕"/>
                         </a:rPr>
-                        <a:t>-14.3%</a:t>
+                        <a:t>-14.4%</a:t>
                       </a:r>
                     </a:p>
                   </a:txBody>
@@ -15170,7 +15170,7 @@
                           </a:solidFill>
                           <a:latin typeface="맑은 고딕"/>
                         </a:rPr>
-                        <a:t>-10.3%</a:t>
+                        <a:t>-10.2%</a:t>
                       </a:r>
                     </a:p>
                   </a:txBody>
@@ -15193,7 +15193,7 @@
                           </a:solidFill>
                           <a:latin typeface="맑은 고딕"/>
                         </a:rPr>
-                        <a:t>-8.0%</a:t>
+                        <a:t>-7.8%</a:t>
                       </a:r>
                     </a:p>
                   </a:txBody>
@@ -15241,7 +15241,7 @@
                           </a:solidFill>
                           <a:latin typeface="맑은 고딕"/>
                         </a:rPr>
-                        <a:t>-20.7%</a:t>
+                        <a:t>-20.9%</a:t>
                       </a:r>
                     </a:p>
                   </a:txBody>
@@ -15287,7 +15287,7 @@
                           </a:solidFill>
                           <a:latin typeface="맑은 고딕"/>
                         </a:rPr>
-                        <a:t>-18.1%</a:t>
+                        <a:t>-18.0%</a:t>
                       </a:r>
                     </a:p>
                   </a:txBody>
@@ -15310,7 +15310,7 @@
                           </a:solidFill>
                           <a:latin typeface="맑은 고딕"/>
                         </a:rPr>
-                        <a:t>-16.9%</a:t>
+                        <a:t>-16.7%</a:t>
                       </a:r>
                     </a:p>
                   </a:txBody>
@@ -16000,7 +16000,7 @@
                           </a:solidFill>
                           <a:latin typeface="맑은 고딕"/>
                         </a:rPr>
-                        <a:t>41%</a:t>
+                        <a:t>42%</a:t>
                       </a:r>
                     </a:p>
                   </a:txBody>
@@ -16023,7 +16023,7 @@
                           </a:solidFill>
                           <a:latin typeface="맑은 고딕"/>
                         </a:rPr>
-                        <a:t>41%</a:t>
+                        <a:t>42%</a:t>
                       </a:r>
                     </a:p>
                   </a:txBody>
@@ -16094,7 +16094,7 @@
                           </a:solidFill>
                           <a:latin typeface="맑은 고딕"/>
                         </a:rPr>
-                        <a:t>46%</a:t>
+                        <a:t>47%</a:t>
                       </a:r>
                     </a:p>
                   </a:txBody>
@@ -16140,7 +16140,7 @@
                           </a:solidFill>
                           <a:latin typeface="맑은 고딕"/>
                         </a:rPr>
-                        <a:t>48%</a:t>
+                        <a:t>49%</a:t>
                       </a:r>
                     </a:p>
                   </a:txBody>
@@ -16211,7 +16211,7 @@
                           </a:solidFill>
                           <a:latin typeface="맑은 고딕"/>
                         </a:rPr>
-                        <a:t>52%</a:t>
+                        <a:t>53%</a:t>
                       </a:r>
                     </a:p>
                   </a:txBody>
@@ -16234,7 +16234,7 @@
                           </a:solidFill>
                           <a:latin typeface="맑은 고딕"/>
                         </a:rPr>
-                        <a:t>55%</a:t>
+                        <a:t>56%</a:t>
                       </a:r>
                     </a:p>
                   </a:txBody>
@@ -16328,7 +16328,7 @@
                           </a:solidFill>
                           <a:latin typeface="맑은 고딕"/>
                         </a:rPr>
-                        <a:t>59%</a:t>
+                        <a:t>60%</a:t>
                       </a:r>
                     </a:p>
                   </a:txBody>
@@ -16445,7 +16445,7 @@
                           </a:solidFill>
                           <a:latin typeface="맑은 고딕"/>
                         </a:rPr>
-                        <a:t>67%</a:t>
+                        <a:t>68%</a:t>
                       </a:r>
                     </a:p>
                   </a:txBody>
@@ -16562,7 +16562,7 @@
                           </a:solidFill>
                           <a:latin typeface="맑은 고딕"/>
                         </a:rPr>
-                        <a:t>75%</a:t>
+                        <a:t>76%</a:t>
                       </a:r>
                     </a:p>
                   </a:txBody>
@@ -16819,7 +16819,7 @@
                           </a:solidFill>
                           <a:latin typeface="맑은 고딕"/>
                         </a:rPr>
-                        <a:t>87%</a:t>
+                        <a:t>86%</a:t>
                       </a:r>
                     </a:p>
                   </a:txBody>
@@ -17125,7 +17125,7 @@
                           </a:solidFill>
                           <a:latin typeface="맑은 고딕"/>
                         </a:rPr>
-                        <a:t>+18.6%</a:t>
+                        <a:t>+18.8%</a:t>
                       </a:r>
                     </a:p>
                   </a:txBody>
@@ -17148,7 +17148,7 @@
                           </a:solidFill>
                           <a:latin typeface="맑은 고딕"/>
                         </a:rPr>
-                        <a:t>+22.9%</a:t>
+                        <a:t>+23.2%</a:t>
                       </a:r>
                     </a:p>
                   </a:txBody>
@@ -17171,7 +17171,7 @@
                           </a:solidFill>
                           <a:latin typeface="맑은 고딕"/>
                         </a:rPr>
-                        <a:t>+27.7%</a:t>
+                        <a:t>+28.0%</a:t>
                       </a:r>
                     </a:p>
                   </a:txBody>
@@ -17194,7 +17194,7 @@
                           </a:solidFill>
                           <a:latin typeface="맑은 고딕"/>
                         </a:rPr>
-                        <a:t>+32.3%</a:t>
+                        <a:t>+32.8%</a:t>
                       </a:r>
                     </a:p>
                   </a:txBody>
@@ -17242,7 +17242,7 @@
                           </a:solidFill>
                           <a:latin typeface="맑은 고딕"/>
                         </a:rPr>
-                        <a:t>+14.8%</a:t>
+                        <a:t>+15.0%</a:t>
                       </a:r>
                     </a:p>
                   </a:txBody>
@@ -17265,7 +17265,7 @@
                           </a:solidFill>
                           <a:latin typeface="맑은 고딕"/>
                         </a:rPr>
-                        <a:t>+19.1%</a:t>
+                        <a:t>+19.3%</a:t>
                       </a:r>
                     </a:p>
                   </a:txBody>
@@ -17288,7 +17288,7 @@
                           </a:solidFill>
                           <a:latin typeface="맑은 고딕"/>
                         </a:rPr>
-                        <a:t>+23.8%</a:t>
+                        <a:t>+24.2%</a:t>
                       </a:r>
                     </a:p>
                   </a:txBody>
@@ -17311,7 +17311,7 @@
                           </a:solidFill>
                           <a:latin typeface="맑은 고딕"/>
                         </a:rPr>
-                        <a:t>+28.3%</a:t>
+                        <a:t>+28.8%</a:t>
                       </a:r>
                     </a:p>
                   </a:txBody>
@@ -17359,7 +17359,7 @@
                           </a:solidFill>
                           <a:latin typeface="맑은 고딕"/>
                         </a:rPr>
-                        <a:t>+10.5%</a:t>
+                        <a:t>+10.6%</a:t>
                       </a:r>
                     </a:p>
                   </a:txBody>
@@ -17382,7 +17382,7 @@
                           </a:solidFill>
                           <a:latin typeface="맑은 고딕"/>
                         </a:rPr>
-                        <a:t>+14.6%</a:t>
+                        <a:t>+14.8%</a:t>
                       </a:r>
                     </a:p>
                   </a:txBody>
@@ -17405,7 +17405,7 @@
                           </a:solidFill>
                           <a:latin typeface="맑은 고딕"/>
                         </a:rPr>
-                        <a:t>+19.3%</a:t>
+                        <a:t>+19.7%</a:t>
                       </a:r>
                     </a:p>
                   </a:txBody>
@@ -17428,7 +17428,7 @@
                           </a:solidFill>
                           <a:latin typeface="맑은 고딕"/>
                         </a:rPr>
-                        <a:t>+23.8%</a:t>
+                        <a:t>+24.3%</a:t>
                       </a:r>
                     </a:p>
                   </a:txBody>
@@ -17499,7 +17499,7 @@
                           </a:solidFill>
                           <a:latin typeface="맑은 고딕"/>
                         </a:rPr>
-                        <a:t>+9.5%</a:t>
+                        <a:t>+9.6%</a:t>
                       </a:r>
                     </a:p>
                   </a:txBody>
@@ -17522,7 +17522,7 @@
                           </a:solidFill>
                           <a:latin typeface="맑은 고딕"/>
                         </a:rPr>
-                        <a:t>+14.1%</a:t>
+                        <a:t>+14.4%</a:t>
                       </a:r>
                     </a:p>
                   </a:txBody>
@@ -17545,7 +17545,7 @@
                           </a:solidFill>
                           <a:latin typeface="맑은 고딕"/>
                         </a:rPr>
-                        <a:t>+18.8%</a:t>
+                        <a:t>+19.3%</a:t>
                       </a:r>
                     </a:p>
                   </a:txBody>
@@ -17616,7 +17616,7 @@
                           </a:solidFill>
                           <a:latin typeface="맑은 고딕"/>
                         </a:rPr>
-                        <a:t>+3.5%</a:t>
+                        <a:t>+3.7%</a:t>
                       </a:r>
                     </a:p>
                   </a:txBody>
@@ -17639,7 +17639,7 @@
                           </a:solidFill>
                           <a:latin typeface="맑은 고딕"/>
                         </a:rPr>
-                        <a:t>+7.9%</a:t>
+                        <a:t>+8.2%</a:t>
                       </a:r>
                     </a:p>
                   </a:txBody>
@@ -17662,7 +17662,7 @@
                           </a:solidFill>
                           <a:latin typeface="맑은 고딕"/>
                         </a:rPr>
-                        <a:t>+13.2%</a:t>
+                        <a:t>+13.6%</a:t>
                       </a:r>
                     </a:p>
                   </a:txBody>
@@ -17710,7 +17710,7 @@
                           </a:solidFill>
                           <a:latin typeface="맑은 고딕"/>
                         </a:rPr>
-                        <a:t>-6.3%</a:t>
+                        <a:t>-6.4%</a:t>
                       </a:r>
                     </a:p>
                   </a:txBody>
@@ -17733,7 +17733,7 @@
                           </a:solidFill>
                           <a:latin typeface="맑은 고딕"/>
                         </a:rPr>
-                        <a:t>-3.3%</a:t>
+                        <a:t>-3.2%</a:t>
                       </a:r>
                     </a:p>
                   </a:txBody>
@@ -17756,7 +17756,7 @@
                           </a:solidFill>
                           <a:latin typeface="맑은 고딕"/>
                         </a:rPr>
-                        <a:t>+0.6%</a:t>
+                        <a:t>+0.9%</a:t>
                       </a:r>
                     </a:p>
                   </a:txBody>
@@ -17779,7 +17779,7 @@
                           </a:solidFill>
                           <a:latin typeface="맑은 고딕"/>
                         </a:rPr>
-                        <a:t>+6.4%</a:t>
+                        <a:t>+6.8%</a:t>
                       </a:r>
                     </a:p>
                   </a:txBody>
@@ -17850,7 +17850,7 @@
                           </a:solidFill>
                           <a:latin typeface="맑은 고딕"/>
                         </a:rPr>
-                        <a:t>-11.1%</a:t>
+                        <a:t>-11.0%</a:t>
                       </a:r>
                     </a:p>
                   </a:txBody>
@@ -17873,7 +17873,7 @@
                           </a:solidFill>
                           <a:latin typeface="맑은 고딕"/>
                         </a:rPr>
-                        <a:t>-8.0%</a:t>
+                        <a:t>-7.8%</a:t>
                       </a:r>
                     </a:p>
                   </a:txBody>
@@ -17896,7 +17896,7 @@
                           </a:solidFill>
                           <a:latin typeface="맑은 고딕"/>
                         </a:rPr>
-                        <a:t>-2.5%</a:t>
+                        <a:t>-2.1%</a:t>
                       </a:r>
                     </a:p>
                   </a:txBody>
@@ -17944,7 +17944,7 @@
                           </a:solidFill>
                           <a:latin typeface="맑은 고딕"/>
                         </a:rPr>
-                        <a:t>-21.4%</a:t>
+                        <a:t>-21.5%</a:t>
                       </a:r>
                     </a:p>
                   </a:txBody>
@@ -17967,7 +17967,7 @@
                           </a:solidFill>
                           <a:latin typeface="맑은 고딕"/>
                         </a:rPr>
-                        <a:t>-19.9%</a:t>
+                        <a:t>-19.8%</a:t>
                       </a:r>
                     </a:p>
                   </a:txBody>
@@ -17990,7 +17990,7 @@
                           </a:solidFill>
                           <a:latin typeface="맑은 고딕"/>
                         </a:rPr>
-                        <a:t>-18.0%</a:t>
+                        <a:t>-17.7%</a:t>
                       </a:r>
                     </a:p>
                   </a:txBody>
@@ -18013,7 +18013,7 @@
                           </a:solidFill>
                           <a:latin typeface="맑은 고딕"/>
                         </a:rPr>
-                        <a:t>-14.2%</a:t>
+                        <a:t>-13.9%</a:t>
                       </a:r>
                     </a:p>
                   </a:txBody>
@@ -18084,7 +18084,7 @@
                           </a:solidFill>
                           <a:latin typeface="맑은 고딕"/>
                         </a:rPr>
-                        <a:t>-29.6%</a:t>
+                        <a:t>-29.5%</a:t>
                       </a:r>
                     </a:p>
                   </a:txBody>
@@ -18107,7 +18107,7 @@
                           </a:solidFill>
                           <a:latin typeface="맑은 고딕"/>
                         </a:rPr>
-                        <a:t>-29.1%</a:t>
+                        <a:t>-28.9%</a:t>
                       </a:r>
                     </a:p>
                   </a:txBody>
@@ -18130,7 +18130,7 @@
                           </a:solidFill>
                           <a:latin typeface="맑은 고딕"/>
                         </a:rPr>
-                        <a:t>-28.8%</a:t>
+                        <a:t>-28.5%</a:t>
                       </a:r>
                     </a:p>
                   </a:txBody>

--- a/제안서/변동성하베스트펀드_AITop2_v1_20260715.pptx
+++ b/제안서/변동성하베스트펀드_AITop2_v1_20260715.pptx
@@ -10015,2599 +10015,7 @@
 </p:sld>
 </file>
 
-<file path=ppt/slides/slide12.xml><?xml version="1.0" encoding="utf-8"?>
-<p:sld xmlns:a="http://schemas.openxmlformats.org/drawingml/2006/main" xmlns:r="http://schemas.openxmlformats.org/officeDocument/2006/relationships" xmlns:p="http://schemas.openxmlformats.org/presentationml/2006/main">
-  <p:cSld>
-    <p:spTree>
-      <p:nvGrpSpPr>
-        <p:cNvPr id="1" name=""/>
-        <p:cNvGrpSpPr/>
-        <p:nvPr/>
-      </p:nvGrpSpPr>
-      <p:grpSpPr>
-        <a:xfrm>
-          <a:off x="0" y="0"/>
-          <a:ext cx="0" cy="0"/>
-          <a:chOff x="0" y="0"/>
-          <a:chExt cx="0" cy="0"/>
-        </a:xfrm>
-      </p:grpSpPr>
-      <p:sp>
-        <p:nvSpPr>
-          <p:cNvPr id="2" name="Rectangle 1"/>
-          <p:cNvSpPr/>
-          <p:nvPr/>
-        </p:nvSpPr>
-        <p:spPr>
-          <a:xfrm>
-            <a:off x="0" y="0"/>
-            <a:ext cx="9875520" cy="6858000"/>
-          </a:xfrm>
-          <a:prstGeom prst="rect">
-            <a:avLst/>
-          </a:prstGeom>
-          <a:solidFill>
-            <a:srgbClr val="FFFFFF"/>
-          </a:solidFill>
-          <a:ln>
-            <a:noFill/>
-          </a:ln>
-          <a:effectLst/>
-        </p:spPr>
-        <p:style>
-          <a:lnRef idx="1">
-            <a:schemeClr val="accent1"/>
-          </a:lnRef>
-          <a:fillRef idx="3">
-            <a:schemeClr val="accent1"/>
-          </a:fillRef>
-          <a:effectRef idx="2">
-            <a:schemeClr val="accent1"/>
-          </a:effectRef>
-          <a:fontRef idx="minor">
-            <a:schemeClr val="lt1"/>
-          </a:fontRef>
-        </p:style>
-        <p:txBody>
-          <a:bodyPr rtlCol="0" anchor="ctr"/>
-          <a:lstStyle/>
-          <a:p>
-            <a:pPr algn="ctr"/>
-            <a:endParaRPr/>
-          </a:p>
-        </p:txBody>
-      </p:sp>
-      <p:sp>
-        <p:nvSpPr>
-          <p:cNvPr id="3" name="Rectangle 2"/>
-          <p:cNvSpPr/>
-          <p:nvPr/>
-        </p:nvSpPr>
-        <p:spPr>
-          <a:xfrm>
-            <a:off x="457200" y="502920"/>
-            <a:ext cx="128016" cy="566928"/>
-          </a:xfrm>
-          <a:prstGeom prst="rect">
-            <a:avLst/>
-          </a:prstGeom>
-          <a:solidFill>
-            <a:srgbClr val="F58220"/>
-          </a:solidFill>
-          <a:ln>
-            <a:noFill/>
-          </a:ln>
-          <a:effectLst/>
-        </p:spPr>
-        <p:style>
-          <a:lnRef idx="1">
-            <a:schemeClr val="accent1"/>
-          </a:lnRef>
-          <a:fillRef idx="3">
-            <a:schemeClr val="accent1"/>
-          </a:fillRef>
-          <a:effectRef idx="2">
-            <a:schemeClr val="accent1"/>
-          </a:effectRef>
-          <a:fontRef idx="minor">
-            <a:schemeClr val="lt1"/>
-          </a:fontRef>
-        </p:style>
-        <p:txBody>
-          <a:bodyPr rtlCol="0" anchor="ctr"/>
-          <a:lstStyle/>
-          <a:p>
-            <a:pPr algn="ctr"/>
-            <a:endParaRPr/>
-          </a:p>
-        </p:txBody>
-      </p:sp>
-      <p:sp>
-        <p:nvSpPr>
-          <p:cNvPr id="4" name="TextBox 3"/>
-          <p:cNvSpPr txBox="1"/>
-          <p:nvPr/>
-        </p:nvSpPr>
-        <p:spPr>
-          <a:xfrm>
-            <a:off x="585216" y="342021"/>
-            <a:ext cx="8229600" cy="210314"/>
-          </a:xfrm>
-          <a:prstGeom prst="rect">
-            <a:avLst/>
-          </a:prstGeom>
-          <a:noFill/>
-        </p:spPr>
-        <p:txBody>
-          <a:bodyPr wrap="square" lIns="25400" tIns="12700" rIns="25400" bIns="12700" anchor="t">
-            <a:spAutoFit/>
-          </a:bodyPr>
-          <a:lstStyle/>
-          <a:p>
-            <a:pPr algn="l">
-              <a:lnSpc>
-                <a:spcPct val="100000"/>
-              </a:lnSpc>
-            </a:pPr>
-            <a:r>
-              <a:rPr sz="1200" b="1" dirty="0">
-                <a:solidFill>
-                  <a:srgbClr val="F58220"/>
-                </a:solidFill>
-                <a:latin typeface="맑은 고딕"/>
-              </a:rPr>
-              <a:t>0</a:t>
-            </a:r>
-            <a:r>
-              <a:rPr lang="en-US" altLang="ko-KR" sz="1200" b="1" dirty="0">
-                <a:solidFill>
-                  <a:srgbClr val="F58220"/>
-                </a:solidFill>
-                <a:latin typeface="맑은 고딕"/>
-              </a:rPr>
-              <a:t>8</a:t>
-            </a:r>
-            <a:r>
-              <a:rPr sz="1200" b="1" dirty="0">
-                <a:solidFill>
-                  <a:srgbClr val="F58220"/>
-                </a:solidFill>
-                <a:latin typeface="맑은 고딕"/>
-              </a:rPr>
-              <a:t>  PAYOFF</a:t>
-            </a:r>
-          </a:p>
-        </p:txBody>
-      </p:sp>
-      <p:sp>
-        <p:nvSpPr>
-          <p:cNvPr id="5" name="TextBox 4"/>
-          <p:cNvSpPr txBox="1"/>
-          <p:nvPr/>
-        </p:nvSpPr>
-        <p:spPr>
-          <a:xfrm>
-            <a:off x="640080" y="585328"/>
-            <a:ext cx="8686800" cy="379591"/>
-          </a:xfrm>
-          <a:prstGeom prst="rect">
-            <a:avLst/>
-          </a:prstGeom>
-          <a:noFill/>
-        </p:spPr>
-        <p:txBody>
-          <a:bodyPr wrap="square" lIns="25400" tIns="12700" rIns="25400" bIns="12700" anchor="t">
-            <a:spAutoFit/>
-          </a:bodyPr>
-          <a:lstStyle/>
-          <a:p>
-            <a:pPr algn="l">
-              <a:lnSpc>
-                <a:spcPct val="100000"/>
-              </a:lnSpc>
-            </a:pPr>
-            <a:r>
-              <a:rPr sz="2300" b="1" dirty="0" err="1">
-                <a:solidFill>
-                  <a:srgbClr val="043B72"/>
-                </a:solidFill>
-                <a:latin typeface="맑은 고딕"/>
-              </a:rPr>
-              <a:t>수익</a:t>
-            </a:r>
-            <a:r>
-              <a:rPr sz="2300" b="1" dirty="0">
-                <a:solidFill>
-                  <a:srgbClr val="043B72"/>
-                </a:solidFill>
-                <a:latin typeface="맑은 고딕"/>
-              </a:rPr>
-              <a:t> 구조</a:t>
-            </a:r>
-            <a:r>
-              <a:rPr lang="en-US" altLang="ko-KR" sz="2300" b="1" dirty="0">
-                <a:solidFill>
-                  <a:srgbClr val="043B72"/>
-                </a:solidFill>
-                <a:latin typeface="맑은 고딕"/>
-              </a:rPr>
-              <a:t>1</a:t>
-            </a:r>
-            <a:r>
-              <a:rPr sz="2300" b="1" dirty="0">
-                <a:solidFill>
-                  <a:srgbClr val="043B72"/>
-                </a:solidFill>
-                <a:latin typeface="맑은 고딕"/>
-              </a:rPr>
-              <a:t> — </a:t>
-            </a:r>
-            <a:r>
-              <a:rPr sz="2300" b="1" dirty="0" err="1">
-                <a:solidFill>
-                  <a:srgbClr val="043B72"/>
-                </a:solidFill>
-                <a:latin typeface="맑은 고딕"/>
-              </a:rPr>
-              <a:t>성장변동성펀드</a:t>
-            </a:r>
-            <a:r>
-              <a:rPr sz="2300" b="1" dirty="0">
-                <a:solidFill>
-                  <a:srgbClr val="043B72"/>
-                </a:solidFill>
-                <a:latin typeface="맑은 고딕"/>
-              </a:rPr>
-              <a:t> (</a:t>
-            </a:r>
-            <a:r>
-              <a:rPr sz="2300" b="1" dirty="0" err="1">
-                <a:solidFill>
-                  <a:srgbClr val="043B72"/>
-                </a:solidFill>
-                <a:latin typeface="맑은 고딕"/>
-              </a:rPr>
-              <a:t>변동성</a:t>
-            </a:r>
-            <a:r>
-              <a:rPr sz="2300" b="1" dirty="0">
-                <a:solidFill>
-                  <a:srgbClr val="043B72"/>
-                </a:solidFill>
-                <a:latin typeface="맑은 고딕"/>
-              </a:rPr>
-              <a:t> </a:t>
-            </a:r>
-            <a:r>
-              <a:rPr sz="2300" b="1" dirty="0" err="1">
-                <a:solidFill>
-                  <a:srgbClr val="043B72"/>
-                </a:solidFill>
-                <a:latin typeface="맑은 고딕"/>
-              </a:rPr>
-              <a:t>매매</a:t>
-            </a:r>
-            <a:r>
-              <a:rPr sz="2300" b="1" dirty="0">
-                <a:solidFill>
-                  <a:srgbClr val="043B72"/>
-                </a:solidFill>
-                <a:latin typeface="맑은 고딕"/>
-              </a:rPr>
-              <a:t> + </a:t>
-            </a:r>
-            <a:r>
-              <a:rPr sz="2300" b="1" dirty="0" err="1">
-                <a:solidFill>
-                  <a:srgbClr val="043B72"/>
-                </a:solidFill>
-                <a:latin typeface="맑은 고딕"/>
-              </a:rPr>
-              <a:t>상승</a:t>
-            </a:r>
-            <a:r>
-              <a:rPr sz="2300" b="1" dirty="0">
-                <a:solidFill>
-                  <a:srgbClr val="043B72"/>
-                </a:solidFill>
-                <a:latin typeface="맑은 고딕"/>
-              </a:rPr>
-              <a:t> </a:t>
-            </a:r>
-            <a:r>
-              <a:rPr sz="2300" b="1" dirty="0" err="1">
-                <a:solidFill>
-                  <a:srgbClr val="043B72"/>
-                </a:solidFill>
-                <a:latin typeface="맑은 고딕"/>
-              </a:rPr>
-              <a:t>참여</a:t>
-            </a:r>
-            <a:r>
-              <a:rPr sz="2300" b="1" dirty="0">
-                <a:solidFill>
-                  <a:srgbClr val="043B72"/>
-                </a:solidFill>
-                <a:latin typeface="맑은 고딕"/>
-              </a:rPr>
-              <a:t>)</a:t>
-            </a:r>
-          </a:p>
-        </p:txBody>
-      </p:sp>
-      <p:sp>
-        <p:nvSpPr>
-          <p:cNvPr id="6" name="TextBox 5"/>
-          <p:cNvSpPr txBox="1"/>
-          <p:nvPr/>
-        </p:nvSpPr>
-        <p:spPr>
-          <a:xfrm>
-            <a:off x="685800" y="960120"/>
-            <a:ext cx="8686800" cy="365760"/>
-          </a:xfrm>
-          <a:prstGeom prst="rect">
-            <a:avLst/>
-          </a:prstGeom>
-          <a:noFill/>
-        </p:spPr>
-        <p:txBody>
-          <a:bodyPr wrap="square" lIns="25400" tIns="12700" rIns="25400" bIns="12700" anchor="t">
-            <a:spAutoFit/>
-          </a:bodyPr>
-          <a:lstStyle/>
-          <a:p>
-            <a:pPr algn="l">
-              <a:lnSpc>
-                <a:spcPct val="100000"/>
-              </a:lnSpc>
-            </a:pPr>
-            <a:r>
-              <a:rPr sz="1250" b="1">
-                <a:solidFill>
-                  <a:srgbClr val="3A3A3A"/>
-                </a:solidFill>
-                <a:latin typeface="맑은 고딕"/>
-              </a:rPr>
-              <a:t>운용 중 -40% 미도달 시 상승에 참여, -40% 도달 시 하방에 노출됩니다. 시뮬레이션 결과(각 점=1회).</a:t>
-            </a:r>
-          </a:p>
-        </p:txBody>
-      </p:sp>
-      <p:sp>
-        <p:nvSpPr>
-          <p:cNvPr id="9" name="TextBox 8"/>
-          <p:cNvSpPr txBox="1"/>
-          <p:nvPr/>
-        </p:nvSpPr>
-        <p:spPr>
-          <a:xfrm>
-            <a:off x="777240" y="5004936"/>
-            <a:ext cx="8595360" cy="365760"/>
-          </a:xfrm>
-          <a:prstGeom prst="rect">
-            <a:avLst/>
-          </a:prstGeom>
-          <a:noFill/>
-        </p:spPr>
-        <p:txBody>
-          <a:bodyPr wrap="square" lIns="25400" tIns="12700" rIns="25400" bIns="12700" anchor="t">
-            <a:spAutoFit/>
-          </a:bodyPr>
-          <a:lstStyle/>
-          <a:p>
-            <a:pPr algn="l">
-              <a:lnSpc>
-                <a:spcPct val="100000"/>
-              </a:lnSpc>
-            </a:pPr>
-            <a:r>
-              <a:rPr sz="900" b="0" dirty="0" err="1">
-                <a:solidFill>
-                  <a:srgbClr val="84888B"/>
-                </a:solidFill>
-                <a:latin typeface="맑은 고딕"/>
-              </a:rPr>
-              <a:t>변동성 60% 가정 · 점=시뮬 1회 · 노란선=구간 평균 · 데이터: 자체 시뮬레이션(거래비용·운용오차 포함)</a:t>
-            </a:r>
-            <a:r>
-              <a:rPr sz="900" b="0" dirty="0">
-                <a:solidFill>
-                  <a:srgbClr val="84888B"/>
-                </a:solidFill>
-                <a:latin typeface="맑은 고딕"/>
-              </a:rPr>
-              <a:t/>
-            </a:r>
-            <a:r>
-              <a:rPr sz="900" b="0" dirty="0" err="1">
-                <a:solidFill>
-                  <a:srgbClr val="84888B"/>
-                </a:solidFill>
-                <a:latin typeface="맑은 고딕"/>
-              </a:rPr>
-              <a:t/>
-            </a:r>
-            <a:r>
-              <a:rPr sz="900" b="0" dirty="0">
-                <a:solidFill>
-                  <a:srgbClr val="84888B"/>
-                </a:solidFill>
-                <a:latin typeface="맑은 고딕"/>
-              </a:rPr>
-              <a:t/>
-            </a:r>
-            <a:r>
-              <a:rPr sz="900" b="0" dirty="0" err="1">
-                <a:solidFill>
-                  <a:srgbClr val="84888B"/>
-                </a:solidFill>
-                <a:latin typeface="맑은 고딕"/>
-              </a:rPr>
-              <a:t/>
-            </a:r>
-            <a:r>
-              <a:rPr sz="900" b="0" dirty="0">
-                <a:solidFill>
-                  <a:srgbClr val="84888B"/>
-                </a:solidFill>
-                <a:latin typeface="맑은 고딕"/>
-              </a:rPr>
-              <a:t/>
-            </a:r>
-            <a:r>
-              <a:rPr sz="900" b="0" dirty="0" err="1">
-                <a:solidFill>
-                  <a:srgbClr val="84888B"/>
-                </a:solidFill>
-                <a:latin typeface="맑은 고딕"/>
-              </a:rPr>
-              <a:t/>
-            </a:r>
-            <a:r>
-              <a:rPr sz="900" b="0" dirty="0">
-                <a:solidFill>
-                  <a:srgbClr val="84888B"/>
-                </a:solidFill>
-                <a:latin typeface="맑은 고딕"/>
-              </a:rPr>
-              <a:t/>
-            </a:r>
-            <a:r>
-              <a:rPr sz="900" b="1" dirty="0" err="1">
-                <a:solidFill>
-                  <a:srgbClr val="F58220"/>
-                </a:solidFill>
-                <a:latin typeface="맑은 고딕"/>
-              </a:rPr>
-              <a:t/>
-            </a:r>
-            <a:r>
-              <a:rPr sz="900" b="1" dirty="0">
-                <a:solidFill>
-                  <a:srgbClr val="F58220"/>
-                </a:solidFill>
-                <a:latin typeface="맑은 고딕"/>
-              </a:rPr>
-              <a:t/>
-            </a:r>
-            <a:r>
-              <a:rPr sz="900" b="1" dirty="0" err="1">
-                <a:solidFill>
-                  <a:srgbClr val="F58220"/>
-                </a:solidFill>
-                <a:latin typeface="맑은 고딕"/>
-              </a:rPr>
-              <a:t/>
-            </a:r>
-            <a:r>
-              <a:rPr sz="900" b="1" dirty="0">
-                <a:solidFill>
-                  <a:srgbClr val="F58220"/>
-                </a:solidFill>
-                <a:latin typeface="맑은 고딕"/>
-              </a:rPr>
-              <a:t/>
-            </a:r>
-            <a:r>
-              <a:rPr sz="900" b="1" dirty="0" err="1">
-                <a:solidFill>
-                  <a:srgbClr val="F58220"/>
-                </a:solidFill>
-                <a:latin typeface="맑은 고딕"/>
-              </a:rPr>
-              <a:t/>
-            </a:r>
-            <a:r>
-              <a:rPr sz="900" b="0" dirty="0">
-                <a:solidFill>
-                  <a:srgbClr val="84888B"/>
-                </a:solidFill>
-                <a:latin typeface="맑은 고딕"/>
-              </a:rPr>
-              <a:t/>
-            </a:r>
-            <a:r>
-              <a:rPr sz="900" b="0" dirty="0" err="1">
-                <a:solidFill>
-                  <a:srgbClr val="84888B"/>
-                </a:solidFill>
-                <a:latin typeface="맑은 고딕"/>
-              </a:rPr>
-              <a:t/>
-            </a:r>
-            <a:r>
-              <a:rPr sz="900" b="0" dirty="0">
-                <a:solidFill>
-                  <a:srgbClr val="84888B"/>
-                </a:solidFill>
-                <a:latin typeface="맑은 고딕"/>
-              </a:rPr>
-              <a:t/>
-            </a:r>
-            <a:r>
-              <a:rPr sz="900" b="0" dirty="0" err="1">
-                <a:solidFill>
-                  <a:srgbClr val="84888B"/>
-                </a:solidFill>
-                <a:latin typeface="맑은 고딕"/>
-              </a:rPr>
-              <a:t/>
-            </a:r>
-            <a:r>
-              <a:rPr sz="900" b="0" dirty="0">
-                <a:solidFill>
-                  <a:srgbClr val="84888B"/>
-                </a:solidFill>
-                <a:latin typeface="맑은 고딕"/>
-              </a:rPr>
-              <a:t/>
-            </a:r>
-            <a:r>
-              <a:rPr sz="900" b="0" dirty="0" err="1">
-                <a:solidFill>
-                  <a:srgbClr val="84888B"/>
-                </a:solidFill>
-                <a:latin typeface="맑은 고딕"/>
-              </a:rPr>
-              <a:t/>
-            </a:r>
-            <a:r>
-              <a:rPr sz="900" b="0" dirty="0">
-                <a:solidFill>
-                  <a:srgbClr val="84888B"/>
-                </a:solidFill>
-                <a:latin typeface="맑은 고딕"/>
-              </a:rPr>
-              <a:t/>
-            </a:r>
-            <a:r>
-              <a:rPr sz="900" b="0" dirty="0" err="1">
-                <a:solidFill>
-                  <a:srgbClr val="84888B"/>
-                </a:solidFill>
-                <a:latin typeface="맑은 고딕"/>
-              </a:rPr>
-              <a:t/>
-            </a:r>
-            <a:r>
-              <a:rPr sz="900" b="0" dirty="0">
-                <a:solidFill>
-                  <a:srgbClr val="84888B"/>
-                </a:solidFill>
-                <a:latin typeface="맑은 고딕"/>
-              </a:rPr>
-              <a:t/>
-            </a:r>
-            <a:r>
-              <a:rPr sz="900" b="0" dirty="0" err="1">
-                <a:solidFill>
-                  <a:srgbClr val="84888B"/>
-                </a:solidFill>
-                <a:latin typeface="맑은 고딕"/>
-              </a:rPr>
-              <a:t/>
-            </a:r>
-            <a:r>
-              <a:rPr sz="900" b="0" dirty="0">
-                <a:solidFill>
-                  <a:srgbClr val="84888B"/>
-                </a:solidFill>
-                <a:latin typeface="맑은 고딕"/>
-              </a:rPr>
-              <a:t/>
-            </a:r>
-          </a:p>
-        </p:txBody>
-      </p:sp>
-      <p:sp>
-        <p:nvSpPr>
-          <p:cNvPr id="10" name="TextBox 9"/>
-          <p:cNvSpPr txBox="1"/>
-          <p:nvPr/>
-        </p:nvSpPr>
-        <p:spPr>
-          <a:xfrm>
-            <a:off x="457200" y="6510528"/>
-            <a:ext cx="7863840" cy="292608"/>
-          </a:xfrm>
-          <a:prstGeom prst="rect">
-            <a:avLst/>
-          </a:prstGeom>
-          <a:noFill/>
-        </p:spPr>
-        <p:txBody>
-          <a:bodyPr wrap="square" lIns="25400" tIns="12700" rIns="25400" bIns="12700" anchor="t">
-            <a:spAutoFit/>
-          </a:bodyPr>
-          <a:lstStyle/>
-          <a:p>
-            <a:pPr algn="l">
-              <a:lnSpc>
-                <a:spcPct val="100000"/>
-              </a:lnSpc>
-            </a:pPr>
-            <a:r>
-              <a:rPr sz="700" b="0">
-                <a:solidFill>
-                  <a:srgbClr val="84888B"/>
-                </a:solidFill>
-                <a:latin typeface="맑은 고딕"/>
-              </a:rPr>
-              <a:t>※ 상기 자료는 이해를 돕기 위한 예시이며 실제 투자내용을 의미하지 않습니다. 시뮬레이션은 가정에 따른 것으로 실제와 다를 수 있습니다.</a:t>
-            </a:r>
-          </a:p>
-        </p:txBody>
-      </p:sp>
-      <p:sp>
-        <p:nvSpPr>
-          <p:cNvPr id="11" name="TextBox 10"/>
-          <p:cNvSpPr txBox="1"/>
-          <p:nvPr/>
-        </p:nvSpPr>
-        <p:spPr>
-          <a:xfrm>
-            <a:off x="9052560" y="6510528"/>
-            <a:ext cx="548640" cy="292608"/>
-          </a:xfrm>
-          <a:prstGeom prst="rect">
-            <a:avLst/>
-          </a:prstGeom>
-          <a:noFill/>
-        </p:spPr>
-        <p:txBody>
-          <a:bodyPr wrap="square" lIns="25400" tIns="12700" rIns="25400" bIns="12700" anchor="t">
-            <a:spAutoFit/>
-          </a:bodyPr>
-          <a:lstStyle/>
-          <a:p>
-            <a:pPr algn="r">
-              <a:lnSpc>
-                <a:spcPct val="100000"/>
-              </a:lnSpc>
-            </a:pPr>
-            <a:r>
-              <a:rPr sz="900" b="1">
-                <a:solidFill>
-                  <a:srgbClr val="84888B"/>
-                </a:solidFill>
-                <a:latin typeface="맑은 고딕"/>
-              </a:rPr>
-              <a:t>11</a:t>
-            </a:r>
-          </a:p>
-        </p:txBody>
-      </p:sp>
-      <p:sp>
-        <p:nvSpPr>
-          <p:cNvPr id="12" name="Rectangle 11"/>
-          <p:cNvSpPr/>
-          <p:nvPr/>
-        </p:nvSpPr>
-        <p:spPr>
-          <a:xfrm>
-            <a:off x="685800" y="5318819"/>
-            <a:ext cx="8503920" cy="731520"/>
-          </a:xfrm>
-          <a:prstGeom prst="rect">
-            <a:avLst/>
-          </a:prstGeom>
-          <a:solidFill>
-            <a:srgbClr val="FDF1E6"/>
-          </a:solidFill>
-          <a:ln>
-            <a:noFill/>
-          </a:ln>
-          <a:effectLst/>
-        </p:spPr>
-        <p:style>
-          <a:lnRef idx="1">
-            <a:schemeClr val="accent1"/>
-          </a:lnRef>
-          <a:fillRef idx="3">
-            <a:schemeClr val="accent1"/>
-          </a:fillRef>
-          <a:effectRef idx="2">
-            <a:schemeClr val="accent1"/>
-          </a:effectRef>
-          <a:fontRef idx="minor">
-            <a:schemeClr val="lt1"/>
-          </a:fontRef>
-        </p:style>
-        <p:txBody>
-          <a:bodyPr rtlCol="0" anchor="ctr"/>
-          <a:lstStyle/>
-          <a:p>
-            <a:pPr algn="ctr"/>
-            <a:endParaRPr/>
-          </a:p>
-        </p:txBody>
-      </p:sp>
-      <p:sp>
-        <p:nvSpPr>
-          <p:cNvPr id="13" name="TextBox 12"/>
-          <p:cNvSpPr txBox="1"/>
-          <p:nvPr/>
-        </p:nvSpPr>
-        <p:spPr>
-          <a:xfrm>
-            <a:off x="914400" y="5373683"/>
-            <a:ext cx="8138160" cy="731520"/>
-          </a:xfrm>
-          <a:prstGeom prst="rect">
-            <a:avLst/>
-          </a:prstGeom>
-          <a:noFill/>
-        </p:spPr>
-        <p:txBody>
-          <a:bodyPr wrap="square" anchor="ctr">
-            <a:spAutoFit/>
-          </a:bodyPr>
-          <a:lstStyle/>
-          <a:p>
-            <a:pPr>
-              <a:lnSpc>
-                <a:spcPct val="110000"/>
-              </a:lnSpc>
-            </a:pPr>
-            <a:r>
-              <a:rPr sz="1300" b="1" dirty="0">
-                <a:solidFill>
-                  <a:srgbClr val="F58220"/>
-                </a:solidFill>
-                <a:latin typeface="맑은 고딕"/>
-              </a:rPr>
-              <a:t>※ -40% </a:t>
-            </a:r>
-            <a:r>
-              <a:rPr sz="1300" b="1" dirty="0" err="1">
-                <a:solidFill>
-                  <a:srgbClr val="F58220"/>
-                </a:solidFill>
-                <a:latin typeface="맑은 고딕"/>
-              </a:rPr>
-              <a:t>도달</a:t>
-            </a:r>
-            <a:r>
-              <a:rPr sz="1300" b="1" dirty="0">
-                <a:solidFill>
-                  <a:srgbClr val="F58220"/>
-                </a:solidFill>
-                <a:latin typeface="맑은 고딕"/>
-              </a:rPr>
-              <a:t> </a:t>
-            </a:r>
-            <a:r>
-              <a:rPr sz="1300" b="1" dirty="0" err="1">
-                <a:solidFill>
-                  <a:srgbClr val="F58220"/>
-                </a:solidFill>
-                <a:latin typeface="맑은 고딕"/>
-              </a:rPr>
-              <a:t>시에는</a:t>
-            </a:r>
-            <a:r>
-              <a:rPr sz="1300" b="1" dirty="0">
-                <a:solidFill>
-                  <a:srgbClr val="F58220"/>
-                </a:solidFill>
-                <a:latin typeface="맑은 고딕"/>
-              </a:rPr>
-              <a:t> </a:t>
-            </a:r>
-            <a:r>
-              <a:rPr sz="1300" b="1" dirty="0" err="1">
-                <a:solidFill>
-                  <a:srgbClr val="3A3A3A"/>
-                </a:solidFill>
-                <a:latin typeface="맑은 고딕"/>
-              </a:rPr>
-              <a:t>상승에</a:t>
-            </a:r>
-            <a:r>
-              <a:rPr sz="1300" b="1" dirty="0">
-                <a:solidFill>
-                  <a:srgbClr val="3A3A3A"/>
-                </a:solidFill>
-                <a:latin typeface="맑은 고딕"/>
-              </a:rPr>
-              <a:t> </a:t>
-            </a:r>
-            <a:r>
-              <a:rPr sz="1300" b="1" dirty="0" err="1">
-                <a:solidFill>
-                  <a:srgbClr val="3A3A3A"/>
-                </a:solidFill>
-                <a:latin typeface="맑은 고딕"/>
-              </a:rPr>
-              <a:t>따른</a:t>
-            </a:r>
-            <a:r>
-              <a:rPr sz="1300" b="1" dirty="0">
-                <a:solidFill>
-                  <a:srgbClr val="3A3A3A"/>
-                </a:solidFill>
-                <a:latin typeface="맑은 고딕"/>
-              </a:rPr>
-              <a:t> </a:t>
-            </a:r>
-            <a:r>
-              <a:rPr sz="1300" b="1" dirty="0" err="1">
-                <a:solidFill>
-                  <a:srgbClr val="3A3A3A"/>
-                </a:solidFill>
-                <a:latin typeface="맑은 고딕"/>
-              </a:rPr>
-              <a:t>수익을</a:t>
-            </a:r>
-            <a:r>
-              <a:rPr sz="1300" b="1" dirty="0">
-                <a:solidFill>
-                  <a:srgbClr val="3A3A3A"/>
-                </a:solidFill>
-                <a:latin typeface="맑은 고딕"/>
-              </a:rPr>
-              <a:t> </a:t>
-            </a:r>
-            <a:r>
-              <a:rPr sz="1300" b="1" dirty="0" err="1">
-                <a:solidFill>
-                  <a:srgbClr val="3A3A3A"/>
-                </a:solidFill>
-                <a:latin typeface="맑은 고딕"/>
-              </a:rPr>
-              <a:t>수취하기</a:t>
-            </a:r>
-            <a:r>
-              <a:rPr sz="1300" b="1" dirty="0">
-                <a:solidFill>
-                  <a:srgbClr val="3A3A3A"/>
-                </a:solidFill>
-                <a:latin typeface="맑은 고딕"/>
-              </a:rPr>
-              <a:t> </a:t>
-            </a:r>
-            <a:r>
-              <a:rPr sz="1300" b="1" dirty="0" err="1">
-                <a:solidFill>
-                  <a:srgbClr val="3A3A3A"/>
-                </a:solidFill>
-                <a:latin typeface="맑은 고딕"/>
-              </a:rPr>
-              <a:t>위해</a:t>
-            </a:r>
-            <a:r>
-              <a:rPr sz="1300" b="1" dirty="0">
-                <a:solidFill>
-                  <a:srgbClr val="3A3A3A"/>
-                </a:solidFill>
-                <a:latin typeface="맑은 고딕"/>
-              </a:rPr>
-              <a:t> </a:t>
-            </a:r>
-            <a:r>
-              <a:rPr sz="1300" b="1" dirty="0" err="1">
-                <a:solidFill>
-                  <a:srgbClr val="3A3A3A"/>
-                </a:solidFill>
-                <a:latin typeface="맑은 고딕"/>
-              </a:rPr>
-              <a:t>변동성</a:t>
-            </a:r>
-            <a:r>
-              <a:rPr sz="1300" b="1" dirty="0">
-                <a:solidFill>
-                  <a:srgbClr val="3A3A3A"/>
-                </a:solidFill>
-                <a:latin typeface="맑은 고딕"/>
-              </a:rPr>
-              <a:t> </a:t>
-            </a:r>
-            <a:r>
-              <a:rPr sz="1300" b="1" dirty="0" err="1">
-                <a:solidFill>
-                  <a:srgbClr val="3A3A3A"/>
-                </a:solidFill>
-                <a:latin typeface="맑은 고딕"/>
-              </a:rPr>
-              <a:t>매매를</a:t>
-            </a:r>
-            <a:r>
-              <a:rPr sz="1300" b="1" dirty="0">
-                <a:solidFill>
-                  <a:srgbClr val="3A3A3A"/>
-                </a:solidFill>
-                <a:latin typeface="맑은 고딕"/>
-              </a:rPr>
-              <a:t> </a:t>
-            </a:r>
-            <a:r>
-              <a:rPr sz="1300" b="1" dirty="0" err="1">
-                <a:solidFill>
-                  <a:srgbClr val="3A3A3A"/>
-                </a:solidFill>
-                <a:latin typeface="맑은 고딕"/>
-              </a:rPr>
-              <a:t>수행하지</a:t>
-            </a:r>
-            <a:r>
-              <a:rPr sz="1300" b="1" dirty="0">
-                <a:solidFill>
-                  <a:srgbClr val="3A3A3A"/>
-                </a:solidFill>
-                <a:latin typeface="맑은 고딕"/>
-              </a:rPr>
-              <a:t> </a:t>
-            </a:r>
-            <a:r>
-              <a:rPr sz="1300" b="1" dirty="0" err="1">
-                <a:solidFill>
-                  <a:srgbClr val="3A3A3A"/>
-                </a:solidFill>
-                <a:latin typeface="맑은 고딕"/>
-              </a:rPr>
-              <a:t>않으며</a:t>
-            </a:r>
-            <a:r>
-              <a:rPr sz="1300" b="1" dirty="0">
-                <a:solidFill>
-                  <a:srgbClr val="3A3A3A"/>
-                </a:solidFill>
-                <a:latin typeface="맑은 고딕"/>
-              </a:rPr>
-              <a:t>, </a:t>
-            </a:r>
-            <a:r>
-              <a:rPr sz="1300" b="1" dirty="0" err="1">
-                <a:solidFill>
-                  <a:srgbClr val="3A3A3A"/>
-                </a:solidFill>
-                <a:latin typeface="맑은 고딕"/>
-              </a:rPr>
-              <a:t>주식형과</a:t>
-            </a:r>
-            <a:r>
-              <a:rPr sz="1300" b="1" dirty="0">
-                <a:solidFill>
-                  <a:srgbClr val="3A3A3A"/>
-                </a:solidFill>
-                <a:latin typeface="맑은 고딕"/>
-              </a:rPr>
-              <a:t> </a:t>
-            </a:r>
-            <a:r>
-              <a:rPr sz="1300" b="1" dirty="0" err="1">
-                <a:solidFill>
-                  <a:srgbClr val="3A3A3A"/>
-                </a:solidFill>
-                <a:latin typeface="맑은 고딕"/>
-              </a:rPr>
-              <a:t>유사하게</a:t>
-            </a:r>
-            <a:r>
-              <a:rPr sz="1300" b="1" dirty="0">
-                <a:solidFill>
-                  <a:srgbClr val="3A3A3A"/>
-                </a:solidFill>
-                <a:latin typeface="맑은 고딕"/>
-              </a:rPr>
-              <a:t> </a:t>
-            </a:r>
-            <a:r>
-              <a:rPr sz="1300" b="1" dirty="0" err="1">
-                <a:solidFill>
-                  <a:srgbClr val="3A3A3A"/>
-                </a:solidFill>
-                <a:latin typeface="맑은 고딕"/>
-              </a:rPr>
-              <a:t>운용됩니다</a:t>
-            </a:r>
-            <a:r>
-              <a:rPr sz="1300" b="1" dirty="0">
-                <a:solidFill>
-                  <a:srgbClr val="3A3A3A"/>
-                </a:solidFill>
-                <a:latin typeface="맑은 고딕"/>
-              </a:rPr>
-              <a:t>.</a:t>
-            </a:r>
-          </a:p>
-        </p:txBody>
-      </p:sp>
-      <p:pic>
-        <p:nvPicPr>
-          <p:cNvPr id="16" name="Picture 15" descr="scat_top2_growth_nt.png"/>
-          <p:cNvPicPr>
-            <a:picLocks noChangeAspect="1"/>
-          </p:cNvPicPr>
-          <p:nvPr/>
-        </p:nvPicPr>
-        <p:blipFill>
-          <a:blip r:embed="rId4"/>
-          <a:stretch>
-            <a:fillRect/>
-          </a:stretch>
-        </p:blipFill>
-        <p:spPr>
-          <a:xfrm>
-            <a:off x="320040" y="1417321"/>
-            <a:ext cx="4526280" cy="3650039"/>
-          </a:xfrm>
-          <a:prstGeom prst="rect">
-            <a:avLst/>
-          </a:prstGeom>
-        </p:spPr>
-      </p:pic>
-      <p:pic>
-        <p:nvPicPr>
-          <p:cNvPr id="17" name="Picture 16" descr="scat_top2_growth_t.png"/>
-          <p:cNvPicPr>
-            <a:picLocks noChangeAspect="1"/>
-          </p:cNvPicPr>
-          <p:nvPr/>
-        </p:nvPicPr>
-        <p:blipFill>
-          <a:blip r:embed="rId5"/>
-          <a:stretch>
-            <a:fillRect/>
-          </a:stretch>
-        </p:blipFill>
-        <p:spPr>
-          <a:xfrm>
-            <a:off x="4983480" y="1417321"/>
-            <a:ext cx="4526280" cy="3650039"/>
-          </a:xfrm>
-          <a:prstGeom prst="rect">
-            <a:avLst/>
-          </a:prstGeom>
-        </p:spPr>
-      </p:pic>
-    </p:spTree>
-  </p:cSld>
-  <p:clrMapOvr>
-    <a:masterClrMapping/>
-  </p:clrMapOvr>
-</p:sld>
-</file>
-
-<file path=ppt/slides/slide13.xml><?xml version="1.0" encoding="utf-8"?>
-<p:sld xmlns:a="http://schemas.openxmlformats.org/drawingml/2006/main" xmlns:r="http://schemas.openxmlformats.org/officeDocument/2006/relationships" xmlns:p="http://schemas.openxmlformats.org/presentationml/2006/main">
-  <p:cSld>
-    <p:spTree>
-      <p:nvGrpSpPr>
-        <p:cNvPr id="1" name=""/>
-        <p:cNvGrpSpPr/>
-        <p:nvPr/>
-      </p:nvGrpSpPr>
-      <p:grpSpPr>
-        <a:xfrm>
-          <a:off x="0" y="0"/>
-          <a:ext cx="0" cy="0"/>
-          <a:chOff x="0" y="0"/>
-          <a:chExt cx="0" cy="0"/>
-        </a:xfrm>
-      </p:grpSpPr>
-      <p:sp>
-        <p:nvSpPr>
-          <p:cNvPr id="2" name="Rectangle 1"/>
-          <p:cNvSpPr/>
-          <p:nvPr/>
-        </p:nvSpPr>
-        <p:spPr>
-          <a:xfrm>
-            <a:off x="0" y="0"/>
-            <a:ext cx="9875520" cy="6858000"/>
-          </a:xfrm>
-          <a:prstGeom prst="rect">
-            <a:avLst/>
-          </a:prstGeom>
-          <a:solidFill>
-            <a:srgbClr val="FFFFFF"/>
-          </a:solidFill>
-          <a:ln>
-            <a:noFill/>
-          </a:ln>
-          <a:effectLst/>
-        </p:spPr>
-        <p:style>
-          <a:lnRef idx="1">
-            <a:schemeClr val="accent1"/>
-          </a:lnRef>
-          <a:fillRef idx="3">
-            <a:schemeClr val="accent1"/>
-          </a:fillRef>
-          <a:effectRef idx="2">
-            <a:schemeClr val="accent1"/>
-          </a:effectRef>
-          <a:fontRef idx="minor">
-            <a:schemeClr val="lt1"/>
-          </a:fontRef>
-        </p:style>
-        <p:txBody>
-          <a:bodyPr rtlCol="0" anchor="ctr"/>
-          <a:lstStyle/>
-          <a:p>
-            <a:pPr algn="ctr"/>
-            <a:endParaRPr/>
-          </a:p>
-        </p:txBody>
-      </p:sp>
-      <p:sp>
-        <p:nvSpPr>
-          <p:cNvPr id="3" name="Rectangle 2"/>
-          <p:cNvSpPr/>
-          <p:nvPr/>
-        </p:nvSpPr>
-        <p:spPr>
-          <a:xfrm>
-            <a:off x="457200" y="502920"/>
-            <a:ext cx="128016" cy="566928"/>
-          </a:xfrm>
-          <a:prstGeom prst="rect">
-            <a:avLst/>
-          </a:prstGeom>
-          <a:solidFill>
-            <a:srgbClr val="F58220"/>
-          </a:solidFill>
-          <a:ln>
-            <a:noFill/>
-          </a:ln>
-          <a:effectLst/>
-        </p:spPr>
-        <p:style>
-          <a:lnRef idx="1">
-            <a:schemeClr val="accent1"/>
-          </a:lnRef>
-          <a:fillRef idx="3">
-            <a:schemeClr val="accent1"/>
-          </a:fillRef>
-          <a:effectRef idx="2">
-            <a:schemeClr val="accent1"/>
-          </a:effectRef>
-          <a:fontRef idx="minor">
-            <a:schemeClr val="lt1"/>
-          </a:fontRef>
-        </p:style>
-        <p:txBody>
-          <a:bodyPr rtlCol="0" anchor="ctr"/>
-          <a:lstStyle/>
-          <a:p>
-            <a:pPr algn="ctr"/>
-            <a:endParaRPr/>
-          </a:p>
-        </p:txBody>
-      </p:sp>
-      <p:sp>
-        <p:nvSpPr>
-          <p:cNvPr id="4" name="TextBox 3"/>
-          <p:cNvSpPr txBox="1"/>
-          <p:nvPr/>
-        </p:nvSpPr>
-        <p:spPr>
-          <a:xfrm>
-            <a:off x="685800" y="393192"/>
-            <a:ext cx="8229600" cy="320040"/>
-          </a:xfrm>
-          <a:prstGeom prst="rect">
-            <a:avLst/>
-          </a:prstGeom>
-          <a:noFill/>
-        </p:spPr>
-        <p:txBody>
-          <a:bodyPr wrap="square" lIns="25400" tIns="12700" rIns="25400" bIns="12700" anchor="t">
-            <a:spAutoFit/>
-          </a:bodyPr>
-          <a:lstStyle/>
-          <a:p>
-            <a:pPr algn="l">
-              <a:lnSpc>
-                <a:spcPct val="100000"/>
-              </a:lnSpc>
-            </a:pPr>
-            <a:r>
-              <a:rPr sz="1200" b="1" dirty="0">
-                <a:solidFill>
-                  <a:srgbClr val="F58220"/>
-                </a:solidFill>
-                <a:latin typeface="맑은 고딕"/>
-              </a:rPr>
-              <a:t>10  PAYOFF</a:t>
-            </a:r>
-          </a:p>
-        </p:txBody>
-      </p:sp>
-      <p:sp>
-        <p:nvSpPr>
-          <p:cNvPr id="5" name="TextBox 4"/>
-          <p:cNvSpPr txBox="1"/>
-          <p:nvPr/>
-        </p:nvSpPr>
-        <p:spPr>
-          <a:xfrm>
-            <a:off x="685800" y="630936"/>
-            <a:ext cx="8686800" cy="379591"/>
-          </a:xfrm>
-          <a:prstGeom prst="rect">
-            <a:avLst/>
-          </a:prstGeom>
-          <a:noFill/>
-        </p:spPr>
-        <p:txBody>
-          <a:bodyPr wrap="square" lIns="25400" tIns="12700" rIns="25400" bIns="12700" anchor="t">
-            <a:spAutoFit/>
-          </a:bodyPr>
-          <a:lstStyle/>
-          <a:p>
-            <a:pPr algn="l">
-              <a:lnSpc>
-                <a:spcPct val="100000"/>
-              </a:lnSpc>
-            </a:pPr>
-            <a:r>
-              <a:rPr sz="2300" b="1" dirty="0" err="1">
-                <a:solidFill>
-                  <a:srgbClr val="043B72"/>
-                </a:solidFill>
-                <a:latin typeface="맑은 고딕"/>
-              </a:rPr>
-              <a:t>수익</a:t>
-            </a:r>
-            <a:r>
-              <a:rPr sz="2300" b="1" dirty="0">
-                <a:solidFill>
-                  <a:srgbClr val="043B72"/>
-                </a:solidFill>
-                <a:latin typeface="맑은 고딕"/>
-              </a:rPr>
-              <a:t> 구조</a:t>
-            </a:r>
-            <a:r>
-              <a:rPr lang="en-US" altLang="ko-KR" sz="2300" b="1" dirty="0">
-                <a:solidFill>
-                  <a:srgbClr val="043B72"/>
-                </a:solidFill>
-                <a:latin typeface="맑은 고딕"/>
-              </a:rPr>
-              <a:t>2</a:t>
-            </a:r>
-            <a:r>
-              <a:rPr sz="2300" b="1" dirty="0">
-                <a:solidFill>
-                  <a:srgbClr val="043B72"/>
-                </a:solidFill>
-                <a:latin typeface="맑은 고딕"/>
-              </a:rPr>
-              <a:t> — </a:t>
-            </a:r>
-            <a:r>
-              <a:rPr sz="2300" b="1" dirty="0" err="1">
-                <a:solidFill>
-                  <a:srgbClr val="043B72"/>
-                </a:solidFill>
-                <a:latin typeface="맑은 고딕"/>
-              </a:rPr>
-              <a:t>안정변동성펀드</a:t>
-            </a:r>
-            <a:r>
-              <a:rPr sz="2300" b="1" dirty="0">
-                <a:solidFill>
-                  <a:srgbClr val="043B72"/>
-                </a:solidFill>
-                <a:latin typeface="맑은 고딕"/>
-              </a:rPr>
-              <a:t> (</a:t>
-            </a:r>
-            <a:r>
-              <a:rPr sz="2300" b="1" dirty="0" err="1">
-                <a:solidFill>
-                  <a:srgbClr val="043B72"/>
-                </a:solidFill>
-                <a:latin typeface="맑은 고딕"/>
-              </a:rPr>
-              <a:t>안정</a:t>
-            </a:r>
-            <a:r>
-              <a:rPr sz="2300" b="1" dirty="0">
-                <a:solidFill>
-                  <a:srgbClr val="043B72"/>
-                </a:solidFill>
-                <a:latin typeface="맑은 고딕"/>
-              </a:rPr>
-              <a:t> </a:t>
-            </a:r>
-            <a:r>
-              <a:rPr sz="2300" b="1" dirty="0" err="1">
-                <a:solidFill>
-                  <a:srgbClr val="043B72"/>
-                </a:solidFill>
-                <a:latin typeface="맑은 고딕"/>
-              </a:rPr>
-              <a:t>변동성</a:t>
-            </a:r>
-            <a:r>
-              <a:rPr sz="2300" b="1" dirty="0">
-                <a:solidFill>
-                  <a:srgbClr val="043B72"/>
-                </a:solidFill>
-                <a:latin typeface="맑은 고딕"/>
-              </a:rPr>
-              <a:t> </a:t>
-            </a:r>
-            <a:r>
-              <a:rPr sz="2300" b="1" dirty="0" err="1">
-                <a:solidFill>
-                  <a:srgbClr val="043B72"/>
-                </a:solidFill>
-                <a:latin typeface="맑은 고딕"/>
-              </a:rPr>
-              <a:t>매매</a:t>
-            </a:r>
-            <a:r>
-              <a:rPr sz="2300" b="1" dirty="0">
-                <a:solidFill>
-                  <a:srgbClr val="043B72"/>
-                </a:solidFill>
-                <a:latin typeface="맑은 고딕"/>
-              </a:rPr>
-              <a:t>)</a:t>
-            </a:r>
-          </a:p>
-        </p:txBody>
-      </p:sp>
-      <p:sp>
-        <p:nvSpPr>
-          <p:cNvPr id="6" name="TextBox 5"/>
-          <p:cNvSpPr txBox="1"/>
-          <p:nvPr/>
-        </p:nvSpPr>
-        <p:spPr>
-          <a:xfrm>
-            <a:off x="685800" y="1005840"/>
-            <a:ext cx="8686800" cy="225703"/>
-          </a:xfrm>
-          <a:prstGeom prst="rect">
-            <a:avLst/>
-          </a:prstGeom>
-          <a:noFill/>
-        </p:spPr>
-        <p:txBody>
-          <a:bodyPr wrap="square" lIns="25400" tIns="12700" rIns="25400" bIns="12700" anchor="t">
-            <a:spAutoFit/>
-          </a:bodyPr>
-          <a:lstStyle/>
-          <a:p>
-            <a:pPr algn="l">
-              <a:lnSpc>
-                <a:spcPct val="100000"/>
-              </a:lnSpc>
-            </a:pPr>
-            <a:r>
-              <a:rPr sz="1300" b="1" dirty="0" err="1">
-                <a:solidFill>
-                  <a:srgbClr val="3A3A3A"/>
-                </a:solidFill>
-                <a:latin typeface="맑은 고딕"/>
-              </a:rPr>
-              <a:t>보합·상승</a:t>
-            </a:r>
-            <a:r>
-              <a:rPr sz="1300" b="1" dirty="0">
-                <a:solidFill>
-                  <a:srgbClr val="3A3A3A"/>
-                </a:solidFill>
-                <a:latin typeface="맑은 고딕"/>
-              </a:rPr>
-              <a:t> </a:t>
-            </a:r>
-            <a:r>
-              <a:rPr sz="1300" b="1" dirty="0" err="1">
-                <a:solidFill>
-                  <a:srgbClr val="3A3A3A"/>
-                </a:solidFill>
-                <a:latin typeface="맑은 고딕"/>
-              </a:rPr>
-              <a:t>구간에서</a:t>
-            </a:r>
-            <a:r>
-              <a:rPr sz="1300" b="1" dirty="0">
-                <a:solidFill>
-                  <a:srgbClr val="3A3A3A"/>
-                </a:solidFill>
-                <a:latin typeface="맑은 고딕"/>
-              </a:rPr>
-              <a:t> </a:t>
-            </a:r>
-            <a:r>
-              <a:rPr sz="1300" b="1" dirty="0" err="1">
-                <a:solidFill>
-                  <a:srgbClr val="3A3A3A"/>
-                </a:solidFill>
-                <a:latin typeface="맑은 고딕"/>
-              </a:rPr>
-              <a:t>변동성</a:t>
-            </a:r>
-            <a:r>
-              <a:rPr sz="1300" b="1" dirty="0">
-                <a:solidFill>
-                  <a:srgbClr val="3A3A3A"/>
-                </a:solidFill>
-                <a:latin typeface="맑은 고딕"/>
-              </a:rPr>
-              <a:t> </a:t>
-            </a:r>
-            <a:r>
-              <a:rPr sz="1300" b="1" dirty="0" err="1">
-                <a:solidFill>
-                  <a:srgbClr val="3A3A3A"/>
-                </a:solidFill>
-                <a:latin typeface="맑은 고딕"/>
-              </a:rPr>
-              <a:t>매매</a:t>
-            </a:r>
-            <a:r>
-              <a:rPr sz="1300" b="1" dirty="0">
-                <a:solidFill>
-                  <a:srgbClr val="3A3A3A"/>
-                </a:solidFill>
-                <a:latin typeface="맑은 고딕"/>
-              </a:rPr>
-              <a:t> </a:t>
-            </a:r>
-            <a:r>
-              <a:rPr sz="1300" b="1" dirty="0" err="1">
-                <a:solidFill>
-                  <a:srgbClr val="3A3A3A"/>
-                </a:solidFill>
-                <a:latin typeface="맑은 고딕"/>
-              </a:rPr>
-              <a:t>수익을</a:t>
-            </a:r>
-            <a:r>
-              <a:rPr sz="1300" b="1" dirty="0">
-                <a:solidFill>
-                  <a:srgbClr val="3A3A3A"/>
-                </a:solidFill>
-                <a:latin typeface="맑은 고딕"/>
-              </a:rPr>
-              <a:t> </a:t>
-            </a:r>
-            <a:r>
-              <a:rPr sz="1300" b="1" dirty="0" err="1">
-                <a:solidFill>
-                  <a:srgbClr val="3A3A3A"/>
-                </a:solidFill>
-                <a:latin typeface="맑은 고딕"/>
-              </a:rPr>
-              <a:t>안정적으로</a:t>
-            </a:r>
-            <a:r>
-              <a:rPr sz="1300" b="1" dirty="0">
-                <a:solidFill>
-                  <a:srgbClr val="3A3A3A"/>
-                </a:solidFill>
-                <a:latin typeface="맑은 고딕"/>
-              </a:rPr>
-              <a:t> </a:t>
-            </a:r>
-            <a:r>
-              <a:rPr sz="1300" b="1" dirty="0" err="1">
-                <a:solidFill>
-                  <a:srgbClr val="3A3A3A"/>
-                </a:solidFill>
-                <a:latin typeface="맑은 고딕"/>
-              </a:rPr>
-              <a:t>확보</a:t>
-            </a:r>
-            <a:r>
-              <a:rPr sz="1300" b="1" dirty="0">
-                <a:solidFill>
-                  <a:srgbClr val="3A3A3A"/>
-                </a:solidFill>
-                <a:latin typeface="맑은 고딕"/>
-              </a:rPr>
-              <a:t>(</a:t>
-            </a:r>
-            <a:r>
-              <a:rPr sz="1300" b="1" dirty="0" err="1">
-                <a:solidFill>
-                  <a:srgbClr val="3A3A3A"/>
-                </a:solidFill>
-                <a:latin typeface="맑은 고딕"/>
-              </a:rPr>
-              <a:t>상단</a:t>
-            </a:r>
-            <a:r>
-              <a:rPr sz="1300" b="1" dirty="0">
-                <a:solidFill>
-                  <a:srgbClr val="3A3A3A"/>
-                </a:solidFill>
-                <a:latin typeface="맑은 고딕"/>
-              </a:rPr>
-              <a:t> </a:t>
-            </a:r>
-            <a:r>
-              <a:rPr sz="1300" b="1" dirty="0" err="1">
-                <a:solidFill>
-                  <a:srgbClr val="3A3A3A"/>
-                </a:solidFill>
-                <a:latin typeface="맑은 고딕"/>
-              </a:rPr>
-              <a:t>고정</a:t>
-            </a:r>
-            <a:r>
-              <a:rPr sz="1300" b="1" dirty="0">
-                <a:solidFill>
-                  <a:srgbClr val="3A3A3A"/>
-                </a:solidFill>
-                <a:latin typeface="맑은 고딕"/>
-              </a:rPr>
-              <a:t>), </a:t>
-            </a:r>
-            <a:r>
-              <a:rPr lang="ko-KR" altLang="en-US" sz="1300" b="1" dirty="0">
-                <a:solidFill>
-                  <a:srgbClr val="3A3A3A"/>
-                </a:solidFill>
-                <a:latin typeface="맑은 고딕"/>
-              </a:rPr>
-              <a:t>단</a:t>
-            </a:r>
-            <a:r>
-              <a:rPr lang="en-US" altLang="ko-KR" sz="1300" b="1" dirty="0">
-                <a:solidFill>
-                  <a:srgbClr val="3A3A3A"/>
-                </a:solidFill>
-                <a:latin typeface="맑은 고딕"/>
-              </a:rPr>
-              <a:t>,</a:t>
-            </a:r>
-            <a:r>
-              <a:rPr lang="ko-KR" altLang="en-US" sz="1300" b="1" dirty="0">
-                <a:solidFill>
-                  <a:srgbClr val="3A3A3A"/>
-                </a:solidFill>
-                <a:latin typeface="맑은 고딕"/>
-              </a:rPr>
-              <a:t> 상승이 제한됩니다</a:t>
-            </a:r>
-            <a:r>
-              <a:rPr lang="en-US" altLang="ko-KR" sz="1300" b="1" dirty="0">
-                <a:solidFill>
-                  <a:srgbClr val="3A3A3A"/>
-                </a:solidFill>
-                <a:latin typeface="맑은 고딕"/>
-              </a:rPr>
-              <a:t>.</a:t>
-            </a:r>
-            <a:endParaRPr sz="1300" b="1" dirty="0">
-              <a:solidFill>
-                <a:srgbClr val="3A3A3A"/>
-              </a:solidFill>
-              <a:latin typeface="맑은 고딕"/>
-            </a:endParaRPr>
-          </a:p>
-        </p:txBody>
-      </p:sp>
-      <p:sp>
-        <p:nvSpPr>
-          <p:cNvPr id="8" name="TextBox 7"/>
-          <p:cNvSpPr txBox="1"/>
-          <p:nvPr/>
-        </p:nvSpPr>
-        <p:spPr>
-          <a:xfrm>
-            <a:off x="1280160" y="5556144"/>
-            <a:ext cx="8595360" cy="365760"/>
-          </a:xfrm>
-          <a:prstGeom prst="rect">
-            <a:avLst/>
-          </a:prstGeom>
-          <a:noFill/>
-        </p:spPr>
-        <p:txBody>
-          <a:bodyPr wrap="square" lIns="25400" tIns="12700" rIns="25400" bIns="12700" anchor="t">
-            <a:spAutoFit/>
-          </a:bodyPr>
-          <a:lstStyle/>
-          <a:p>
-            <a:pPr algn="l">
-              <a:lnSpc>
-                <a:spcPct val="100000"/>
-              </a:lnSpc>
-            </a:pPr>
-            <a:r>
-              <a:rPr sz="900" b="0">
-                <a:solidFill>
-                  <a:srgbClr val="84888B"/>
-                </a:solidFill>
-                <a:latin typeface="맑은 고딕"/>
-              </a:rPr>
-              <a:t>변동성 60% 가정 · 점=시뮬 1회 · </a:t>
-            </a:r>
-            <a:r>
-              <a:rPr sz="900" b="1">
-                <a:solidFill>
-                  <a:srgbClr val="F58220"/>
-                </a:solidFill>
-                <a:latin typeface="맑은 고딕"/>
-              </a:rPr>
-              <a:t>노란선=구간 평균</a:t>
-            </a:r>
-            <a:r>
-              <a:rPr sz="900" b="0">
-                <a:solidFill>
-                  <a:srgbClr val="84888B"/>
-                </a:solidFill>
-                <a:latin typeface="맑은 고딕"/>
-              </a:rPr>
-              <a:t> · 데이터: 자체 시뮬레이션(거래비용·운용오차 포함)</a:t>
-            </a:r>
-          </a:p>
-        </p:txBody>
-      </p:sp>
-      <p:sp>
-        <p:nvSpPr>
-          <p:cNvPr id="9" name="TextBox 8"/>
-          <p:cNvSpPr txBox="1"/>
-          <p:nvPr/>
-        </p:nvSpPr>
-        <p:spPr>
-          <a:xfrm>
-            <a:off x="457200" y="6510528"/>
-            <a:ext cx="7863840" cy="292608"/>
-          </a:xfrm>
-          <a:prstGeom prst="rect">
-            <a:avLst/>
-          </a:prstGeom>
-          <a:noFill/>
-        </p:spPr>
-        <p:txBody>
-          <a:bodyPr wrap="square" lIns="25400" tIns="12700" rIns="25400" bIns="12700" anchor="t">
-            <a:spAutoFit/>
-          </a:bodyPr>
-          <a:lstStyle/>
-          <a:p>
-            <a:pPr algn="l">
-              <a:lnSpc>
-                <a:spcPct val="100000"/>
-              </a:lnSpc>
-            </a:pPr>
-            <a:r>
-              <a:rPr sz="700" b="0" dirty="0">
-                <a:solidFill>
-                  <a:srgbClr val="84888B"/>
-                </a:solidFill>
-                <a:latin typeface="맑은 고딕"/>
-              </a:rPr>
-              <a:t>※ </a:t>
-            </a:r>
-            <a:r>
-              <a:rPr sz="700" b="0" dirty="0" err="1">
-                <a:solidFill>
-                  <a:srgbClr val="84888B"/>
-                </a:solidFill>
-                <a:latin typeface="맑은 고딕"/>
-              </a:rPr>
-              <a:t>상기</a:t>
-            </a:r>
-            <a:r>
-              <a:rPr sz="700" b="0" dirty="0">
-                <a:solidFill>
-                  <a:srgbClr val="84888B"/>
-                </a:solidFill>
-                <a:latin typeface="맑은 고딕"/>
-              </a:rPr>
-              <a:t> </a:t>
-            </a:r>
-            <a:r>
-              <a:rPr sz="700" b="0" dirty="0" err="1">
-                <a:solidFill>
-                  <a:srgbClr val="84888B"/>
-                </a:solidFill>
-                <a:latin typeface="맑은 고딕"/>
-              </a:rPr>
-              <a:t>자료는</a:t>
-            </a:r>
-            <a:r>
-              <a:rPr sz="700" b="0" dirty="0">
-                <a:solidFill>
-                  <a:srgbClr val="84888B"/>
-                </a:solidFill>
-                <a:latin typeface="맑은 고딕"/>
-              </a:rPr>
-              <a:t> </a:t>
-            </a:r>
-            <a:r>
-              <a:rPr sz="700" b="0" dirty="0" err="1">
-                <a:solidFill>
-                  <a:srgbClr val="84888B"/>
-                </a:solidFill>
-                <a:latin typeface="맑은 고딕"/>
-              </a:rPr>
-              <a:t>이해를</a:t>
-            </a:r>
-            <a:r>
-              <a:rPr sz="700" b="0" dirty="0">
-                <a:solidFill>
-                  <a:srgbClr val="84888B"/>
-                </a:solidFill>
-                <a:latin typeface="맑은 고딕"/>
-              </a:rPr>
-              <a:t> </a:t>
-            </a:r>
-            <a:r>
-              <a:rPr sz="700" b="0" dirty="0" err="1">
-                <a:solidFill>
-                  <a:srgbClr val="84888B"/>
-                </a:solidFill>
-                <a:latin typeface="맑은 고딕"/>
-              </a:rPr>
-              <a:t>돕기</a:t>
-            </a:r>
-            <a:r>
-              <a:rPr sz="700" b="0" dirty="0">
-                <a:solidFill>
-                  <a:srgbClr val="84888B"/>
-                </a:solidFill>
-                <a:latin typeface="맑은 고딕"/>
-              </a:rPr>
-              <a:t> </a:t>
-            </a:r>
-            <a:r>
-              <a:rPr sz="700" b="0" dirty="0" err="1">
-                <a:solidFill>
-                  <a:srgbClr val="84888B"/>
-                </a:solidFill>
-                <a:latin typeface="맑은 고딕"/>
-              </a:rPr>
-              <a:t>위한</a:t>
-            </a:r>
-            <a:r>
-              <a:rPr sz="700" b="0" dirty="0">
-                <a:solidFill>
-                  <a:srgbClr val="84888B"/>
-                </a:solidFill>
-                <a:latin typeface="맑은 고딕"/>
-              </a:rPr>
-              <a:t> </a:t>
-            </a:r>
-            <a:r>
-              <a:rPr sz="700" b="0" dirty="0" err="1">
-                <a:solidFill>
-                  <a:srgbClr val="84888B"/>
-                </a:solidFill>
-                <a:latin typeface="맑은 고딕"/>
-              </a:rPr>
-              <a:t>예시이며</a:t>
-            </a:r>
-            <a:r>
-              <a:rPr sz="700" b="0" dirty="0">
-                <a:solidFill>
-                  <a:srgbClr val="84888B"/>
-                </a:solidFill>
-                <a:latin typeface="맑은 고딕"/>
-              </a:rPr>
-              <a:t> </a:t>
-            </a:r>
-            <a:r>
-              <a:rPr sz="700" b="0" dirty="0" err="1">
-                <a:solidFill>
-                  <a:srgbClr val="84888B"/>
-                </a:solidFill>
-                <a:latin typeface="맑은 고딕"/>
-              </a:rPr>
-              <a:t>실제</a:t>
-            </a:r>
-            <a:r>
-              <a:rPr sz="700" b="0" dirty="0">
-                <a:solidFill>
-                  <a:srgbClr val="84888B"/>
-                </a:solidFill>
-                <a:latin typeface="맑은 고딕"/>
-              </a:rPr>
-              <a:t> </a:t>
-            </a:r>
-            <a:r>
-              <a:rPr sz="700" b="0" dirty="0" err="1">
-                <a:solidFill>
-                  <a:srgbClr val="84888B"/>
-                </a:solidFill>
-                <a:latin typeface="맑은 고딕"/>
-              </a:rPr>
-              <a:t>투자내용을</a:t>
-            </a:r>
-            <a:r>
-              <a:rPr sz="700" b="0" dirty="0">
-                <a:solidFill>
-                  <a:srgbClr val="84888B"/>
-                </a:solidFill>
-                <a:latin typeface="맑은 고딕"/>
-              </a:rPr>
-              <a:t> </a:t>
-            </a:r>
-            <a:r>
-              <a:rPr sz="700" b="0" dirty="0" err="1">
-                <a:solidFill>
-                  <a:srgbClr val="84888B"/>
-                </a:solidFill>
-                <a:latin typeface="맑은 고딕"/>
-              </a:rPr>
-              <a:t>의미하지</a:t>
-            </a:r>
-            <a:r>
-              <a:rPr sz="700" b="0" dirty="0">
-                <a:solidFill>
-                  <a:srgbClr val="84888B"/>
-                </a:solidFill>
-                <a:latin typeface="맑은 고딕"/>
-              </a:rPr>
-              <a:t> </a:t>
-            </a:r>
-            <a:r>
-              <a:rPr sz="700" b="0" dirty="0" err="1">
-                <a:solidFill>
-                  <a:srgbClr val="84888B"/>
-                </a:solidFill>
-                <a:latin typeface="맑은 고딕"/>
-              </a:rPr>
-              <a:t>않습니다</a:t>
-            </a:r>
-            <a:r>
-              <a:rPr sz="700" b="0" dirty="0">
-                <a:solidFill>
-                  <a:srgbClr val="84888B"/>
-                </a:solidFill>
-                <a:latin typeface="맑은 고딕"/>
-              </a:rPr>
-              <a:t>. </a:t>
-            </a:r>
-            <a:r>
-              <a:rPr sz="700" b="0" dirty="0" err="1">
-                <a:solidFill>
-                  <a:srgbClr val="84888B"/>
-                </a:solidFill>
-                <a:latin typeface="맑은 고딕"/>
-              </a:rPr>
-              <a:t>시뮬레이션은</a:t>
-            </a:r>
-            <a:r>
-              <a:rPr sz="700" b="0" dirty="0">
-                <a:solidFill>
-                  <a:srgbClr val="84888B"/>
-                </a:solidFill>
-                <a:latin typeface="맑은 고딕"/>
-              </a:rPr>
-              <a:t> </a:t>
-            </a:r>
-            <a:r>
-              <a:rPr sz="700" b="0" dirty="0" err="1">
-                <a:solidFill>
-                  <a:srgbClr val="84888B"/>
-                </a:solidFill>
-                <a:latin typeface="맑은 고딕"/>
-              </a:rPr>
-              <a:t>가정에</a:t>
-            </a:r>
-            <a:r>
-              <a:rPr sz="700" b="0" dirty="0">
-                <a:solidFill>
-                  <a:srgbClr val="84888B"/>
-                </a:solidFill>
-                <a:latin typeface="맑은 고딕"/>
-              </a:rPr>
-              <a:t> </a:t>
-            </a:r>
-            <a:r>
-              <a:rPr sz="700" b="0" dirty="0" err="1">
-                <a:solidFill>
-                  <a:srgbClr val="84888B"/>
-                </a:solidFill>
-                <a:latin typeface="맑은 고딕"/>
-              </a:rPr>
-              <a:t>따른</a:t>
-            </a:r>
-            <a:r>
-              <a:rPr sz="700" b="0" dirty="0">
-                <a:solidFill>
-                  <a:srgbClr val="84888B"/>
-                </a:solidFill>
-                <a:latin typeface="맑은 고딕"/>
-              </a:rPr>
-              <a:t> </a:t>
-            </a:r>
-            <a:r>
-              <a:rPr sz="700" b="0" dirty="0" err="1">
-                <a:solidFill>
-                  <a:srgbClr val="84888B"/>
-                </a:solidFill>
-                <a:latin typeface="맑은 고딕"/>
-              </a:rPr>
-              <a:t>것으로</a:t>
-            </a:r>
-            <a:r>
-              <a:rPr sz="700" b="0" dirty="0">
-                <a:solidFill>
-                  <a:srgbClr val="84888B"/>
-                </a:solidFill>
-                <a:latin typeface="맑은 고딕"/>
-              </a:rPr>
-              <a:t> </a:t>
-            </a:r>
-            <a:r>
-              <a:rPr sz="700" b="0" dirty="0" err="1">
-                <a:solidFill>
-                  <a:srgbClr val="84888B"/>
-                </a:solidFill>
-                <a:latin typeface="맑은 고딕"/>
-              </a:rPr>
-              <a:t>실제와</a:t>
-            </a:r>
-            <a:r>
-              <a:rPr sz="700" b="0" dirty="0">
-                <a:solidFill>
-                  <a:srgbClr val="84888B"/>
-                </a:solidFill>
-                <a:latin typeface="맑은 고딕"/>
-              </a:rPr>
-              <a:t> </a:t>
-            </a:r>
-            <a:r>
-              <a:rPr sz="700" b="0" dirty="0" err="1">
-                <a:solidFill>
-                  <a:srgbClr val="84888B"/>
-                </a:solidFill>
-                <a:latin typeface="맑은 고딕"/>
-              </a:rPr>
-              <a:t>다를</a:t>
-            </a:r>
-            <a:r>
-              <a:rPr sz="700" b="0" dirty="0">
-                <a:solidFill>
-                  <a:srgbClr val="84888B"/>
-                </a:solidFill>
-                <a:latin typeface="맑은 고딕"/>
-              </a:rPr>
-              <a:t> </a:t>
-            </a:r>
-            <a:r>
-              <a:rPr sz="700" b="0" dirty="0" err="1">
-                <a:solidFill>
-                  <a:srgbClr val="84888B"/>
-                </a:solidFill>
-                <a:latin typeface="맑은 고딕"/>
-              </a:rPr>
-              <a:t>수</a:t>
-            </a:r>
-            <a:r>
-              <a:rPr sz="700" b="0" dirty="0">
-                <a:solidFill>
-                  <a:srgbClr val="84888B"/>
-                </a:solidFill>
-                <a:latin typeface="맑은 고딕"/>
-              </a:rPr>
-              <a:t> </a:t>
-            </a:r>
-            <a:r>
-              <a:rPr sz="700" b="0" dirty="0" err="1">
-                <a:solidFill>
-                  <a:srgbClr val="84888B"/>
-                </a:solidFill>
-                <a:latin typeface="맑은 고딕"/>
-              </a:rPr>
-              <a:t>있습니다</a:t>
-            </a:r>
-            <a:r>
-              <a:rPr sz="700" b="0" dirty="0">
-                <a:solidFill>
-                  <a:srgbClr val="84888B"/>
-                </a:solidFill>
-                <a:latin typeface="맑은 고딕"/>
-              </a:rPr>
-              <a:t>.</a:t>
-            </a:r>
-          </a:p>
-        </p:txBody>
-      </p:sp>
-      <p:sp>
-        <p:nvSpPr>
-          <p:cNvPr id="10" name="TextBox 9"/>
-          <p:cNvSpPr txBox="1"/>
-          <p:nvPr/>
-        </p:nvSpPr>
-        <p:spPr>
-          <a:xfrm>
-            <a:off x="9052560" y="6510528"/>
-            <a:ext cx="548640" cy="292608"/>
-          </a:xfrm>
-          <a:prstGeom prst="rect">
-            <a:avLst/>
-          </a:prstGeom>
-          <a:noFill/>
-        </p:spPr>
-        <p:txBody>
-          <a:bodyPr wrap="square" lIns="25400" tIns="12700" rIns="25400" bIns="12700" anchor="t">
-            <a:spAutoFit/>
-          </a:bodyPr>
-          <a:lstStyle/>
-          <a:p>
-            <a:pPr algn="r">
-              <a:lnSpc>
-                <a:spcPct val="100000"/>
-              </a:lnSpc>
-            </a:pPr>
-            <a:r>
-              <a:rPr sz="900" b="1">
-                <a:solidFill>
-                  <a:srgbClr val="84888B"/>
-                </a:solidFill>
-                <a:latin typeface="맑은 고딕"/>
-              </a:rPr>
-              <a:t>12</a:t>
-            </a:r>
-          </a:p>
-        </p:txBody>
-      </p:sp>
-      <p:pic>
-        <p:nvPicPr>
-          <p:cNvPr id="11" name="Picture 10" descr="scat_top2_stable.png"/>
-          <p:cNvPicPr>
-            <a:picLocks noChangeAspect="1"/>
-          </p:cNvPicPr>
-          <p:nvPr/>
-        </p:nvPicPr>
-        <p:blipFill>
-          <a:blip r:embed="rId3"/>
-          <a:stretch>
-            <a:fillRect/>
-          </a:stretch>
-        </p:blipFill>
-        <p:spPr>
-          <a:xfrm>
-            <a:off x="1417320" y="1463040"/>
-            <a:ext cx="7040880" cy="4044487"/>
-          </a:xfrm>
-          <a:prstGeom prst="rect">
-            <a:avLst/>
-          </a:prstGeom>
-        </p:spPr>
-      </p:pic>
-    </p:spTree>
-  </p:cSld>
-  <p:clrMapOvr>
-    <a:masterClrMapping/>
-  </p:clrMapOvr>
-</p:sld>
-</file>
-
-<file path=ppt/slides/slide14.xml><?xml version="1.0" encoding="utf-8"?>
-<p:sld xmlns:a="http://schemas.openxmlformats.org/drawingml/2006/main" xmlns:r="http://schemas.openxmlformats.org/officeDocument/2006/relationships" xmlns:p="http://schemas.openxmlformats.org/presentationml/2006/main">
-  <p:cSld>
-    <p:spTree>
-      <p:nvGrpSpPr>
-        <p:cNvPr id="1" name=""/>
-        <p:cNvGrpSpPr/>
-        <p:nvPr/>
-      </p:nvGrpSpPr>
-      <p:grpSpPr>
-        <a:xfrm>
-          <a:off x="0" y="0"/>
-          <a:ext cx="0" cy="0"/>
-          <a:chOff x="0" y="0"/>
-          <a:chExt cx="0" cy="0"/>
-        </a:xfrm>
-      </p:grpSpPr>
-      <p:sp>
-        <p:nvSpPr>
-          <p:cNvPr id="2" name="Rectangle 1"/>
-          <p:cNvSpPr/>
-          <p:nvPr/>
-        </p:nvSpPr>
-        <p:spPr>
-          <a:xfrm>
-            <a:off x="0" y="0"/>
-            <a:ext cx="9875520" cy="6858000"/>
-          </a:xfrm>
-          <a:prstGeom prst="rect">
-            <a:avLst/>
-          </a:prstGeom>
-          <a:solidFill>
-            <a:srgbClr val="FFFFFF"/>
-          </a:solidFill>
-          <a:ln>
-            <a:noFill/>
-          </a:ln>
-          <a:effectLst/>
-        </p:spPr>
-        <p:style>
-          <a:lnRef idx="1">
-            <a:schemeClr val="accent1"/>
-          </a:lnRef>
-          <a:fillRef idx="3">
-            <a:schemeClr val="accent1"/>
-          </a:fillRef>
-          <a:effectRef idx="2">
-            <a:schemeClr val="accent1"/>
-          </a:effectRef>
-          <a:fontRef idx="minor">
-            <a:schemeClr val="lt1"/>
-          </a:fontRef>
-        </p:style>
-        <p:txBody>
-          <a:bodyPr rtlCol="0" anchor="ctr"/>
-          <a:lstStyle/>
-          <a:p>
-            <a:pPr algn="ctr"/>
-            <a:endParaRPr/>
-          </a:p>
-        </p:txBody>
-      </p:sp>
-      <p:sp>
-        <p:nvSpPr>
-          <p:cNvPr id="3" name="Rectangle 2"/>
-          <p:cNvSpPr/>
-          <p:nvPr/>
-        </p:nvSpPr>
-        <p:spPr>
-          <a:xfrm>
-            <a:off x="457200" y="502920"/>
-            <a:ext cx="128016" cy="566928"/>
-          </a:xfrm>
-          <a:prstGeom prst="rect">
-            <a:avLst/>
-          </a:prstGeom>
-          <a:solidFill>
-            <a:srgbClr val="F58220"/>
-          </a:solidFill>
-          <a:ln>
-            <a:noFill/>
-          </a:ln>
-          <a:effectLst/>
-        </p:spPr>
-        <p:style>
-          <a:lnRef idx="1">
-            <a:schemeClr val="accent1"/>
-          </a:lnRef>
-          <a:fillRef idx="3">
-            <a:schemeClr val="accent1"/>
-          </a:fillRef>
-          <a:effectRef idx="2">
-            <a:schemeClr val="accent1"/>
-          </a:effectRef>
-          <a:fontRef idx="minor">
-            <a:schemeClr val="lt1"/>
-          </a:fontRef>
-        </p:style>
-        <p:txBody>
-          <a:bodyPr rtlCol="0" anchor="ctr"/>
-          <a:lstStyle/>
-          <a:p>
-            <a:pPr algn="ctr"/>
-            <a:endParaRPr/>
-          </a:p>
-        </p:txBody>
-      </p:sp>
-      <p:sp>
-        <p:nvSpPr>
-          <p:cNvPr id="4" name="TextBox 3"/>
-          <p:cNvSpPr txBox="1"/>
-          <p:nvPr/>
-        </p:nvSpPr>
-        <p:spPr>
-          <a:xfrm>
-            <a:off x="685800" y="457200"/>
-            <a:ext cx="8229600" cy="320040"/>
-          </a:xfrm>
-          <a:prstGeom prst="rect">
-            <a:avLst/>
-          </a:prstGeom>
-          <a:noFill/>
-        </p:spPr>
-        <p:txBody>
-          <a:bodyPr wrap="square" lIns="25400" tIns="12700" rIns="25400" bIns="12700" anchor="t">
-            <a:spAutoFit/>
-          </a:bodyPr>
-          <a:lstStyle/>
-          <a:p>
-            <a:pPr algn="l">
-              <a:lnSpc>
-                <a:spcPct val="100000"/>
-              </a:lnSpc>
-            </a:pPr>
-            <a:r>
-              <a:rPr sz="1200" b="1">
-                <a:solidFill>
-                  <a:srgbClr val="F58220"/>
-                </a:solidFill>
-                <a:latin typeface="맑은 고딕"/>
-              </a:rPr>
-              <a:t>11  RISK</a:t>
-            </a:r>
-          </a:p>
-        </p:txBody>
-      </p:sp>
-      <p:sp>
-        <p:nvSpPr>
-          <p:cNvPr id="5" name="TextBox 4"/>
-          <p:cNvSpPr txBox="1"/>
-          <p:nvPr/>
-        </p:nvSpPr>
-        <p:spPr>
-          <a:xfrm>
-            <a:off x="685800" y="731520"/>
-            <a:ext cx="8686800" cy="502920"/>
-          </a:xfrm>
-          <a:prstGeom prst="rect">
-            <a:avLst/>
-          </a:prstGeom>
-          <a:noFill/>
-        </p:spPr>
-        <p:txBody>
-          <a:bodyPr wrap="square" lIns="25400" tIns="12700" rIns="25400" bIns="12700" anchor="t">
-            <a:spAutoFit/>
-          </a:bodyPr>
-          <a:lstStyle/>
-          <a:p>
-            <a:pPr algn="l">
-              <a:lnSpc>
-                <a:spcPct val="100000"/>
-              </a:lnSpc>
-            </a:pPr>
-            <a:r>
-              <a:rPr sz="2300" b="1">
-                <a:solidFill>
-                  <a:srgbClr val="043B72"/>
-                </a:solidFill>
-                <a:latin typeface="맑은 고딕"/>
-              </a:rPr>
-              <a:t>리스크 및 유의사항</a:t>
-            </a:r>
-          </a:p>
-        </p:txBody>
-      </p:sp>
-      <p:sp>
-        <p:nvSpPr>
-          <p:cNvPr id="6" name="TextBox 5"/>
-          <p:cNvSpPr txBox="1"/>
-          <p:nvPr/>
-        </p:nvSpPr>
-        <p:spPr>
-          <a:xfrm>
-            <a:off x="685800" y="1463040"/>
-            <a:ext cx="8503920" cy="4572000"/>
-          </a:xfrm>
-          <a:prstGeom prst="rect">
-            <a:avLst/>
-          </a:prstGeom>
-          <a:noFill/>
-        </p:spPr>
-        <p:txBody>
-          <a:bodyPr wrap="square">
-            <a:spAutoFit/>
-          </a:bodyPr>
-          <a:lstStyle/>
-          <a:p>
-            <a:pPr>
-              <a:lnSpc>
-                <a:spcPct val="130000"/>
-              </a:lnSpc>
-              <a:spcAft>
-                <a:spcPts val="300"/>
-              </a:spcAft>
-            </a:pPr>
-            <a:r>
-              <a:rPr sz="1250" b="1">
-                <a:solidFill>
-                  <a:srgbClr val="043B72"/>
-                </a:solidFill>
-                <a:latin typeface="맑은 고딕"/>
-              </a:rPr>
-              <a:t>■ 하방 손실 위험 (최대 위험요소): 전략 특성상 기초자산 급락 시 손실이 누적되며 원금의 상당 부분 손실이 가능합니다.</a:t>
-            </a:r>
-          </a:p>
-          <a:p>
-            <a:pPr>
-              <a:lnSpc>
-                <a:spcPct val="130000"/>
-              </a:lnSpc>
-              <a:spcAft>
-                <a:spcPts val="300"/>
-              </a:spcAft>
-            </a:pPr>
-            <a:r>
-              <a:rPr sz="1250" b="0">
-                <a:solidFill>
-                  <a:srgbClr val="3A3A3A"/>
-                </a:solidFill>
-                <a:latin typeface="맑은 고딕"/>
-              </a:rPr>
-              <a:t>■ 운용오차: 이산 리밸런싱·급변동·갭 하락 시 이론 수익과 실현손익이 크게 벌어질 수 있습니다(시뮬레이션상 이탈 사례 확인).</a:t>
-            </a:r>
-          </a:p>
-          <a:p>
-            <a:pPr>
-              <a:lnSpc>
-                <a:spcPct val="130000"/>
-              </a:lnSpc>
-              <a:spcAft>
-                <a:spcPts val="300"/>
-              </a:spcAft>
-            </a:pPr>
-            <a:r>
-              <a:rPr sz="1250" b="0">
-                <a:solidFill>
-                  <a:srgbClr val="3A3A3A"/>
-                </a:solidFill>
-                <a:latin typeface="맑은 고딕"/>
-              </a:rPr>
-              <a:t>■ 편입비 상한(180%) 효과: 급변동 구간에서 편입비 조절이 제한되어 추가 오차가 발생할 수 있습니다.</a:t>
-            </a:r>
-          </a:p>
-          <a:p>
-            <a:pPr>
-              <a:lnSpc>
-                <a:spcPct val="130000"/>
-              </a:lnSpc>
-              <a:spcAft>
-                <a:spcPts val="300"/>
-              </a:spcAft>
-            </a:pPr>
-            <a:r>
-              <a:rPr sz="1250" b="0">
-                <a:solidFill>
-                  <a:srgbClr val="3A3A3A"/>
-                </a:solidFill>
-                <a:latin typeface="맑은 고딕"/>
-              </a:rPr>
-              <a:t>■ 급락 국면 위험: 급격한 하락 시 하방 완충이 제한되어 손실에 노출될 수 있습니다.</a:t>
-            </a:r>
-          </a:p>
-          <a:p>
-            <a:pPr>
-              <a:lnSpc>
-                <a:spcPct val="130000"/>
-              </a:lnSpc>
-              <a:spcAft>
-                <a:spcPts val="300"/>
-              </a:spcAft>
-            </a:pPr>
-            <a:r>
-              <a:rPr sz="1250" b="0">
-                <a:solidFill>
-                  <a:srgbClr val="3A3A3A"/>
-                </a:solidFill>
-                <a:latin typeface="맑은 고딕"/>
-              </a:rPr>
-              <a:t>■ 단일종목 집중 위험: 삼성전자·SK하이닉스 2종목에 집중되어 개별기업·반도체 사이클 리스크에 크게 노출됩니다.</a:t>
-            </a:r>
-          </a:p>
-          <a:p>
-            <a:pPr>
-              <a:lnSpc>
-                <a:spcPct val="130000"/>
-              </a:lnSpc>
-              <a:spcAft>
-                <a:spcPts val="300"/>
-              </a:spcAft>
-            </a:pPr>
-            <a:r>
-              <a:rPr sz="1250" b="0">
-                <a:solidFill>
-                  <a:srgbClr val="3A3A3A"/>
-                </a:solidFill>
-                <a:latin typeface="맑은 고딕"/>
-              </a:rPr>
-              <a:t>■ 변동성 축소 위험: 시장 변동성이 가정보다 낮아지면 변동성 매매 수익 기회가 줄어 기대수익에 미달할 수 있습니다.</a:t>
-            </a:r>
-          </a:p>
-        </p:txBody>
-      </p:sp>
-      <p:sp>
-        <p:nvSpPr>
-          <p:cNvPr id="7" name="Rectangle 6"/>
-          <p:cNvSpPr/>
-          <p:nvPr/>
-        </p:nvSpPr>
-        <p:spPr>
-          <a:xfrm>
-            <a:off x="685800" y="5074920"/>
-            <a:ext cx="8503920" cy="960120"/>
-          </a:xfrm>
-          <a:prstGeom prst="rect">
-            <a:avLst/>
-          </a:prstGeom>
-          <a:solidFill>
-            <a:srgbClr val="EEF2F7"/>
-          </a:solidFill>
-          <a:ln>
-            <a:noFill/>
-          </a:ln>
-          <a:effectLst/>
-        </p:spPr>
-        <p:style>
-          <a:lnRef idx="1">
-            <a:schemeClr val="accent1"/>
-          </a:lnRef>
-          <a:fillRef idx="3">
-            <a:schemeClr val="accent1"/>
-          </a:fillRef>
-          <a:effectRef idx="2">
-            <a:schemeClr val="accent1"/>
-          </a:effectRef>
-          <a:fontRef idx="minor">
-            <a:schemeClr val="lt1"/>
-          </a:fontRef>
-        </p:style>
-        <p:txBody>
-          <a:bodyPr rtlCol="0" anchor="ctr"/>
-          <a:lstStyle/>
-          <a:p>
-            <a:pPr algn="ctr"/>
-            <a:endParaRPr/>
-          </a:p>
-        </p:txBody>
-      </p:sp>
-      <p:sp>
-        <p:nvSpPr>
-          <p:cNvPr id="8" name="TextBox 7"/>
-          <p:cNvSpPr txBox="1"/>
-          <p:nvPr/>
-        </p:nvSpPr>
-        <p:spPr>
-          <a:xfrm>
-            <a:off x="914400" y="5193792"/>
-            <a:ext cx="8138160" cy="777240"/>
-          </a:xfrm>
-          <a:prstGeom prst="rect">
-            <a:avLst/>
-          </a:prstGeom>
-          <a:noFill/>
-        </p:spPr>
-        <p:txBody>
-          <a:bodyPr wrap="square" lIns="25400" tIns="12700" rIns="25400" bIns="12700" anchor="t">
-            <a:spAutoFit/>
-          </a:bodyPr>
-          <a:lstStyle/>
-          <a:p>
-            <a:pPr algn="l">
-              <a:lnSpc>
-                <a:spcPct val="120000"/>
-              </a:lnSpc>
-            </a:pPr>
-            <a:r>
-              <a:rPr sz="1150" b="1">
-                <a:solidFill>
-                  <a:srgbClr val="D02F00"/>
-                </a:solidFill>
-                <a:latin typeface="맑은 고딕"/>
-              </a:rPr>
-              <a:t>본 상품은 1등급(매우 높은 위험) 상품으로 원금의 전부(0~100%) 손실이 발생할 수 있으며, 그 손실은 투자자에게 귀속됩니다.</a:t>
-            </a:r>
-          </a:p>
-          <a:p>
-            <a:pPr algn="l">
-              <a:lnSpc>
-                <a:spcPct val="120000"/>
-              </a:lnSpc>
-            </a:pPr>
-            <a:r>
-              <a:rPr sz="1050" b="0">
-                <a:solidFill>
-                  <a:srgbClr val="84888B"/>
-                </a:solidFill>
-                <a:latin typeface="맑은 고딕"/>
-              </a:rPr>
-              <a:t>투자 전 상품설명서·약관·계약권유문서를 반드시 확인하시기 바랍니다.</a:t>
-            </a:r>
-          </a:p>
-        </p:txBody>
-      </p:sp>
-      <p:sp>
-        <p:nvSpPr>
-          <p:cNvPr id="9" name="TextBox 8"/>
-          <p:cNvSpPr txBox="1"/>
-          <p:nvPr/>
-        </p:nvSpPr>
-        <p:spPr>
-          <a:xfrm>
-            <a:off x="457200" y="6510528"/>
-            <a:ext cx="7863840" cy="292608"/>
-          </a:xfrm>
-          <a:prstGeom prst="rect">
-            <a:avLst/>
-          </a:prstGeom>
-          <a:noFill/>
-        </p:spPr>
-        <p:txBody>
-          <a:bodyPr wrap="square" lIns="25400" tIns="12700" rIns="25400" bIns="12700" anchor="t">
-            <a:spAutoFit/>
-          </a:bodyPr>
-          <a:lstStyle/>
-          <a:p>
-            <a:pPr algn="l">
-              <a:lnSpc>
-                <a:spcPct val="100000"/>
-              </a:lnSpc>
-            </a:pPr>
-            <a:r>
-              <a:rPr sz="700" b="0">
-                <a:solidFill>
-                  <a:srgbClr val="84888B"/>
-                </a:solidFill>
-                <a:latin typeface="맑은 고딕"/>
-              </a:rPr>
-              <a:t>※ 상기 자료는 이해를 돕기 위한 예시이며 실제 투자내용을 의미하지 않습니다. 시뮬레이션은 가정에 따른 것으로 실제와 다를 수 있습니다.</a:t>
-            </a:r>
-          </a:p>
-        </p:txBody>
-      </p:sp>
-      <p:sp>
-        <p:nvSpPr>
-          <p:cNvPr id="10" name="TextBox 9"/>
-          <p:cNvSpPr txBox="1"/>
-          <p:nvPr/>
-        </p:nvSpPr>
-        <p:spPr>
-          <a:xfrm>
-            <a:off x="9052560" y="6510528"/>
-            <a:ext cx="548640" cy="292608"/>
-          </a:xfrm>
-          <a:prstGeom prst="rect">
-            <a:avLst/>
-          </a:prstGeom>
-          <a:noFill/>
-        </p:spPr>
-        <p:txBody>
-          <a:bodyPr wrap="square" lIns="25400" tIns="12700" rIns="25400" bIns="12700" anchor="t">
-            <a:spAutoFit/>
-          </a:bodyPr>
-          <a:lstStyle/>
-          <a:p>
-            <a:pPr algn="r">
-              <a:lnSpc>
-                <a:spcPct val="100000"/>
-              </a:lnSpc>
-            </a:pPr>
-            <a:r>
-              <a:rPr sz="900" b="1">
-                <a:solidFill>
-                  <a:srgbClr val="84888B"/>
-                </a:solidFill>
-                <a:latin typeface="맑은 고딕"/>
-              </a:rPr>
-              <a:t>13</a:t>
-            </a:r>
-          </a:p>
-        </p:txBody>
-      </p:sp>
-    </p:spTree>
-  </p:cSld>
-  <p:clrMapOvr>
-    <a:masterClrMapping/>
-  </p:clrMapOvr>
-</p:sld>
-</file>
-
-<file path=ppt/slides/slide15.xml><?xml version="1.0" encoding="utf-8"?>
+<file path=ppt/slides/slide10.xml><?xml version="1.0" encoding="utf-8"?>
 <p:sld xmlns:a="http://schemas.openxmlformats.org/drawingml/2006/main" xmlns:p="http://schemas.openxmlformats.org/presentationml/2006/main" xmlns:r="http://schemas.openxmlformats.org/officeDocument/2006/relationships">
   <p:cSld>
     <p:spTree>
@@ -15427,7 +12835,7 @@
 </p:sld>
 </file>
 
-<file path=ppt/slides/slide16.xml><?xml version="1.0" encoding="utf-8"?>
+<file path=ppt/slides/slide11.xml><?xml version="1.0" encoding="utf-8"?>
 <p:sld xmlns:a="http://schemas.openxmlformats.org/drawingml/2006/main" xmlns:p="http://schemas.openxmlformats.org/presentationml/2006/main" xmlns:r="http://schemas.openxmlformats.org/officeDocument/2006/relationships">
   <p:cSld>
     <p:spTree>
@@ -18247,6 +15655,2598 @@
 </p:sld>
 </file>
 
+<file path=ppt/slides/slide12.xml><?xml version="1.0" encoding="utf-8"?>
+<p:sld xmlns:a="http://schemas.openxmlformats.org/drawingml/2006/main" xmlns:r="http://schemas.openxmlformats.org/officeDocument/2006/relationships" xmlns:p="http://schemas.openxmlformats.org/presentationml/2006/main">
+  <p:cSld>
+    <p:spTree>
+      <p:nvGrpSpPr>
+        <p:cNvPr id="1" name=""/>
+        <p:cNvGrpSpPr/>
+        <p:nvPr/>
+      </p:nvGrpSpPr>
+      <p:grpSpPr>
+        <a:xfrm>
+          <a:off x="0" y="0"/>
+          <a:ext cx="0" cy="0"/>
+          <a:chOff x="0" y="0"/>
+          <a:chExt cx="0" cy="0"/>
+        </a:xfrm>
+      </p:grpSpPr>
+      <p:sp>
+        <p:nvSpPr>
+          <p:cNvPr id="2" name="Rectangle 1"/>
+          <p:cNvSpPr/>
+          <p:nvPr/>
+        </p:nvSpPr>
+        <p:spPr>
+          <a:xfrm>
+            <a:off x="0" y="0"/>
+            <a:ext cx="9875520" cy="6858000"/>
+          </a:xfrm>
+          <a:prstGeom prst="rect">
+            <a:avLst/>
+          </a:prstGeom>
+          <a:solidFill>
+            <a:srgbClr val="FFFFFF"/>
+          </a:solidFill>
+          <a:ln>
+            <a:noFill/>
+          </a:ln>
+          <a:effectLst/>
+        </p:spPr>
+        <p:style>
+          <a:lnRef idx="1">
+            <a:schemeClr val="accent1"/>
+          </a:lnRef>
+          <a:fillRef idx="3">
+            <a:schemeClr val="accent1"/>
+          </a:fillRef>
+          <a:effectRef idx="2">
+            <a:schemeClr val="accent1"/>
+          </a:effectRef>
+          <a:fontRef idx="minor">
+            <a:schemeClr val="lt1"/>
+          </a:fontRef>
+        </p:style>
+        <p:txBody>
+          <a:bodyPr rtlCol="0" anchor="ctr"/>
+          <a:lstStyle/>
+          <a:p>
+            <a:pPr algn="ctr"/>
+            <a:endParaRPr/>
+          </a:p>
+        </p:txBody>
+      </p:sp>
+      <p:sp>
+        <p:nvSpPr>
+          <p:cNvPr id="3" name="Rectangle 2"/>
+          <p:cNvSpPr/>
+          <p:nvPr/>
+        </p:nvSpPr>
+        <p:spPr>
+          <a:xfrm>
+            <a:off x="457200" y="502920"/>
+            <a:ext cx="128016" cy="566928"/>
+          </a:xfrm>
+          <a:prstGeom prst="rect">
+            <a:avLst/>
+          </a:prstGeom>
+          <a:solidFill>
+            <a:srgbClr val="F58220"/>
+          </a:solidFill>
+          <a:ln>
+            <a:noFill/>
+          </a:ln>
+          <a:effectLst/>
+        </p:spPr>
+        <p:style>
+          <a:lnRef idx="1">
+            <a:schemeClr val="accent1"/>
+          </a:lnRef>
+          <a:fillRef idx="3">
+            <a:schemeClr val="accent1"/>
+          </a:fillRef>
+          <a:effectRef idx="2">
+            <a:schemeClr val="accent1"/>
+          </a:effectRef>
+          <a:fontRef idx="minor">
+            <a:schemeClr val="lt1"/>
+          </a:fontRef>
+        </p:style>
+        <p:txBody>
+          <a:bodyPr rtlCol="0" anchor="ctr"/>
+          <a:lstStyle/>
+          <a:p>
+            <a:pPr algn="ctr"/>
+            <a:endParaRPr/>
+          </a:p>
+        </p:txBody>
+      </p:sp>
+      <p:sp>
+        <p:nvSpPr>
+          <p:cNvPr id="4" name="TextBox 3"/>
+          <p:cNvSpPr txBox="1"/>
+          <p:nvPr/>
+        </p:nvSpPr>
+        <p:spPr>
+          <a:xfrm>
+            <a:off x="585216" y="342021"/>
+            <a:ext cx="8229600" cy="210314"/>
+          </a:xfrm>
+          <a:prstGeom prst="rect">
+            <a:avLst/>
+          </a:prstGeom>
+          <a:noFill/>
+        </p:spPr>
+        <p:txBody>
+          <a:bodyPr wrap="square" lIns="25400" tIns="12700" rIns="25400" bIns="12700" anchor="t">
+            <a:spAutoFit/>
+          </a:bodyPr>
+          <a:lstStyle/>
+          <a:p>
+            <a:pPr algn="l">
+              <a:lnSpc>
+                <a:spcPct val="100000"/>
+              </a:lnSpc>
+            </a:pPr>
+            <a:r>
+              <a:rPr sz="1200" b="1" dirty="0">
+                <a:solidFill>
+                  <a:srgbClr val="F58220"/>
+                </a:solidFill>
+                <a:latin typeface="맑은 고딕"/>
+              </a:rPr>
+              <a:t>0</a:t>
+            </a:r>
+            <a:r>
+              <a:rPr lang="en-US" altLang="ko-KR" sz="1200" b="1" dirty="0">
+                <a:solidFill>
+                  <a:srgbClr val="F58220"/>
+                </a:solidFill>
+                <a:latin typeface="맑은 고딕"/>
+              </a:rPr>
+              <a:t>8</a:t>
+            </a:r>
+            <a:r>
+              <a:rPr sz="1200" b="1" dirty="0">
+                <a:solidFill>
+                  <a:srgbClr val="F58220"/>
+                </a:solidFill>
+                <a:latin typeface="맑은 고딕"/>
+              </a:rPr>
+              <a:t>  PAYOFF</a:t>
+            </a:r>
+          </a:p>
+        </p:txBody>
+      </p:sp>
+      <p:sp>
+        <p:nvSpPr>
+          <p:cNvPr id="5" name="TextBox 4"/>
+          <p:cNvSpPr txBox="1"/>
+          <p:nvPr/>
+        </p:nvSpPr>
+        <p:spPr>
+          <a:xfrm>
+            <a:off x="640080" y="585328"/>
+            <a:ext cx="8686800" cy="379591"/>
+          </a:xfrm>
+          <a:prstGeom prst="rect">
+            <a:avLst/>
+          </a:prstGeom>
+          <a:noFill/>
+        </p:spPr>
+        <p:txBody>
+          <a:bodyPr wrap="square" lIns="25400" tIns="12700" rIns="25400" bIns="12700" anchor="t">
+            <a:spAutoFit/>
+          </a:bodyPr>
+          <a:lstStyle/>
+          <a:p>
+            <a:pPr algn="l">
+              <a:lnSpc>
+                <a:spcPct val="100000"/>
+              </a:lnSpc>
+            </a:pPr>
+            <a:r>
+              <a:rPr sz="2300" b="1" dirty="0" err="1">
+                <a:solidFill>
+                  <a:srgbClr val="043B72"/>
+                </a:solidFill>
+                <a:latin typeface="맑은 고딕"/>
+              </a:rPr>
+              <a:t>수익</a:t>
+            </a:r>
+            <a:r>
+              <a:rPr sz="2300" b="1" dirty="0">
+                <a:solidFill>
+                  <a:srgbClr val="043B72"/>
+                </a:solidFill>
+                <a:latin typeface="맑은 고딕"/>
+              </a:rPr>
+              <a:t> 구조</a:t>
+            </a:r>
+            <a:r>
+              <a:rPr lang="en-US" altLang="ko-KR" sz="2300" b="1" dirty="0">
+                <a:solidFill>
+                  <a:srgbClr val="043B72"/>
+                </a:solidFill>
+                <a:latin typeface="맑은 고딕"/>
+              </a:rPr>
+              <a:t>1</a:t>
+            </a:r>
+            <a:r>
+              <a:rPr sz="2300" b="1" dirty="0">
+                <a:solidFill>
+                  <a:srgbClr val="043B72"/>
+                </a:solidFill>
+                <a:latin typeface="맑은 고딕"/>
+              </a:rPr>
+              <a:t> — </a:t>
+            </a:r>
+            <a:r>
+              <a:rPr sz="2300" b="1" dirty="0" err="1">
+                <a:solidFill>
+                  <a:srgbClr val="043B72"/>
+                </a:solidFill>
+                <a:latin typeface="맑은 고딕"/>
+              </a:rPr>
+              <a:t>성장변동성펀드</a:t>
+            </a:r>
+            <a:r>
+              <a:rPr sz="2300" b="1" dirty="0">
+                <a:solidFill>
+                  <a:srgbClr val="043B72"/>
+                </a:solidFill>
+                <a:latin typeface="맑은 고딕"/>
+              </a:rPr>
+              <a:t> (</a:t>
+            </a:r>
+            <a:r>
+              <a:rPr sz="2300" b="1" dirty="0" err="1">
+                <a:solidFill>
+                  <a:srgbClr val="043B72"/>
+                </a:solidFill>
+                <a:latin typeface="맑은 고딕"/>
+              </a:rPr>
+              <a:t>변동성</a:t>
+            </a:r>
+            <a:r>
+              <a:rPr sz="2300" b="1" dirty="0">
+                <a:solidFill>
+                  <a:srgbClr val="043B72"/>
+                </a:solidFill>
+                <a:latin typeface="맑은 고딕"/>
+              </a:rPr>
+              <a:t> </a:t>
+            </a:r>
+            <a:r>
+              <a:rPr sz="2300" b="1" dirty="0" err="1">
+                <a:solidFill>
+                  <a:srgbClr val="043B72"/>
+                </a:solidFill>
+                <a:latin typeface="맑은 고딕"/>
+              </a:rPr>
+              <a:t>매매</a:t>
+            </a:r>
+            <a:r>
+              <a:rPr sz="2300" b="1" dirty="0">
+                <a:solidFill>
+                  <a:srgbClr val="043B72"/>
+                </a:solidFill>
+                <a:latin typeface="맑은 고딕"/>
+              </a:rPr>
+              <a:t> + </a:t>
+            </a:r>
+            <a:r>
+              <a:rPr sz="2300" b="1" dirty="0" err="1">
+                <a:solidFill>
+                  <a:srgbClr val="043B72"/>
+                </a:solidFill>
+                <a:latin typeface="맑은 고딕"/>
+              </a:rPr>
+              <a:t>상승</a:t>
+            </a:r>
+            <a:r>
+              <a:rPr sz="2300" b="1" dirty="0">
+                <a:solidFill>
+                  <a:srgbClr val="043B72"/>
+                </a:solidFill>
+                <a:latin typeface="맑은 고딕"/>
+              </a:rPr>
+              <a:t> </a:t>
+            </a:r>
+            <a:r>
+              <a:rPr sz="2300" b="1" dirty="0" err="1">
+                <a:solidFill>
+                  <a:srgbClr val="043B72"/>
+                </a:solidFill>
+                <a:latin typeface="맑은 고딕"/>
+              </a:rPr>
+              <a:t>참여</a:t>
+            </a:r>
+            <a:r>
+              <a:rPr sz="2300" b="1" dirty="0">
+                <a:solidFill>
+                  <a:srgbClr val="043B72"/>
+                </a:solidFill>
+                <a:latin typeface="맑은 고딕"/>
+              </a:rPr>
+              <a:t>)</a:t>
+            </a:r>
+          </a:p>
+        </p:txBody>
+      </p:sp>
+      <p:sp>
+        <p:nvSpPr>
+          <p:cNvPr id="6" name="TextBox 5"/>
+          <p:cNvSpPr txBox="1"/>
+          <p:nvPr/>
+        </p:nvSpPr>
+        <p:spPr>
+          <a:xfrm>
+            <a:off x="685800" y="960120"/>
+            <a:ext cx="8686800" cy="365760"/>
+          </a:xfrm>
+          <a:prstGeom prst="rect">
+            <a:avLst/>
+          </a:prstGeom>
+          <a:noFill/>
+        </p:spPr>
+        <p:txBody>
+          <a:bodyPr wrap="square" lIns="25400" tIns="12700" rIns="25400" bIns="12700" anchor="t">
+            <a:spAutoFit/>
+          </a:bodyPr>
+          <a:lstStyle/>
+          <a:p>
+            <a:pPr algn="l">
+              <a:lnSpc>
+                <a:spcPct val="100000"/>
+              </a:lnSpc>
+            </a:pPr>
+            <a:r>
+              <a:rPr sz="1250" b="1">
+                <a:solidFill>
+                  <a:srgbClr val="3A3A3A"/>
+                </a:solidFill>
+                <a:latin typeface="맑은 고딕"/>
+              </a:rPr>
+              <a:t>운용 중 -40% 미도달 시 상승에 참여, -40% 도달 시 하방에 노출됩니다. 시뮬레이션 결과(각 점=1회).</a:t>
+            </a:r>
+          </a:p>
+        </p:txBody>
+      </p:sp>
+      <p:sp>
+        <p:nvSpPr>
+          <p:cNvPr id="9" name="TextBox 8"/>
+          <p:cNvSpPr txBox="1"/>
+          <p:nvPr/>
+        </p:nvSpPr>
+        <p:spPr>
+          <a:xfrm>
+            <a:off x="777240" y="5004936"/>
+            <a:ext cx="8595360" cy="365760"/>
+          </a:xfrm>
+          <a:prstGeom prst="rect">
+            <a:avLst/>
+          </a:prstGeom>
+          <a:noFill/>
+        </p:spPr>
+        <p:txBody>
+          <a:bodyPr wrap="square" lIns="25400" tIns="12700" rIns="25400" bIns="12700" anchor="t">
+            <a:spAutoFit/>
+          </a:bodyPr>
+          <a:lstStyle/>
+          <a:p>
+            <a:pPr algn="l">
+              <a:lnSpc>
+                <a:spcPct val="100000"/>
+              </a:lnSpc>
+            </a:pPr>
+            <a:r>
+              <a:rPr sz="900" b="0" dirty="0" err="1">
+                <a:solidFill>
+                  <a:srgbClr val="84888B"/>
+                </a:solidFill>
+                <a:latin typeface="맑은 고딕"/>
+              </a:rPr>
+              <a:t>변동성 60% 가정 · 점=시뮬 1회 · 노란선=구간 평균 · 데이터: 자체 시뮬레이션(거래비용·운용오차 포함)</a:t>
+            </a:r>
+            <a:r>
+              <a:rPr sz="900" b="0" dirty="0">
+                <a:solidFill>
+                  <a:srgbClr val="84888B"/>
+                </a:solidFill>
+                <a:latin typeface="맑은 고딕"/>
+              </a:rPr>
+              <a:t/>
+            </a:r>
+            <a:r>
+              <a:rPr sz="900" b="0" dirty="0" err="1">
+                <a:solidFill>
+                  <a:srgbClr val="84888B"/>
+                </a:solidFill>
+                <a:latin typeface="맑은 고딕"/>
+              </a:rPr>
+              <a:t/>
+            </a:r>
+            <a:r>
+              <a:rPr sz="900" b="0" dirty="0">
+                <a:solidFill>
+                  <a:srgbClr val="84888B"/>
+                </a:solidFill>
+                <a:latin typeface="맑은 고딕"/>
+              </a:rPr>
+              <a:t/>
+            </a:r>
+            <a:r>
+              <a:rPr sz="900" b="0" dirty="0" err="1">
+                <a:solidFill>
+                  <a:srgbClr val="84888B"/>
+                </a:solidFill>
+                <a:latin typeface="맑은 고딕"/>
+              </a:rPr>
+              <a:t/>
+            </a:r>
+            <a:r>
+              <a:rPr sz="900" b="0" dirty="0">
+                <a:solidFill>
+                  <a:srgbClr val="84888B"/>
+                </a:solidFill>
+                <a:latin typeface="맑은 고딕"/>
+              </a:rPr>
+              <a:t/>
+            </a:r>
+            <a:r>
+              <a:rPr sz="900" b="0" dirty="0" err="1">
+                <a:solidFill>
+                  <a:srgbClr val="84888B"/>
+                </a:solidFill>
+                <a:latin typeface="맑은 고딕"/>
+              </a:rPr>
+              <a:t/>
+            </a:r>
+            <a:r>
+              <a:rPr sz="900" b="0" dirty="0">
+                <a:solidFill>
+                  <a:srgbClr val="84888B"/>
+                </a:solidFill>
+                <a:latin typeface="맑은 고딕"/>
+              </a:rPr>
+              <a:t/>
+            </a:r>
+            <a:r>
+              <a:rPr sz="900" b="1" dirty="0" err="1">
+                <a:solidFill>
+                  <a:srgbClr val="F58220"/>
+                </a:solidFill>
+                <a:latin typeface="맑은 고딕"/>
+              </a:rPr>
+              <a:t/>
+            </a:r>
+            <a:r>
+              <a:rPr sz="900" b="1" dirty="0">
+                <a:solidFill>
+                  <a:srgbClr val="F58220"/>
+                </a:solidFill>
+                <a:latin typeface="맑은 고딕"/>
+              </a:rPr>
+              <a:t/>
+            </a:r>
+            <a:r>
+              <a:rPr sz="900" b="1" dirty="0" err="1">
+                <a:solidFill>
+                  <a:srgbClr val="F58220"/>
+                </a:solidFill>
+                <a:latin typeface="맑은 고딕"/>
+              </a:rPr>
+              <a:t/>
+            </a:r>
+            <a:r>
+              <a:rPr sz="900" b="1" dirty="0">
+                <a:solidFill>
+                  <a:srgbClr val="F58220"/>
+                </a:solidFill>
+                <a:latin typeface="맑은 고딕"/>
+              </a:rPr>
+              <a:t/>
+            </a:r>
+            <a:r>
+              <a:rPr sz="900" b="1" dirty="0" err="1">
+                <a:solidFill>
+                  <a:srgbClr val="F58220"/>
+                </a:solidFill>
+                <a:latin typeface="맑은 고딕"/>
+              </a:rPr>
+              <a:t/>
+            </a:r>
+            <a:r>
+              <a:rPr sz="900" b="0" dirty="0">
+                <a:solidFill>
+                  <a:srgbClr val="84888B"/>
+                </a:solidFill>
+                <a:latin typeface="맑은 고딕"/>
+              </a:rPr>
+              <a:t/>
+            </a:r>
+            <a:r>
+              <a:rPr sz="900" b="0" dirty="0" err="1">
+                <a:solidFill>
+                  <a:srgbClr val="84888B"/>
+                </a:solidFill>
+                <a:latin typeface="맑은 고딕"/>
+              </a:rPr>
+              <a:t/>
+            </a:r>
+            <a:r>
+              <a:rPr sz="900" b="0" dirty="0">
+                <a:solidFill>
+                  <a:srgbClr val="84888B"/>
+                </a:solidFill>
+                <a:latin typeface="맑은 고딕"/>
+              </a:rPr>
+              <a:t/>
+            </a:r>
+            <a:r>
+              <a:rPr sz="900" b="0" dirty="0" err="1">
+                <a:solidFill>
+                  <a:srgbClr val="84888B"/>
+                </a:solidFill>
+                <a:latin typeface="맑은 고딕"/>
+              </a:rPr>
+              <a:t/>
+            </a:r>
+            <a:r>
+              <a:rPr sz="900" b="0" dirty="0">
+                <a:solidFill>
+                  <a:srgbClr val="84888B"/>
+                </a:solidFill>
+                <a:latin typeface="맑은 고딕"/>
+              </a:rPr>
+              <a:t/>
+            </a:r>
+            <a:r>
+              <a:rPr sz="900" b="0" dirty="0" err="1">
+                <a:solidFill>
+                  <a:srgbClr val="84888B"/>
+                </a:solidFill>
+                <a:latin typeface="맑은 고딕"/>
+              </a:rPr>
+              <a:t/>
+            </a:r>
+            <a:r>
+              <a:rPr sz="900" b="0" dirty="0">
+                <a:solidFill>
+                  <a:srgbClr val="84888B"/>
+                </a:solidFill>
+                <a:latin typeface="맑은 고딕"/>
+              </a:rPr>
+              <a:t/>
+            </a:r>
+            <a:r>
+              <a:rPr sz="900" b="0" dirty="0" err="1">
+                <a:solidFill>
+                  <a:srgbClr val="84888B"/>
+                </a:solidFill>
+                <a:latin typeface="맑은 고딕"/>
+              </a:rPr>
+              <a:t/>
+            </a:r>
+            <a:r>
+              <a:rPr sz="900" b="0" dirty="0">
+                <a:solidFill>
+                  <a:srgbClr val="84888B"/>
+                </a:solidFill>
+                <a:latin typeface="맑은 고딕"/>
+              </a:rPr>
+              <a:t/>
+            </a:r>
+            <a:r>
+              <a:rPr sz="900" b="0" dirty="0" err="1">
+                <a:solidFill>
+                  <a:srgbClr val="84888B"/>
+                </a:solidFill>
+                <a:latin typeface="맑은 고딕"/>
+              </a:rPr>
+              <a:t/>
+            </a:r>
+            <a:r>
+              <a:rPr sz="900" b="0" dirty="0">
+                <a:solidFill>
+                  <a:srgbClr val="84888B"/>
+                </a:solidFill>
+                <a:latin typeface="맑은 고딕"/>
+              </a:rPr>
+              <a:t/>
+            </a:r>
+          </a:p>
+        </p:txBody>
+      </p:sp>
+      <p:sp>
+        <p:nvSpPr>
+          <p:cNvPr id="10" name="TextBox 9"/>
+          <p:cNvSpPr txBox="1"/>
+          <p:nvPr/>
+        </p:nvSpPr>
+        <p:spPr>
+          <a:xfrm>
+            <a:off x="457200" y="6510528"/>
+            <a:ext cx="7863840" cy="292608"/>
+          </a:xfrm>
+          <a:prstGeom prst="rect">
+            <a:avLst/>
+          </a:prstGeom>
+          <a:noFill/>
+        </p:spPr>
+        <p:txBody>
+          <a:bodyPr wrap="square" lIns="25400" tIns="12700" rIns="25400" bIns="12700" anchor="t">
+            <a:spAutoFit/>
+          </a:bodyPr>
+          <a:lstStyle/>
+          <a:p>
+            <a:pPr algn="l">
+              <a:lnSpc>
+                <a:spcPct val="100000"/>
+              </a:lnSpc>
+            </a:pPr>
+            <a:r>
+              <a:rPr sz="700" b="0">
+                <a:solidFill>
+                  <a:srgbClr val="84888B"/>
+                </a:solidFill>
+                <a:latin typeface="맑은 고딕"/>
+              </a:rPr>
+              <a:t>※ 상기 자료는 이해를 돕기 위한 예시이며 실제 투자내용을 의미하지 않습니다. 시뮬레이션은 가정에 따른 것으로 실제와 다를 수 있습니다.</a:t>
+            </a:r>
+          </a:p>
+        </p:txBody>
+      </p:sp>
+      <p:sp>
+        <p:nvSpPr>
+          <p:cNvPr id="11" name="TextBox 10"/>
+          <p:cNvSpPr txBox="1"/>
+          <p:nvPr/>
+        </p:nvSpPr>
+        <p:spPr>
+          <a:xfrm>
+            <a:off x="9052560" y="6510528"/>
+            <a:ext cx="548640" cy="292608"/>
+          </a:xfrm>
+          <a:prstGeom prst="rect">
+            <a:avLst/>
+          </a:prstGeom>
+          <a:noFill/>
+        </p:spPr>
+        <p:txBody>
+          <a:bodyPr wrap="square" lIns="25400" tIns="12700" rIns="25400" bIns="12700" anchor="t">
+            <a:spAutoFit/>
+          </a:bodyPr>
+          <a:lstStyle/>
+          <a:p>
+            <a:pPr algn="r">
+              <a:lnSpc>
+                <a:spcPct val="100000"/>
+              </a:lnSpc>
+            </a:pPr>
+            <a:r>
+              <a:rPr sz="900" b="1">
+                <a:solidFill>
+                  <a:srgbClr val="84888B"/>
+                </a:solidFill>
+                <a:latin typeface="맑은 고딕"/>
+              </a:rPr>
+              <a:t>11</a:t>
+            </a:r>
+          </a:p>
+        </p:txBody>
+      </p:sp>
+      <p:sp>
+        <p:nvSpPr>
+          <p:cNvPr id="12" name="Rectangle 11"/>
+          <p:cNvSpPr/>
+          <p:nvPr/>
+        </p:nvSpPr>
+        <p:spPr>
+          <a:xfrm>
+            <a:off x="685800" y="5318819"/>
+            <a:ext cx="8503920" cy="731520"/>
+          </a:xfrm>
+          <a:prstGeom prst="rect">
+            <a:avLst/>
+          </a:prstGeom>
+          <a:solidFill>
+            <a:srgbClr val="FDF1E6"/>
+          </a:solidFill>
+          <a:ln>
+            <a:noFill/>
+          </a:ln>
+          <a:effectLst/>
+        </p:spPr>
+        <p:style>
+          <a:lnRef idx="1">
+            <a:schemeClr val="accent1"/>
+          </a:lnRef>
+          <a:fillRef idx="3">
+            <a:schemeClr val="accent1"/>
+          </a:fillRef>
+          <a:effectRef idx="2">
+            <a:schemeClr val="accent1"/>
+          </a:effectRef>
+          <a:fontRef idx="minor">
+            <a:schemeClr val="lt1"/>
+          </a:fontRef>
+        </p:style>
+        <p:txBody>
+          <a:bodyPr rtlCol="0" anchor="ctr"/>
+          <a:lstStyle/>
+          <a:p>
+            <a:pPr algn="ctr"/>
+            <a:endParaRPr/>
+          </a:p>
+        </p:txBody>
+      </p:sp>
+      <p:sp>
+        <p:nvSpPr>
+          <p:cNvPr id="13" name="TextBox 12"/>
+          <p:cNvSpPr txBox="1"/>
+          <p:nvPr/>
+        </p:nvSpPr>
+        <p:spPr>
+          <a:xfrm>
+            <a:off x="914400" y="5373683"/>
+            <a:ext cx="8138160" cy="731520"/>
+          </a:xfrm>
+          <a:prstGeom prst="rect">
+            <a:avLst/>
+          </a:prstGeom>
+          <a:noFill/>
+        </p:spPr>
+        <p:txBody>
+          <a:bodyPr wrap="square" anchor="ctr">
+            <a:spAutoFit/>
+          </a:bodyPr>
+          <a:lstStyle/>
+          <a:p>
+            <a:pPr>
+              <a:lnSpc>
+                <a:spcPct val="110000"/>
+              </a:lnSpc>
+            </a:pPr>
+            <a:r>
+              <a:rPr sz="1300" b="1" dirty="0">
+                <a:solidFill>
+                  <a:srgbClr val="F58220"/>
+                </a:solidFill>
+                <a:latin typeface="맑은 고딕"/>
+              </a:rPr>
+              <a:t>※ -40% </a:t>
+            </a:r>
+            <a:r>
+              <a:rPr sz="1300" b="1" dirty="0" err="1">
+                <a:solidFill>
+                  <a:srgbClr val="F58220"/>
+                </a:solidFill>
+                <a:latin typeface="맑은 고딕"/>
+              </a:rPr>
+              <a:t>도달</a:t>
+            </a:r>
+            <a:r>
+              <a:rPr sz="1300" b="1" dirty="0">
+                <a:solidFill>
+                  <a:srgbClr val="F58220"/>
+                </a:solidFill>
+                <a:latin typeface="맑은 고딕"/>
+              </a:rPr>
+              <a:t> </a:t>
+            </a:r>
+            <a:r>
+              <a:rPr sz="1300" b="1" dirty="0" err="1">
+                <a:solidFill>
+                  <a:srgbClr val="F58220"/>
+                </a:solidFill>
+                <a:latin typeface="맑은 고딕"/>
+              </a:rPr>
+              <a:t>시에는</a:t>
+            </a:r>
+            <a:r>
+              <a:rPr sz="1300" b="1" dirty="0">
+                <a:solidFill>
+                  <a:srgbClr val="F58220"/>
+                </a:solidFill>
+                <a:latin typeface="맑은 고딕"/>
+              </a:rPr>
+              <a:t> </a:t>
+            </a:r>
+            <a:r>
+              <a:rPr sz="1300" b="1" dirty="0" err="1">
+                <a:solidFill>
+                  <a:srgbClr val="3A3A3A"/>
+                </a:solidFill>
+                <a:latin typeface="맑은 고딕"/>
+              </a:rPr>
+              <a:t>상승에</a:t>
+            </a:r>
+            <a:r>
+              <a:rPr sz="1300" b="1" dirty="0">
+                <a:solidFill>
+                  <a:srgbClr val="3A3A3A"/>
+                </a:solidFill>
+                <a:latin typeface="맑은 고딕"/>
+              </a:rPr>
+              <a:t> </a:t>
+            </a:r>
+            <a:r>
+              <a:rPr sz="1300" b="1" dirty="0" err="1">
+                <a:solidFill>
+                  <a:srgbClr val="3A3A3A"/>
+                </a:solidFill>
+                <a:latin typeface="맑은 고딕"/>
+              </a:rPr>
+              <a:t>따른</a:t>
+            </a:r>
+            <a:r>
+              <a:rPr sz="1300" b="1" dirty="0">
+                <a:solidFill>
+                  <a:srgbClr val="3A3A3A"/>
+                </a:solidFill>
+                <a:latin typeface="맑은 고딕"/>
+              </a:rPr>
+              <a:t> </a:t>
+            </a:r>
+            <a:r>
+              <a:rPr sz="1300" b="1" dirty="0" err="1">
+                <a:solidFill>
+                  <a:srgbClr val="3A3A3A"/>
+                </a:solidFill>
+                <a:latin typeface="맑은 고딕"/>
+              </a:rPr>
+              <a:t>수익을</a:t>
+            </a:r>
+            <a:r>
+              <a:rPr sz="1300" b="1" dirty="0">
+                <a:solidFill>
+                  <a:srgbClr val="3A3A3A"/>
+                </a:solidFill>
+                <a:latin typeface="맑은 고딕"/>
+              </a:rPr>
+              <a:t> </a:t>
+            </a:r>
+            <a:r>
+              <a:rPr sz="1300" b="1" dirty="0" err="1">
+                <a:solidFill>
+                  <a:srgbClr val="3A3A3A"/>
+                </a:solidFill>
+                <a:latin typeface="맑은 고딕"/>
+              </a:rPr>
+              <a:t>수취하기</a:t>
+            </a:r>
+            <a:r>
+              <a:rPr sz="1300" b="1" dirty="0">
+                <a:solidFill>
+                  <a:srgbClr val="3A3A3A"/>
+                </a:solidFill>
+                <a:latin typeface="맑은 고딕"/>
+              </a:rPr>
+              <a:t> </a:t>
+            </a:r>
+            <a:r>
+              <a:rPr sz="1300" b="1" dirty="0" err="1">
+                <a:solidFill>
+                  <a:srgbClr val="3A3A3A"/>
+                </a:solidFill>
+                <a:latin typeface="맑은 고딕"/>
+              </a:rPr>
+              <a:t>위해</a:t>
+            </a:r>
+            <a:r>
+              <a:rPr sz="1300" b="1" dirty="0">
+                <a:solidFill>
+                  <a:srgbClr val="3A3A3A"/>
+                </a:solidFill>
+                <a:latin typeface="맑은 고딕"/>
+              </a:rPr>
+              <a:t> </a:t>
+            </a:r>
+            <a:r>
+              <a:rPr sz="1300" b="1" dirty="0" err="1">
+                <a:solidFill>
+                  <a:srgbClr val="3A3A3A"/>
+                </a:solidFill>
+                <a:latin typeface="맑은 고딕"/>
+              </a:rPr>
+              <a:t>변동성</a:t>
+            </a:r>
+            <a:r>
+              <a:rPr sz="1300" b="1" dirty="0">
+                <a:solidFill>
+                  <a:srgbClr val="3A3A3A"/>
+                </a:solidFill>
+                <a:latin typeface="맑은 고딕"/>
+              </a:rPr>
+              <a:t> </a:t>
+            </a:r>
+            <a:r>
+              <a:rPr sz="1300" b="1" dirty="0" err="1">
+                <a:solidFill>
+                  <a:srgbClr val="3A3A3A"/>
+                </a:solidFill>
+                <a:latin typeface="맑은 고딕"/>
+              </a:rPr>
+              <a:t>매매를</a:t>
+            </a:r>
+            <a:r>
+              <a:rPr sz="1300" b="1" dirty="0">
+                <a:solidFill>
+                  <a:srgbClr val="3A3A3A"/>
+                </a:solidFill>
+                <a:latin typeface="맑은 고딕"/>
+              </a:rPr>
+              <a:t> </a:t>
+            </a:r>
+            <a:r>
+              <a:rPr sz="1300" b="1" dirty="0" err="1">
+                <a:solidFill>
+                  <a:srgbClr val="3A3A3A"/>
+                </a:solidFill>
+                <a:latin typeface="맑은 고딕"/>
+              </a:rPr>
+              <a:t>수행하지</a:t>
+            </a:r>
+            <a:r>
+              <a:rPr sz="1300" b="1" dirty="0">
+                <a:solidFill>
+                  <a:srgbClr val="3A3A3A"/>
+                </a:solidFill>
+                <a:latin typeface="맑은 고딕"/>
+              </a:rPr>
+              <a:t> </a:t>
+            </a:r>
+            <a:r>
+              <a:rPr sz="1300" b="1" dirty="0" err="1">
+                <a:solidFill>
+                  <a:srgbClr val="3A3A3A"/>
+                </a:solidFill>
+                <a:latin typeface="맑은 고딕"/>
+              </a:rPr>
+              <a:t>않으며</a:t>
+            </a:r>
+            <a:r>
+              <a:rPr sz="1300" b="1" dirty="0">
+                <a:solidFill>
+                  <a:srgbClr val="3A3A3A"/>
+                </a:solidFill>
+                <a:latin typeface="맑은 고딕"/>
+              </a:rPr>
+              <a:t>, </a:t>
+            </a:r>
+            <a:r>
+              <a:rPr sz="1300" b="1" dirty="0" err="1">
+                <a:solidFill>
+                  <a:srgbClr val="3A3A3A"/>
+                </a:solidFill>
+                <a:latin typeface="맑은 고딕"/>
+              </a:rPr>
+              <a:t>주식형과</a:t>
+            </a:r>
+            <a:r>
+              <a:rPr sz="1300" b="1" dirty="0">
+                <a:solidFill>
+                  <a:srgbClr val="3A3A3A"/>
+                </a:solidFill>
+                <a:latin typeface="맑은 고딕"/>
+              </a:rPr>
+              <a:t> </a:t>
+            </a:r>
+            <a:r>
+              <a:rPr sz="1300" b="1" dirty="0" err="1">
+                <a:solidFill>
+                  <a:srgbClr val="3A3A3A"/>
+                </a:solidFill>
+                <a:latin typeface="맑은 고딕"/>
+              </a:rPr>
+              <a:t>유사하게</a:t>
+            </a:r>
+            <a:r>
+              <a:rPr sz="1300" b="1" dirty="0">
+                <a:solidFill>
+                  <a:srgbClr val="3A3A3A"/>
+                </a:solidFill>
+                <a:latin typeface="맑은 고딕"/>
+              </a:rPr>
+              <a:t> </a:t>
+            </a:r>
+            <a:r>
+              <a:rPr sz="1300" b="1" dirty="0" err="1">
+                <a:solidFill>
+                  <a:srgbClr val="3A3A3A"/>
+                </a:solidFill>
+                <a:latin typeface="맑은 고딕"/>
+              </a:rPr>
+              <a:t>운용됩니다</a:t>
+            </a:r>
+            <a:r>
+              <a:rPr sz="1300" b="1" dirty="0">
+                <a:solidFill>
+                  <a:srgbClr val="3A3A3A"/>
+                </a:solidFill>
+                <a:latin typeface="맑은 고딕"/>
+              </a:rPr>
+              <a:t>.</a:t>
+            </a:r>
+          </a:p>
+        </p:txBody>
+      </p:sp>
+      <p:pic>
+        <p:nvPicPr>
+          <p:cNvPr id="16" name="Picture 15" descr="scat_top2_growth_nt.png"/>
+          <p:cNvPicPr>
+            <a:picLocks noChangeAspect="1"/>
+          </p:cNvPicPr>
+          <p:nvPr/>
+        </p:nvPicPr>
+        <p:blipFill>
+          <a:blip r:embed="rId4"/>
+          <a:stretch>
+            <a:fillRect/>
+          </a:stretch>
+        </p:blipFill>
+        <p:spPr>
+          <a:xfrm>
+            <a:off x="320040" y="1417321"/>
+            <a:ext cx="4526280" cy="3650039"/>
+          </a:xfrm>
+          <a:prstGeom prst="rect">
+            <a:avLst/>
+          </a:prstGeom>
+        </p:spPr>
+      </p:pic>
+      <p:pic>
+        <p:nvPicPr>
+          <p:cNvPr id="17" name="Picture 16" descr="scat_top2_growth_t.png"/>
+          <p:cNvPicPr>
+            <a:picLocks noChangeAspect="1"/>
+          </p:cNvPicPr>
+          <p:nvPr/>
+        </p:nvPicPr>
+        <p:blipFill>
+          <a:blip r:embed="rId5"/>
+          <a:stretch>
+            <a:fillRect/>
+          </a:stretch>
+        </p:blipFill>
+        <p:spPr>
+          <a:xfrm>
+            <a:off x="4983480" y="1417321"/>
+            <a:ext cx="4526280" cy="3650039"/>
+          </a:xfrm>
+          <a:prstGeom prst="rect">
+            <a:avLst/>
+          </a:prstGeom>
+        </p:spPr>
+      </p:pic>
+    </p:spTree>
+  </p:cSld>
+  <p:clrMapOvr>
+    <a:masterClrMapping/>
+  </p:clrMapOvr>
+</p:sld>
+</file>
+
+<file path=ppt/slides/slide13.xml><?xml version="1.0" encoding="utf-8"?>
+<p:sld xmlns:a="http://schemas.openxmlformats.org/drawingml/2006/main" xmlns:r="http://schemas.openxmlformats.org/officeDocument/2006/relationships" xmlns:p="http://schemas.openxmlformats.org/presentationml/2006/main">
+  <p:cSld>
+    <p:spTree>
+      <p:nvGrpSpPr>
+        <p:cNvPr id="1" name=""/>
+        <p:cNvGrpSpPr/>
+        <p:nvPr/>
+      </p:nvGrpSpPr>
+      <p:grpSpPr>
+        <a:xfrm>
+          <a:off x="0" y="0"/>
+          <a:ext cx="0" cy="0"/>
+          <a:chOff x="0" y="0"/>
+          <a:chExt cx="0" cy="0"/>
+        </a:xfrm>
+      </p:grpSpPr>
+      <p:sp>
+        <p:nvSpPr>
+          <p:cNvPr id="2" name="Rectangle 1"/>
+          <p:cNvSpPr/>
+          <p:nvPr/>
+        </p:nvSpPr>
+        <p:spPr>
+          <a:xfrm>
+            <a:off x="0" y="0"/>
+            <a:ext cx="9875520" cy="6858000"/>
+          </a:xfrm>
+          <a:prstGeom prst="rect">
+            <a:avLst/>
+          </a:prstGeom>
+          <a:solidFill>
+            <a:srgbClr val="FFFFFF"/>
+          </a:solidFill>
+          <a:ln>
+            <a:noFill/>
+          </a:ln>
+          <a:effectLst/>
+        </p:spPr>
+        <p:style>
+          <a:lnRef idx="1">
+            <a:schemeClr val="accent1"/>
+          </a:lnRef>
+          <a:fillRef idx="3">
+            <a:schemeClr val="accent1"/>
+          </a:fillRef>
+          <a:effectRef idx="2">
+            <a:schemeClr val="accent1"/>
+          </a:effectRef>
+          <a:fontRef idx="minor">
+            <a:schemeClr val="lt1"/>
+          </a:fontRef>
+        </p:style>
+        <p:txBody>
+          <a:bodyPr rtlCol="0" anchor="ctr"/>
+          <a:lstStyle/>
+          <a:p>
+            <a:pPr algn="ctr"/>
+            <a:endParaRPr/>
+          </a:p>
+        </p:txBody>
+      </p:sp>
+      <p:sp>
+        <p:nvSpPr>
+          <p:cNvPr id="3" name="Rectangle 2"/>
+          <p:cNvSpPr/>
+          <p:nvPr/>
+        </p:nvSpPr>
+        <p:spPr>
+          <a:xfrm>
+            <a:off x="457200" y="502920"/>
+            <a:ext cx="128016" cy="566928"/>
+          </a:xfrm>
+          <a:prstGeom prst="rect">
+            <a:avLst/>
+          </a:prstGeom>
+          <a:solidFill>
+            <a:srgbClr val="F58220"/>
+          </a:solidFill>
+          <a:ln>
+            <a:noFill/>
+          </a:ln>
+          <a:effectLst/>
+        </p:spPr>
+        <p:style>
+          <a:lnRef idx="1">
+            <a:schemeClr val="accent1"/>
+          </a:lnRef>
+          <a:fillRef idx="3">
+            <a:schemeClr val="accent1"/>
+          </a:fillRef>
+          <a:effectRef idx="2">
+            <a:schemeClr val="accent1"/>
+          </a:effectRef>
+          <a:fontRef idx="minor">
+            <a:schemeClr val="lt1"/>
+          </a:fontRef>
+        </p:style>
+        <p:txBody>
+          <a:bodyPr rtlCol="0" anchor="ctr"/>
+          <a:lstStyle/>
+          <a:p>
+            <a:pPr algn="ctr"/>
+            <a:endParaRPr/>
+          </a:p>
+        </p:txBody>
+      </p:sp>
+      <p:sp>
+        <p:nvSpPr>
+          <p:cNvPr id="4" name="TextBox 3"/>
+          <p:cNvSpPr txBox="1"/>
+          <p:nvPr/>
+        </p:nvSpPr>
+        <p:spPr>
+          <a:xfrm>
+            <a:off x="685800" y="393192"/>
+            <a:ext cx="8229600" cy="320040"/>
+          </a:xfrm>
+          <a:prstGeom prst="rect">
+            <a:avLst/>
+          </a:prstGeom>
+          <a:noFill/>
+        </p:spPr>
+        <p:txBody>
+          <a:bodyPr wrap="square" lIns="25400" tIns="12700" rIns="25400" bIns="12700" anchor="t">
+            <a:spAutoFit/>
+          </a:bodyPr>
+          <a:lstStyle/>
+          <a:p>
+            <a:pPr algn="l">
+              <a:lnSpc>
+                <a:spcPct val="100000"/>
+              </a:lnSpc>
+            </a:pPr>
+            <a:r>
+              <a:rPr sz="1200" b="1" dirty="0">
+                <a:solidFill>
+                  <a:srgbClr val="F58220"/>
+                </a:solidFill>
+                <a:latin typeface="맑은 고딕"/>
+              </a:rPr>
+              <a:t>10  PAYOFF</a:t>
+            </a:r>
+          </a:p>
+        </p:txBody>
+      </p:sp>
+      <p:sp>
+        <p:nvSpPr>
+          <p:cNvPr id="5" name="TextBox 4"/>
+          <p:cNvSpPr txBox="1"/>
+          <p:nvPr/>
+        </p:nvSpPr>
+        <p:spPr>
+          <a:xfrm>
+            <a:off x="685800" y="630936"/>
+            <a:ext cx="8686800" cy="379591"/>
+          </a:xfrm>
+          <a:prstGeom prst="rect">
+            <a:avLst/>
+          </a:prstGeom>
+          <a:noFill/>
+        </p:spPr>
+        <p:txBody>
+          <a:bodyPr wrap="square" lIns="25400" tIns="12700" rIns="25400" bIns="12700" anchor="t">
+            <a:spAutoFit/>
+          </a:bodyPr>
+          <a:lstStyle/>
+          <a:p>
+            <a:pPr algn="l">
+              <a:lnSpc>
+                <a:spcPct val="100000"/>
+              </a:lnSpc>
+            </a:pPr>
+            <a:r>
+              <a:rPr sz="2300" b="1" dirty="0" err="1">
+                <a:solidFill>
+                  <a:srgbClr val="043B72"/>
+                </a:solidFill>
+                <a:latin typeface="맑은 고딕"/>
+              </a:rPr>
+              <a:t>수익</a:t>
+            </a:r>
+            <a:r>
+              <a:rPr sz="2300" b="1" dirty="0">
+                <a:solidFill>
+                  <a:srgbClr val="043B72"/>
+                </a:solidFill>
+                <a:latin typeface="맑은 고딕"/>
+              </a:rPr>
+              <a:t> 구조</a:t>
+            </a:r>
+            <a:r>
+              <a:rPr lang="en-US" altLang="ko-KR" sz="2300" b="1" dirty="0">
+                <a:solidFill>
+                  <a:srgbClr val="043B72"/>
+                </a:solidFill>
+                <a:latin typeface="맑은 고딕"/>
+              </a:rPr>
+              <a:t>2</a:t>
+            </a:r>
+            <a:r>
+              <a:rPr sz="2300" b="1" dirty="0">
+                <a:solidFill>
+                  <a:srgbClr val="043B72"/>
+                </a:solidFill>
+                <a:latin typeface="맑은 고딕"/>
+              </a:rPr>
+              <a:t> — </a:t>
+            </a:r>
+            <a:r>
+              <a:rPr sz="2300" b="1" dirty="0" err="1">
+                <a:solidFill>
+                  <a:srgbClr val="043B72"/>
+                </a:solidFill>
+                <a:latin typeface="맑은 고딕"/>
+              </a:rPr>
+              <a:t>안정변동성펀드</a:t>
+            </a:r>
+            <a:r>
+              <a:rPr sz="2300" b="1" dirty="0">
+                <a:solidFill>
+                  <a:srgbClr val="043B72"/>
+                </a:solidFill>
+                <a:latin typeface="맑은 고딕"/>
+              </a:rPr>
+              <a:t> (</a:t>
+            </a:r>
+            <a:r>
+              <a:rPr sz="2300" b="1" dirty="0" err="1">
+                <a:solidFill>
+                  <a:srgbClr val="043B72"/>
+                </a:solidFill>
+                <a:latin typeface="맑은 고딕"/>
+              </a:rPr>
+              <a:t>안정</a:t>
+            </a:r>
+            <a:r>
+              <a:rPr sz="2300" b="1" dirty="0">
+                <a:solidFill>
+                  <a:srgbClr val="043B72"/>
+                </a:solidFill>
+                <a:latin typeface="맑은 고딕"/>
+              </a:rPr>
+              <a:t> </a:t>
+            </a:r>
+            <a:r>
+              <a:rPr sz="2300" b="1" dirty="0" err="1">
+                <a:solidFill>
+                  <a:srgbClr val="043B72"/>
+                </a:solidFill>
+                <a:latin typeface="맑은 고딕"/>
+              </a:rPr>
+              <a:t>변동성</a:t>
+            </a:r>
+            <a:r>
+              <a:rPr sz="2300" b="1" dirty="0">
+                <a:solidFill>
+                  <a:srgbClr val="043B72"/>
+                </a:solidFill>
+                <a:latin typeface="맑은 고딕"/>
+              </a:rPr>
+              <a:t> </a:t>
+            </a:r>
+            <a:r>
+              <a:rPr sz="2300" b="1" dirty="0" err="1">
+                <a:solidFill>
+                  <a:srgbClr val="043B72"/>
+                </a:solidFill>
+                <a:latin typeface="맑은 고딕"/>
+              </a:rPr>
+              <a:t>매매</a:t>
+            </a:r>
+            <a:r>
+              <a:rPr sz="2300" b="1" dirty="0">
+                <a:solidFill>
+                  <a:srgbClr val="043B72"/>
+                </a:solidFill>
+                <a:latin typeface="맑은 고딕"/>
+              </a:rPr>
+              <a:t>)</a:t>
+            </a:r>
+          </a:p>
+        </p:txBody>
+      </p:sp>
+      <p:sp>
+        <p:nvSpPr>
+          <p:cNvPr id="6" name="TextBox 5"/>
+          <p:cNvSpPr txBox="1"/>
+          <p:nvPr/>
+        </p:nvSpPr>
+        <p:spPr>
+          <a:xfrm>
+            <a:off x="685800" y="1005840"/>
+            <a:ext cx="8686800" cy="225703"/>
+          </a:xfrm>
+          <a:prstGeom prst="rect">
+            <a:avLst/>
+          </a:prstGeom>
+          <a:noFill/>
+        </p:spPr>
+        <p:txBody>
+          <a:bodyPr wrap="square" lIns="25400" tIns="12700" rIns="25400" bIns="12700" anchor="t">
+            <a:spAutoFit/>
+          </a:bodyPr>
+          <a:lstStyle/>
+          <a:p>
+            <a:pPr algn="l">
+              <a:lnSpc>
+                <a:spcPct val="100000"/>
+              </a:lnSpc>
+            </a:pPr>
+            <a:r>
+              <a:rPr sz="1300" b="1" dirty="0" err="1">
+                <a:solidFill>
+                  <a:srgbClr val="3A3A3A"/>
+                </a:solidFill>
+                <a:latin typeface="맑은 고딕"/>
+              </a:rPr>
+              <a:t>보합·상승</a:t>
+            </a:r>
+            <a:r>
+              <a:rPr sz="1300" b="1" dirty="0">
+                <a:solidFill>
+                  <a:srgbClr val="3A3A3A"/>
+                </a:solidFill>
+                <a:latin typeface="맑은 고딕"/>
+              </a:rPr>
+              <a:t> </a:t>
+            </a:r>
+            <a:r>
+              <a:rPr sz="1300" b="1" dirty="0" err="1">
+                <a:solidFill>
+                  <a:srgbClr val="3A3A3A"/>
+                </a:solidFill>
+                <a:latin typeface="맑은 고딕"/>
+              </a:rPr>
+              <a:t>구간에서</a:t>
+            </a:r>
+            <a:r>
+              <a:rPr sz="1300" b="1" dirty="0">
+                <a:solidFill>
+                  <a:srgbClr val="3A3A3A"/>
+                </a:solidFill>
+                <a:latin typeface="맑은 고딕"/>
+              </a:rPr>
+              <a:t> </a:t>
+            </a:r>
+            <a:r>
+              <a:rPr sz="1300" b="1" dirty="0" err="1">
+                <a:solidFill>
+                  <a:srgbClr val="3A3A3A"/>
+                </a:solidFill>
+                <a:latin typeface="맑은 고딕"/>
+              </a:rPr>
+              <a:t>변동성</a:t>
+            </a:r>
+            <a:r>
+              <a:rPr sz="1300" b="1" dirty="0">
+                <a:solidFill>
+                  <a:srgbClr val="3A3A3A"/>
+                </a:solidFill>
+                <a:latin typeface="맑은 고딕"/>
+              </a:rPr>
+              <a:t> </a:t>
+            </a:r>
+            <a:r>
+              <a:rPr sz="1300" b="1" dirty="0" err="1">
+                <a:solidFill>
+                  <a:srgbClr val="3A3A3A"/>
+                </a:solidFill>
+                <a:latin typeface="맑은 고딕"/>
+              </a:rPr>
+              <a:t>매매</a:t>
+            </a:r>
+            <a:r>
+              <a:rPr sz="1300" b="1" dirty="0">
+                <a:solidFill>
+                  <a:srgbClr val="3A3A3A"/>
+                </a:solidFill>
+                <a:latin typeface="맑은 고딕"/>
+              </a:rPr>
+              <a:t> </a:t>
+            </a:r>
+            <a:r>
+              <a:rPr sz="1300" b="1" dirty="0" err="1">
+                <a:solidFill>
+                  <a:srgbClr val="3A3A3A"/>
+                </a:solidFill>
+                <a:latin typeface="맑은 고딕"/>
+              </a:rPr>
+              <a:t>수익을</a:t>
+            </a:r>
+            <a:r>
+              <a:rPr sz="1300" b="1" dirty="0">
+                <a:solidFill>
+                  <a:srgbClr val="3A3A3A"/>
+                </a:solidFill>
+                <a:latin typeface="맑은 고딕"/>
+              </a:rPr>
+              <a:t> </a:t>
+            </a:r>
+            <a:r>
+              <a:rPr sz="1300" b="1" dirty="0" err="1">
+                <a:solidFill>
+                  <a:srgbClr val="3A3A3A"/>
+                </a:solidFill>
+                <a:latin typeface="맑은 고딕"/>
+              </a:rPr>
+              <a:t>안정적으로</a:t>
+            </a:r>
+            <a:r>
+              <a:rPr sz="1300" b="1" dirty="0">
+                <a:solidFill>
+                  <a:srgbClr val="3A3A3A"/>
+                </a:solidFill>
+                <a:latin typeface="맑은 고딕"/>
+              </a:rPr>
+              <a:t> </a:t>
+            </a:r>
+            <a:r>
+              <a:rPr sz="1300" b="1" dirty="0" err="1">
+                <a:solidFill>
+                  <a:srgbClr val="3A3A3A"/>
+                </a:solidFill>
+                <a:latin typeface="맑은 고딕"/>
+              </a:rPr>
+              <a:t>확보</a:t>
+            </a:r>
+            <a:r>
+              <a:rPr sz="1300" b="1" dirty="0">
+                <a:solidFill>
+                  <a:srgbClr val="3A3A3A"/>
+                </a:solidFill>
+                <a:latin typeface="맑은 고딕"/>
+              </a:rPr>
+              <a:t>(</a:t>
+            </a:r>
+            <a:r>
+              <a:rPr sz="1300" b="1" dirty="0" err="1">
+                <a:solidFill>
+                  <a:srgbClr val="3A3A3A"/>
+                </a:solidFill>
+                <a:latin typeface="맑은 고딕"/>
+              </a:rPr>
+              <a:t>상단</a:t>
+            </a:r>
+            <a:r>
+              <a:rPr sz="1300" b="1" dirty="0">
+                <a:solidFill>
+                  <a:srgbClr val="3A3A3A"/>
+                </a:solidFill>
+                <a:latin typeface="맑은 고딕"/>
+              </a:rPr>
+              <a:t> </a:t>
+            </a:r>
+            <a:r>
+              <a:rPr sz="1300" b="1" dirty="0" err="1">
+                <a:solidFill>
+                  <a:srgbClr val="3A3A3A"/>
+                </a:solidFill>
+                <a:latin typeface="맑은 고딕"/>
+              </a:rPr>
+              <a:t>고정</a:t>
+            </a:r>
+            <a:r>
+              <a:rPr sz="1300" b="1" dirty="0">
+                <a:solidFill>
+                  <a:srgbClr val="3A3A3A"/>
+                </a:solidFill>
+                <a:latin typeface="맑은 고딕"/>
+              </a:rPr>
+              <a:t>), </a:t>
+            </a:r>
+            <a:r>
+              <a:rPr lang="ko-KR" altLang="en-US" sz="1300" b="1" dirty="0">
+                <a:solidFill>
+                  <a:srgbClr val="3A3A3A"/>
+                </a:solidFill>
+                <a:latin typeface="맑은 고딕"/>
+              </a:rPr>
+              <a:t>단</a:t>
+            </a:r>
+            <a:r>
+              <a:rPr lang="en-US" altLang="ko-KR" sz="1300" b="1" dirty="0">
+                <a:solidFill>
+                  <a:srgbClr val="3A3A3A"/>
+                </a:solidFill>
+                <a:latin typeface="맑은 고딕"/>
+              </a:rPr>
+              <a:t>,</a:t>
+            </a:r>
+            <a:r>
+              <a:rPr lang="ko-KR" altLang="en-US" sz="1300" b="1" dirty="0">
+                <a:solidFill>
+                  <a:srgbClr val="3A3A3A"/>
+                </a:solidFill>
+                <a:latin typeface="맑은 고딕"/>
+              </a:rPr>
+              <a:t> 상승이 제한됩니다</a:t>
+            </a:r>
+            <a:r>
+              <a:rPr lang="en-US" altLang="ko-KR" sz="1300" b="1" dirty="0">
+                <a:solidFill>
+                  <a:srgbClr val="3A3A3A"/>
+                </a:solidFill>
+                <a:latin typeface="맑은 고딕"/>
+              </a:rPr>
+              <a:t>.</a:t>
+            </a:r>
+            <a:endParaRPr sz="1300" b="1" dirty="0">
+              <a:solidFill>
+                <a:srgbClr val="3A3A3A"/>
+              </a:solidFill>
+              <a:latin typeface="맑은 고딕"/>
+            </a:endParaRPr>
+          </a:p>
+        </p:txBody>
+      </p:sp>
+      <p:sp>
+        <p:nvSpPr>
+          <p:cNvPr id="8" name="TextBox 7"/>
+          <p:cNvSpPr txBox="1"/>
+          <p:nvPr/>
+        </p:nvSpPr>
+        <p:spPr>
+          <a:xfrm>
+            <a:off x="1280160" y="5556144"/>
+            <a:ext cx="8595360" cy="365760"/>
+          </a:xfrm>
+          <a:prstGeom prst="rect">
+            <a:avLst/>
+          </a:prstGeom>
+          <a:noFill/>
+        </p:spPr>
+        <p:txBody>
+          <a:bodyPr wrap="square" lIns="25400" tIns="12700" rIns="25400" bIns="12700" anchor="t">
+            <a:spAutoFit/>
+          </a:bodyPr>
+          <a:lstStyle/>
+          <a:p>
+            <a:pPr algn="l">
+              <a:lnSpc>
+                <a:spcPct val="100000"/>
+              </a:lnSpc>
+            </a:pPr>
+            <a:r>
+              <a:rPr sz="900" b="0">
+                <a:solidFill>
+                  <a:srgbClr val="84888B"/>
+                </a:solidFill>
+                <a:latin typeface="맑은 고딕"/>
+              </a:rPr>
+              <a:t>변동성 60% 가정 · 점=시뮬 1회 · </a:t>
+            </a:r>
+            <a:r>
+              <a:rPr sz="900" b="1">
+                <a:solidFill>
+                  <a:srgbClr val="F58220"/>
+                </a:solidFill>
+                <a:latin typeface="맑은 고딕"/>
+              </a:rPr>
+              <a:t>노란선=구간 평균</a:t>
+            </a:r>
+            <a:r>
+              <a:rPr sz="900" b="0">
+                <a:solidFill>
+                  <a:srgbClr val="84888B"/>
+                </a:solidFill>
+                <a:latin typeface="맑은 고딕"/>
+              </a:rPr>
+              <a:t> · 데이터: 자체 시뮬레이션(거래비용·운용오차 포함)</a:t>
+            </a:r>
+          </a:p>
+        </p:txBody>
+      </p:sp>
+      <p:sp>
+        <p:nvSpPr>
+          <p:cNvPr id="9" name="TextBox 8"/>
+          <p:cNvSpPr txBox="1"/>
+          <p:nvPr/>
+        </p:nvSpPr>
+        <p:spPr>
+          <a:xfrm>
+            <a:off x="457200" y="6510528"/>
+            <a:ext cx="7863840" cy="292608"/>
+          </a:xfrm>
+          <a:prstGeom prst="rect">
+            <a:avLst/>
+          </a:prstGeom>
+          <a:noFill/>
+        </p:spPr>
+        <p:txBody>
+          <a:bodyPr wrap="square" lIns="25400" tIns="12700" rIns="25400" bIns="12700" anchor="t">
+            <a:spAutoFit/>
+          </a:bodyPr>
+          <a:lstStyle/>
+          <a:p>
+            <a:pPr algn="l">
+              <a:lnSpc>
+                <a:spcPct val="100000"/>
+              </a:lnSpc>
+            </a:pPr>
+            <a:r>
+              <a:rPr sz="700" b="0" dirty="0">
+                <a:solidFill>
+                  <a:srgbClr val="84888B"/>
+                </a:solidFill>
+                <a:latin typeface="맑은 고딕"/>
+              </a:rPr>
+              <a:t>※ </a:t>
+            </a:r>
+            <a:r>
+              <a:rPr sz="700" b="0" dirty="0" err="1">
+                <a:solidFill>
+                  <a:srgbClr val="84888B"/>
+                </a:solidFill>
+                <a:latin typeface="맑은 고딕"/>
+              </a:rPr>
+              <a:t>상기</a:t>
+            </a:r>
+            <a:r>
+              <a:rPr sz="700" b="0" dirty="0">
+                <a:solidFill>
+                  <a:srgbClr val="84888B"/>
+                </a:solidFill>
+                <a:latin typeface="맑은 고딕"/>
+              </a:rPr>
+              <a:t> </a:t>
+            </a:r>
+            <a:r>
+              <a:rPr sz="700" b="0" dirty="0" err="1">
+                <a:solidFill>
+                  <a:srgbClr val="84888B"/>
+                </a:solidFill>
+                <a:latin typeface="맑은 고딕"/>
+              </a:rPr>
+              <a:t>자료는</a:t>
+            </a:r>
+            <a:r>
+              <a:rPr sz="700" b="0" dirty="0">
+                <a:solidFill>
+                  <a:srgbClr val="84888B"/>
+                </a:solidFill>
+                <a:latin typeface="맑은 고딕"/>
+              </a:rPr>
+              <a:t> </a:t>
+            </a:r>
+            <a:r>
+              <a:rPr sz="700" b="0" dirty="0" err="1">
+                <a:solidFill>
+                  <a:srgbClr val="84888B"/>
+                </a:solidFill>
+                <a:latin typeface="맑은 고딕"/>
+              </a:rPr>
+              <a:t>이해를</a:t>
+            </a:r>
+            <a:r>
+              <a:rPr sz="700" b="0" dirty="0">
+                <a:solidFill>
+                  <a:srgbClr val="84888B"/>
+                </a:solidFill>
+                <a:latin typeface="맑은 고딕"/>
+              </a:rPr>
+              <a:t> </a:t>
+            </a:r>
+            <a:r>
+              <a:rPr sz="700" b="0" dirty="0" err="1">
+                <a:solidFill>
+                  <a:srgbClr val="84888B"/>
+                </a:solidFill>
+                <a:latin typeface="맑은 고딕"/>
+              </a:rPr>
+              <a:t>돕기</a:t>
+            </a:r>
+            <a:r>
+              <a:rPr sz="700" b="0" dirty="0">
+                <a:solidFill>
+                  <a:srgbClr val="84888B"/>
+                </a:solidFill>
+                <a:latin typeface="맑은 고딕"/>
+              </a:rPr>
+              <a:t> </a:t>
+            </a:r>
+            <a:r>
+              <a:rPr sz="700" b="0" dirty="0" err="1">
+                <a:solidFill>
+                  <a:srgbClr val="84888B"/>
+                </a:solidFill>
+                <a:latin typeface="맑은 고딕"/>
+              </a:rPr>
+              <a:t>위한</a:t>
+            </a:r>
+            <a:r>
+              <a:rPr sz="700" b="0" dirty="0">
+                <a:solidFill>
+                  <a:srgbClr val="84888B"/>
+                </a:solidFill>
+                <a:latin typeface="맑은 고딕"/>
+              </a:rPr>
+              <a:t> </a:t>
+            </a:r>
+            <a:r>
+              <a:rPr sz="700" b="0" dirty="0" err="1">
+                <a:solidFill>
+                  <a:srgbClr val="84888B"/>
+                </a:solidFill>
+                <a:latin typeface="맑은 고딕"/>
+              </a:rPr>
+              <a:t>예시이며</a:t>
+            </a:r>
+            <a:r>
+              <a:rPr sz="700" b="0" dirty="0">
+                <a:solidFill>
+                  <a:srgbClr val="84888B"/>
+                </a:solidFill>
+                <a:latin typeface="맑은 고딕"/>
+              </a:rPr>
+              <a:t> </a:t>
+            </a:r>
+            <a:r>
+              <a:rPr sz="700" b="0" dirty="0" err="1">
+                <a:solidFill>
+                  <a:srgbClr val="84888B"/>
+                </a:solidFill>
+                <a:latin typeface="맑은 고딕"/>
+              </a:rPr>
+              <a:t>실제</a:t>
+            </a:r>
+            <a:r>
+              <a:rPr sz="700" b="0" dirty="0">
+                <a:solidFill>
+                  <a:srgbClr val="84888B"/>
+                </a:solidFill>
+                <a:latin typeface="맑은 고딕"/>
+              </a:rPr>
+              <a:t> </a:t>
+            </a:r>
+            <a:r>
+              <a:rPr sz="700" b="0" dirty="0" err="1">
+                <a:solidFill>
+                  <a:srgbClr val="84888B"/>
+                </a:solidFill>
+                <a:latin typeface="맑은 고딕"/>
+              </a:rPr>
+              <a:t>투자내용을</a:t>
+            </a:r>
+            <a:r>
+              <a:rPr sz="700" b="0" dirty="0">
+                <a:solidFill>
+                  <a:srgbClr val="84888B"/>
+                </a:solidFill>
+                <a:latin typeface="맑은 고딕"/>
+              </a:rPr>
+              <a:t> </a:t>
+            </a:r>
+            <a:r>
+              <a:rPr sz="700" b="0" dirty="0" err="1">
+                <a:solidFill>
+                  <a:srgbClr val="84888B"/>
+                </a:solidFill>
+                <a:latin typeface="맑은 고딕"/>
+              </a:rPr>
+              <a:t>의미하지</a:t>
+            </a:r>
+            <a:r>
+              <a:rPr sz="700" b="0" dirty="0">
+                <a:solidFill>
+                  <a:srgbClr val="84888B"/>
+                </a:solidFill>
+                <a:latin typeface="맑은 고딕"/>
+              </a:rPr>
+              <a:t> </a:t>
+            </a:r>
+            <a:r>
+              <a:rPr sz="700" b="0" dirty="0" err="1">
+                <a:solidFill>
+                  <a:srgbClr val="84888B"/>
+                </a:solidFill>
+                <a:latin typeface="맑은 고딕"/>
+              </a:rPr>
+              <a:t>않습니다</a:t>
+            </a:r>
+            <a:r>
+              <a:rPr sz="700" b="0" dirty="0">
+                <a:solidFill>
+                  <a:srgbClr val="84888B"/>
+                </a:solidFill>
+                <a:latin typeface="맑은 고딕"/>
+              </a:rPr>
+              <a:t>. </a:t>
+            </a:r>
+            <a:r>
+              <a:rPr sz="700" b="0" dirty="0" err="1">
+                <a:solidFill>
+                  <a:srgbClr val="84888B"/>
+                </a:solidFill>
+                <a:latin typeface="맑은 고딕"/>
+              </a:rPr>
+              <a:t>시뮬레이션은</a:t>
+            </a:r>
+            <a:r>
+              <a:rPr sz="700" b="0" dirty="0">
+                <a:solidFill>
+                  <a:srgbClr val="84888B"/>
+                </a:solidFill>
+                <a:latin typeface="맑은 고딕"/>
+              </a:rPr>
+              <a:t> </a:t>
+            </a:r>
+            <a:r>
+              <a:rPr sz="700" b="0" dirty="0" err="1">
+                <a:solidFill>
+                  <a:srgbClr val="84888B"/>
+                </a:solidFill>
+                <a:latin typeface="맑은 고딕"/>
+              </a:rPr>
+              <a:t>가정에</a:t>
+            </a:r>
+            <a:r>
+              <a:rPr sz="700" b="0" dirty="0">
+                <a:solidFill>
+                  <a:srgbClr val="84888B"/>
+                </a:solidFill>
+                <a:latin typeface="맑은 고딕"/>
+              </a:rPr>
+              <a:t> </a:t>
+            </a:r>
+            <a:r>
+              <a:rPr sz="700" b="0" dirty="0" err="1">
+                <a:solidFill>
+                  <a:srgbClr val="84888B"/>
+                </a:solidFill>
+                <a:latin typeface="맑은 고딕"/>
+              </a:rPr>
+              <a:t>따른</a:t>
+            </a:r>
+            <a:r>
+              <a:rPr sz="700" b="0" dirty="0">
+                <a:solidFill>
+                  <a:srgbClr val="84888B"/>
+                </a:solidFill>
+                <a:latin typeface="맑은 고딕"/>
+              </a:rPr>
+              <a:t> </a:t>
+            </a:r>
+            <a:r>
+              <a:rPr sz="700" b="0" dirty="0" err="1">
+                <a:solidFill>
+                  <a:srgbClr val="84888B"/>
+                </a:solidFill>
+                <a:latin typeface="맑은 고딕"/>
+              </a:rPr>
+              <a:t>것으로</a:t>
+            </a:r>
+            <a:r>
+              <a:rPr sz="700" b="0" dirty="0">
+                <a:solidFill>
+                  <a:srgbClr val="84888B"/>
+                </a:solidFill>
+                <a:latin typeface="맑은 고딕"/>
+              </a:rPr>
+              <a:t> </a:t>
+            </a:r>
+            <a:r>
+              <a:rPr sz="700" b="0" dirty="0" err="1">
+                <a:solidFill>
+                  <a:srgbClr val="84888B"/>
+                </a:solidFill>
+                <a:latin typeface="맑은 고딕"/>
+              </a:rPr>
+              <a:t>실제와</a:t>
+            </a:r>
+            <a:r>
+              <a:rPr sz="700" b="0" dirty="0">
+                <a:solidFill>
+                  <a:srgbClr val="84888B"/>
+                </a:solidFill>
+                <a:latin typeface="맑은 고딕"/>
+              </a:rPr>
+              <a:t> </a:t>
+            </a:r>
+            <a:r>
+              <a:rPr sz="700" b="0" dirty="0" err="1">
+                <a:solidFill>
+                  <a:srgbClr val="84888B"/>
+                </a:solidFill>
+                <a:latin typeface="맑은 고딕"/>
+              </a:rPr>
+              <a:t>다를</a:t>
+            </a:r>
+            <a:r>
+              <a:rPr sz="700" b="0" dirty="0">
+                <a:solidFill>
+                  <a:srgbClr val="84888B"/>
+                </a:solidFill>
+                <a:latin typeface="맑은 고딕"/>
+              </a:rPr>
+              <a:t> </a:t>
+            </a:r>
+            <a:r>
+              <a:rPr sz="700" b="0" dirty="0" err="1">
+                <a:solidFill>
+                  <a:srgbClr val="84888B"/>
+                </a:solidFill>
+                <a:latin typeface="맑은 고딕"/>
+              </a:rPr>
+              <a:t>수</a:t>
+            </a:r>
+            <a:r>
+              <a:rPr sz="700" b="0" dirty="0">
+                <a:solidFill>
+                  <a:srgbClr val="84888B"/>
+                </a:solidFill>
+                <a:latin typeface="맑은 고딕"/>
+              </a:rPr>
+              <a:t> </a:t>
+            </a:r>
+            <a:r>
+              <a:rPr sz="700" b="0" dirty="0" err="1">
+                <a:solidFill>
+                  <a:srgbClr val="84888B"/>
+                </a:solidFill>
+                <a:latin typeface="맑은 고딕"/>
+              </a:rPr>
+              <a:t>있습니다</a:t>
+            </a:r>
+            <a:r>
+              <a:rPr sz="700" b="0" dirty="0">
+                <a:solidFill>
+                  <a:srgbClr val="84888B"/>
+                </a:solidFill>
+                <a:latin typeface="맑은 고딕"/>
+              </a:rPr>
+              <a:t>.</a:t>
+            </a:r>
+          </a:p>
+        </p:txBody>
+      </p:sp>
+      <p:sp>
+        <p:nvSpPr>
+          <p:cNvPr id="10" name="TextBox 9"/>
+          <p:cNvSpPr txBox="1"/>
+          <p:nvPr/>
+        </p:nvSpPr>
+        <p:spPr>
+          <a:xfrm>
+            <a:off x="9052560" y="6510528"/>
+            <a:ext cx="548640" cy="292608"/>
+          </a:xfrm>
+          <a:prstGeom prst="rect">
+            <a:avLst/>
+          </a:prstGeom>
+          <a:noFill/>
+        </p:spPr>
+        <p:txBody>
+          <a:bodyPr wrap="square" lIns="25400" tIns="12700" rIns="25400" bIns="12700" anchor="t">
+            <a:spAutoFit/>
+          </a:bodyPr>
+          <a:lstStyle/>
+          <a:p>
+            <a:pPr algn="r">
+              <a:lnSpc>
+                <a:spcPct val="100000"/>
+              </a:lnSpc>
+            </a:pPr>
+            <a:r>
+              <a:rPr sz="900" b="1">
+                <a:solidFill>
+                  <a:srgbClr val="84888B"/>
+                </a:solidFill>
+                <a:latin typeface="맑은 고딕"/>
+              </a:rPr>
+              <a:t>12</a:t>
+            </a:r>
+          </a:p>
+        </p:txBody>
+      </p:sp>
+      <p:pic>
+        <p:nvPicPr>
+          <p:cNvPr id="11" name="Picture 10" descr="scat_top2_stable.png"/>
+          <p:cNvPicPr>
+            <a:picLocks noChangeAspect="1"/>
+          </p:cNvPicPr>
+          <p:nvPr/>
+        </p:nvPicPr>
+        <p:blipFill>
+          <a:blip r:embed="rId3"/>
+          <a:stretch>
+            <a:fillRect/>
+          </a:stretch>
+        </p:blipFill>
+        <p:spPr>
+          <a:xfrm>
+            <a:off x="1417320" y="1463040"/>
+            <a:ext cx="7040880" cy="4044487"/>
+          </a:xfrm>
+          <a:prstGeom prst="rect">
+            <a:avLst/>
+          </a:prstGeom>
+        </p:spPr>
+      </p:pic>
+    </p:spTree>
+  </p:cSld>
+  <p:clrMapOvr>
+    <a:masterClrMapping/>
+  </p:clrMapOvr>
+</p:sld>
+</file>
+
+<file path=ppt/slides/slide14.xml><?xml version="1.0" encoding="utf-8"?>
+<p:sld xmlns:a="http://schemas.openxmlformats.org/drawingml/2006/main" xmlns:r="http://schemas.openxmlformats.org/officeDocument/2006/relationships" xmlns:p="http://schemas.openxmlformats.org/presentationml/2006/main">
+  <p:cSld>
+    <p:spTree>
+      <p:nvGrpSpPr>
+        <p:cNvPr id="1" name=""/>
+        <p:cNvGrpSpPr/>
+        <p:nvPr/>
+      </p:nvGrpSpPr>
+      <p:grpSpPr>
+        <a:xfrm>
+          <a:off x="0" y="0"/>
+          <a:ext cx="0" cy="0"/>
+          <a:chOff x="0" y="0"/>
+          <a:chExt cx="0" cy="0"/>
+        </a:xfrm>
+      </p:grpSpPr>
+      <p:sp>
+        <p:nvSpPr>
+          <p:cNvPr id="2" name="Rectangle 1"/>
+          <p:cNvSpPr/>
+          <p:nvPr/>
+        </p:nvSpPr>
+        <p:spPr>
+          <a:xfrm>
+            <a:off x="0" y="0"/>
+            <a:ext cx="9875520" cy="6858000"/>
+          </a:xfrm>
+          <a:prstGeom prst="rect">
+            <a:avLst/>
+          </a:prstGeom>
+          <a:solidFill>
+            <a:srgbClr val="FFFFFF"/>
+          </a:solidFill>
+          <a:ln>
+            <a:noFill/>
+          </a:ln>
+          <a:effectLst/>
+        </p:spPr>
+        <p:style>
+          <a:lnRef idx="1">
+            <a:schemeClr val="accent1"/>
+          </a:lnRef>
+          <a:fillRef idx="3">
+            <a:schemeClr val="accent1"/>
+          </a:fillRef>
+          <a:effectRef idx="2">
+            <a:schemeClr val="accent1"/>
+          </a:effectRef>
+          <a:fontRef idx="minor">
+            <a:schemeClr val="lt1"/>
+          </a:fontRef>
+        </p:style>
+        <p:txBody>
+          <a:bodyPr rtlCol="0" anchor="ctr"/>
+          <a:lstStyle/>
+          <a:p>
+            <a:pPr algn="ctr"/>
+            <a:endParaRPr/>
+          </a:p>
+        </p:txBody>
+      </p:sp>
+      <p:sp>
+        <p:nvSpPr>
+          <p:cNvPr id="3" name="Rectangle 2"/>
+          <p:cNvSpPr/>
+          <p:nvPr/>
+        </p:nvSpPr>
+        <p:spPr>
+          <a:xfrm>
+            <a:off x="457200" y="502920"/>
+            <a:ext cx="128016" cy="566928"/>
+          </a:xfrm>
+          <a:prstGeom prst="rect">
+            <a:avLst/>
+          </a:prstGeom>
+          <a:solidFill>
+            <a:srgbClr val="F58220"/>
+          </a:solidFill>
+          <a:ln>
+            <a:noFill/>
+          </a:ln>
+          <a:effectLst/>
+        </p:spPr>
+        <p:style>
+          <a:lnRef idx="1">
+            <a:schemeClr val="accent1"/>
+          </a:lnRef>
+          <a:fillRef idx="3">
+            <a:schemeClr val="accent1"/>
+          </a:fillRef>
+          <a:effectRef idx="2">
+            <a:schemeClr val="accent1"/>
+          </a:effectRef>
+          <a:fontRef idx="minor">
+            <a:schemeClr val="lt1"/>
+          </a:fontRef>
+        </p:style>
+        <p:txBody>
+          <a:bodyPr rtlCol="0" anchor="ctr"/>
+          <a:lstStyle/>
+          <a:p>
+            <a:pPr algn="ctr"/>
+            <a:endParaRPr/>
+          </a:p>
+        </p:txBody>
+      </p:sp>
+      <p:sp>
+        <p:nvSpPr>
+          <p:cNvPr id="4" name="TextBox 3"/>
+          <p:cNvSpPr txBox="1"/>
+          <p:nvPr/>
+        </p:nvSpPr>
+        <p:spPr>
+          <a:xfrm>
+            <a:off x="685800" y="457200"/>
+            <a:ext cx="8229600" cy="320040"/>
+          </a:xfrm>
+          <a:prstGeom prst="rect">
+            <a:avLst/>
+          </a:prstGeom>
+          <a:noFill/>
+        </p:spPr>
+        <p:txBody>
+          <a:bodyPr wrap="square" lIns="25400" tIns="12700" rIns="25400" bIns="12700" anchor="t">
+            <a:spAutoFit/>
+          </a:bodyPr>
+          <a:lstStyle/>
+          <a:p>
+            <a:pPr algn="l">
+              <a:lnSpc>
+                <a:spcPct val="100000"/>
+              </a:lnSpc>
+            </a:pPr>
+            <a:r>
+              <a:rPr sz="1200" b="1">
+                <a:solidFill>
+                  <a:srgbClr val="F58220"/>
+                </a:solidFill>
+                <a:latin typeface="맑은 고딕"/>
+              </a:rPr>
+              <a:t>11  RISK</a:t>
+            </a:r>
+          </a:p>
+        </p:txBody>
+      </p:sp>
+      <p:sp>
+        <p:nvSpPr>
+          <p:cNvPr id="5" name="TextBox 4"/>
+          <p:cNvSpPr txBox="1"/>
+          <p:nvPr/>
+        </p:nvSpPr>
+        <p:spPr>
+          <a:xfrm>
+            <a:off x="685800" y="731520"/>
+            <a:ext cx="8686800" cy="502920"/>
+          </a:xfrm>
+          <a:prstGeom prst="rect">
+            <a:avLst/>
+          </a:prstGeom>
+          <a:noFill/>
+        </p:spPr>
+        <p:txBody>
+          <a:bodyPr wrap="square" lIns="25400" tIns="12700" rIns="25400" bIns="12700" anchor="t">
+            <a:spAutoFit/>
+          </a:bodyPr>
+          <a:lstStyle/>
+          <a:p>
+            <a:pPr algn="l">
+              <a:lnSpc>
+                <a:spcPct val="100000"/>
+              </a:lnSpc>
+            </a:pPr>
+            <a:r>
+              <a:rPr sz="2300" b="1">
+                <a:solidFill>
+                  <a:srgbClr val="043B72"/>
+                </a:solidFill>
+                <a:latin typeface="맑은 고딕"/>
+              </a:rPr>
+              <a:t>리스크 및 유의사항</a:t>
+            </a:r>
+          </a:p>
+        </p:txBody>
+      </p:sp>
+      <p:sp>
+        <p:nvSpPr>
+          <p:cNvPr id="6" name="TextBox 5"/>
+          <p:cNvSpPr txBox="1"/>
+          <p:nvPr/>
+        </p:nvSpPr>
+        <p:spPr>
+          <a:xfrm>
+            <a:off x="685800" y="1463040"/>
+            <a:ext cx="8503920" cy="4572000"/>
+          </a:xfrm>
+          <a:prstGeom prst="rect">
+            <a:avLst/>
+          </a:prstGeom>
+          <a:noFill/>
+        </p:spPr>
+        <p:txBody>
+          <a:bodyPr wrap="square">
+            <a:spAutoFit/>
+          </a:bodyPr>
+          <a:lstStyle/>
+          <a:p>
+            <a:pPr>
+              <a:lnSpc>
+                <a:spcPct val="130000"/>
+              </a:lnSpc>
+              <a:spcAft>
+                <a:spcPts val="300"/>
+              </a:spcAft>
+            </a:pPr>
+            <a:r>
+              <a:rPr sz="1250" b="1">
+                <a:solidFill>
+                  <a:srgbClr val="043B72"/>
+                </a:solidFill>
+                <a:latin typeface="맑은 고딕"/>
+              </a:rPr>
+              <a:t>■ 하방 손실 위험 (최대 위험요소): 전략 특성상 기초자산 급락 시 손실이 누적되며 원금의 상당 부분 손실이 가능합니다.</a:t>
+            </a:r>
+          </a:p>
+          <a:p>
+            <a:pPr>
+              <a:lnSpc>
+                <a:spcPct val="130000"/>
+              </a:lnSpc>
+              <a:spcAft>
+                <a:spcPts val="300"/>
+              </a:spcAft>
+            </a:pPr>
+            <a:r>
+              <a:rPr sz="1250" b="0">
+                <a:solidFill>
+                  <a:srgbClr val="3A3A3A"/>
+                </a:solidFill>
+                <a:latin typeface="맑은 고딕"/>
+              </a:rPr>
+              <a:t>■ 운용오차: 이산 리밸런싱·급변동·갭 하락 시 이론 수익과 실현손익이 크게 벌어질 수 있습니다(시뮬레이션상 이탈 사례 확인).</a:t>
+            </a:r>
+          </a:p>
+          <a:p>
+            <a:pPr>
+              <a:lnSpc>
+                <a:spcPct val="130000"/>
+              </a:lnSpc>
+              <a:spcAft>
+                <a:spcPts val="300"/>
+              </a:spcAft>
+            </a:pPr>
+            <a:r>
+              <a:rPr sz="1250" b="0">
+                <a:solidFill>
+                  <a:srgbClr val="3A3A3A"/>
+                </a:solidFill>
+                <a:latin typeface="맑은 고딕"/>
+              </a:rPr>
+              <a:t>■ 편입비 상한(180%) 효과: 급변동 구간에서 편입비 조절이 제한되어 추가 오차가 발생할 수 있습니다.</a:t>
+            </a:r>
+          </a:p>
+          <a:p>
+            <a:pPr>
+              <a:lnSpc>
+                <a:spcPct val="130000"/>
+              </a:lnSpc>
+              <a:spcAft>
+                <a:spcPts val="300"/>
+              </a:spcAft>
+            </a:pPr>
+            <a:r>
+              <a:rPr sz="1250" b="0">
+                <a:solidFill>
+                  <a:srgbClr val="3A3A3A"/>
+                </a:solidFill>
+                <a:latin typeface="맑은 고딕"/>
+              </a:rPr>
+              <a:t>■ 급락 국면 위험: 급격한 하락 시 하방 완충이 제한되어 손실에 노출될 수 있습니다.</a:t>
+            </a:r>
+          </a:p>
+          <a:p>
+            <a:pPr>
+              <a:lnSpc>
+                <a:spcPct val="130000"/>
+              </a:lnSpc>
+              <a:spcAft>
+                <a:spcPts val="300"/>
+              </a:spcAft>
+            </a:pPr>
+            <a:r>
+              <a:rPr sz="1250" b="0">
+                <a:solidFill>
+                  <a:srgbClr val="3A3A3A"/>
+                </a:solidFill>
+                <a:latin typeface="맑은 고딕"/>
+              </a:rPr>
+              <a:t>■ 단일종목 집중 위험: 삼성전자·SK하이닉스 2종목에 집중되어 개별기업·반도체 사이클 리스크에 크게 노출됩니다.</a:t>
+            </a:r>
+          </a:p>
+          <a:p>
+            <a:pPr>
+              <a:lnSpc>
+                <a:spcPct val="130000"/>
+              </a:lnSpc>
+              <a:spcAft>
+                <a:spcPts val="300"/>
+              </a:spcAft>
+            </a:pPr>
+            <a:r>
+              <a:rPr sz="1250" b="0">
+                <a:solidFill>
+                  <a:srgbClr val="3A3A3A"/>
+                </a:solidFill>
+                <a:latin typeface="맑은 고딕"/>
+              </a:rPr>
+              <a:t>■ 변동성 축소 위험: 시장 변동성이 가정보다 낮아지면 변동성 매매 수익 기회가 줄어 기대수익에 미달할 수 있습니다.</a:t>
+            </a:r>
+          </a:p>
+        </p:txBody>
+      </p:sp>
+      <p:sp>
+        <p:nvSpPr>
+          <p:cNvPr id="7" name="Rectangle 6"/>
+          <p:cNvSpPr/>
+          <p:nvPr/>
+        </p:nvSpPr>
+        <p:spPr>
+          <a:xfrm>
+            <a:off x="685800" y="5074920"/>
+            <a:ext cx="8503920" cy="960120"/>
+          </a:xfrm>
+          <a:prstGeom prst="rect">
+            <a:avLst/>
+          </a:prstGeom>
+          <a:solidFill>
+            <a:srgbClr val="EEF2F7"/>
+          </a:solidFill>
+          <a:ln>
+            <a:noFill/>
+          </a:ln>
+          <a:effectLst/>
+        </p:spPr>
+        <p:style>
+          <a:lnRef idx="1">
+            <a:schemeClr val="accent1"/>
+          </a:lnRef>
+          <a:fillRef idx="3">
+            <a:schemeClr val="accent1"/>
+          </a:fillRef>
+          <a:effectRef idx="2">
+            <a:schemeClr val="accent1"/>
+          </a:effectRef>
+          <a:fontRef idx="minor">
+            <a:schemeClr val="lt1"/>
+          </a:fontRef>
+        </p:style>
+        <p:txBody>
+          <a:bodyPr rtlCol="0" anchor="ctr"/>
+          <a:lstStyle/>
+          <a:p>
+            <a:pPr algn="ctr"/>
+            <a:endParaRPr/>
+          </a:p>
+        </p:txBody>
+      </p:sp>
+      <p:sp>
+        <p:nvSpPr>
+          <p:cNvPr id="8" name="TextBox 7"/>
+          <p:cNvSpPr txBox="1"/>
+          <p:nvPr/>
+        </p:nvSpPr>
+        <p:spPr>
+          <a:xfrm>
+            <a:off x="914400" y="5193792"/>
+            <a:ext cx="8138160" cy="777240"/>
+          </a:xfrm>
+          <a:prstGeom prst="rect">
+            <a:avLst/>
+          </a:prstGeom>
+          <a:noFill/>
+        </p:spPr>
+        <p:txBody>
+          <a:bodyPr wrap="square" lIns="25400" tIns="12700" rIns="25400" bIns="12700" anchor="t">
+            <a:spAutoFit/>
+          </a:bodyPr>
+          <a:lstStyle/>
+          <a:p>
+            <a:pPr algn="l">
+              <a:lnSpc>
+                <a:spcPct val="120000"/>
+              </a:lnSpc>
+            </a:pPr>
+            <a:r>
+              <a:rPr sz="1150" b="1">
+                <a:solidFill>
+                  <a:srgbClr val="D02F00"/>
+                </a:solidFill>
+                <a:latin typeface="맑은 고딕"/>
+              </a:rPr>
+              <a:t>본 상품은 1등급(매우 높은 위험) 상품으로 원금의 전부(0~100%) 손실이 발생할 수 있으며, 그 손실은 투자자에게 귀속됩니다.</a:t>
+            </a:r>
+          </a:p>
+          <a:p>
+            <a:pPr algn="l">
+              <a:lnSpc>
+                <a:spcPct val="120000"/>
+              </a:lnSpc>
+            </a:pPr>
+            <a:r>
+              <a:rPr sz="1050" b="0">
+                <a:solidFill>
+                  <a:srgbClr val="84888B"/>
+                </a:solidFill>
+                <a:latin typeface="맑은 고딕"/>
+              </a:rPr>
+              <a:t>투자 전 상품설명서·약관·계약권유문서를 반드시 확인하시기 바랍니다.</a:t>
+            </a:r>
+          </a:p>
+        </p:txBody>
+      </p:sp>
+      <p:sp>
+        <p:nvSpPr>
+          <p:cNvPr id="9" name="TextBox 8"/>
+          <p:cNvSpPr txBox="1"/>
+          <p:nvPr/>
+        </p:nvSpPr>
+        <p:spPr>
+          <a:xfrm>
+            <a:off x="457200" y="6510528"/>
+            <a:ext cx="7863840" cy="292608"/>
+          </a:xfrm>
+          <a:prstGeom prst="rect">
+            <a:avLst/>
+          </a:prstGeom>
+          <a:noFill/>
+        </p:spPr>
+        <p:txBody>
+          <a:bodyPr wrap="square" lIns="25400" tIns="12700" rIns="25400" bIns="12700" anchor="t">
+            <a:spAutoFit/>
+          </a:bodyPr>
+          <a:lstStyle/>
+          <a:p>
+            <a:pPr algn="l">
+              <a:lnSpc>
+                <a:spcPct val="100000"/>
+              </a:lnSpc>
+            </a:pPr>
+            <a:r>
+              <a:rPr sz="700" b="0">
+                <a:solidFill>
+                  <a:srgbClr val="84888B"/>
+                </a:solidFill>
+                <a:latin typeface="맑은 고딕"/>
+              </a:rPr>
+              <a:t>※ 상기 자료는 이해를 돕기 위한 예시이며 실제 투자내용을 의미하지 않습니다. 시뮬레이션은 가정에 따른 것으로 실제와 다를 수 있습니다.</a:t>
+            </a:r>
+          </a:p>
+        </p:txBody>
+      </p:sp>
+      <p:sp>
+        <p:nvSpPr>
+          <p:cNvPr id="10" name="TextBox 9"/>
+          <p:cNvSpPr txBox="1"/>
+          <p:nvPr/>
+        </p:nvSpPr>
+        <p:spPr>
+          <a:xfrm>
+            <a:off x="9052560" y="6510528"/>
+            <a:ext cx="548640" cy="292608"/>
+          </a:xfrm>
+          <a:prstGeom prst="rect">
+            <a:avLst/>
+          </a:prstGeom>
+          <a:noFill/>
+        </p:spPr>
+        <p:txBody>
+          <a:bodyPr wrap="square" lIns="25400" tIns="12700" rIns="25400" bIns="12700" anchor="t">
+            <a:spAutoFit/>
+          </a:bodyPr>
+          <a:lstStyle/>
+          <a:p>
+            <a:pPr algn="r">
+              <a:lnSpc>
+                <a:spcPct val="100000"/>
+              </a:lnSpc>
+            </a:pPr>
+            <a:r>
+              <a:rPr sz="900" b="1">
+                <a:solidFill>
+                  <a:srgbClr val="84888B"/>
+                </a:solidFill>
+                <a:latin typeface="맑은 고딕"/>
+              </a:rPr>
+              <a:t>13</a:t>
+            </a:r>
+          </a:p>
+        </p:txBody>
+      </p:sp>
+    </p:spTree>
+  </p:cSld>
+  <p:clrMapOvr>
+    <a:masterClrMapping/>
+  </p:clrMapOvr>
+</p:sld>
+</file>
+
 <file path=ppt/slides/slide2.xml><?xml version="1.0" encoding="utf-8"?>
 <p:sld xmlns:a="http://schemas.openxmlformats.org/drawingml/2006/main" xmlns:r="http://schemas.openxmlformats.org/officeDocument/2006/relationships" xmlns:p="http://schemas.openxmlformats.org/presentationml/2006/main">
   <p:cSld>
@@ -24967,6 +24967,41 @@
           </a:prstGeom>
         </p:spPr>
       </p:pic>
+      <p:sp>
+        <p:nvSpPr>
+          <p:cNvPr id="22" name="TextBox 21"/>
+          <p:cNvSpPr txBox="1"/>
+          <p:nvPr/>
+        </p:nvSpPr>
+        <p:spPr>
+          <a:xfrm>
+            <a:off x="457200" y="5040056"/>
+            <a:ext cx="4526280" cy="274320"/>
+          </a:xfrm>
+          <a:prstGeom prst="rect">
+            <a:avLst/>
+          </a:prstGeom>
+          <a:noFill/>
+        </p:spPr>
+        <p:txBody>
+          <a:bodyPr wrap="square">
+            <a:spAutoFit/>
+          </a:bodyPr>
+          <a:lstStyle/>
+          <a:p>
+            <a:pPr algn="ctr"/>
+            <a:r>
+              <a:rPr sz="950" b="1">
+                <a:solidFill>
+                  <a:srgbClr val="043B72"/>
+                </a:solidFill>
+                <a:latin typeface="맑은 고딕"/>
+              </a:rPr>
+              <a:t>데이터 기준일: 2026-07-15 (상장 2026-05-27 ~ 2026-07-15 · ETF_데이터_pivot)</a:t>
+            </a:r>
+          </a:p>
+        </p:txBody>
+      </p:sp>
     </p:spTree>
   </p:cSld>
   <p:clrMapOvr>

--- a/제안서/변동성하베스트펀드_AITop2_v1_20260715.pptx
+++ b/제안서/변동성하베스트펀드_AITop2_v1_20260715.pptx
@@ -6,7 +6,7 @@
     <p:sldMasterId id="2147483661" r:id="rId2"/>
   </p:sldMasterIdLst>
   <p:notesMasterIdLst>
-    <p:notesMasterId r:id="rId15"/>
+    <p:notesMasterId r:id="rId17"/>
   </p:notesMasterIdLst>
   <p:sldIdLst>
     <p:sldId id="1032" r:id="rId3"/>
@@ -18,11 +18,11 @@
     <p:sldId id="261" r:id="rId9"/>
     <p:sldId id="263" r:id="rId10"/>
     <p:sldId id="264" r:id="rId11"/>
-    <p:sldId id="1044" r:id="rId21"/>
-    <p:sldId id="1045" r:id="rId20"/>
-    <p:sldId id="265" r:id="rId12"/>
-    <p:sldId id="266" r:id="rId13"/>
-    <p:sldId id="267" r:id="rId14"/>
+    <p:sldId id="1044" r:id="rId12"/>
+    <p:sldId id="1045" r:id="rId13"/>
+    <p:sldId id="265" r:id="rId14"/>
+    <p:sldId id="266" r:id="rId15"/>
+    <p:sldId id="267" r:id="rId16"/>
   </p:sldIdLst>
   <p:sldSz cx="9875838" cy="6858000"/>
   <p:notesSz cx="6858000" cy="9144000"/>
@@ -222,7 +222,7 @@
           <a:p>
             <a:fld id="{BC9EAE46-2B9A-4D90-9A88-1920B1FB6996}" type="datetimeFigureOut">
               <a:rPr lang="ko-KR" altLang="en-US" smtClean="0"/>
-              <a:t>2026. 7. 15.</a:t>
+              <a:t>2026-07-16</a:t>
             </a:fld>
             <a:endParaRPr lang="ko-KR" altLang="en-US"/>
           </a:p>
@@ -947,7 +947,7 @@
           <a:p>
             <a:fld id="{5BCAD085-E8A6-8845-BD4E-CB4CCA059FC4}" type="datetimeFigureOut">
               <a:rPr lang="en-US" smtClean="0"/>
-              <a:t>7/15/26</a:t>
+              <a:t>7/16/2026</a:t>
             </a:fld>
             <a:endParaRPr lang="en-US"/>
           </a:p>
@@ -1115,7 +1115,7 @@
           <a:p>
             <a:fld id="{5BCAD085-E8A6-8845-BD4E-CB4CCA059FC4}" type="datetimeFigureOut">
               <a:rPr lang="en-US" smtClean="0"/>
-              <a:t>7/15/26</a:t>
+              <a:t>7/16/2026</a:t>
             </a:fld>
             <a:endParaRPr lang="en-US"/>
           </a:p>
@@ -1293,7 +1293,7 @@
           <a:p>
             <a:fld id="{5BCAD085-E8A6-8845-BD4E-CB4CCA059FC4}" type="datetimeFigureOut">
               <a:rPr lang="en-US" smtClean="0"/>
-              <a:t>7/15/26</a:t>
+              <a:t>7/16/2026</a:t>
             </a:fld>
             <a:endParaRPr lang="en-US"/>
           </a:p>
@@ -6202,7 +6202,7 @@
           <a:p>
             <a:fld id="{5BCAD085-E8A6-8845-BD4E-CB4CCA059FC4}" type="datetimeFigureOut">
               <a:rPr lang="en-US" smtClean="0"/>
-              <a:t>7/15/26</a:t>
+              <a:t>7/16/2026</a:t>
             </a:fld>
             <a:endParaRPr lang="en-US"/>
           </a:p>
@@ -7280,7 +7280,7 @@
           <a:p>
             <a:fld id="{5BCAD085-E8A6-8845-BD4E-CB4CCA059FC4}" type="datetimeFigureOut">
               <a:rPr lang="en-US" smtClean="0"/>
-              <a:t>7/15/26</a:t>
+              <a:t>7/16/2026</a:t>
             </a:fld>
             <a:endParaRPr lang="en-US"/>
           </a:p>
@@ -7565,7 +7565,7 @@
           <a:p>
             <a:fld id="{5BCAD085-E8A6-8845-BD4E-CB4CCA059FC4}" type="datetimeFigureOut">
               <a:rPr lang="en-US" smtClean="0"/>
-              <a:t>7/15/26</a:t>
+              <a:t>7/16/2026</a:t>
             </a:fld>
             <a:endParaRPr lang="en-US"/>
           </a:p>
@@ -7984,7 +7984,7 @@
           <a:p>
             <a:fld id="{5BCAD085-E8A6-8845-BD4E-CB4CCA059FC4}" type="datetimeFigureOut">
               <a:rPr lang="en-US" smtClean="0"/>
-              <a:t>7/15/26</a:t>
+              <a:t>7/16/2026</a:t>
             </a:fld>
             <a:endParaRPr lang="en-US"/>
           </a:p>
@@ -8101,7 +8101,7 @@
           <a:p>
             <a:fld id="{5BCAD085-E8A6-8845-BD4E-CB4CCA059FC4}" type="datetimeFigureOut">
               <a:rPr lang="en-US" smtClean="0"/>
-              <a:t>7/15/26</a:t>
+              <a:t>7/16/2026</a:t>
             </a:fld>
             <a:endParaRPr lang="en-US"/>
           </a:p>
@@ -8196,7 +8196,7 @@
           <a:p>
             <a:fld id="{5BCAD085-E8A6-8845-BD4E-CB4CCA059FC4}" type="datetimeFigureOut">
               <a:rPr lang="en-US" smtClean="0"/>
-              <a:t>7/15/26</a:t>
+              <a:t>7/16/2026</a:t>
             </a:fld>
             <a:endParaRPr lang="en-US"/>
           </a:p>
@@ -8471,7 +8471,7 @@
           <a:p>
             <a:fld id="{5BCAD085-E8A6-8845-BD4E-CB4CCA059FC4}" type="datetimeFigureOut">
               <a:rPr lang="en-US" smtClean="0"/>
-              <a:t>7/15/26</a:t>
+              <a:t>7/16/2026</a:t>
             </a:fld>
             <a:endParaRPr lang="en-US"/>
           </a:p>
@@ -8723,7 +8723,7 @@
           <a:p>
             <a:fld id="{5BCAD085-E8A6-8845-BD4E-CB4CCA059FC4}" type="datetimeFigureOut">
               <a:rPr lang="en-US" smtClean="0"/>
-              <a:t>7/15/26</a:t>
+              <a:t>7/16/2026</a:t>
             </a:fld>
             <a:endParaRPr lang="en-US"/>
           </a:p>
@@ -8934,7 +8934,7 @@
           <a:p>
             <a:fld id="{5BCAD085-E8A6-8845-BD4E-CB4CCA059FC4}" type="datetimeFigureOut">
               <a:rPr lang="en-US" smtClean="0"/>
-              <a:t>7/15/26</a:t>
+              <a:t>7/16/2026</a:t>
             </a:fld>
             <a:endParaRPr lang="en-US"/>
           </a:p>
@@ -9846,14 +9846,6 @@
               <a:rPr lang="ko-KR" altLang="en-US" sz="2792" dirty="0"/>
               <a:t>변동성 하베스트 Top2 펀드 제안서</a:t>
             </a:r>
-            <a:r>
-              <a:rPr lang="ko-KR" altLang="en-US" sz="2792" dirty="0" err="1"/>
-              <a:t/>
-            </a:r>
-            <a:r>
-              <a:rPr lang="ko-KR" altLang="en-US" sz="2792" dirty="0"/>
-              <a:t/>
-            </a:r>
           </a:p>
         </p:txBody>
       </p:sp>
@@ -10016,7 +10008,7 @@
 </file>
 
 <file path=ppt/slides/slide10.xml><?xml version="1.0" encoding="utf-8"?>
-<p:sld xmlns:a="http://schemas.openxmlformats.org/drawingml/2006/main" xmlns:p="http://schemas.openxmlformats.org/presentationml/2006/main" xmlns:r="http://schemas.openxmlformats.org/officeDocument/2006/relationships">
+<p:sld xmlns:a="http://schemas.openxmlformats.org/drawingml/2006/main" xmlns:r="http://schemas.openxmlformats.org/officeDocument/2006/relationships" xmlns:p="http://schemas.openxmlformats.org/presentationml/2006/main">
   <p:cSld>
     <p:spTree>
       <p:nvGrpSpPr>
@@ -10024,7 +10016,14 @@
         <p:cNvGrpSpPr/>
         <p:nvPr/>
       </p:nvGrpSpPr>
-      <p:grpSpPr/>
+      <p:grpSpPr>
+        <a:xfrm>
+          <a:off x="0" y="0"/>
+          <a:ext cx="0" cy="0"/>
+          <a:chOff x="0" y="0"/>
+          <a:chExt cx="0" cy="0"/>
+        </a:xfrm>
+      </p:grpSpPr>
       <p:sp>
         <p:nvSpPr>
           <p:cNvPr id="2" name="Rectangle 1"/>
@@ -10066,6 +10065,7 @@
           <a:lstStyle/>
           <a:p>
             <a:pPr algn="ctr"/>
+            <a:endParaRPr/>
           </a:p>
         </p:txBody>
       </p:sp>
@@ -10110,6 +10110,7 @@
           <a:lstStyle/>
           <a:p>
             <a:pPr algn="ctr"/>
+            <a:endParaRPr/>
           </a:p>
         </p:txBody>
       </p:sp>
@@ -10130,7 +10131,7 @@
           <a:noFill/>
         </p:spPr>
         <p:txBody>
-          <a:bodyPr wrap="square" anchor="t" lIns="25400" rIns="25400" tIns="12700" bIns="12700">
+          <a:bodyPr wrap="square" lIns="25400" tIns="12700" rIns="25400" bIns="12700" anchor="t">
             <a:spAutoFit/>
           </a:bodyPr>
           <a:lstStyle/>
@@ -10169,7 +10170,7 @@
           <a:noFill/>
         </p:spPr>
         <p:txBody>
-          <a:bodyPr wrap="square" anchor="t" lIns="25400" rIns="25400" tIns="12700" bIns="12700">
+          <a:bodyPr wrap="square" lIns="25400" tIns="12700" rIns="25400" bIns="12700" anchor="t">
             <a:spAutoFit/>
           </a:bodyPr>
           <a:lstStyle/>
@@ -10208,7 +10209,7 @@
           <a:noFill/>
         </p:spPr>
         <p:txBody>
-          <a:bodyPr wrap="square" anchor="t" lIns="25400" rIns="25400" tIns="12700" bIns="12700">
+          <a:bodyPr wrap="square" lIns="25400" tIns="12700" rIns="25400" bIns="12700" anchor="t">
             <a:spAutoFit/>
           </a:bodyPr>
           <a:lstStyle/>
@@ -10247,7 +10248,7 @@
           <a:noFill/>
         </p:spPr>
         <p:txBody>
-          <a:bodyPr wrap="square" anchor="t" lIns="25400" rIns="25400" tIns="12700" bIns="12700">
+          <a:bodyPr wrap="square" lIns="25400" tIns="12700" rIns="25400" bIns="12700" anchor="t">
             <a:spAutoFit/>
           </a:bodyPr>
           <a:lstStyle/>
@@ -10288,11 +10289,41 @@
                 <a:tableStyleId>{5C22544A-7EE6-4342-B048-85BDC9FD1C3A}</a:tableStyleId>
               </a:tblPr>
               <a:tblGrid>
-                <a:gridCol w="1234440"/>
-                <a:gridCol w="788670"/>
-                <a:gridCol w="788670"/>
-                <a:gridCol w="788670"/>
-                <a:gridCol w="788670"/>
+                <a:gridCol w="1234440">
+                  <a:extLst>
+                    <a:ext uri="{9D8B030D-6E8A-4147-A177-3AD203B41FA5}">
+                      <a16:colId xmlns:a16="http://schemas.microsoft.com/office/drawing/2014/main" val="20000"/>
+                    </a:ext>
+                  </a:extLst>
+                </a:gridCol>
+                <a:gridCol w="788670">
+                  <a:extLst>
+                    <a:ext uri="{9D8B030D-6E8A-4147-A177-3AD203B41FA5}">
+                      <a16:colId xmlns:a16="http://schemas.microsoft.com/office/drawing/2014/main" val="20001"/>
+                    </a:ext>
+                  </a:extLst>
+                </a:gridCol>
+                <a:gridCol w="788670">
+                  <a:extLst>
+                    <a:ext uri="{9D8B030D-6E8A-4147-A177-3AD203B41FA5}">
+                      <a16:colId xmlns:a16="http://schemas.microsoft.com/office/drawing/2014/main" val="20002"/>
+                    </a:ext>
+                  </a:extLst>
+                </a:gridCol>
+                <a:gridCol w="788670">
+                  <a:extLst>
+                    <a:ext uri="{9D8B030D-6E8A-4147-A177-3AD203B41FA5}">
+                      <a16:colId xmlns:a16="http://schemas.microsoft.com/office/drawing/2014/main" val="20003"/>
+                    </a:ext>
+                  </a:extLst>
+                </a:gridCol>
+                <a:gridCol w="788670">
+                  <a:extLst>
+                    <a:ext uri="{9D8B030D-6E8A-4147-A177-3AD203B41FA5}">
+                      <a16:colId xmlns:a16="http://schemas.microsoft.com/office/drawing/2014/main" val="20004"/>
+                    </a:ext>
+                  </a:extLst>
+                </a:gridCol>
               </a:tblGrid>
               <a:tr h="329184">
                 <a:tc>
@@ -10410,6 +10441,11 @@
                     </a:solidFill>
                   </a:tcPr>
                 </a:tc>
+                <a:extLst>
+                  <a:ext uri="{0D108BD9-81ED-4DB2-BD59-A6C34878D82A}">
+                    <a16:rowId xmlns:a16="http://schemas.microsoft.com/office/drawing/2014/main" val="10000"/>
+                  </a:ext>
+                </a:extLst>
               </a:tr>
               <a:tr h="329184">
                 <a:tc>
@@ -10527,6 +10563,11 @@
                     </a:solidFill>
                   </a:tcPr>
                 </a:tc>
+                <a:extLst>
+                  <a:ext uri="{0D108BD9-81ED-4DB2-BD59-A6C34878D82A}">
+                    <a16:rowId xmlns:a16="http://schemas.microsoft.com/office/drawing/2014/main" val="10001"/>
+                  </a:ext>
+                </a:extLst>
               </a:tr>
               <a:tr h="329184">
                 <a:tc>
@@ -10644,6 +10685,11 @@
                     </a:solidFill>
                   </a:tcPr>
                 </a:tc>
+                <a:extLst>
+                  <a:ext uri="{0D108BD9-81ED-4DB2-BD59-A6C34878D82A}">
+                    <a16:rowId xmlns:a16="http://schemas.microsoft.com/office/drawing/2014/main" val="10002"/>
+                  </a:ext>
+                </a:extLst>
               </a:tr>
               <a:tr h="329184">
                 <a:tc>
@@ -10761,6 +10807,11 @@
                     </a:solidFill>
                   </a:tcPr>
                 </a:tc>
+                <a:extLst>
+                  <a:ext uri="{0D108BD9-81ED-4DB2-BD59-A6C34878D82A}">
+                    <a16:rowId xmlns:a16="http://schemas.microsoft.com/office/drawing/2014/main" val="10003"/>
+                  </a:ext>
+                </a:extLst>
               </a:tr>
               <a:tr h="329184">
                 <a:tc>
@@ -10878,6 +10929,11 @@
                     </a:solidFill>
                   </a:tcPr>
                 </a:tc>
+                <a:extLst>
+                  <a:ext uri="{0D108BD9-81ED-4DB2-BD59-A6C34878D82A}">
+                    <a16:rowId xmlns:a16="http://schemas.microsoft.com/office/drawing/2014/main" val="10004"/>
+                  </a:ext>
+                </a:extLst>
               </a:tr>
               <a:tr h="329184">
                 <a:tc>
@@ -10995,6 +11051,11 @@
                     </a:solidFill>
                   </a:tcPr>
                 </a:tc>
+                <a:extLst>
+                  <a:ext uri="{0D108BD9-81ED-4DB2-BD59-A6C34878D82A}">
+                    <a16:rowId xmlns:a16="http://schemas.microsoft.com/office/drawing/2014/main" val="10005"/>
+                  </a:ext>
+                </a:extLst>
               </a:tr>
               <a:tr h="329184">
                 <a:tc>
@@ -11112,6 +11173,11 @@
                     </a:solidFill>
                   </a:tcPr>
                 </a:tc>
+                <a:extLst>
+                  <a:ext uri="{0D108BD9-81ED-4DB2-BD59-A6C34878D82A}">
+                    <a16:rowId xmlns:a16="http://schemas.microsoft.com/office/drawing/2014/main" val="10006"/>
+                  </a:ext>
+                </a:extLst>
               </a:tr>
               <a:tr h="329184">
                 <a:tc>
@@ -11229,6 +11295,11 @@
                     </a:solidFill>
                   </a:tcPr>
                 </a:tc>
+                <a:extLst>
+                  <a:ext uri="{0D108BD9-81ED-4DB2-BD59-A6C34878D82A}">
+                    <a16:rowId xmlns:a16="http://schemas.microsoft.com/office/drawing/2014/main" val="10007"/>
+                  </a:ext>
+                </a:extLst>
               </a:tr>
               <a:tr h="329184">
                 <a:tc>
@@ -11346,6 +11417,11 @@
                     </a:solidFill>
                   </a:tcPr>
                 </a:tc>
+                <a:extLst>
+                  <a:ext uri="{0D108BD9-81ED-4DB2-BD59-A6C34878D82A}">
+                    <a16:rowId xmlns:a16="http://schemas.microsoft.com/office/drawing/2014/main" val="10008"/>
+                  </a:ext>
+                </a:extLst>
               </a:tr>
               <a:tr h="329184">
                 <a:tc>
@@ -11463,6 +11539,11 @@
                     </a:solidFill>
                   </a:tcPr>
                 </a:tc>
+                <a:extLst>
+                  <a:ext uri="{0D108BD9-81ED-4DB2-BD59-A6C34878D82A}">
+                    <a16:rowId xmlns:a16="http://schemas.microsoft.com/office/drawing/2014/main" val="10009"/>
+                  </a:ext>
+                </a:extLst>
               </a:tr>
             </a:tbl>
           </a:graphicData>
@@ -11485,7 +11566,7 @@
           <a:noFill/>
         </p:spPr>
         <p:txBody>
-          <a:bodyPr wrap="square" anchor="t" lIns="25400" rIns="25400" tIns="12700" bIns="12700">
+          <a:bodyPr wrap="square" lIns="25400" tIns="12700" rIns="25400" bIns="12700" anchor="t">
             <a:spAutoFit/>
           </a:bodyPr>
           <a:lstStyle/>
@@ -11553,11 +11634,41 @@
                 <a:tableStyleId>{5C22544A-7EE6-4342-B048-85BDC9FD1C3A}</a:tableStyleId>
               </a:tblPr>
               <a:tblGrid>
-                <a:gridCol w="1234440"/>
-                <a:gridCol w="777240"/>
-                <a:gridCol w="777240"/>
-                <a:gridCol w="777240"/>
-                <a:gridCol w="777240"/>
+                <a:gridCol w="1234440">
+                  <a:extLst>
+                    <a:ext uri="{9D8B030D-6E8A-4147-A177-3AD203B41FA5}">
+                      <a16:colId xmlns:a16="http://schemas.microsoft.com/office/drawing/2014/main" val="20000"/>
+                    </a:ext>
+                  </a:extLst>
+                </a:gridCol>
+                <a:gridCol w="777240">
+                  <a:extLst>
+                    <a:ext uri="{9D8B030D-6E8A-4147-A177-3AD203B41FA5}">
+                      <a16:colId xmlns:a16="http://schemas.microsoft.com/office/drawing/2014/main" val="20001"/>
+                    </a:ext>
+                  </a:extLst>
+                </a:gridCol>
+                <a:gridCol w="777240">
+                  <a:extLst>
+                    <a:ext uri="{9D8B030D-6E8A-4147-A177-3AD203B41FA5}">
+                      <a16:colId xmlns:a16="http://schemas.microsoft.com/office/drawing/2014/main" val="20002"/>
+                    </a:ext>
+                  </a:extLst>
+                </a:gridCol>
+                <a:gridCol w="777240">
+                  <a:extLst>
+                    <a:ext uri="{9D8B030D-6E8A-4147-A177-3AD203B41FA5}">
+                      <a16:colId xmlns:a16="http://schemas.microsoft.com/office/drawing/2014/main" val="20003"/>
+                    </a:ext>
+                  </a:extLst>
+                </a:gridCol>
+                <a:gridCol w="777240">
+                  <a:extLst>
+                    <a:ext uri="{9D8B030D-6E8A-4147-A177-3AD203B41FA5}">
+                      <a16:colId xmlns:a16="http://schemas.microsoft.com/office/drawing/2014/main" val="20004"/>
+                    </a:ext>
+                  </a:extLst>
+                </a:gridCol>
               </a:tblGrid>
               <a:tr h="329184">
                 <a:tc>
@@ -11675,6 +11786,11 @@
                     </a:solidFill>
                   </a:tcPr>
                 </a:tc>
+                <a:extLst>
+                  <a:ext uri="{0D108BD9-81ED-4DB2-BD59-A6C34878D82A}">
+                    <a16:rowId xmlns:a16="http://schemas.microsoft.com/office/drawing/2014/main" val="10000"/>
+                  </a:ext>
+                </a:extLst>
               </a:tr>
               <a:tr h="329184">
                 <a:tc>
@@ -11792,6 +11908,11 @@
                     </a:solidFill>
                   </a:tcPr>
                 </a:tc>
+                <a:extLst>
+                  <a:ext uri="{0D108BD9-81ED-4DB2-BD59-A6C34878D82A}">
+                    <a16:rowId xmlns:a16="http://schemas.microsoft.com/office/drawing/2014/main" val="10001"/>
+                  </a:ext>
+                </a:extLst>
               </a:tr>
               <a:tr h="329184">
                 <a:tc>
@@ -11909,6 +12030,11 @@
                     </a:solidFill>
                   </a:tcPr>
                 </a:tc>
+                <a:extLst>
+                  <a:ext uri="{0D108BD9-81ED-4DB2-BD59-A6C34878D82A}">
+                    <a16:rowId xmlns:a16="http://schemas.microsoft.com/office/drawing/2014/main" val="10002"/>
+                  </a:ext>
+                </a:extLst>
               </a:tr>
               <a:tr h="329184">
                 <a:tc>
@@ -12026,6 +12152,11 @@
                     </a:solidFill>
                   </a:tcPr>
                 </a:tc>
+                <a:extLst>
+                  <a:ext uri="{0D108BD9-81ED-4DB2-BD59-A6C34878D82A}">
+                    <a16:rowId xmlns:a16="http://schemas.microsoft.com/office/drawing/2014/main" val="10003"/>
+                  </a:ext>
+                </a:extLst>
               </a:tr>
               <a:tr h="329184">
                 <a:tc>
@@ -12143,6 +12274,11 @@
                     </a:solidFill>
                   </a:tcPr>
                 </a:tc>
+                <a:extLst>
+                  <a:ext uri="{0D108BD9-81ED-4DB2-BD59-A6C34878D82A}">
+                    <a16:rowId xmlns:a16="http://schemas.microsoft.com/office/drawing/2014/main" val="10004"/>
+                  </a:ext>
+                </a:extLst>
               </a:tr>
               <a:tr h="329184">
                 <a:tc>
@@ -12260,6 +12396,11 @@
                     </a:solidFill>
                   </a:tcPr>
                 </a:tc>
+                <a:extLst>
+                  <a:ext uri="{0D108BD9-81ED-4DB2-BD59-A6C34878D82A}">
+                    <a16:rowId xmlns:a16="http://schemas.microsoft.com/office/drawing/2014/main" val="10005"/>
+                  </a:ext>
+                </a:extLst>
               </a:tr>
               <a:tr h="329184">
                 <a:tc>
@@ -12377,6 +12518,11 @@
                     </a:solidFill>
                   </a:tcPr>
                 </a:tc>
+                <a:extLst>
+                  <a:ext uri="{0D108BD9-81ED-4DB2-BD59-A6C34878D82A}">
+                    <a16:rowId xmlns:a16="http://schemas.microsoft.com/office/drawing/2014/main" val="10006"/>
+                  </a:ext>
+                </a:extLst>
               </a:tr>
               <a:tr h="329184">
                 <a:tc>
@@ -12494,6 +12640,11 @@
                     </a:solidFill>
                   </a:tcPr>
                 </a:tc>
+                <a:extLst>
+                  <a:ext uri="{0D108BD9-81ED-4DB2-BD59-A6C34878D82A}">
+                    <a16:rowId xmlns:a16="http://schemas.microsoft.com/office/drawing/2014/main" val="10007"/>
+                  </a:ext>
+                </a:extLst>
               </a:tr>
               <a:tr h="329184">
                 <a:tc>
@@ -12611,6 +12762,11 @@
                     </a:solidFill>
                   </a:tcPr>
                 </a:tc>
+                <a:extLst>
+                  <a:ext uri="{0D108BD9-81ED-4DB2-BD59-A6C34878D82A}">
+                    <a16:rowId xmlns:a16="http://schemas.microsoft.com/office/drawing/2014/main" val="10008"/>
+                  </a:ext>
+                </a:extLst>
               </a:tr>
               <a:tr h="329184">
                 <a:tc>
@@ -12728,6 +12884,11 @@
                     </a:solidFill>
                   </a:tcPr>
                 </a:tc>
+                <a:extLst>
+                  <a:ext uri="{0D108BD9-81ED-4DB2-BD59-A6C34878D82A}">
+                    <a16:rowId xmlns:a16="http://schemas.microsoft.com/office/drawing/2014/main" val="10009"/>
+                  </a:ext>
+                </a:extLst>
               </a:tr>
             </a:tbl>
           </a:graphicData>
@@ -12750,7 +12911,7 @@
           <a:noFill/>
         </p:spPr>
         <p:txBody>
-          <a:bodyPr wrap="square" anchor="t" lIns="25400" rIns="25400" tIns="12700" bIns="12700">
+          <a:bodyPr wrap="square" lIns="25400" tIns="12700" rIns="25400" bIns="12700" anchor="t">
             <a:spAutoFit/>
           </a:bodyPr>
           <a:lstStyle/>
@@ -12805,7 +12966,7 @@
           <a:noFill/>
         </p:spPr>
         <p:txBody>
-          <a:bodyPr wrap="square" anchor="t" lIns="25400" rIns="25400" tIns="12700" bIns="12700">
+          <a:bodyPr wrap="square" lIns="25400" tIns="12700" rIns="25400" bIns="12700" anchor="t">
             <a:spAutoFit/>
           </a:bodyPr>
           <a:lstStyle/>
@@ -12836,7 +12997,7 @@
 </file>
 
 <file path=ppt/slides/slide11.xml><?xml version="1.0" encoding="utf-8"?>
-<p:sld xmlns:a="http://schemas.openxmlformats.org/drawingml/2006/main" xmlns:p="http://schemas.openxmlformats.org/presentationml/2006/main" xmlns:r="http://schemas.openxmlformats.org/officeDocument/2006/relationships">
+<p:sld xmlns:a="http://schemas.openxmlformats.org/drawingml/2006/main" xmlns:r="http://schemas.openxmlformats.org/officeDocument/2006/relationships" xmlns:p="http://schemas.openxmlformats.org/presentationml/2006/main">
   <p:cSld>
     <p:spTree>
       <p:nvGrpSpPr>
@@ -12844,7 +13005,14 @@
         <p:cNvGrpSpPr/>
         <p:nvPr/>
       </p:nvGrpSpPr>
-      <p:grpSpPr/>
+      <p:grpSpPr>
+        <a:xfrm>
+          <a:off x="0" y="0"/>
+          <a:ext cx="0" cy="0"/>
+          <a:chOff x="0" y="0"/>
+          <a:chExt cx="0" cy="0"/>
+        </a:xfrm>
+      </p:grpSpPr>
       <p:sp>
         <p:nvSpPr>
           <p:cNvPr id="2" name="Rectangle 1"/>
@@ -12886,6 +13054,7 @@
           <a:lstStyle/>
           <a:p>
             <a:pPr algn="ctr"/>
+            <a:endParaRPr/>
           </a:p>
         </p:txBody>
       </p:sp>
@@ -12930,6 +13099,7 @@
           <a:lstStyle/>
           <a:p>
             <a:pPr algn="ctr"/>
+            <a:endParaRPr/>
           </a:p>
         </p:txBody>
       </p:sp>
@@ -12950,7 +13120,7 @@
           <a:noFill/>
         </p:spPr>
         <p:txBody>
-          <a:bodyPr wrap="square" anchor="t" lIns="25400" rIns="25400" tIns="12700" bIns="12700">
+          <a:bodyPr wrap="square" lIns="25400" tIns="12700" rIns="25400" bIns="12700" anchor="t">
             <a:spAutoFit/>
           </a:bodyPr>
           <a:lstStyle/>
@@ -12989,7 +13159,7 @@
           <a:noFill/>
         </p:spPr>
         <p:txBody>
-          <a:bodyPr wrap="square" anchor="t" lIns="25400" rIns="25400" tIns="12700" bIns="12700">
+          <a:bodyPr wrap="square" lIns="25400" tIns="12700" rIns="25400" bIns="12700" anchor="t">
             <a:spAutoFit/>
           </a:bodyPr>
           <a:lstStyle/>
@@ -13028,7 +13198,7 @@
           <a:noFill/>
         </p:spPr>
         <p:txBody>
-          <a:bodyPr wrap="square" anchor="t" lIns="25400" rIns="25400" tIns="12700" bIns="12700">
+          <a:bodyPr wrap="square" lIns="25400" tIns="12700" rIns="25400" bIns="12700" anchor="t">
             <a:spAutoFit/>
           </a:bodyPr>
           <a:lstStyle/>
@@ -13067,7 +13237,7 @@
           <a:noFill/>
         </p:spPr>
         <p:txBody>
-          <a:bodyPr wrap="square" anchor="t" lIns="25400" rIns="25400" tIns="12700" bIns="12700">
+          <a:bodyPr wrap="square" lIns="25400" tIns="12700" rIns="25400" bIns="12700" anchor="t">
             <a:spAutoFit/>
           </a:bodyPr>
           <a:lstStyle/>
@@ -13108,11 +13278,41 @@
                 <a:tableStyleId>{5C22544A-7EE6-4342-B048-85BDC9FD1C3A}</a:tableStyleId>
               </a:tblPr>
               <a:tblGrid>
-                <a:gridCol w="1234440"/>
-                <a:gridCol w="788670"/>
-                <a:gridCol w="788670"/>
-                <a:gridCol w="788670"/>
-                <a:gridCol w="788670"/>
+                <a:gridCol w="1234440">
+                  <a:extLst>
+                    <a:ext uri="{9D8B030D-6E8A-4147-A177-3AD203B41FA5}">
+                      <a16:colId xmlns:a16="http://schemas.microsoft.com/office/drawing/2014/main" val="20000"/>
+                    </a:ext>
+                  </a:extLst>
+                </a:gridCol>
+                <a:gridCol w="788670">
+                  <a:extLst>
+                    <a:ext uri="{9D8B030D-6E8A-4147-A177-3AD203B41FA5}">
+                      <a16:colId xmlns:a16="http://schemas.microsoft.com/office/drawing/2014/main" val="20001"/>
+                    </a:ext>
+                  </a:extLst>
+                </a:gridCol>
+                <a:gridCol w="788670">
+                  <a:extLst>
+                    <a:ext uri="{9D8B030D-6E8A-4147-A177-3AD203B41FA5}">
+                      <a16:colId xmlns:a16="http://schemas.microsoft.com/office/drawing/2014/main" val="20002"/>
+                    </a:ext>
+                  </a:extLst>
+                </a:gridCol>
+                <a:gridCol w="788670">
+                  <a:extLst>
+                    <a:ext uri="{9D8B030D-6E8A-4147-A177-3AD203B41FA5}">
+                      <a16:colId xmlns:a16="http://schemas.microsoft.com/office/drawing/2014/main" val="20003"/>
+                    </a:ext>
+                  </a:extLst>
+                </a:gridCol>
+                <a:gridCol w="788670">
+                  <a:extLst>
+                    <a:ext uri="{9D8B030D-6E8A-4147-A177-3AD203B41FA5}">
+                      <a16:colId xmlns:a16="http://schemas.microsoft.com/office/drawing/2014/main" val="20004"/>
+                    </a:ext>
+                  </a:extLst>
+                </a:gridCol>
               </a:tblGrid>
               <a:tr h="329184">
                 <a:tc>
@@ -13230,6 +13430,11 @@
                     </a:solidFill>
                   </a:tcPr>
                 </a:tc>
+                <a:extLst>
+                  <a:ext uri="{0D108BD9-81ED-4DB2-BD59-A6C34878D82A}">
+                    <a16:rowId xmlns:a16="http://schemas.microsoft.com/office/drawing/2014/main" val="10000"/>
+                  </a:ext>
+                </a:extLst>
               </a:tr>
               <a:tr h="329184">
                 <a:tc>
@@ -13347,6 +13552,11 @@
                     </a:solidFill>
                   </a:tcPr>
                 </a:tc>
+                <a:extLst>
+                  <a:ext uri="{0D108BD9-81ED-4DB2-BD59-A6C34878D82A}">
+                    <a16:rowId xmlns:a16="http://schemas.microsoft.com/office/drawing/2014/main" val="10001"/>
+                  </a:ext>
+                </a:extLst>
               </a:tr>
               <a:tr h="329184">
                 <a:tc>
@@ -13464,6 +13674,11 @@
                     </a:solidFill>
                   </a:tcPr>
                 </a:tc>
+                <a:extLst>
+                  <a:ext uri="{0D108BD9-81ED-4DB2-BD59-A6C34878D82A}">
+                    <a16:rowId xmlns:a16="http://schemas.microsoft.com/office/drawing/2014/main" val="10002"/>
+                  </a:ext>
+                </a:extLst>
               </a:tr>
               <a:tr h="329184">
                 <a:tc>
@@ -13581,6 +13796,11 @@
                     </a:solidFill>
                   </a:tcPr>
                 </a:tc>
+                <a:extLst>
+                  <a:ext uri="{0D108BD9-81ED-4DB2-BD59-A6C34878D82A}">
+                    <a16:rowId xmlns:a16="http://schemas.microsoft.com/office/drawing/2014/main" val="10003"/>
+                  </a:ext>
+                </a:extLst>
               </a:tr>
               <a:tr h="329184">
                 <a:tc>
@@ -13698,6 +13918,11 @@
                     </a:solidFill>
                   </a:tcPr>
                 </a:tc>
+                <a:extLst>
+                  <a:ext uri="{0D108BD9-81ED-4DB2-BD59-A6C34878D82A}">
+                    <a16:rowId xmlns:a16="http://schemas.microsoft.com/office/drawing/2014/main" val="10004"/>
+                  </a:ext>
+                </a:extLst>
               </a:tr>
               <a:tr h="329184">
                 <a:tc>
@@ -13815,6 +14040,11 @@
                     </a:solidFill>
                   </a:tcPr>
                 </a:tc>
+                <a:extLst>
+                  <a:ext uri="{0D108BD9-81ED-4DB2-BD59-A6C34878D82A}">
+                    <a16:rowId xmlns:a16="http://schemas.microsoft.com/office/drawing/2014/main" val="10005"/>
+                  </a:ext>
+                </a:extLst>
               </a:tr>
               <a:tr h="329184">
                 <a:tc>
@@ -13932,6 +14162,11 @@
                     </a:solidFill>
                   </a:tcPr>
                 </a:tc>
+                <a:extLst>
+                  <a:ext uri="{0D108BD9-81ED-4DB2-BD59-A6C34878D82A}">
+                    <a16:rowId xmlns:a16="http://schemas.microsoft.com/office/drawing/2014/main" val="10006"/>
+                  </a:ext>
+                </a:extLst>
               </a:tr>
               <a:tr h="329184">
                 <a:tc>
@@ -14049,6 +14284,11 @@
                     </a:solidFill>
                   </a:tcPr>
                 </a:tc>
+                <a:extLst>
+                  <a:ext uri="{0D108BD9-81ED-4DB2-BD59-A6C34878D82A}">
+                    <a16:rowId xmlns:a16="http://schemas.microsoft.com/office/drawing/2014/main" val="10007"/>
+                  </a:ext>
+                </a:extLst>
               </a:tr>
               <a:tr h="329184">
                 <a:tc>
@@ -14166,6 +14406,11 @@
                     </a:solidFill>
                   </a:tcPr>
                 </a:tc>
+                <a:extLst>
+                  <a:ext uri="{0D108BD9-81ED-4DB2-BD59-A6C34878D82A}">
+                    <a16:rowId xmlns:a16="http://schemas.microsoft.com/office/drawing/2014/main" val="10008"/>
+                  </a:ext>
+                </a:extLst>
               </a:tr>
               <a:tr h="329184">
                 <a:tc>
@@ -14283,6 +14528,11 @@
                     </a:solidFill>
                   </a:tcPr>
                 </a:tc>
+                <a:extLst>
+                  <a:ext uri="{0D108BD9-81ED-4DB2-BD59-A6C34878D82A}">
+                    <a16:rowId xmlns:a16="http://schemas.microsoft.com/office/drawing/2014/main" val="10009"/>
+                  </a:ext>
+                </a:extLst>
               </a:tr>
             </a:tbl>
           </a:graphicData>
@@ -14305,7 +14555,7 @@
           <a:noFill/>
         </p:spPr>
         <p:txBody>
-          <a:bodyPr wrap="square" anchor="t" lIns="25400" rIns="25400" tIns="12700" bIns="12700">
+          <a:bodyPr wrap="square" lIns="25400" tIns="12700" rIns="25400" bIns="12700" anchor="t">
             <a:spAutoFit/>
           </a:bodyPr>
           <a:lstStyle/>
@@ -14373,11 +14623,41 @@
                 <a:tableStyleId>{5C22544A-7EE6-4342-B048-85BDC9FD1C3A}</a:tableStyleId>
               </a:tblPr>
               <a:tblGrid>
-                <a:gridCol w="1234440"/>
-                <a:gridCol w="777240"/>
-                <a:gridCol w="777240"/>
-                <a:gridCol w="777240"/>
-                <a:gridCol w="777240"/>
+                <a:gridCol w="1234440">
+                  <a:extLst>
+                    <a:ext uri="{9D8B030D-6E8A-4147-A177-3AD203B41FA5}">
+                      <a16:colId xmlns:a16="http://schemas.microsoft.com/office/drawing/2014/main" val="20000"/>
+                    </a:ext>
+                  </a:extLst>
+                </a:gridCol>
+                <a:gridCol w="777240">
+                  <a:extLst>
+                    <a:ext uri="{9D8B030D-6E8A-4147-A177-3AD203B41FA5}">
+                      <a16:colId xmlns:a16="http://schemas.microsoft.com/office/drawing/2014/main" val="20001"/>
+                    </a:ext>
+                  </a:extLst>
+                </a:gridCol>
+                <a:gridCol w="777240">
+                  <a:extLst>
+                    <a:ext uri="{9D8B030D-6E8A-4147-A177-3AD203B41FA5}">
+                      <a16:colId xmlns:a16="http://schemas.microsoft.com/office/drawing/2014/main" val="20002"/>
+                    </a:ext>
+                  </a:extLst>
+                </a:gridCol>
+                <a:gridCol w="777240">
+                  <a:extLst>
+                    <a:ext uri="{9D8B030D-6E8A-4147-A177-3AD203B41FA5}">
+                      <a16:colId xmlns:a16="http://schemas.microsoft.com/office/drawing/2014/main" val="20003"/>
+                    </a:ext>
+                  </a:extLst>
+                </a:gridCol>
+                <a:gridCol w="777240">
+                  <a:extLst>
+                    <a:ext uri="{9D8B030D-6E8A-4147-A177-3AD203B41FA5}">
+                      <a16:colId xmlns:a16="http://schemas.microsoft.com/office/drawing/2014/main" val="20004"/>
+                    </a:ext>
+                  </a:extLst>
+                </a:gridCol>
               </a:tblGrid>
               <a:tr h="329184">
                 <a:tc>
@@ -14495,6 +14775,11 @@
                     </a:solidFill>
                   </a:tcPr>
                 </a:tc>
+                <a:extLst>
+                  <a:ext uri="{0D108BD9-81ED-4DB2-BD59-A6C34878D82A}">
+                    <a16:rowId xmlns:a16="http://schemas.microsoft.com/office/drawing/2014/main" val="10000"/>
+                  </a:ext>
+                </a:extLst>
               </a:tr>
               <a:tr h="329184">
                 <a:tc>
@@ -14612,6 +14897,11 @@
                     </a:solidFill>
                   </a:tcPr>
                 </a:tc>
+                <a:extLst>
+                  <a:ext uri="{0D108BD9-81ED-4DB2-BD59-A6C34878D82A}">
+                    <a16:rowId xmlns:a16="http://schemas.microsoft.com/office/drawing/2014/main" val="10001"/>
+                  </a:ext>
+                </a:extLst>
               </a:tr>
               <a:tr h="329184">
                 <a:tc>
@@ -14729,6 +15019,11 @@
                     </a:solidFill>
                   </a:tcPr>
                 </a:tc>
+                <a:extLst>
+                  <a:ext uri="{0D108BD9-81ED-4DB2-BD59-A6C34878D82A}">
+                    <a16:rowId xmlns:a16="http://schemas.microsoft.com/office/drawing/2014/main" val="10002"/>
+                  </a:ext>
+                </a:extLst>
               </a:tr>
               <a:tr h="329184">
                 <a:tc>
@@ -14846,6 +15141,11 @@
                     </a:solidFill>
                   </a:tcPr>
                 </a:tc>
+                <a:extLst>
+                  <a:ext uri="{0D108BD9-81ED-4DB2-BD59-A6C34878D82A}">
+                    <a16:rowId xmlns:a16="http://schemas.microsoft.com/office/drawing/2014/main" val="10003"/>
+                  </a:ext>
+                </a:extLst>
               </a:tr>
               <a:tr h="329184">
                 <a:tc>
@@ -14963,6 +15263,11 @@
                     </a:solidFill>
                   </a:tcPr>
                 </a:tc>
+                <a:extLst>
+                  <a:ext uri="{0D108BD9-81ED-4DB2-BD59-A6C34878D82A}">
+                    <a16:rowId xmlns:a16="http://schemas.microsoft.com/office/drawing/2014/main" val="10004"/>
+                  </a:ext>
+                </a:extLst>
               </a:tr>
               <a:tr h="329184">
                 <a:tc>
@@ -15080,6 +15385,11 @@
                     </a:solidFill>
                   </a:tcPr>
                 </a:tc>
+                <a:extLst>
+                  <a:ext uri="{0D108BD9-81ED-4DB2-BD59-A6C34878D82A}">
+                    <a16:rowId xmlns:a16="http://schemas.microsoft.com/office/drawing/2014/main" val="10005"/>
+                  </a:ext>
+                </a:extLst>
               </a:tr>
               <a:tr h="329184">
                 <a:tc>
@@ -15197,6 +15507,11 @@
                     </a:solidFill>
                   </a:tcPr>
                 </a:tc>
+                <a:extLst>
+                  <a:ext uri="{0D108BD9-81ED-4DB2-BD59-A6C34878D82A}">
+                    <a16:rowId xmlns:a16="http://schemas.microsoft.com/office/drawing/2014/main" val="10006"/>
+                  </a:ext>
+                </a:extLst>
               </a:tr>
               <a:tr h="329184">
                 <a:tc>
@@ -15314,6 +15629,11 @@
                     </a:solidFill>
                   </a:tcPr>
                 </a:tc>
+                <a:extLst>
+                  <a:ext uri="{0D108BD9-81ED-4DB2-BD59-A6C34878D82A}">
+                    <a16:rowId xmlns:a16="http://schemas.microsoft.com/office/drawing/2014/main" val="10007"/>
+                  </a:ext>
+                </a:extLst>
               </a:tr>
               <a:tr h="329184">
                 <a:tc>
@@ -15431,6 +15751,11 @@
                     </a:solidFill>
                   </a:tcPr>
                 </a:tc>
+                <a:extLst>
+                  <a:ext uri="{0D108BD9-81ED-4DB2-BD59-A6C34878D82A}">
+                    <a16:rowId xmlns:a16="http://schemas.microsoft.com/office/drawing/2014/main" val="10008"/>
+                  </a:ext>
+                </a:extLst>
               </a:tr>
               <a:tr h="329184">
                 <a:tc>
@@ -15548,6 +15873,11 @@
                     </a:solidFill>
                   </a:tcPr>
                 </a:tc>
+                <a:extLst>
+                  <a:ext uri="{0D108BD9-81ED-4DB2-BD59-A6C34878D82A}">
+                    <a16:rowId xmlns:a16="http://schemas.microsoft.com/office/drawing/2014/main" val="10009"/>
+                  </a:ext>
+                </a:extLst>
               </a:tr>
             </a:tbl>
           </a:graphicData>
@@ -15570,7 +15900,7 @@
           <a:noFill/>
         </p:spPr>
         <p:txBody>
-          <a:bodyPr wrap="square" anchor="t" lIns="25400" rIns="25400" tIns="12700" bIns="12700">
+          <a:bodyPr wrap="square" lIns="25400" tIns="12700" rIns="25400" bIns="12700" anchor="t">
             <a:spAutoFit/>
           </a:bodyPr>
           <a:lstStyle/>
@@ -15625,7 +15955,7 @@
           <a:noFill/>
         </p:spPr>
         <p:txBody>
-          <a:bodyPr wrap="square" anchor="t" lIns="25400" rIns="25400" tIns="12700" bIns="12700">
+          <a:bodyPr wrap="square" lIns="25400" tIns="12700" rIns="25400" bIns="12700" anchor="t">
             <a:spAutoFit/>
           </a:bodyPr>
           <a:lstStyle/>
@@ -16050,213 +16380,6 @@
               </a:rPr>
               <a:t>변동성 60% 가정 · 점=시뮬 1회 · 노란선=구간 평균 · 데이터: 자체 시뮬레이션(거래비용·운용오차 포함)</a:t>
             </a:r>
-            <a:r>
-              <a:rPr sz="900" b="0" dirty="0">
-                <a:solidFill>
-                  <a:srgbClr val="84888B"/>
-                </a:solidFill>
-                <a:latin typeface="맑은 고딕"/>
-              </a:rPr>
-              <a:t/>
-            </a:r>
-            <a:r>
-              <a:rPr sz="900" b="0" dirty="0" err="1">
-                <a:solidFill>
-                  <a:srgbClr val="84888B"/>
-                </a:solidFill>
-                <a:latin typeface="맑은 고딕"/>
-              </a:rPr>
-              <a:t/>
-            </a:r>
-            <a:r>
-              <a:rPr sz="900" b="0" dirty="0">
-                <a:solidFill>
-                  <a:srgbClr val="84888B"/>
-                </a:solidFill>
-                <a:latin typeface="맑은 고딕"/>
-              </a:rPr>
-              <a:t/>
-            </a:r>
-            <a:r>
-              <a:rPr sz="900" b="0" dirty="0" err="1">
-                <a:solidFill>
-                  <a:srgbClr val="84888B"/>
-                </a:solidFill>
-                <a:latin typeface="맑은 고딕"/>
-              </a:rPr>
-              <a:t/>
-            </a:r>
-            <a:r>
-              <a:rPr sz="900" b="0" dirty="0">
-                <a:solidFill>
-                  <a:srgbClr val="84888B"/>
-                </a:solidFill>
-                <a:latin typeface="맑은 고딕"/>
-              </a:rPr>
-              <a:t/>
-            </a:r>
-            <a:r>
-              <a:rPr sz="900" b="0" dirty="0" err="1">
-                <a:solidFill>
-                  <a:srgbClr val="84888B"/>
-                </a:solidFill>
-                <a:latin typeface="맑은 고딕"/>
-              </a:rPr>
-              <a:t/>
-            </a:r>
-            <a:r>
-              <a:rPr sz="900" b="0" dirty="0">
-                <a:solidFill>
-                  <a:srgbClr val="84888B"/>
-                </a:solidFill>
-                <a:latin typeface="맑은 고딕"/>
-              </a:rPr>
-              <a:t/>
-            </a:r>
-            <a:r>
-              <a:rPr sz="900" b="1" dirty="0" err="1">
-                <a:solidFill>
-                  <a:srgbClr val="F58220"/>
-                </a:solidFill>
-                <a:latin typeface="맑은 고딕"/>
-              </a:rPr>
-              <a:t/>
-            </a:r>
-            <a:r>
-              <a:rPr sz="900" b="1" dirty="0">
-                <a:solidFill>
-                  <a:srgbClr val="F58220"/>
-                </a:solidFill>
-                <a:latin typeface="맑은 고딕"/>
-              </a:rPr>
-              <a:t/>
-            </a:r>
-            <a:r>
-              <a:rPr sz="900" b="1" dirty="0" err="1">
-                <a:solidFill>
-                  <a:srgbClr val="F58220"/>
-                </a:solidFill>
-                <a:latin typeface="맑은 고딕"/>
-              </a:rPr>
-              <a:t/>
-            </a:r>
-            <a:r>
-              <a:rPr sz="900" b="1" dirty="0">
-                <a:solidFill>
-                  <a:srgbClr val="F58220"/>
-                </a:solidFill>
-                <a:latin typeface="맑은 고딕"/>
-              </a:rPr>
-              <a:t/>
-            </a:r>
-            <a:r>
-              <a:rPr sz="900" b="1" dirty="0" err="1">
-                <a:solidFill>
-                  <a:srgbClr val="F58220"/>
-                </a:solidFill>
-                <a:latin typeface="맑은 고딕"/>
-              </a:rPr>
-              <a:t/>
-            </a:r>
-            <a:r>
-              <a:rPr sz="900" b="0" dirty="0">
-                <a:solidFill>
-                  <a:srgbClr val="84888B"/>
-                </a:solidFill>
-                <a:latin typeface="맑은 고딕"/>
-              </a:rPr>
-              <a:t/>
-            </a:r>
-            <a:r>
-              <a:rPr sz="900" b="0" dirty="0" err="1">
-                <a:solidFill>
-                  <a:srgbClr val="84888B"/>
-                </a:solidFill>
-                <a:latin typeface="맑은 고딕"/>
-              </a:rPr>
-              <a:t/>
-            </a:r>
-            <a:r>
-              <a:rPr sz="900" b="0" dirty="0">
-                <a:solidFill>
-                  <a:srgbClr val="84888B"/>
-                </a:solidFill>
-                <a:latin typeface="맑은 고딕"/>
-              </a:rPr>
-              <a:t/>
-            </a:r>
-            <a:r>
-              <a:rPr sz="900" b="0" dirty="0" err="1">
-                <a:solidFill>
-                  <a:srgbClr val="84888B"/>
-                </a:solidFill>
-                <a:latin typeface="맑은 고딕"/>
-              </a:rPr>
-              <a:t/>
-            </a:r>
-            <a:r>
-              <a:rPr sz="900" b="0" dirty="0">
-                <a:solidFill>
-                  <a:srgbClr val="84888B"/>
-                </a:solidFill>
-                <a:latin typeface="맑은 고딕"/>
-              </a:rPr>
-              <a:t/>
-            </a:r>
-            <a:r>
-              <a:rPr sz="900" b="0" dirty="0" err="1">
-                <a:solidFill>
-                  <a:srgbClr val="84888B"/>
-                </a:solidFill>
-                <a:latin typeface="맑은 고딕"/>
-              </a:rPr>
-              <a:t/>
-            </a:r>
-            <a:r>
-              <a:rPr sz="900" b="0" dirty="0">
-                <a:solidFill>
-                  <a:srgbClr val="84888B"/>
-                </a:solidFill>
-                <a:latin typeface="맑은 고딕"/>
-              </a:rPr>
-              <a:t/>
-            </a:r>
-            <a:r>
-              <a:rPr sz="900" b="0" dirty="0" err="1">
-                <a:solidFill>
-                  <a:srgbClr val="84888B"/>
-                </a:solidFill>
-                <a:latin typeface="맑은 고딕"/>
-              </a:rPr>
-              <a:t/>
-            </a:r>
-            <a:r>
-              <a:rPr sz="900" b="0" dirty="0">
-                <a:solidFill>
-                  <a:srgbClr val="84888B"/>
-                </a:solidFill>
-                <a:latin typeface="맑은 고딕"/>
-              </a:rPr>
-              <a:t/>
-            </a:r>
-            <a:r>
-              <a:rPr sz="900" b="0" dirty="0" err="1">
-                <a:solidFill>
-                  <a:srgbClr val="84888B"/>
-                </a:solidFill>
-                <a:latin typeface="맑은 고딕"/>
-              </a:rPr>
-              <a:t/>
-            </a:r>
-            <a:r>
-              <a:rPr sz="900" b="0" dirty="0">
-                <a:solidFill>
-                  <a:srgbClr val="84888B"/>
-                </a:solidFill>
-                <a:latin typeface="맑은 고딕"/>
-              </a:rPr>
-              <a:t/>
-            </a:r>
           </a:p>
         </p:txBody>
       </p:sp>
@@ -16683,7 +16806,7 @@
           <p:nvPr/>
         </p:nvPicPr>
         <p:blipFill>
-          <a:blip r:embed="rId4"/>
+          <a:blip r:embed="rId2"/>
           <a:stretch>
             <a:fillRect/>
           </a:stretch>
@@ -16707,7 +16830,7 @@
           <p:nvPr/>
         </p:nvPicPr>
         <p:blipFill>
-          <a:blip r:embed="rId5"/>
+          <a:blip r:embed="rId3"/>
           <a:stretch>
             <a:fillRect/>
           </a:stretch>
@@ -17716,7 +17839,7 @@
           <p:nvPr/>
         </p:nvPicPr>
         <p:blipFill>
-          <a:blip r:embed="rId3"/>
+          <a:blip r:embed="rId2"/>
           <a:stretch>
             <a:fillRect/>
           </a:stretch>
@@ -19906,105 +20029,6 @@
               </a:rPr>
               <a:t>삼성전자·SK하이닉스 변동성이 최근 5년 중 최고 수준입니다. 변동성이 클수록 변동성 매매의 수익 기회가 커집니다.</a:t>
             </a:r>
-            <a:r>
-              <a:rPr sz="1300" b="1" dirty="0">
-                <a:solidFill>
-                  <a:srgbClr val="3A3A3A"/>
-                </a:solidFill>
-                <a:latin typeface="맑은 고딕"/>
-              </a:rPr>
-              <a:t/>
-            </a:r>
-            <a:r>
-              <a:rPr sz="1300" b="1" dirty="0" err="1">
-                <a:solidFill>
-                  <a:srgbClr val="3A3A3A"/>
-                </a:solidFill>
-                <a:latin typeface="맑은 고딕"/>
-              </a:rPr>
-              <a:t/>
-            </a:r>
-            <a:r>
-              <a:rPr sz="1300" b="1" dirty="0">
-                <a:solidFill>
-                  <a:srgbClr val="3A3A3A"/>
-                </a:solidFill>
-                <a:latin typeface="맑은 고딕"/>
-              </a:rPr>
-              <a:t/>
-            </a:r>
-            <a:r>
-              <a:rPr sz="1300" b="1" dirty="0" err="1">
-                <a:solidFill>
-                  <a:srgbClr val="3A3A3A"/>
-                </a:solidFill>
-                <a:latin typeface="맑은 고딕"/>
-              </a:rPr>
-              <a:t/>
-            </a:r>
-            <a:r>
-              <a:rPr sz="1300" b="1" dirty="0">
-                <a:solidFill>
-                  <a:srgbClr val="3A3A3A"/>
-                </a:solidFill>
-                <a:latin typeface="맑은 고딕"/>
-              </a:rPr>
-              <a:t/>
-            </a:r>
-            <a:r>
-              <a:rPr sz="1300" b="1" dirty="0" err="1">
-                <a:solidFill>
-                  <a:srgbClr val="3A3A3A"/>
-                </a:solidFill>
-                <a:latin typeface="맑은 고딕"/>
-              </a:rPr>
-              <a:t/>
-            </a:r>
-            <a:r>
-              <a:rPr sz="1300" b="1" dirty="0">
-                <a:solidFill>
-                  <a:srgbClr val="3A3A3A"/>
-                </a:solidFill>
-                <a:latin typeface="맑은 고딕"/>
-              </a:rPr>
-              <a:t/>
-            </a:r>
-            <a:r>
-              <a:rPr sz="1300" b="1" dirty="0" err="1">
-                <a:solidFill>
-                  <a:srgbClr val="3A3A3A"/>
-                </a:solidFill>
-                <a:latin typeface="맑은 고딕"/>
-              </a:rPr>
-              <a:t/>
-            </a:r>
-            <a:r>
-              <a:rPr lang="en-US" sz="1300" b="1" dirty="0">
-                <a:solidFill>
-                  <a:srgbClr val="3A3A3A"/>
-                </a:solidFill>
-                <a:latin typeface="맑은 고딕"/>
-              </a:rPr>
-              <a:t/>
-            </a:r>
-            <a:r>
-              <a:rPr sz="1300" b="1" dirty="0">
-                <a:solidFill>
-                  <a:srgbClr val="3A3A3A"/>
-                </a:solidFill>
-                <a:latin typeface="맑은 고딕"/>
-              </a:rPr>
-              <a:t/>
-            </a:r>
-            <a:r>
-              <a:rPr sz="1300" b="1" dirty="0" err="1">
-                <a:solidFill>
-                  <a:srgbClr val="3A3A3A"/>
-                </a:solidFill>
-                <a:latin typeface="맑은 고딕"/>
-              </a:rPr>
-              <a:t/>
-            </a:r>
           </a:p>
         </p:txBody>
       </p:sp>
@@ -20179,7 +20203,7 @@
           <p:nvPr/>
         </p:nvPicPr>
         <p:blipFill>
-          <a:blip r:embed="rId3"/>
+          <a:blip r:embed="rId2"/>
           <a:stretch>
             <a:fillRect/>
           </a:stretch>
@@ -24976,7 +25000,7 @@
         <p:spPr>
           <a:xfrm>
             <a:off x="457200" y="5040056"/>
-            <a:ext cx="4526280" cy="274320"/>
+            <a:ext cx="4526280" cy="238527"/>
           </a:xfrm>
           <a:prstGeom prst="rect">
             <a:avLst/>
@@ -24991,13 +25015,40 @@
           <a:p>
             <a:pPr algn="ctr"/>
             <a:r>
-              <a:rPr sz="950" b="1">
+              <a:rPr sz="950" b="1" dirty="0" err="1">
                 <a:solidFill>
                   <a:srgbClr val="043B72"/>
                 </a:solidFill>
                 <a:latin typeface="맑은 고딕"/>
               </a:rPr>
-              <a:t>데이터 기준일: 2026-07-15 (상장 2026-05-27 ~ 2026-07-15 · ETF_데이터_pivot)</a:t>
+              <a:t>데이터</a:t>
+            </a:r>
+            <a:r>
+              <a:rPr sz="950" b="1" dirty="0">
+                <a:solidFill>
+                  <a:srgbClr val="043B72"/>
+                </a:solidFill>
+                <a:latin typeface="맑은 고딕"/>
+              </a:rPr>
+              <a:t> </a:t>
+            </a:r>
+            <a:r>
+              <a:rPr sz="950" b="1" dirty="0" err="1">
+                <a:solidFill>
+                  <a:srgbClr val="043B72"/>
+                </a:solidFill>
+                <a:latin typeface="맑은 고딕"/>
+              </a:rPr>
+              <a:t>기준일</a:t>
+            </a:r>
+            <a:r>
+              <a:rPr sz="950" b="1" dirty="0">
+                <a:solidFill>
+                  <a:srgbClr val="043B72"/>
+                </a:solidFill>
+                <a:latin typeface="맑은 고딕"/>
+              </a:rPr>
+              <a:t>: 2026-07-15</a:t>
             </a:r>
           </a:p>
         </p:txBody>

--- a/제안서/변동성하베스트펀드_AITop2_v1_20260715.pptx
+++ b/제안서/변동성하베스트펀드_AITop2_v1_20260715.pptx
@@ -24862,13 +24862,130 @@
               </a:lnSpc>
             </a:pPr>
             <a:r>
-              <a:rPr sz="1400" b="1">
+              <a:rPr sz="1400" b="1" dirty="0" err="1">
                 <a:solidFill>
                   <a:srgbClr val="F58220"/>
                 </a:solidFill>
                 <a:latin typeface="맑은 고딕"/>
               </a:rPr>
-              <a:t>핵심: 레버리지가 '잃는' 바로 그 변동성을, 본 펀드는 '수확'한다.</a:t>
+              <a:t>핵심</a:t>
+            </a:r>
+            <a:r>
+              <a:rPr sz="1400" b="1" dirty="0">
+                <a:solidFill>
+                  <a:srgbClr val="F58220"/>
+                </a:solidFill>
+                <a:latin typeface="맑은 고딕"/>
+              </a:rPr>
+              <a:t>: </a:t>
+            </a:r>
+            <a:r>
+              <a:rPr sz="1400" b="1" dirty="0" err="1">
+                <a:solidFill>
+                  <a:srgbClr val="F58220"/>
+                </a:solidFill>
+                <a:latin typeface="맑은 고딕"/>
+              </a:rPr>
+              <a:t>레버리지가</a:t>
+            </a:r>
+            <a:r>
+              <a:rPr sz="1400" b="1" dirty="0">
+                <a:solidFill>
+                  <a:srgbClr val="F58220"/>
+                </a:solidFill>
+                <a:latin typeface="맑은 고딕"/>
+              </a:rPr>
+              <a:t> '</a:t>
+            </a:r>
+            <a:r>
+              <a:rPr sz="1400" b="1" dirty="0" err="1">
+                <a:solidFill>
+                  <a:srgbClr val="F58220"/>
+                </a:solidFill>
+                <a:latin typeface="맑은 고딕"/>
+              </a:rPr>
+              <a:t>잃는</a:t>
+            </a:r>
+            <a:r>
+              <a:rPr sz="1400" b="1" dirty="0">
+                <a:solidFill>
+                  <a:srgbClr val="F58220"/>
+                </a:solidFill>
+                <a:latin typeface="맑은 고딕"/>
+              </a:rPr>
+              <a:t>' </a:t>
+            </a:r>
+            <a:r>
+              <a:rPr sz="1400" b="1" dirty="0" err="1">
+                <a:solidFill>
+                  <a:srgbClr val="F58220"/>
+                </a:solidFill>
+                <a:latin typeface="맑은 고딕"/>
+              </a:rPr>
+              <a:t>바로</a:t>
+            </a:r>
+            <a:r>
+              <a:rPr sz="1400" b="1" dirty="0">
+                <a:solidFill>
+                  <a:srgbClr val="F58220"/>
+                </a:solidFill>
+                <a:latin typeface="맑은 고딕"/>
+              </a:rPr>
+              <a:t> 그 </a:t>
+            </a:r>
+            <a:r>
+              <a:rPr sz="1400" b="1" dirty="0" err="1">
+                <a:solidFill>
+                  <a:srgbClr val="F58220"/>
+                </a:solidFill>
+                <a:latin typeface="맑은 고딕"/>
+              </a:rPr>
+              <a:t>변동성을</a:t>
+            </a:r>
+            <a:r>
+              <a:rPr sz="1400" b="1" dirty="0">
+                <a:solidFill>
+                  <a:srgbClr val="F58220"/>
+                </a:solidFill>
+                <a:latin typeface="맑은 고딕"/>
+              </a:rPr>
+              <a:t>, 본 </a:t>
+            </a:r>
+            <a:r>
+              <a:rPr sz="1400" b="1" dirty="0" err="1">
+                <a:solidFill>
+                  <a:srgbClr val="F58220"/>
+                </a:solidFill>
+                <a:latin typeface="맑은 고딕"/>
+              </a:rPr>
+              <a:t>펀드는</a:t>
+            </a:r>
+            <a:r>
+              <a:rPr sz="1400" b="1" dirty="0">
+                <a:solidFill>
+                  <a:srgbClr val="F58220"/>
+                </a:solidFill>
+                <a:latin typeface="맑은 고딕"/>
+              </a:rPr>
+              <a:t> '</a:t>
+            </a:r>
+            <a:r>
+              <a:rPr sz="1400" b="1" dirty="0" err="1">
+                <a:solidFill>
+                  <a:srgbClr val="F58220"/>
+                </a:solidFill>
+                <a:latin typeface="맑은 고딕"/>
+              </a:rPr>
+              <a:t>수확'한다</a:t>
+            </a:r>
+            <a:r>
+              <a:rPr sz="1400" b="1" dirty="0">
+                <a:solidFill>
+                  <a:srgbClr val="F58220"/>
+                </a:solidFill>
+                <a:latin typeface="맑은 고딕"/>
+              </a:rPr>
+              <a:t>.</a:t>
             </a:r>
           </a:p>
           <a:p>
@@ -24878,13 +24995,166 @@
               </a:lnSpc>
             </a:pPr>
             <a:r>
-              <a:rPr sz="1200" b="1">
+              <a:rPr sz="1200" b="1" dirty="0" err="1">
                 <a:solidFill>
                   <a:srgbClr val="3A3A3A"/>
                 </a:solidFill>
                 <a:latin typeface="맑은 고딕"/>
               </a:rPr>
-              <a:t>변동성이 클수록(=잠식이 클수록) 본 펀드의 수익 기회는 오히려 커진다.</a:t>
+              <a:t>변동성이</a:t>
+            </a:r>
+            <a:r>
+              <a:rPr sz="1200" b="1" dirty="0">
+                <a:solidFill>
+                  <a:srgbClr val="3A3A3A"/>
+                </a:solidFill>
+                <a:latin typeface="맑은 고딕"/>
+              </a:rPr>
+              <a:t> </a:t>
+            </a:r>
+            <a:r>
+              <a:rPr sz="1200" b="1" dirty="0" err="1">
+                <a:solidFill>
+                  <a:srgbClr val="3A3A3A"/>
+                </a:solidFill>
+                <a:latin typeface="맑은 고딕"/>
+              </a:rPr>
+              <a:t>클수록</a:t>
+            </a:r>
+            <a:r>
+              <a:rPr sz="1200" b="1" dirty="0">
+                <a:solidFill>
+                  <a:srgbClr val="3A3A3A"/>
+                </a:solidFill>
+                <a:latin typeface="맑은 고딕"/>
+              </a:rPr>
+              <a:t>(=</a:t>
+            </a:r>
+            <a:r>
+              <a:rPr sz="1200" b="1" dirty="0" err="1">
+                <a:solidFill>
+                  <a:srgbClr val="3A3A3A"/>
+                </a:solidFill>
+                <a:latin typeface="맑은 고딕"/>
+              </a:rPr>
+              <a:t>잠식이</a:t>
+            </a:r>
+            <a:r>
+              <a:rPr sz="1200" b="1" dirty="0">
+                <a:solidFill>
+                  <a:srgbClr val="3A3A3A"/>
+                </a:solidFill>
+                <a:latin typeface="맑은 고딕"/>
+              </a:rPr>
+              <a:t> </a:t>
+            </a:r>
+            <a:r>
+              <a:rPr sz="1200" b="1" dirty="0" err="1">
+                <a:solidFill>
+                  <a:srgbClr val="3A3A3A"/>
+                </a:solidFill>
+                <a:latin typeface="맑은 고딕"/>
+              </a:rPr>
+              <a:t>클수록</a:t>
+            </a:r>
+            <a:r>
+              <a:rPr sz="1200" b="1" dirty="0">
+                <a:solidFill>
+                  <a:srgbClr val="3A3A3A"/>
+                </a:solidFill>
+                <a:latin typeface="맑은 고딕"/>
+              </a:rPr>
+              <a:t>) 본 </a:t>
+            </a:r>
+            <a:r>
+              <a:rPr sz="1200" b="1" dirty="0" err="1">
+                <a:solidFill>
+                  <a:srgbClr val="3A3A3A"/>
+                </a:solidFill>
+                <a:latin typeface="맑은 고딕"/>
+              </a:rPr>
+              <a:t>펀드의</a:t>
+            </a:r>
+            <a:r>
+              <a:rPr sz="1200" b="1" dirty="0">
+                <a:solidFill>
+                  <a:srgbClr val="3A3A3A"/>
+                </a:solidFill>
+                <a:latin typeface="맑은 고딕"/>
+              </a:rPr>
+              <a:t> </a:t>
+            </a:r>
+            <a:r>
+              <a:rPr sz="1200" b="1" dirty="0" err="1">
+                <a:solidFill>
+                  <a:srgbClr val="3A3A3A"/>
+                </a:solidFill>
+                <a:latin typeface="맑은 고딕"/>
+              </a:rPr>
+              <a:t>수익</a:t>
+            </a:r>
+            <a:r>
+              <a:rPr sz="1200" b="1" dirty="0">
+                <a:solidFill>
+                  <a:srgbClr val="3A3A3A"/>
+                </a:solidFill>
+                <a:latin typeface="맑은 고딕"/>
+              </a:rPr>
+              <a:t> </a:t>
+            </a:r>
+            <a:r>
+              <a:rPr sz="1200" b="1" dirty="0" err="1">
+                <a:solidFill>
+                  <a:srgbClr val="3A3A3A"/>
+                </a:solidFill>
+                <a:latin typeface="맑은 고딕"/>
+              </a:rPr>
+              <a:t>기회는</a:t>
+            </a:r>
+            <a:r>
+              <a:rPr sz="1200" b="1" dirty="0">
+                <a:solidFill>
+                  <a:srgbClr val="3A3A3A"/>
+                </a:solidFill>
+                <a:latin typeface="맑은 고딕"/>
+              </a:rPr>
+              <a:t> </a:t>
+            </a:r>
+            <a:r>
+              <a:rPr sz="1200" b="1" dirty="0" err="1">
+                <a:solidFill>
+                  <a:srgbClr val="3A3A3A"/>
+                </a:solidFill>
+                <a:latin typeface="맑은 고딕"/>
+              </a:rPr>
+              <a:t>오히려</a:t>
+            </a:r>
+            <a:r>
+              <a:rPr sz="1200" b="1" dirty="0">
+                <a:solidFill>
+                  <a:srgbClr val="3A3A3A"/>
+                </a:solidFill>
+                <a:latin typeface="맑은 고딕"/>
+              </a:rPr>
+              <a:t> </a:t>
+            </a:r>
+            <a:r>
+              <a:rPr sz="1200" b="1" dirty="0" err="1">
+                <a:solidFill>
+                  <a:srgbClr val="3A3A3A"/>
+                </a:solidFill>
+                <a:latin typeface="맑은 고딕"/>
+              </a:rPr>
+              <a:t>커진다</a:t>
+            </a:r>
+            <a:r>
+              <a:rPr sz="1200" b="1" dirty="0">
+                <a:solidFill>
+                  <a:srgbClr val="3A3A3A"/>
+                </a:solidFill>
+                <a:latin typeface="맑은 고딕"/>
+              </a:rPr>
+              <a:t>.</a:t>
             </a:r>
           </a:p>
         </p:txBody>

--- a/제안서/변동성하베스트펀드_AITop2_v1_20260715.pptx
+++ b/제안서/변동성하베스트펀드_AITop2_v1_20260715.pptx
@@ -13856,6 +13856,41 @@
           </a:p>
         </p:txBody>
       </p:sp>
+      <p:sp>
+        <p:nvSpPr>
+          <p:cNvPr id="13" name="TextBox 12"/>
+          <p:cNvSpPr txBox="1"/>
+          <p:nvPr/>
+        </p:nvSpPr>
+        <p:spPr>
+          <a:xfrm>
+            <a:off x="9052560" y="6510528"/>
+            <a:ext cx="548640" cy="292608"/>
+          </a:xfrm>
+          <a:prstGeom prst="rect">
+            <a:avLst/>
+          </a:prstGeom>
+          <a:noFill/>
+        </p:spPr>
+        <p:txBody>
+          <a:bodyPr wrap="none">
+            <a:spAutoFit/>
+          </a:bodyPr>
+          <a:lstStyle/>
+          <a:p>
+            <a:pPr algn="r"/>
+            <a:r>
+              <a:rPr sz="900" b="1">
+                <a:solidFill>
+                  <a:srgbClr val="84888B"/>
+                </a:solidFill>
+                <a:latin typeface="맑은 고딕"/>
+              </a:rPr>
+              <a:t>11</a:t>
+            </a:r>
+          </a:p>
+        </p:txBody>
+      </p:sp>
     </p:spTree>
   </p:cSld>
   <p:clrMapOvr>
@@ -17854,6 +17889,41 @@
           </a:p>
         </p:txBody>
       </p:sp>
+      <p:sp>
+        <p:nvSpPr>
+          <p:cNvPr id="13" name="TextBox 12"/>
+          <p:cNvSpPr txBox="1"/>
+          <p:nvPr/>
+        </p:nvSpPr>
+        <p:spPr>
+          <a:xfrm>
+            <a:off x="9052560" y="6510528"/>
+            <a:ext cx="548640" cy="292608"/>
+          </a:xfrm>
+          <a:prstGeom prst="rect">
+            <a:avLst/>
+          </a:prstGeom>
+          <a:noFill/>
+        </p:spPr>
+        <p:txBody>
+          <a:bodyPr wrap="none">
+            <a:spAutoFit/>
+          </a:bodyPr>
+          <a:lstStyle/>
+          <a:p>
+            <a:pPr algn="r"/>
+            <a:r>
+              <a:rPr sz="900" b="1">
+                <a:solidFill>
+                  <a:srgbClr val="84888B"/>
+                </a:solidFill>
+                <a:latin typeface="맑은 고딕"/>
+              </a:rPr>
+              <a:t>13</a:t>
+            </a:r>
+          </a:p>
+        </p:txBody>
+      </p:sp>
     </p:spTree>
   </p:cSld>
   <p:clrMapOvr>

--- a/제안서/변동성하베스트펀드_AITop2_v1_20260715.pptx
+++ b/제안서/변동성하베스트펀드_AITop2_v1_20260715.pptx
@@ -10400,7 +10400,7 @@
                 </a:solidFill>
                 <a:latin typeface="맑은 고딕"/>
               </a:rPr>
-              <a:t>변동성 60% · 복제비율 110% 가정 · 점=시뮬 1회 · 노란선=구간 평균 · 데이터: 자체 시뮬레이션(거래비용·운용오차 포함)</a:t>
+              <a:t>변동성 60% 가정 · 점=시뮬 1회 · 노란선=구간 평균 · 데이터: 자체 시뮬레이션(거래비용·운용오차 포함)</a:t>
             </a:r>
           </a:p>
         </p:txBody>
@@ -15127,7 +15127,7 @@
                 </a:solidFill>
                 <a:latin typeface="맑은 고딕"/>
               </a:rPr>
-              <a:t>리밸런싱일 지수=100 기준 · 잔존만기별 편입비와 원금 대비 예상수익률 · 최대 편입비 100%</a:t>
+              <a:t>리밸런싱일 지수=100 기준 · 잔존만기별 편입비와 원금 대비 예상수익률 · 복제비율 110% · 최대 편입비 110%</a:t>
             </a:r>
           </a:p>
         </p:txBody>
@@ -15385,7 +15385,7 @@
                           </a:solidFill>
                           <a:latin typeface="맑은 고딕"/>
                         </a:rPr>
-                        <a:t>19%</a:t>
+                        <a:t>21%</a:t>
                       </a:r>
                     </a:p>
                   </a:txBody>
@@ -15408,7 +15408,7 @@
                           </a:solidFill>
                           <a:latin typeface="맑은 고딕"/>
                         </a:rPr>
-                        <a:t>18%</a:t>
+                        <a:t>20%</a:t>
                       </a:r>
                     </a:p>
                   </a:txBody>
@@ -15431,7 +15431,7 @@
                           </a:solidFill>
                           <a:latin typeface="맑은 고딕"/>
                         </a:rPr>
-                        <a:t>16%</a:t>
+                        <a:t>17%</a:t>
                       </a:r>
                     </a:p>
                   </a:txBody>
@@ -15454,7 +15454,7 @@
                           </a:solidFill>
                           <a:latin typeface="맑은 고딕"/>
                         </a:rPr>
-                        <a:t>10%</a:t>
+                        <a:t>11%</a:t>
                       </a:r>
                     </a:p>
                   </a:txBody>
@@ -15507,7 +15507,30 @@
                           </a:solidFill>
                           <a:latin typeface="맑은 고딕"/>
                         </a:rPr>
-                        <a:t>22%</a:t>
+                        <a:t>25%</a:t>
+                      </a:r>
+                    </a:p>
+                  </a:txBody>
+                  <a:tcPr marL="38100" marR="38100" marT="12700" marB="12700" anchor="ctr">
+                    <a:solidFill>
+                      <a:srgbClr val="EEF2F7"/>
+                    </a:solidFill>
+                  </a:tcPr>
+                </a:tc>
+                <a:tc>
+                  <a:txBody>
+                    <a:bodyPr/>
+                    <a:lstStyle/>
+                    <a:p>
+                      <a:pPr algn="ctr"/>
+                      <a:r>
+                        <a:rPr sz="1000" b="0">
+                          <a:solidFill>
+                            <a:srgbClr val="3A3A3A"/>
+                          </a:solidFill>
+                          <a:latin typeface="맑은 고딕"/>
+                        </a:rPr>
+                        <a:t>24%</a:t>
                       </a:r>
                     </a:p>
                   </a:txBody>
@@ -15553,30 +15576,7 @@
                           </a:solidFill>
                           <a:latin typeface="맑은 고딕"/>
                         </a:rPr>
-                        <a:t>20%</a:t>
-                      </a:r>
-                    </a:p>
-                  </a:txBody>
-                  <a:tcPr marL="38100" marR="38100" marT="12700" marB="12700" anchor="ctr">
-                    <a:solidFill>
-                      <a:srgbClr val="EEF2F7"/>
-                    </a:solidFill>
-                  </a:tcPr>
-                </a:tc>
-                <a:tc>
-                  <a:txBody>
-                    <a:bodyPr/>
-                    <a:lstStyle/>
-                    <a:p>
-                      <a:pPr algn="ctr"/>
-                      <a:r>
-                        <a:rPr sz="1000" b="0">
-                          <a:solidFill>
-                            <a:srgbClr val="3A3A3A"/>
-                          </a:solidFill>
-                          <a:latin typeface="맑은 고딕"/>
-                        </a:rPr>
-                        <a:t>15%</a:t>
+                        <a:t>17%</a:t>
                       </a:r>
                     </a:p>
                   </a:txBody>
@@ -15629,7 +15629,7 @@
                           </a:solidFill>
                           <a:latin typeface="맑은 고딕"/>
                         </a:rPr>
-                        <a:t>27%</a:t>
+                        <a:t>29%</a:t>
                       </a:r>
                     </a:p>
                   </a:txBody>
@@ -15652,7 +15652,7 @@
                           </a:solidFill>
                           <a:latin typeface="맑은 고딕"/>
                         </a:rPr>
-                        <a:t>27%</a:t>
+                        <a:t>29%</a:t>
                       </a:r>
                     </a:p>
                   </a:txBody>
@@ -15675,7 +15675,7 @@
                           </a:solidFill>
                           <a:latin typeface="맑은 고딕"/>
                         </a:rPr>
-                        <a:t>26%</a:t>
+                        <a:t>28%</a:t>
                       </a:r>
                     </a:p>
                   </a:txBody>
@@ -15698,7 +15698,7 @@
                           </a:solidFill>
                           <a:latin typeface="맑은 고딕"/>
                         </a:rPr>
-                        <a:t>22%</a:t>
+                        <a:t>25%</a:t>
                       </a:r>
                     </a:p>
                   </a:txBody>
@@ -15751,7 +15751,7 @@
                           </a:solidFill>
                           <a:latin typeface="맑은 고딕"/>
                         </a:rPr>
-                        <a:t>32%</a:t>
+                        <a:t>35%</a:t>
                       </a:r>
                     </a:p>
                   </a:txBody>
@@ -15774,7 +15774,7 @@
                           </a:solidFill>
                           <a:latin typeface="맑은 고딕"/>
                         </a:rPr>
-                        <a:t>32%</a:t>
+                        <a:t>35%</a:t>
                       </a:r>
                     </a:p>
                   </a:txBody>
@@ -15797,7 +15797,7 @@
                           </a:solidFill>
                           <a:latin typeface="맑은 고딕"/>
                         </a:rPr>
-                        <a:t>33%</a:t>
+                        <a:t>36%</a:t>
                       </a:r>
                     </a:p>
                   </a:txBody>
@@ -15820,7 +15820,7 @@
                           </a:solidFill>
                           <a:latin typeface="맑은 고딕"/>
                         </a:rPr>
-                        <a:t>32%</a:t>
+                        <a:t>35%</a:t>
                       </a:r>
                     </a:p>
                   </a:txBody>
@@ -15873,52 +15873,6 @@
                           </a:solidFill>
                           <a:latin typeface="맑은 고딕"/>
                         </a:rPr>
-                        <a:t>37%</a:t>
-                      </a:r>
-                    </a:p>
-                  </a:txBody>
-                  <a:tcPr marL="38100" marR="38100" marT="12700" marB="12700" anchor="ctr">
-                    <a:solidFill>
-                      <a:srgbClr val="FFFFFF"/>
-                    </a:solidFill>
-                  </a:tcPr>
-                </a:tc>
-                <a:tc>
-                  <a:txBody>
-                    <a:bodyPr/>
-                    <a:lstStyle/>
-                    <a:p>
-                      <a:pPr algn="ctr"/>
-                      <a:r>
-                        <a:rPr sz="1000" b="1">
-                          <a:solidFill>
-                            <a:srgbClr val="3A3A3A"/>
-                          </a:solidFill>
-                          <a:latin typeface="맑은 고딕"/>
-                        </a:rPr>
-                        <a:t>39%</a:t>
-                      </a:r>
-                    </a:p>
-                  </a:txBody>
-                  <a:tcPr marL="38100" marR="38100" marT="12700" marB="12700" anchor="ctr">
-                    <a:solidFill>
-                      <a:srgbClr val="FFFFFF"/>
-                    </a:solidFill>
-                  </a:tcPr>
-                </a:tc>
-                <a:tc>
-                  <a:txBody>
-                    <a:bodyPr/>
-                    <a:lstStyle/>
-                    <a:p>
-                      <a:pPr algn="ctr"/>
-                      <a:r>
-                        <a:rPr sz="1000" b="1">
-                          <a:solidFill>
-                            <a:srgbClr val="3A3A3A"/>
-                          </a:solidFill>
-                          <a:latin typeface="맑은 고딕"/>
-                        </a:rPr>
                         <a:t>41%</a:t>
                       </a:r>
                     </a:p>
@@ -15942,7 +15896,53 @@
                           </a:solidFill>
                           <a:latin typeface="맑은 고딕"/>
                         </a:rPr>
-                        <a:t>44%</a:t>
+                        <a:t>43%</a:t>
+                      </a:r>
+                    </a:p>
+                  </a:txBody>
+                  <a:tcPr marL="38100" marR="38100" marT="12700" marB="12700" anchor="ctr">
+                    <a:solidFill>
+                      <a:srgbClr val="FFFFFF"/>
+                    </a:solidFill>
+                  </a:tcPr>
+                </a:tc>
+                <a:tc>
+                  <a:txBody>
+                    <a:bodyPr/>
+                    <a:lstStyle/>
+                    <a:p>
+                      <a:pPr algn="ctr"/>
+                      <a:r>
+                        <a:rPr sz="1000" b="1">
+                          <a:solidFill>
+                            <a:srgbClr val="3A3A3A"/>
+                          </a:solidFill>
+                          <a:latin typeface="맑은 고딕"/>
+                        </a:rPr>
+                        <a:t>45%</a:t>
+                      </a:r>
+                    </a:p>
+                  </a:txBody>
+                  <a:tcPr marL="38100" marR="38100" marT="12700" marB="12700" anchor="ctr">
+                    <a:solidFill>
+                      <a:srgbClr val="FFFFFF"/>
+                    </a:solidFill>
+                  </a:tcPr>
+                </a:tc>
+                <a:tc>
+                  <a:txBody>
+                    <a:bodyPr/>
+                    <a:lstStyle/>
+                    <a:p>
+                      <a:pPr algn="ctr"/>
+                      <a:r>
+                        <a:rPr sz="1000" b="1">
+                          <a:solidFill>
+                            <a:srgbClr val="3A3A3A"/>
+                          </a:solidFill>
+                          <a:latin typeface="맑은 고딕"/>
+                        </a:rPr>
+                        <a:t>48%</a:t>
                       </a:r>
                     </a:p>
                   </a:txBody>
@@ -15995,7 +15995,7 @@
                           </a:solidFill>
                           <a:latin typeface="맑은 고딕"/>
                         </a:rPr>
-                        <a:t>44%</a:t>
+                        <a:t>48%</a:t>
                       </a:r>
                     </a:p>
                   </a:txBody>
@@ -16018,7 +16018,7 @@
                           </a:solidFill>
                           <a:latin typeface="맑은 고딕"/>
                         </a:rPr>
-                        <a:t>47%</a:t>
+                        <a:t>52%</a:t>
                       </a:r>
                     </a:p>
                   </a:txBody>
@@ -16041,7 +16041,7 @@
                           </a:solidFill>
                           <a:latin typeface="맑은 고딕"/>
                         </a:rPr>
-                        <a:t>51%</a:t>
+                        <a:t>56%</a:t>
                       </a:r>
                     </a:p>
                   </a:txBody>
@@ -16064,7 +16064,7 @@
                           </a:solidFill>
                           <a:latin typeface="맑은 고딕"/>
                         </a:rPr>
-                        <a:t>58%</a:t>
+                        <a:t>63%</a:t>
                       </a:r>
                     </a:p>
                   </a:txBody>
@@ -16117,7 +16117,7 @@
                           </a:solidFill>
                           <a:latin typeface="맑은 고딕"/>
                         </a:rPr>
-                        <a:t>52%</a:t>
+                        <a:t>57%</a:t>
                       </a:r>
                     </a:p>
                   </a:txBody>
@@ -16140,7 +16140,7 @@
                           </a:solidFill>
                           <a:latin typeface="맑은 고딕"/>
                         </a:rPr>
-                        <a:t>56%</a:t>
+                        <a:t>61%</a:t>
                       </a:r>
                     </a:p>
                   </a:txBody>
@@ -16163,7 +16163,7 @@
                           </a:solidFill>
                           <a:latin typeface="맑은 고딕"/>
                         </a:rPr>
-                        <a:t>62%</a:t>
+                        <a:t>68%</a:t>
                       </a:r>
                     </a:p>
                   </a:txBody>
@@ -16186,7 +16186,7 @@
                           </a:solidFill>
                           <a:latin typeface="맑은 고딕"/>
                         </a:rPr>
-                        <a:t>72%</a:t>
+                        <a:t>79%</a:t>
                       </a:r>
                     </a:p>
                   </a:txBody>
@@ -16239,7 +16239,7 @@
                           </a:solidFill>
                           <a:latin typeface="맑은 고딕"/>
                         </a:rPr>
-                        <a:t>60%</a:t>
+                        <a:t>66%</a:t>
                       </a:r>
                     </a:p>
                   </a:txBody>
@@ -16262,7 +16262,7 @@
                           </a:solidFill>
                           <a:latin typeface="맑은 고딕"/>
                         </a:rPr>
-                        <a:t>65%</a:t>
+                        <a:t>72%</a:t>
                       </a:r>
                     </a:p>
                   </a:txBody>
@@ -16285,7 +16285,7 @@
                           </a:solidFill>
                           <a:latin typeface="맑은 고딕"/>
                         </a:rPr>
-                        <a:t>73%</a:t>
+                        <a:t>80%</a:t>
                       </a:r>
                     </a:p>
                   </a:txBody>
@@ -16308,7 +16308,7 @@
                           </a:solidFill>
                           <a:latin typeface="맑은 고딕"/>
                         </a:rPr>
-                        <a:t>85%</a:t>
+                        <a:t>93%</a:t>
                       </a:r>
                     </a:p>
                   </a:txBody>
@@ -16361,30 +16361,7 @@
                           </a:solidFill>
                           <a:latin typeface="맑은 고딕"/>
                         </a:rPr>
-                        <a:t>69%</a:t>
-                      </a:r>
-                    </a:p>
-                  </a:txBody>
-                  <a:tcPr marL="38100" marR="38100" marT="12700" marB="12700" anchor="ctr">
-                    <a:solidFill>
-                      <a:srgbClr val="FFFFFF"/>
-                    </a:solidFill>
-                  </a:tcPr>
-                </a:tc>
-                <a:tc>
-                  <a:txBody>
-                    <a:bodyPr/>
-                    <a:lstStyle/>
-                    <a:p>
-                      <a:pPr algn="ctr"/>
-                      <a:r>
-                        <a:rPr sz="1000" b="0">
-                          <a:solidFill>
-                            <a:srgbClr val="3A3A3A"/>
-                          </a:solidFill>
-                          <a:latin typeface="맑은 고딕"/>
-                        </a:rPr>
-                        <a:t>75%</a:t>
+                        <a:t>76%</a:t>
                       </a:r>
                     </a:p>
                   </a:txBody>
@@ -16430,7 +16407,30 @@
                           </a:solidFill>
                           <a:latin typeface="맑은 고딕"/>
                         </a:rPr>
-                        <a:t>93%</a:t>
+                        <a:t>91%</a:t>
+                      </a:r>
+                    </a:p>
+                  </a:txBody>
+                  <a:tcPr marL="38100" marR="38100" marT="12700" marB="12700" anchor="ctr">
+                    <a:solidFill>
+                      <a:srgbClr val="FFFFFF"/>
+                    </a:solidFill>
+                  </a:tcPr>
+                </a:tc>
+                <a:tc>
+                  <a:txBody>
+                    <a:bodyPr/>
+                    <a:lstStyle/>
+                    <a:p>
+                      <a:pPr algn="ctr"/>
+                      <a:r>
+                        <a:rPr sz="1000" b="0">
+                          <a:solidFill>
+                            <a:srgbClr val="3A3A3A"/>
+                          </a:solidFill>
+                          <a:latin typeface="맑은 고딕"/>
+                        </a:rPr>
+                        <a:t>103%</a:t>
                       </a:r>
                     </a:p>
                   </a:txBody>
@@ -16730,7 +16730,7 @@
                           </a:solidFill>
                           <a:latin typeface="맑은 고딕"/>
                         </a:rPr>
-                        <a:t>+10.8%</a:t>
+                        <a:t>+11.9%</a:t>
                       </a:r>
                     </a:p>
                   </a:txBody>
@@ -16753,30 +16753,7 @@
                           </a:solidFill>
                           <a:latin typeface="맑은 고딕"/>
                         </a:rPr>
-                        <a:t>+13.9%</a:t>
-                      </a:r>
-                    </a:p>
-                  </a:txBody>
-                  <a:tcPr marL="38100" marR="38100" marT="12700" marB="12700" anchor="ctr">
-                    <a:solidFill>
-                      <a:srgbClr val="FFFFFF"/>
-                    </a:solidFill>
-                  </a:tcPr>
-                </a:tc>
-                <a:tc>
-                  <a:txBody>
-                    <a:bodyPr/>
-                    <a:lstStyle/>
-                    <a:p>
-                      <a:pPr algn="ctr"/>
-                      <a:r>
-                        <a:rPr sz="1000" b="0">
-                          <a:solidFill>
-                            <a:srgbClr val="3A3A3A"/>
-                          </a:solidFill>
-                          <a:latin typeface="맑은 고딕"/>
-                        </a:rPr>
-                        <a:t>+17.3%</a:t>
+                        <a:t>+15.3%</a:t>
                       </a:r>
                     </a:p>
                   </a:txBody>
@@ -16799,7 +16776,30 @@
                           </a:solidFill>
                           <a:latin typeface="맑은 고딕"/>
                         </a:rPr>
-                        <a:t>+21.1%</a:t>
+                        <a:t>+19.1%</a:t>
+                      </a:r>
+                    </a:p>
+                  </a:txBody>
+                  <a:tcPr marL="38100" marR="38100" marT="12700" marB="12700" anchor="ctr">
+                    <a:solidFill>
+                      <a:srgbClr val="FBDDB9"/>
+                    </a:solidFill>
+                  </a:tcPr>
+                </a:tc>
+                <a:tc>
+                  <a:txBody>
+                    <a:bodyPr/>
+                    <a:lstStyle/>
+                    <a:p>
+                      <a:pPr algn="ctr"/>
+                      <a:r>
+                        <a:rPr sz="1000" b="0">
+                          <a:solidFill>
+                            <a:srgbClr val="3A3A3A"/>
+                          </a:solidFill>
+                          <a:latin typeface="맑은 고딕"/>
+                        </a:rPr>
+                        <a:t>+23.2%</a:t>
                       </a:r>
                     </a:p>
                   </a:txBody>
@@ -16852,7 +16852,7 @@
                           </a:solidFill>
                           <a:latin typeface="맑은 고딕"/>
                         </a:rPr>
-                        <a:t>+8.8%</a:t>
+                        <a:t>+9.7%</a:t>
                       </a:r>
                     </a:p>
                   </a:txBody>
@@ -16875,7 +16875,7 @@
                           </a:solidFill>
                           <a:latin typeface="맑은 고딕"/>
                         </a:rPr>
-                        <a:t>+11.9%</a:t>
+                        <a:t>+13.1%</a:t>
                       </a:r>
                     </a:p>
                   </a:txBody>
@@ -16898,7 +16898,7 @@
                           </a:solidFill>
                           <a:latin typeface="맑은 고딕"/>
                         </a:rPr>
-                        <a:t>+15.6%</a:t>
+                        <a:t>+17.1%</a:t>
                       </a:r>
                     </a:p>
                   </a:txBody>
@@ -16921,7 +16921,7 @@
                           </a:solidFill>
                           <a:latin typeface="맑은 고딕"/>
                         </a:rPr>
-                        <a:t>+19.9%</a:t>
+                        <a:t>+21.9%</a:t>
                       </a:r>
                     </a:p>
                   </a:txBody>
@@ -16974,7 +16974,7 @@
                           </a:solidFill>
                           <a:latin typeface="맑은 고딕"/>
                         </a:rPr>
-                        <a:t>+6.3%</a:t>
+                        <a:t>+7.0%</a:t>
                       </a:r>
                     </a:p>
                   </a:txBody>
@@ -16997,7 +16997,7 @@
                           </a:solidFill>
                           <a:latin typeface="맑은 고딕"/>
                         </a:rPr>
-                        <a:t>+9.5%</a:t>
+                        <a:t>+10.5%</a:t>
                       </a:r>
                     </a:p>
                   </a:txBody>
@@ -17020,7 +17020,7 @@
                           </a:solidFill>
                           <a:latin typeface="맑은 고딕"/>
                         </a:rPr>
-                        <a:t>+13.3%</a:t>
+                        <a:t>+14.6%</a:t>
                       </a:r>
                     </a:p>
                   </a:txBody>
@@ -17043,7 +17043,7 @@
                           </a:solidFill>
                           <a:latin typeface="맑은 고딕"/>
                         </a:rPr>
-                        <a:t>+18.0%</a:t>
+                        <a:t>+19.8%</a:t>
                       </a:r>
                     </a:p>
                   </a:txBody>
@@ -17096,7 +17096,7 @@
                           </a:solidFill>
                           <a:latin typeface="맑은 고딕"/>
                         </a:rPr>
-                        <a:t>+3.4%</a:t>
+                        <a:t>+3.8%</a:t>
                       </a:r>
                     </a:p>
                   </a:txBody>
@@ -17119,7 +17119,7 @@
                           </a:solidFill>
                           <a:latin typeface="맑은 고딕"/>
                         </a:rPr>
-                        <a:t>+6.6%</a:t>
+                        <a:t>+7.2%</a:t>
                       </a:r>
                     </a:p>
                   </a:txBody>
@@ -17142,7 +17142,7 @@
                           </a:solidFill>
                           <a:latin typeface="맑은 고딕"/>
                         </a:rPr>
-                        <a:t>+10.4%</a:t>
+                        <a:t>+11.4%</a:t>
                       </a:r>
                     </a:p>
                   </a:txBody>
@@ -17165,7 +17165,7 @@
                           </a:solidFill>
                           <a:latin typeface="맑은 고딕"/>
                         </a:rPr>
-                        <a:t>+15.3%</a:t>
+                        <a:t>+16.9%</a:t>
                       </a:r>
                     </a:p>
                   </a:txBody>
@@ -17241,7 +17241,7 @@
                           </a:solidFill>
                           <a:latin typeface="맑은 고딕"/>
                         </a:rPr>
-                        <a:t>+3.0%</a:t>
+                        <a:t>+3.3%</a:t>
                       </a:r>
                     </a:p>
                   </a:txBody>
@@ -17264,7 +17264,7 @@
                           </a:solidFill>
                           <a:latin typeface="맑은 고딕"/>
                         </a:rPr>
-                        <a:t>+6.7%</a:t>
+                        <a:t>+7.4%</a:t>
                       </a:r>
                     </a:p>
                   </a:txBody>
@@ -17287,7 +17287,7 @@
                           </a:solidFill>
                           <a:latin typeface="맑은 고딕"/>
                         </a:rPr>
-                        <a:t>+11.6%</a:t>
+                        <a:t>+12.7%</a:t>
                       </a:r>
                     </a:p>
                   </a:txBody>
@@ -17340,7 +17340,7 @@
                           </a:solidFill>
                           <a:latin typeface="맑은 고딕"/>
                         </a:rPr>
-                        <a:t>-4.1%</a:t>
+                        <a:t>-4.5%</a:t>
                       </a:r>
                     </a:p>
                   </a:txBody>
@@ -17363,7 +17363,7 @@
                           </a:solidFill>
                           <a:latin typeface="맑은 고딕"/>
                         </a:rPr>
-                        <a:t>-1.3%</a:t>
+                        <a:t>-1.4%</a:t>
                       </a:r>
                     </a:p>
                   </a:txBody>
@@ -17386,7 +17386,7 @@
                           </a:solidFill>
                           <a:latin typeface="맑은 고딕"/>
                         </a:rPr>
-                        <a:t>+2.1%</a:t>
+                        <a:t>+2.3%</a:t>
                       </a:r>
                     </a:p>
                   </a:txBody>
@@ -17409,7 +17409,7 @@
                           </a:solidFill>
                           <a:latin typeface="맑은 고딕"/>
                         </a:rPr>
-                        <a:t>+6.5%</a:t>
+                        <a:t>+7.2%</a:t>
                       </a:r>
                     </a:p>
                   </a:txBody>
@@ -17462,7 +17462,7 @@
                           </a:solidFill>
                           <a:latin typeface="맑은 고딕"/>
                         </a:rPr>
-                        <a:t>-8.8%</a:t>
+                        <a:t>-9.7%</a:t>
                       </a:r>
                     </a:p>
                   </a:txBody>
@@ -17485,7 +17485,7 @@
                           </a:solidFill>
                           <a:latin typeface="맑은 고딕"/>
                         </a:rPr>
-                        <a:t>-6.4%</a:t>
+                        <a:t>-7.0%</a:t>
                       </a:r>
                     </a:p>
                   </a:txBody>
@@ -17508,7 +17508,7 @@
                           </a:solidFill>
                           <a:latin typeface="맑은 고딕"/>
                         </a:rPr>
-                        <a:t>-3.5%</a:t>
+                        <a:t>-3.8%</a:t>
                       </a:r>
                     </a:p>
                   </a:txBody>
@@ -17531,7 +17531,7 @@
                           </a:solidFill>
                           <a:latin typeface="맑은 고딕"/>
                         </a:rPr>
-                        <a:t>+0.0%</a:t>
+                        <a:t>+0.1%</a:t>
                       </a:r>
                     </a:p>
                   </a:txBody>
@@ -17584,7 +17584,7 @@
                           </a:solidFill>
                           <a:latin typeface="맑은 고딕"/>
                         </a:rPr>
-                        <a:t>-14.4%</a:t>
+                        <a:t>-15.8%</a:t>
                       </a:r>
                     </a:p>
                   </a:txBody>
@@ -17607,7 +17607,7 @@
                           </a:solidFill>
                           <a:latin typeface="맑은 고딕"/>
                         </a:rPr>
-                        <a:t>-12.4%</a:t>
+                        <a:t>-13.7%</a:t>
                       </a:r>
                     </a:p>
                   </a:txBody>
@@ -17630,7 +17630,7 @@
                           </a:solidFill>
                           <a:latin typeface="맑은 고딕"/>
                         </a:rPr>
-                        <a:t>-10.2%</a:t>
+                        <a:t>-11.2%</a:t>
                       </a:r>
                     </a:p>
                   </a:txBody>
@@ -17653,7 +17653,7 @@
                           </a:solidFill>
                           <a:latin typeface="맑은 고딕"/>
                         </a:rPr>
-                        <a:t>-7.8%</a:t>
+                        <a:t>-8.6%</a:t>
                       </a:r>
                     </a:p>
                   </a:txBody>
@@ -17706,7 +17706,7 @@
                           </a:solidFill>
                           <a:latin typeface="맑은 고딕"/>
                         </a:rPr>
-                        <a:t>-20.9%</a:t>
+                        <a:t>-22.9%</a:t>
                       </a:r>
                     </a:p>
                   </a:txBody>
@@ -17729,7 +17729,7 @@
                           </a:solidFill>
                           <a:latin typeface="맑은 고딕"/>
                         </a:rPr>
-                        <a:t>-19.4%</a:t>
+                        <a:t>-21.4%</a:t>
                       </a:r>
                     </a:p>
                   </a:txBody>
@@ -17752,7 +17752,7 @@
                           </a:solidFill>
                           <a:latin typeface="맑은 고딕"/>
                         </a:rPr>
-                        <a:t>-18.0%</a:t>
+                        <a:t>-19.8%</a:t>
                       </a:r>
                     </a:p>
                   </a:txBody>
@@ -17775,7 +17775,7 @@
                           </a:solidFill>
                           <a:latin typeface="맑은 고딕"/>
                         </a:rPr>
-                        <a:t>-16.7%</a:t>
+                        <a:t>-18.4%</a:t>
                       </a:r>
                     </a:p>
                   </a:txBody>

--- a/제안서/변동성하베스트펀드_AITop2_v1_20260715.pptx
+++ b/제안서/변동성하베스트펀드_AITop2_v1_20260715.pptx
@@ -10335,8 +10335,8 @@
         </p:nvSpPr>
         <p:spPr>
           <a:xfrm>
-            <a:off x="685800" y="960120"/>
-            <a:ext cx="8686800" cy="365760"/>
+            <a:off x="731520" y="1065839"/>
+            <a:ext cx="8686800" cy="410369"/>
           </a:xfrm>
           <a:prstGeom prst="rect">
             <a:avLst/>
@@ -10355,14 +10355,146 @@
               </a:lnSpc>
             </a:pPr>
             <a:r>
-              <a:rPr sz="1250" b="1">
+              <a:rPr sz="1250" b="1" dirty="0" err="1">
                 <a:solidFill>
                   <a:srgbClr val="3A3A3A"/>
                 </a:solidFill>
                 <a:latin typeface="맑은 고딕"/>
               </a:rPr>
-              <a:t>운용 중 -40% 미도달 시 상승에 참여, -40% 도달 시 하방에 노출됩니다. 시뮬레이션 결과(각 점=1회).</a:t>
-            </a:r>
+              <a:t>운용</a:t>
+            </a:r>
+            <a:r>
+              <a:rPr sz="1250" b="1" dirty="0">
+                <a:solidFill>
+                  <a:srgbClr val="3A3A3A"/>
+                </a:solidFill>
+                <a:latin typeface="맑은 고딕"/>
+              </a:rPr>
+              <a:t> 중 -40% </a:t>
+            </a:r>
+            <a:r>
+              <a:rPr sz="1250" b="1" dirty="0" err="1">
+                <a:solidFill>
+                  <a:srgbClr val="3A3A3A"/>
+                </a:solidFill>
+                <a:latin typeface="맑은 고딕"/>
+              </a:rPr>
+              <a:t>미도달</a:t>
+            </a:r>
+            <a:r>
+              <a:rPr sz="1250" b="1" dirty="0">
+                <a:solidFill>
+                  <a:srgbClr val="3A3A3A"/>
+                </a:solidFill>
+                <a:latin typeface="맑은 고딕"/>
+              </a:rPr>
+              <a:t> 시</a:t>
+            </a:r>
+            <a:r>
+              <a:rPr lang="en-US" sz="1250" b="1" dirty="0">
+                <a:solidFill>
+                  <a:srgbClr val="3A3A3A"/>
+                </a:solidFill>
+                <a:latin typeface="맑은 고딕"/>
+              </a:rPr>
+              <a:t> </a:t>
+            </a:r>
+            <a:r>
+              <a:rPr lang="ko-KR" altLang="en-US" sz="1250" b="1" dirty="0">
+                <a:solidFill>
+                  <a:srgbClr val="3A3A3A"/>
+                </a:solidFill>
+                <a:latin typeface="맑은 고딕"/>
+              </a:rPr>
+              <a:t>변동성 및 </a:t>
+            </a:r>
+            <a:r>
+              <a:rPr sz="1250" b="1" dirty="0" err="1">
+                <a:solidFill>
+                  <a:srgbClr val="3A3A3A"/>
+                </a:solidFill>
+                <a:latin typeface="맑은 고딕"/>
+              </a:rPr>
+              <a:t>상승에</a:t>
+            </a:r>
+            <a:r>
+              <a:rPr sz="1250" b="1" dirty="0">
+                <a:solidFill>
+                  <a:srgbClr val="3A3A3A"/>
+                </a:solidFill>
+                <a:latin typeface="맑은 고딕"/>
+              </a:rPr>
+              <a:t> </a:t>
+            </a:r>
+            <a:r>
+              <a:rPr sz="1250" b="1" dirty="0" err="1">
+                <a:solidFill>
+                  <a:srgbClr val="3A3A3A"/>
+                </a:solidFill>
+                <a:latin typeface="맑은 고딕"/>
+              </a:rPr>
+              <a:t>참여</a:t>
+            </a:r>
+            <a:r>
+              <a:rPr lang="ko-KR" altLang="en-US" sz="1250" b="1" dirty="0">
+                <a:solidFill>
+                  <a:srgbClr val="3A3A3A"/>
+                </a:solidFill>
+                <a:latin typeface="맑은 고딕"/>
+              </a:rPr>
+              <a:t>하기 위한 운용이 진행되며 </a:t>
+            </a:r>
+            <a:r>
+              <a:rPr sz="1250" b="1" dirty="0">
+                <a:solidFill>
+                  <a:srgbClr val="3A3A3A"/>
+                </a:solidFill>
+                <a:latin typeface="맑은 고딕"/>
+              </a:rPr>
+              <a:t>, -40% </a:t>
+            </a:r>
+            <a:r>
+              <a:rPr sz="1250" b="1" dirty="0" err="1">
+                <a:solidFill>
+                  <a:srgbClr val="3A3A3A"/>
+                </a:solidFill>
+                <a:latin typeface="맑은 고딕"/>
+              </a:rPr>
+              <a:t>도달</a:t>
+            </a:r>
+            <a:r>
+              <a:rPr sz="1250" b="1" dirty="0">
+                <a:solidFill>
+                  <a:srgbClr val="3A3A3A"/>
+                </a:solidFill>
+                <a:latin typeface="맑은 고딕"/>
+              </a:rPr>
+              <a:t> 시 </a:t>
+            </a:r>
+            <a:r>
+              <a:rPr lang="ko-KR" altLang="en-US" sz="1250" b="1" dirty="0">
+                <a:solidFill>
+                  <a:srgbClr val="3A3A3A"/>
+                </a:solidFill>
+                <a:latin typeface="맑은 고딕"/>
+              </a:rPr>
+              <a:t>변동성 매매보다는 상승에 참여하기 위해 주식형과 유사하게  운용됩니다</a:t>
+            </a:r>
+            <a:r>
+              <a:rPr lang="en-US" altLang="ko-KR" sz="1250" b="1" dirty="0">
+                <a:solidFill>
+                  <a:srgbClr val="3A3A3A"/>
+                </a:solidFill>
+                <a:latin typeface="맑은 고딕"/>
+              </a:rPr>
+              <a:t>.</a:t>
+            </a:r>
+            <a:endParaRPr sz="1250" b="1" dirty="0">
+              <a:solidFill>
+                <a:srgbClr val="3A3A3A"/>
+              </a:solidFill>
+              <a:latin typeface="맑은 고딕"/>
+            </a:endParaRPr>
           </a:p>
         </p:txBody>
       </p:sp>
@@ -10400,7 +10532,7 @@
                 </a:solidFill>
                 <a:latin typeface="맑은 고딕"/>
               </a:rPr>
-              <a:t>변동성 60% 가정 · 점=시뮬 1회 · 노란선=구간 평균 · 데이터: 자체 시뮬레이션(거래비용·운용오차 포함)</a:t>
+              <a:t>변동성 60% 가정 · 점=시뮬 1회 · 노란선=구간 평균 · 데이터: 자체 시뮬레이션(매매비용 5bp·운용오차 포함)</a:t>
             </a:r>
           </a:p>
         </p:txBody>
@@ -10835,8 +10967,8 @@
         </p:blipFill>
         <p:spPr>
           <a:xfrm>
-            <a:off x="320040" y="1417321"/>
-            <a:ext cx="4526280" cy="3650039"/>
+            <a:off x="320040" y="1530037"/>
+            <a:ext cx="4526280" cy="3438321"/>
           </a:xfrm>
           <a:prstGeom prst="rect">
             <a:avLst/>
@@ -10859,8 +10991,8 @@
         </p:blipFill>
         <p:spPr>
           <a:xfrm>
-            <a:off x="4983480" y="1417321"/>
-            <a:ext cx="4526280" cy="3650039"/>
+            <a:off x="4983480" y="1530037"/>
+            <a:ext cx="4526280" cy="3438321"/>
           </a:xfrm>
           <a:prstGeom prst="rect">
             <a:avLst/>
@@ -11030,7 +11162,7 @@
         <p:spPr>
           <a:xfrm>
             <a:off x="685800" y="731520"/>
-            <a:ext cx="8686800" cy="502920"/>
+            <a:ext cx="8686800" cy="379591"/>
           </a:xfrm>
           <a:prstGeom prst="rect">
             <a:avLst/>
@@ -11049,14 +11181,92 @@
               </a:lnSpc>
             </a:pPr>
             <a:r>
-              <a:rPr sz="2300" b="1">
+              <a:rPr lang="ko-KR" altLang="en-US" sz="2300" b="1" dirty="0">
                 <a:solidFill>
                   <a:srgbClr val="043B72"/>
                 </a:solidFill>
                 <a:latin typeface="맑은 고딕"/>
               </a:rPr>
-              <a:t>지수대별 실제 편입비·예상수익률 — 성장변동성펀드</a:t>
-            </a:r>
+              <a:t>수익구조</a:t>
+            </a:r>
+            <a:r>
+              <a:rPr lang="en-US" altLang="ko-KR" sz="2300" b="1" dirty="0">
+                <a:solidFill>
+                  <a:srgbClr val="043B72"/>
+                </a:solidFill>
+                <a:latin typeface="맑은 고딕"/>
+              </a:rPr>
+              <a:t>1 - </a:t>
+            </a:r>
+            <a:r>
+              <a:rPr sz="2300" b="1" dirty="0" err="1">
+                <a:solidFill>
+                  <a:srgbClr val="043B72"/>
+                </a:solidFill>
+                <a:latin typeface="맑은 고딕"/>
+              </a:rPr>
+              <a:t>지수대별</a:t>
+            </a:r>
+            <a:r>
+              <a:rPr sz="2300" b="1" dirty="0">
+                <a:solidFill>
+                  <a:srgbClr val="043B72"/>
+                </a:solidFill>
+                <a:latin typeface="맑은 고딕"/>
+              </a:rPr>
+              <a:t> </a:t>
+            </a:r>
+            <a:r>
+              <a:rPr sz="2300" b="1" dirty="0" err="1">
+                <a:solidFill>
+                  <a:srgbClr val="043B72"/>
+                </a:solidFill>
+                <a:latin typeface="맑은 고딕"/>
+              </a:rPr>
+              <a:t>실제</a:t>
+            </a:r>
+            <a:r>
+              <a:rPr sz="2300" b="1" dirty="0">
+                <a:solidFill>
+                  <a:srgbClr val="043B72"/>
+                </a:solidFill>
+                <a:latin typeface="맑은 고딕"/>
+              </a:rPr>
+              <a:t> </a:t>
+            </a:r>
+            <a:r>
+              <a:rPr sz="2300" b="1" dirty="0" err="1">
+                <a:solidFill>
+                  <a:srgbClr val="043B72"/>
+                </a:solidFill>
+                <a:latin typeface="맑은 고딕"/>
+              </a:rPr>
+              <a:t>편입비·예상수익률</a:t>
+            </a:r>
+            <a:r>
+              <a:rPr sz="2300" b="1" dirty="0">
+                <a:solidFill>
+                  <a:srgbClr val="043B72"/>
+                </a:solidFill>
+                <a:latin typeface="맑은 고딕"/>
+              </a:rPr>
+              <a:t> — </a:t>
+            </a:r>
+            <a:r>
+              <a:rPr sz="2300" b="1" dirty="0" err="1">
+                <a:solidFill>
+                  <a:srgbClr val="043B72"/>
+                </a:solidFill>
+                <a:latin typeface="맑은 고딕"/>
+              </a:rPr>
+              <a:t>성장변동성펀드</a:t>
+            </a:r>
+            <a:endParaRPr sz="2300" b="1" dirty="0">
+              <a:solidFill>
+                <a:srgbClr val="043B72"/>
+              </a:solidFill>
+              <a:latin typeface="맑은 고딕"/>
+            </a:endParaRPr>
           </a:p>
         </p:txBody>
       </p:sp>
@@ -12720,7 +12930,7 @@
                           </a:solidFill>
                           <a:latin typeface="맑은 고딕"/>
                         </a:rPr>
-                        <a:t>+23.2%</a:t>
+                        <a:t>+23.1%</a:t>
                       </a:r>
                     </a:p>
                   </a:txBody>
@@ -12743,7 +12953,7 @@
                           </a:solidFill>
                           <a:latin typeface="맑은 고딕"/>
                         </a:rPr>
-                        <a:t>+28.0%</a:t>
+                        <a:t>+27.8%</a:t>
                       </a:r>
                     </a:p>
                   </a:txBody>
@@ -12766,7 +12976,7 @@
                           </a:solidFill>
                           <a:latin typeface="맑은 고딕"/>
                         </a:rPr>
-                        <a:t>+32.8%</a:t>
+                        <a:t>+32.4%</a:t>
                       </a:r>
                     </a:p>
                   </a:txBody>
@@ -12842,7 +13052,7 @@
                           </a:solidFill>
                           <a:latin typeface="맑은 고딕"/>
                         </a:rPr>
-                        <a:t>+19.3%</a:t>
+                        <a:t>+19.2%</a:t>
                       </a:r>
                     </a:p>
                   </a:txBody>
@@ -12865,7 +13075,7 @@
                           </a:solidFill>
                           <a:latin typeface="맑은 고딕"/>
                         </a:rPr>
-                        <a:t>+24.2%</a:t>
+                        <a:t>+23.9%</a:t>
                       </a:r>
                     </a:p>
                   </a:txBody>
@@ -12888,7 +13098,7 @@
                           </a:solidFill>
                           <a:latin typeface="맑은 고딕"/>
                         </a:rPr>
-                        <a:t>+28.8%</a:t>
+                        <a:t>+28.4%</a:t>
                       </a:r>
                     </a:p>
                   </a:txBody>
@@ -12964,7 +13174,7 @@
                           </a:solidFill>
                           <a:latin typeface="맑은 고딕"/>
                         </a:rPr>
-                        <a:t>+14.8%</a:t>
+                        <a:t>+14.7%</a:t>
                       </a:r>
                     </a:p>
                   </a:txBody>
@@ -12987,7 +13197,7 @@
                           </a:solidFill>
                           <a:latin typeface="맑은 고딕"/>
                         </a:rPr>
-                        <a:t>+19.7%</a:t>
+                        <a:t>+19.4%</a:t>
                       </a:r>
                     </a:p>
                   </a:txBody>
@@ -13010,7 +13220,7 @@
                           </a:solidFill>
                           <a:latin typeface="맑은 고딕"/>
                         </a:rPr>
-                        <a:t>+24.3%</a:t>
+                        <a:t>+23.9%</a:t>
                       </a:r>
                     </a:p>
                   </a:txBody>
@@ -13086,7 +13296,7 @@
                           </a:solidFill>
                           <a:latin typeface="맑은 고딕"/>
                         </a:rPr>
-                        <a:t>+9.6%</a:t>
+                        <a:t>+9.5%</a:t>
                       </a:r>
                     </a:p>
                   </a:txBody>
@@ -13109,7 +13319,7 @@
                           </a:solidFill>
                           <a:latin typeface="맑은 고딕"/>
                         </a:rPr>
-                        <a:t>+14.4%</a:t>
+                        <a:t>+14.1%</a:t>
                       </a:r>
                     </a:p>
                   </a:txBody>
@@ -13132,7 +13342,7 @@
                           </a:solidFill>
                           <a:latin typeface="맑은 고딕"/>
                         </a:rPr>
-                        <a:t>+19.3%</a:t>
+                        <a:t>+18.9%</a:t>
                       </a:r>
                     </a:p>
                   </a:txBody>
@@ -13208,7 +13418,7 @@
                           </a:solidFill>
                           <a:latin typeface="맑은 고딕"/>
                         </a:rPr>
-                        <a:t>+3.7%</a:t>
+                        <a:t>+3.5%</a:t>
                       </a:r>
                     </a:p>
                   </a:txBody>
@@ -13231,7 +13441,7 @@
                           </a:solidFill>
                           <a:latin typeface="맑은 고딕"/>
                         </a:rPr>
-                        <a:t>+8.2%</a:t>
+                        <a:t>+7.9%</a:t>
                       </a:r>
                     </a:p>
                   </a:txBody>
@@ -13254,7 +13464,7 @@
                           </a:solidFill>
                           <a:latin typeface="맑은 고딕"/>
                         </a:rPr>
-                        <a:t>+13.6%</a:t>
+                        <a:t>+13.3%</a:t>
                       </a:r>
                     </a:p>
                   </a:txBody>
@@ -13330,7 +13540,7 @@
                           </a:solidFill>
                           <a:latin typeface="맑은 고딕"/>
                         </a:rPr>
-                        <a:t>-3.2%</a:t>
+                        <a:t>-3.3%</a:t>
                       </a:r>
                     </a:p>
                   </a:txBody>
@@ -13353,7 +13563,7 @@
                           </a:solidFill>
                           <a:latin typeface="맑은 고딕"/>
                         </a:rPr>
-                        <a:t>+0.9%</a:t>
+                        <a:t>+0.6%</a:t>
                       </a:r>
                     </a:p>
                   </a:txBody>
@@ -13376,7 +13586,7 @@
                           </a:solidFill>
                           <a:latin typeface="맑은 고딕"/>
                         </a:rPr>
-                        <a:t>+6.8%</a:t>
+                        <a:t>+6.4%</a:t>
                       </a:r>
                     </a:p>
                   </a:txBody>
@@ -13452,7 +13662,7 @@
                           </a:solidFill>
                           <a:latin typeface="맑은 고딕"/>
                         </a:rPr>
-                        <a:t>-11.0%</a:t>
+                        <a:t>-11.2%</a:t>
                       </a:r>
                     </a:p>
                   </a:txBody>
@@ -13475,7 +13685,7 @@
                           </a:solidFill>
                           <a:latin typeface="맑은 고딕"/>
                         </a:rPr>
-                        <a:t>-7.8%</a:t>
+                        <a:t>-8.0%</a:t>
                       </a:r>
                     </a:p>
                   </a:txBody>
@@ -13498,7 +13708,7 @@
                           </a:solidFill>
                           <a:latin typeface="맑은 고딕"/>
                         </a:rPr>
-                        <a:t>-2.1%</a:t>
+                        <a:t>-2.4%</a:t>
                       </a:r>
                     </a:p>
                   </a:txBody>
@@ -13574,7 +13784,7 @@
                           </a:solidFill>
                           <a:latin typeface="맑은 고딕"/>
                         </a:rPr>
-                        <a:t>-19.8%</a:t>
+                        <a:t>-20.0%</a:t>
                       </a:r>
                     </a:p>
                   </a:txBody>
@@ -13597,7 +13807,7 @@
                           </a:solidFill>
                           <a:latin typeface="맑은 고딕"/>
                         </a:rPr>
-                        <a:t>-17.7%</a:t>
+                        <a:t>-18.0%</a:t>
                       </a:r>
                     </a:p>
                   </a:txBody>
@@ -13620,7 +13830,7 @@
                           </a:solidFill>
                           <a:latin typeface="맑은 고딕"/>
                         </a:rPr>
-                        <a:t>-13.9%</a:t>
+                        <a:t>-14.2%</a:t>
                       </a:r>
                     </a:p>
                   </a:txBody>
@@ -13696,7 +13906,7 @@
                           </a:solidFill>
                           <a:latin typeface="맑은 고딕"/>
                         </a:rPr>
-                        <a:t>-29.5%</a:t>
+                        <a:t>-29.6%</a:t>
                       </a:r>
                     </a:p>
                   </a:txBody>
@@ -13719,7 +13929,7 @@
                           </a:solidFill>
                           <a:latin typeface="맑은 고딕"/>
                         </a:rPr>
-                        <a:t>-28.9%</a:t>
+                        <a:t>-29.1%</a:t>
                       </a:r>
                     </a:p>
                   </a:txBody>
@@ -13742,7 +13952,7 @@
                           </a:solidFill>
                           <a:latin typeface="맑은 고딕"/>
                         </a:rPr>
-                        <a:t>-28.5%</a:t>
+                        <a:t>-28.8%</a:t>
                       </a:r>
                     </a:p>
                   </a:txBody>
@@ -13796,7 +14006,7 @@
                 </a:solidFill>
                 <a:latin typeface="맑은 고딕"/>
               </a:rPr>
-              <a:t>· 변동성 60% 가정, 지수 10포인트 단위(60~140). 지수 60 도달 시 하방 완충이 소멸되어 주식형과 유사하게 운용(실제 편입비 약 100%).</a:t>
+              <a:t>· 변동성 60%·매매비용 5bp 가정, 지수 10포인트 단위(60~140). 지수 60 도달 시 하방 완충이 소멸되어 주식형과 유사하게 운용(실제 편입비 약 100%).</a:t>
             </a:r>
           </a:p>
           <a:p>
@@ -14469,7 +14679,7 @@
                 </a:solidFill>
                 <a:latin typeface="맑은 고딕"/>
               </a:rPr>
-              <a:t> · 데이터: 자체 시뮬레이션(거래비용·운용오차 포함)</a:t>
+              <a:t> · 데이터: 자체 시뮬레이션(매매비용 5bp·운용오차 포함)</a:t>
             </a:r>
           </a:p>
         </p:txBody>
@@ -16753,7 +16963,7 @@
                           </a:solidFill>
                           <a:latin typeface="맑은 고딕"/>
                         </a:rPr>
-                        <a:t>+15.3%</a:t>
+                        <a:t>+15.2%</a:t>
                       </a:r>
                     </a:p>
                   </a:txBody>
@@ -16776,7 +16986,7 @@
                           </a:solidFill>
                           <a:latin typeface="맑은 고딕"/>
                         </a:rPr>
-                        <a:t>+19.1%</a:t>
+                        <a:t>+18.9%</a:t>
                       </a:r>
                     </a:p>
                   </a:txBody>
@@ -16799,7 +17009,7 @@
                           </a:solidFill>
                           <a:latin typeface="맑은 고딕"/>
                         </a:rPr>
-                        <a:t>+23.2%</a:t>
+                        <a:t>+23.0%</a:t>
                       </a:r>
                     </a:p>
                   </a:txBody>
@@ -16898,7 +17108,7 @@
                           </a:solidFill>
                           <a:latin typeface="맑은 고딕"/>
                         </a:rPr>
-                        <a:t>+17.1%</a:t>
+                        <a:t>+17.0%</a:t>
                       </a:r>
                     </a:p>
                   </a:txBody>
@@ -16921,7 +17131,7 @@
                           </a:solidFill>
                           <a:latin typeface="맑은 고딕"/>
                         </a:rPr>
-                        <a:t>+21.9%</a:t>
+                        <a:t>+21.7%</a:t>
                       </a:r>
                     </a:p>
                   </a:txBody>
@@ -16997,7 +17207,7 @@
                           </a:solidFill>
                           <a:latin typeface="맑은 고딕"/>
                         </a:rPr>
-                        <a:t>+10.5%</a:t>
+                        <a:t>+10.4%</a:t>
                       </a:r>
                     </a:p>
                   </a:txBody>
@@ -17020,7 +17230,7 @@
                           </a:solidFill>
                           <a:latin typeface="맑은 고딕"/>
                         </a:rPr>
-                        <a:t>+14.6%</a:t>
+                        <a:t>+14.5%</a:t>
                       </a:r>
                     </a:p>
                   </a:txBody>
@@ -17043,7 +17253,7 @@
                           </a:solidFill>
                           <a:latin typeface="맑은 고딕"/>
                         </a:rPr>
-                        <a:t>+19.8%</a:t>
+                        <a:t>+19.6%</a:t>
                       </a:r>
                     </a:p>
                   </a:txBody>
@@ -17142,7 +17352,7 @@
                           </a:solidFill>
                           <a:latin typeface="맑은 고딕"/>
                         </a:rPr>
-                        <a:t>+11.4%</a:t>
+                        <a:t>+11.3%</a:t>
                       </a:r>
                     </a:p>
                   </a:txBody>
@@ -17165,7 +17375,7 @@
                           </a:solidFill>
                           <a:latin typeface="맑은 고딕"/>
                         </a:rPr>
-                        <a:t>+16.9%</a:t>
+                        <a:t>+16.7%</a:t>
                       </a:r>
                     </a:p>
                   </a:txBody>
@@ -17264,7 +17474,7 @@
                           </a:solidFill>
                           <a:latin typeface="맑은 고딕"/>
                         </a:rPr>
-                        <a:t>+7.4%</a:t>
+                        <a:t>+7.2%</a:t>
                       </a:r>
                     </a:p>
                   </a:txBody>
@@ -17287,7 +17497,7 @@
                           </a:solidFill>
                           <a:latin typeface="맑은 고딕"/>
                         </a:rPr>
-                        <a:t>+12.7%</a:t>
+                        <a:t>+12.5%</a:t>
                       </a:r>
                     </a:p>
                   </a:txBody>
@@ -17386,7 +17596,7 @@
                           </a:solidFill>
                           <a:latin typeface="맑은 고딕"/>
                         </a:rPr>
-                        <a:t>+2.3%</a:t>
+                        <a:t>+2.2%</a:t>
                       </a:r>
                     </a:p>
                   </a:txBody>
@@ -17409,7 +17619,7 @@
                           </a:solidFill>
                           <a:latin typeface="맑은 고딕"/>
                         </a:rPr>
-                        <a:t>+7.2%</a:t>
+                        <a:t>+7.0%</a:t>
                       </a:r>
                     </a:p>
                   </a:txBody>
@@ -17485,7 +17695,7 @@
                           </a:solidFill>
                           <a:latin typeface="맑은 고딕"/>
                         </a:rPr>
-                        <a:t>-7.0%</a:t>
+                        <a:t>-7.1%</a:t>
                       </a:r>
                     </a:p>
                   </a:txBody>
@@ -17508,7 +17718,7 @@
                           </a:solidFill>
                           <a:latin typeface="맑은 고딕"/>
                         </a:rPr>
-                        <a:t>-3.8%</a:t>
+                        <a:t>-4.0%</a:t>
                       </a:r>
                     </a:p>
                   </a:txBody>
@@ -17531,7 +17741,7 @@
                           </a:solidFill>
                           <a:latin typeface="맑은 고딕"/>
                         </a:rPr>
-                        <a:t>+0.1%</a:t>
+                        <a:t>-0.1%</a:t>
                       </a:r>
                     </a:p>
                   </a:txBody>
@@ -17630,7 +17840,7 @@
                           </a:solidFill>
                           <a:latin typeface="맑은 고딕"/>
                         </a:rPr>
-                        <a:t>-11.2%</a:t>
+                        <a:t>-11.4%</a:t>
                       </a:r>
                     </a:p>
                   </a:txBody>
@@ -17653,7 +17863,7 @@
                           </a:solidFill>
                           <a:latin typeface="맑은 고딕"/>
                         </a:rPr>
-                        <a:t>-8.6%</a:t>
+                        <a:t>-8.8%</a:t>
                       </a:r>
                     </a:p>
                   </a:txBody>
@@ -17752,7 +17962,7 @@
                           </a:solidFill>
                           <a:latin typeface="맑은 고딕"/>
                         </a:rPr>
-                        <a:t>-19.8%</a:t>
+                        <a:t>-19.9%</a:t>
                       </a:r>
                     </a:p>
                   </a:txBody>
@@ -17775,7 +17985,7 @@
                           </a:solidFill>
                           <a:latin typeface="맑은 고딕"/>
                         </a:rPr>
-                        <a:t>-18.4%</a:t>
+                        <a:t>-18.6%</a:t>
                       </a:r>
                     </a:p>
                   </a:txBody>
@@ -17829,7 +18039,7 @@
                 </a:solidFill>
                 <a:latin typeface="맑은 고딕"/>
               </a:rPr>
-              <a:t>· 변동성 60% 가정, 지수 10포인트 단위(60~140), 잔존만기 12·9·6·3개월.</a:t>
+              <a:t>· 변동성 60%·매매비용 5bp 가정, 지수 10포인트 단위(60~140), 잔존만기 12·9·6·3개월.</a:t>
             </a:r>
           </a:p>
           <a:p>

--- a/제안서/변동성하베스트펀드_AITop2_v1_20260715.pptx
+++ b/제안서/변동성하베스트펀드_AITop2_v1_20260715.pptx
@@ -10532,7 +10532,7 @@
                 </a:solidFill>
                 <a:latin typeface="맑은 고딕"/>
               </a:rPr>
-              <a:t>변동성 60% 가정 · 점=시뮬 1회 · 노란선=구간 평균 · 데이터: 자체 시뮬레이션(매매비용 5bp·운용오차 포함)</a:t>
+              <a:t>변동성 60% 가정 · 점=시뮬 1회 · 노란선=구간 평균 · 데이터: 자체 시뮬레이션(매매비용 매수 5bp/매도 30bp·운용오차 포함)</a:t>
             </a:r>
           </a:p>
         </p:txBody>
@@ -12930,7 +12930,7 @@
                           </a:solidFill>
                           <a:latin typeface="맑은 고딕"/>
                         </a:rPr>
-                        <a:t>+23.1%</a:t>
+                        <a:t>+22.8%</a:t>
                       </a:r>
                     </a:p>
                   </a:txBody>
@@ -12953,7 +12953,7 @@
                           </a:solidFill>
                           <a:latin typeface="맑은 고딕"/>
                         </a:rPr>
-                        <a:t>+27.8%</a:t>
+                        <a:t>+27.2%</a:t>
                       </a:r>
                     </a:p>
                   </a:txBody>
@@ -12976,7 +12976,7 @@
                           </a:solidFill>
                           <a:latin typeface="맑은 고딕"/>
                         </a:rPr>
-                        <a:t>+32.4%</a:t>
+                        <a:t>+31.5%</a:t>
                       </a:r>
                     </a:p>
                   </a:txBody>
@@ -13052,7 +13052,7 @@
                           </a:solidFill>
                           <a:latin typeface="맑은 고딕"/>
                         </a:rPr>
-                        <a:t>+19.2%</a:t>
+                        <a:t>+18.9%</a:t>
                       </a:r>
                     </a:p>
                   </a:txBody>
@@ -13075,7 +13075,7 @@
                           </a:solidFill>
                           <a:latin typeface="맑은 고딕"/>
                         </a:rPr>
-                        <a:t>+23.9%</a:t>
+                        <a:t>+23.3%</a:t>
                       </a:r>
                     </a:p>
                   </a:txBody>
@@ -13098,7 +13098,7 @@
                           </a:solidFill>
                           <a:latin typeface="맑은 고딕"/>
                         </a:rPr>
-                        <a:t>+28.4%</a:t>
+                        <a:t>+27.5%</a:t>
                       </a:r>
                     </a:p>
                   </a:txBody>
@@ -13174,7 +13174,7 @@
                           </a:solidFill>
                           <a:latin typeface="맑은 고딕"/>
                         </a:rPr>
-                        <a:t>+14.7%</a:t>
+                        <a:t>+14.4%</a:t>
                       </a:r>
                     </a:p>
                   </a:txBody>
@@ -13197,7 +13197,7 @@
                           </a:solidFill>
                           <a:latin typeface="맑은 고딕"/>
                         </a:rPr>
-                        <a:t>+19.4%</a:t>
+                        <a:t>+18.8%</a:t>
                       </a:r>
                     </a:p>
                   </a:txBody>
@@ -13220,7 +13220,7 @@
                           </a:solidFill>
                           <a:latin typeface="맑은 고딕"/>
                         </a:rPr>
-                        <a:t>+23.9%</a:t>
+                        <a:t>+23.0%</a:t>
                       </a:r>
                     </a:p>
                   </a:txBody>
@@ -13296,7 +13296,7 @@
                           </a:solidFill>
                           <a:latin typeface="맑은 고딕"/>
                         </a:rPr>
-                        <a:t>+9.5%</a:t>
+                        <a:t>+9.2%</a:t>
                       </a:r>
                     </a:p>
                   </a:txBody>
@@ -13319,7 +13319,7 @@
                           </a:solidFill>
                           <a:latin typeface="맑은 고딕"/>
                         </a:rPr>
-                        <a:t>+14.1%</a:t>
+                        <a:t>+13.5%</a:t>
                       </a:r>
                     </a:p>
                   </a:txBody>
@@ -13342,7 +13342,7 @@
                           </a:solidFill>
                           <a:latin typeface="맑은 고딕"/>
                         </a:rPr>
-                        <a:t>+18.9%</a:t>
+                        <a:t>+18.0%</a:t>
                       </a:r>
                     </a:p>
                   </a:txBody>
@@ -13418,7 +13418,7 @@
                           </a:solidFill>
                           <a:latin typeface="맑은 고딕"/>
                         </a:rPr>
-                        <a:t>+3.5%</a:t>
+                        <a:t>+3.2%</a:t>
                       </a:r>
                     </a:p>
                   </a:txBody>
@@ -13441,7 +13441,7 @@
                           </a:solidFill>
                           <a:latin typeface="맑은 고딕"/>
                         </a:rPr>
-                        <a:t>+7.9%</a:t>
+                        <a:t>+7.3%</a:t>
                       </a:r>
                     </a:p>
                   </a:txBody>
@@ -13464,7 +13464,7 @@
                           </a:solidFill>
                           <a:latin typeface="맑은 고딕"/>
                         </a:rPr>
-                        <a:t>+13.3%</a:t>
+                        <a:t>+12.4%</a:t>
                       </a:r>
                     </a:p>
                   </a:txBody>
@@ -13540,7 +13540,7 @@
                           </a:solidFill>
                           <a:latin typeface="맑은 고딕"/>
                         </a:rPr>
-                        <a:t>-3.3%</a:t>
+                        <a:t>-3.6%</a:t>
                       </a:r>
                     </a:p>
                   </a:txBody>
@@ -13563,7 +13563,7 @@
                           </a:solidFill>
                           <a:latin typeface="맑은 고딕"/>
                         </a:rPr>
-                        <a:t>+0.6%</a:t>
+                        <a:t>+0.0%</a:t>
                       </a:r>
                     </a:p>
                   </a:txBody>
@@ -13586,7 +13586,7 @@
                           </a:solidFill>
                           <a:latin typeface="맑은 고딕"/>
                         </a:rPr>
-                        <a:t>+6.4%</a:t>
+                        <a:t>+5.5%</a:t>
                       </a:r>
                     </a:p>
                   </a:txBody>
@@ -13662,7 +13662,7 @@
                           </a:solidFill>
                           <a:latin typeface="맑은 고딕"/>
                         </a:rPr>
-                        <a:t>-11.2%</a:t>
+                        <a:t>-11.5%</a:t>
                       </a:r>
                     </a:p>
                   </a:txBody>
@@ -13685,7 +13685,7 @@
                           </a:solidFill>
                           <a:latin typeface="맑은 고딕"/>
                         </a:rPr>
-                        <a:t>-8.0%</a:t>
+                        <a:t>-8.6%</a:t>
                       </a:r>
                     </a:p>
                   </a:txBody>
@@ -13708,7 +13708,7 @@
                           </a:solidFill>
                           <a:latin typeface="맑은 고딕"/>
                         </a:rPr>
-                        <a:t>-2.4%</a:t>
+                        <a:t>-3.3%</a:t>
                       </a:r>
                     </a:p>
                   </a:txBody>
@@ -13784,7 +13784,7 @@
                           </a:solidFill>
                           <a:latin typeface="맑은 고딕"/>
                         </a:rPr>
-                        <a:t>-20.0%</a:t>
+                        <a:t>-20.3%</a:t>
                       </a:r>
                     </a:p>
                   </a:txBody>
@@ -13807,7 +13807,7 @@
                           </a:solidFill>
                           <a:latin typeface="맑은 고딕"/>
                         </a:rPr>
-                        <a:t>-18.0%</a:t>
+                        <a:t>-18.6%</a:t>
                       </a:r>
                     </a:p>
                   </a:txBody>
@@ -13830,7 +13830,7 @@
                           </a:solidFill>
                           <a:latin typeface="맑은 고딕"/>
                         </a:rPr>
-                        <a:t>-14.2%</a:t>
+                        <a:t>-15.1%</a:t>
                       </a:r>
                     </a:p>
                   </a:txBody>
@@ -13906,7 +13906,7 @@
                           </a:solidFill>
                           <a:latin typeface="맑은 고딕"/>
                         </a:rPr>
-                        <a:t>-29.6%</a:t>
+                        <a:t>-29.9%</a:t>
                       </a:r>
                     </a:p>
                   </a:txBody>
@@ -13929,7 +13929,7 @@
                           </a:solidFill>
                           <a:latin typeface="맑은 고딕"/>
                         </a:rPr>
-                        <a:t>-29.1%</a:t>
+                        <a:t>-29.7%</a:t>
                       </a:r>
                     </a:p>
                   </a:txBody>
@@ -13952,7 +13952,7 @@
                           </a:solidFill>
                           <a:latin typeface="맑은 고딕"/>
                         </a:rPr>
-                        <a:t>-28.8%</a:t>
+                        <a:t>-29.7%</a:t>
                       </a:r>
                     </a:p>
                   </a:txBody>
@@ -14006,7 +14006,7 @@
                 </a:solidFill>
                 <a:latin typeface="맑은 고딕"/>
               </a:rPr>
-              <a:t>· 변동성 60%·매매비용 5bp 가정, 지수 10포인트 단위(60~140). 지수 60 도달 시 하방 완충이 소멸되어 주식형과 유사하게 운용(실제 편입비 약 100%).</a:t>
+              <a:t>· 변동성 60%·매매비용 매수 5bp/매도 30bp 가정, 지수 10포인트 단위(60~140). 지수 60 도달 시 하방 완충이 소멸되어 주식형과 유사하게 운용(실제 편입비 약 100%).</a:t>
             </a:r>
           </a:p>
           <a:p>
@@ -14679,7 +14679,7 @@
                 </a:solidFill>
                 <a:latin typeface="맑은 고딕"/>
               </a:rPr>
-              <a:t> · 데이터: 자체 시뮬레이션(매매비용 5bp·운용오차 포함)</a:t>
+              <a:t> · 데이터: 자체 시뮬레이션(매매비용 매수 5bp/매도 30bp·운용오차 포함)</a:t>
             </a:r>
           </a:p>
         </p:txBody>
@@ -16963,7 +16963,7 @@
                           </a:solidFill>
                           <a:latin typeface="맑은 고딕"/>
                         </a:rPr>
-                        <a:t>+15.2%</a:t>
+                        <a:t>+15.1%</a:t>
                       </a:r>
                     </a:p>
                   </a:txBody>
@@ -16986,7 +16986,7 @@
                           </a:solidFill>
                           <a:latin typeface="맑은 고딕"/>
                         </a:rPr>
-                        <a:t>+18.9%</a:t>
+                        <a:t>+18.6%</a:t>
                       </a:r>
                     </a:p>
                   </a:txBody>
@@ -17009,7 +17009,7 @@
                           </a:solidFill>
                           <a:latin typeface="맑은 고딕"/>
                         </a:rPr>
-                        <a:t>+23.0%</a:t>
+                        <a:t>+22.6%</a:t>
                       </a:r>
                     </a:p>
                   </a:txBody>
@@ -17085,7 +17085,7 @@
                           </a:solidFill>
                           <a:latin typeface="맑은 고딕"/>
                         </a:rPr>
-                        <a:t>+13.1%</a:t>
+                        <a:t>+12.9%</a:t>
                       </a:r>
                     </a:p>
                   </a:txBody>
@@ -17108,7 +17108,7 @@
                           </a:solidFill>
                           <a:latin typeface="맑은 고딕"/>
                         </a:rPr>
-                        <a:t>+17.0%</a:t>
+                        <a:t>+16.7%</a:t>
                       </a:r>
                     </a:p>
                   </a:txBody>
@@ -17131,7 +17131,7 @@
                           </a:solidFill>
                           <a:latin typeface="맑은 고딕"/>
                         </a:rPr>
-                        <a:t>+21.7%</a:t>
+                        <a:t>+21.2%</a:t>
                       </a:r>
                     </a:p>
                   </a:txBody>
@@ -17207,7 +17207,7 @@
                           </a:solidFill>
                           <a:latin typeface="맑은 고딕"/>
                         </a:rPr>
-                        <a:t>+10.4%</a:t>
+                        <a:t>+10.2%</a:t>
                       </a:r>
                     </a:p>
                   </a:txBody>
@@ -17230,7 +17230,7 @@
                           </a:solidFill>
                           <a:latin typeface="맑은 고딕"/>
                         </a:rPr>
-                        <a:t>+14.5%</a:t>
+                        <a:t>+14.2%</a:t>
                       </a:r>
                     </a:p>
                   </a:txBody>
@@ -17253,7 +17253,7 @@
                           </a:solidFill>
                           <a:latin typeface="맑은 고딕"/>
                         </a:rPr>
-                        <a:t>+19.6%</a:t>
+                        <a:t>+19.1%</a:t>
                       </a:r>
                     </a:p>
                   </a:txBody>
@@ -17329,7 +17329,7 @@
                           </a:solidFill>
                           <a:latin typeface="맑은 고딕"/>
                         </a:rPr>
-                        <a:t>+7.2%</a:t>
+                        <a:t>+7.0%</a:t>
                       </a:r>
                     </a:p>
                   </a:txBody>
@@ -17352,7 +17352,7 @@
                           </a:solidFill>
                           <a:latin typeface="맑은 고딕"/>
                         </a:rPr>
-                        <a:t>+11.3%</a:t>
+                        <a:t>+11.0%</a:t>
                       </a:r>
                     </a:p>
                   </a:txBody>
@@ -17375,7 +17375,7 @@
                           </a:solidFill>
                           <a:latin typeface="맑은 고딕"/>
                         </a:rPr>
-                        <a:t>+16.7%</a:t>
+                        <a:t>+16.2%</a:t>
                       </a:r>
                     </a:p>
                   </a:txBody>
@@ -17451,7 +17451,7 @@
                           </a:solidFill>
                           <a:latin typeface="맑은 고딕"/>
                         </a:rPr>
-                        <a:t>+3.3%</a:t>
+                        <a:t>+3.1%</a:t>
                       </a:r>
                     </a:p>
                   </a:txBody>
@@ -17474,7 +17474,7 @@
                           </a:solidFill>
                           <a:latin typeface="맑은 고딕"/>
                         </a:rPr>
-                        <a:t>+7.2%</a:t>
+                        <a:t>+6.9%</a:t>
                       </a:r>
                     </a:p>
                   </a:txBody>
@@ -17497,7 +17497,7 @@
                           </a:solidFill>
                           <a:latin typeface="맑은 고딕"/>
                         </a:rPr>
-                        <a:t>+12.5%</a:t>
+                        <a:t>+12.0%</a:t>
                       </a:r>
                     </a:p>
                   </a:txBody>
@@ -17573,7 +17573,7 @@
                           </a:solidFill>
                           <a:latin typeface="맑은 고딕"/>
                         </a:rPr>
-                        <a:t>-1.4%</a:t>
+                        <a:t>-1.6%</a:t>
                       </a:r>
                     </a:p>
                   </a:txBody>
@@ -17596,7 +17596,7 @@
                           </a:solidFill>
                           <a:latin typeface="맑은 고딕"/>
                         </a:rPr>
-                        <a:t>+2.2%</a:t>
+                        <a:t>+1.9%</a:t>
                       </a:r>
                     </a:p>
                   </a:txBody>
@@ -17619,7 +17619,7 @@
                           </a:solidFill>
                           <a:latin typeface="맑은 고딕"/>
                         </a:rPr>
-                        <a:t>+7.0%</a:t>
+                        <a:t>+6.5%</a:t>
                       </a:r>
                     </a:p>
                   </a:txBody>
@@ -17695,7 +17695,7 @@
                           </a:solidFill>
                           <a:latin typeface="맑은 고딕"/>
                         </a:rPr>
-                        <a:t>-7.1%</a:t>
+                        <a:t>-7.2%</a:t>
                       </a:r>
                     </a:p>
                   </a:txBody>
@@ -17718,7 +17718,7 @@
                           </a:solidFill>
                           <a:latin typeface="맑은 고딕"/>
                         </a:rPr>
-                        <a:t>-4.0%</a:t>
+                        <a:t>-4.3%</a:t>
                       </a:r>
                     </a:p>
                   </a:txBody>
@@ -17741,7 +17741,7 @@
                           </a:solidFill>
                           <a:latin typeface="맑은 고딕"/>
                         </a:rPr>
-                        <a:t>-0.1%</a:t>
+                        <a:t>-0.6%</a:t>
                       </a:r>
                     </a:p>
                   </a:txBody>
@@ -17817,7 +17817,7 @@
                           </a:solidFill>
                           <a:latin typeface="맑은 고딕"/>
                         </a:rPr>
-                        <a:t>-13.7%</a:t>
+                        <a:t>-13.9%</a:t>
                       </a:r>
                     </a:p>
                   </a:txBody>
@@ -17840,7 +17840,7 @@
                           </a:solidFill>
                           <a:latin typeface="맑은 고딕"/>
                         </a:rPr>
-                        <a:t>-11.4%</a:t>
+                        <a:t>-11.7%</a:t>
                       </a:r>
                     </a:p>
                   </a:txBody>
@@ -17863,7 +17863,7 @@
                           </a:solidFill>
                           <a:latin typeface="맑은 고딕"/>
                         </a:rPr>
-                        <a:t>-8.8%</a:t>
+                        <a:t>-9.3%</a:t>
                       </a:r>
                     </a:p>
                   </a:txBody>
@@ -17939,7 +17939,7 @@
                           </a:solidFill>
                           <a:latin typeface="맑은 고딕"/>
                         </a:rPr>
-                        <a:t>-21.4%</a:t>
+                        <a:t>-21.6%</a:t>
                       </a:r>
                     </a:p>
                   </a:txBody>
@@ -17962,7 +17962,7 @@
                           </a:solidFill>
                           <a:latin typeface="맑은 고딕"/>
                         </a:rPr>
-                        <a:t>-19.9%</a:t>
+                        <a:t>-20.3%</a:t>
                       </a:r>
                     </a:p>
                   </a:txBody>
@@ -17985,7 +17985,7 @@
                           </a:solidFill>
                           <a:latin typeface="맑은 고딕"/>
                         </a:rPr>
-                        <a:t>-18.6%</a:t>
+                        <a:t>-19.1%</a:t>
                       </a:r>
                     </a:p>
                   </a:txBody>
@@ -18039,7 +18039,7 @@
                 </a:solidFill>
                 <a:latin typeface="맑은 고딕"/>
               </a:rPr>
-              <a:t>· 변동성 60%·매매비용 5bp 가정, 지수 10포인트 단위(60~140), 잔존만기 12·9·6·3개월.</a:t>
+              <a:t>· 변동성 60%·매매비용 매수 5bp/매도 30bp 가정, 지수 10포인트 단위(60~140), 잔존만기 12·9·6·3개월.</a:t>
             </a:r>
           </a:p>
           <a:p>
